--- a/docs/presentation.pptx
+++ b/docs/presentation.pptx
@@ -1,59 +1,60 @@
 
 <file path=ppt/presentation.xml><?xml version="1.0" encoding="utf-8"?>
-<p:presentation xmlns:a="http://schemas.openxmlformats.org/drawingml/2006/main" xmlns:r="http://schemas.openxmlformats.org/officeDocument/2006/relationships" xmlns:mc="http://schemas.openxmlformats.org/markup-compatibility/2006" xmlns:mv="urn:schemas-microsoft-com:mac:vml" xmlns:p="http://schemas.openxmlformats.org/presentationml/2006/main" xmlns:c="http://schemas.openxmlformats.org/drawingml/2006/chart" xmlns:dgm="http://schemas.openxmlformats.org/drawingml/2006/diagram" xmlns:o="urn:schemas-microsoft-com:office:office" xmlns:v="urn:schemas-microsoft-com:vml" xmlns:pvml="urn:schemas-microsoft-com:office:powerpoint" xmlns:com="http://schemas.openxmlformats.org/drawingml/2006/compatibility" xmlns:p14="http://schemas.microsoft.com/office/powerpoint/2010/main" xmlns:p15="http://schemas.microsoft.com/office/powerpoint/2012/main" xmlns:ahyp="http://schemas.microsoft.com/office/drawing/2018/hyperlinkcolor" autoCompressPictures="0" embedTrueTypeFonts="1" strictFirstAndLastChars="0" saveSubsetFonts="1">
+<p:presentation xmlns:a="http://schemas.openxmlformats.org/drawingml/2006/main" xmlns:r="http://schemas.openxmlformats.org/officeDocument/2006/relationships" xmlns:p="http://schemas.openxmlformats.org/presentationml/2006/main" strictFirstAndLastChars="0" embedTrueTypeFonts="1" saveSubsetFonts="1" autoCompressPictures="0">
   <p:sldMasterIdLst>
-    <p:sldMasterId id="2147483651" r:id="rId3"/>
+    <p:sldMasterId id="2147483651" r:id="rId1"/>
   </p:sldMasterIdLst>
   <p:notesMasterIdLst>
-    <p:notesMasterId r:id="rId4"/>
+    <p:notesMasterId r:id="rId9"/>
   </p:notesMasterIdLst>
   <p:sldIdLst>
-    <p:sldId id="256" r:id="rId5"/>
-    <p:sldId id="257" r:id="rId6"/>
-    <p:sldId id="258" r:id="rId7"/>
-    <p:sldId id="259" r:id="rId8"/>
-    <p:sldId id="260" r:id="rId9"/>
-    <p:sldId id="261" r:id="rId10"/>
-    <p:sldId id="262" r:id="rId11"/>
+    <p:sldId id="256" r:id="rId2"/>
+    <p:sldId id="257" r:id="rId3"/>
+    <p:sldId id="258" r:id="rId4"/>
+    <p:sldId id="259" r:id="rId5"/>
+    <p:sldId id="260" r:id="rId6"/>
+    <p:sldId id="261" r:id="rId7"/>
+    <p:sldId id="262" r:id="rId8"/>
   </p:sldIdLst>
-  <p:sldSz cy="5143500" cx="9144000"/>
+  <p:sldSz cx="9144000" cy="5143500" type="screen16x9"/>
   <p:notesSz cx="5143500" cy="9144000"/>
   <p:embeddedFontLst>
     <p:embeddedFont>
-      <p:font typeface="Fira Mono Medium"/>
-      <p:regular r:id="rId12"/>
-      <p:bold r:id="rId13"/>
+      <p:font typeface="Exo" panose="020B0604020202020204" charset="0"/>
+      <p:regular r:id="rId10"/>
+      <p:bold r:id="rId11"/>
+      <p:italic r:id="rId12"/>
+      <p:boldItalic r:id="rId13"/>
     </p:embeddedFont>
     <p:embeddedFont>
-      <p:font typeface="Fira Mono"/>
+      <p:font typeface="Exo SemiBold" panose="020B0604020202020204" charset="0"/>
       <p:regular r:id="rId14"/>
       <p:bold r:id="rId15"/>
+      <p:italic r:id="rId16"/>
+      <p:boldItalic r:id="rId17"/>
     </p:embeddedFont>
     <p:embeddedFont>
-      <p:font typeface="Michroma"/>
-      <p:regular r:id="rId16"/>
+      <p:font typeface="Fira Mono" panose="020B0509050000020004" pitchFamily="49" charset="0"/>
+      <p:regular r:id="rId18"/>
+      <p:bold r:id="rId19"/>
     </p:embeddedFont>
     <p:embeddedFont>
-      <p:font typeface="Oswald"/>
-      <p:bold r:id="rId17"/>
+      <p:font typeface="Fira Mono Medium" panose="020B0609050000020004" pitchFamily="49" charset="0"/>
+      <p:regular r:id="rId20"/>
+      <p:bold r:id="rId21"/>
     </p:embeddedFont>
     <p:embeddedFont>
-      <p:font typeface="Exo"/>
-      <p:regular r:id="rId18"/>
-      <p:bold r:id="rId19"/>
-      <p:italic r:id="rId20"/>
-      <p:boldItalic r:id="rId21"/>
+      <p:font typeface="Michroma" panose="020B0604020202020204" charset="0"/>
+      <p:regular r:id="rId22"/>
     </p:embeddedFont>
     <p:embeddedFont>
-      <p:font typeface="Exo SemiBold"/>
-      <p:regular r:id="rId22"/>
-      <p:bold r:id="rId23"/>
-      <p:italic r:id="rId24"/>
-      <p:boldItalic r:id="rId25"/>
+      <p:font typeface="Oswald" panose="00000500000000000000" pitchFamily="2" charset="0"/>
+      <p:regular r:id="rId23"/>
+      <p:bold r:id="rId24"/>
     </p:embeddedFont>
   </p:embeddedFontLst>
   <p:defaultTextStyle>
-    <a:defPPr lvl="0" marR="0" rtl="0" algn="l">
+    <a:defPPr marR="0" lvl="0" algn="l" rtl="0">
       <a:lnSpc>
         <a:spcPct val="100000"/>
       </a:lnSpc>
@@ -64,7 +65,7 @@
         <a:spcPts val="0"/>
       </a:spcAft>
     </a:defPPr>
-    <a:lvl1pPr lvl="0" marR="0" rtl="0" algn="l">
+    <a:lvl1pPr marR="0" lvl="0" algn="l" rtl="0">
       <a:lnSpc>
         <a:spcPct val="100000"/>
       </a:lnSpc>
@@ -78,7 +79,7 @@
         <a:srgbClr val="000000"/>
       </a:buClr>
       <a:buFont typeface="Arial"/>
-      <a:defRPr b="0" i="0" spc="0" sz="1400" u="none" cap="none" strike="noStrike">
+      <a:defRPr sz="1400" b="0" i="0" u="none" strike="noStrike" cap="none" spc="0">
         <a:solidFill>
           <a:srgbClr val="000000"/>
         </a:solidFill>
@@ -88,7 +89,7 @@
         <a:sym typeface="Arial"/>
       </a:defRPr>
     </a:lvl1pPr>
-    <a:lvl2pPr lvl="1" marR="0" rtl="0" algn="l">
+    <a:lvl2pPr marR="0" lvl="1" algn="l" rtl="0">
       <a:lnSpc>
         <a:spcPct val="100000"/>
       </a:lnSpc>
@@ -102,7 +103,7 @@
         <a:srgbClr val="000000"/>
       </a:buClr>
       <a:buFont typeface="Arial"/>
-      <a:defRPr b="0" i="0" spc="0" sz="1400" u="none" cap="none" strike="noStrike">
+      <a:defRPr sz="1400" b="0" i="0" u="none" strike="noStrike" cap="none" spc="0">
         <a:solidFill>
           <a:srgbClr val="000000"/>
         </a:solidFill>
@@ -112,7 +113,7 @@
         <a:sym typeface="Arial"/>
       </a:defRPr>
     </a:lvl2pPr>
-    <a:lvl3pPr lvl="2" marR="0" rtl="0" algn="l">
+    <a:lvl3pPr marR="0" lvl="2" algn="l" rtl="0">
       <a:lnSpc>
         <a:spcPct val="100000"/>
       </a:lnSpc>
@@ -126,7 +127,7 @@
         <a:srgbClr val="000000"/>
       </a:buClr>
       <a:buFont typeface="Arial"/>
-      <a:defRPr b="0" i="0" spc="0" sz="1400" u="none" cap="none" strike="noStrike">
+      <a:defRPr sz="1400" b="0" i="0" u="none" strike="noStrike" cap="none" spc="0">
         <a:solidFill>
           <a:srgbClr val="000000"/>
         </a:solidFill>
@@ -136,7 +137,7 @@
         <a:sym typeface="Arial"/>
       </a:defRPr>
     </a:lvl3pPr>
-    <a:lvl4pPr lvl="3" marR="0" rtl="0" algn="l">
+    <a:lvl4pPr marR="0" lvl="3" algn="l" rtl="0">
       <a:lnSpc>
         <a:spcPct val="100000"/>
       </a:lnSpc>
@@ -150,7 +151,7 @@
         <a:srgbClr val="000000"/>
       </a:buClr>
       <a:buFont typeface="Arial"/>
-      <a:defRPr b="0" i="0" spc="0" sz="1400" u="none" cap="none" strike="noStrike">
+      <a:defRPr sz="1400" b="0" i="0" u="none" strike="noStrike" cap="none" spc="0">
         <a:solidFill>
           <a:srgbClr val="000000"/>
         </a:solidFill>
@@ -160,7 +161,7 @@
         <a:sym typeface="Arial"/>
       </a:defRPr>
     </a:lvl4pPr>
-    <a:lvl5pPr lvl="4" marR="0" rtl="0" algn="l">
+    <a:lvl5pPr marR="0" lvl="4" algn="l" rtl="0">
       <a:lnSpc>
         <a:spcPct val="100000"/>
       </a:lnSpc>
@@ -174,7 +175,7 @@
         <a:srgbClr val="000000"/>
       </a:buClr>
       <a:buFont typeface="Arial"/>
-      <a:defRPr b="0" i="0" spc="0" sz="1400" u="none" cap="none" strike="noStrike">
+      <a:defRPr sz="1400" b="0" i="0" u="none" strike="noStrike" cap="none" spc="0">
         <a:solidFill>
           <a:srgbClr val="000000"/>
         </a:solidFill>
@@ -184,7 +185,7 @@
         <a:sym typeface="Arial"/>
       </a:defRPr>
     </a:lvl5pPr>
-    <a:lvl6pPr lvl="5" marR="0" rtl="0" algn="l">
+    <a:lvl6pPr marR="0" lvl="5" algn="l" rtl="0">
       <a:lnSpc>
         <a:spcPct val="100000"/>
       </a:lnSpc>
@@ -198,7 +199,7 @@
         <a:srgbClr val="000000"/>
       </a:buClr>
       <a:buFont typeface="Arial"/>
-      <a:defRPr b="0" i="0" spc="0" sz="1400" u="none" cap="none" strike="noStrike">
+      <a:defRPr sz="1400" b="0" i="0" u="none" strike="noStrike" cap="none" spc="0">
         <a:solidFill>
           <a:srgbClr val="000000"/>
         </a:solidFill>
@@ -208,7 +209,7 @@
         <a:sym typeface="Arial"/>
       </a:defRPr>
     </a:lvl6pPr>
-    <a:lvl7pPr lvl="6" marR="0" rtl="0" algn="l">
+    <a:lvl7pPr marR="0" lvl="6" algn="l" rtl="0">
       <a:lnSpc>
         <a:spcPct val="100000"/>
       </a:lnSpc>
@@ -222,7 +223,7 @@
         <a:srgbClr val="000000"/>
       </a:buClr>
       <a:buFont typeface="Arial"/>
-      <a:defRPr b="0" i="0" spc="0" sz="1400" u="none" cap="none" strike="noStrike">
+      <a:defRPr sz="1400" b="0" i="0" u="none" strike="noStrike" cap="none" spc="0">
         <a:solidFill>
           <a:srgbClr val="000000"/>
         </a:solidFill>
@@ -232,7 +233,7 @@
         <a:sym typeface="Arial"/>
       </a:defRPr>
     </a:lvl7pPr>
-    <a:lvl8pPr lvl="7" marR="0" rtl="0" algn="l">
+    <a:lvl8pPr marR="0" lvl="7" algn="l" rtl="0">
       <a:lnSpc>
         <a:spcPct val="100000"/>
       </a:lnSpc>
@@ -246,7 +247,7 @@
         <a:srgbClr val="000000"/>
       </a:buClr>
       <a:buFont typeface="Arial"/>
-      <a:defRPr b="0" i="0" spc="0" sz="1400" u="none" cap="none" strike="noStrike">
+      <a:defRPr sz="1400" b="0" i="0" u="none" strike="noStrike" cap="none" spc="0">
         <a:solidFill>
           <a:srgbClr val="000000"/>
         </a:solidFill>
@@ -256,7 +257,7 @@
         <a:sym typeface="Arial"/>
       </a:defRPr>
     </a:lvl8pPr>
-    <a:lvl9pPr lvl="8" marR="0" rtl="0" algn="l">
+    <a:lvl9pPr marR="0" lvl="8" algn="l" rtl="0">
       <a:lnSpc>
         <a:spcPct val="100000"/>
       </a:lnSpc>
@@ -270,7 +271,7 @@
         <a:srgbClr val="000000"/>
       </a:buClr>
       <a:buFont typeface="Arial"/>
-      <a:defRPr b="0" i="0" spc="0" sz="1400" u="none" cap="none" strike="noStrike">
+      <a:defRPr sz="1400" b="0" i="0" u="none" strike="noStrike" cap="none" spc="0">
         <a:solidFill>
           <a:srgbClr val="000000"/>
         </a:solidFill>
@@ -281,22 +282,28 @@
       </a:defRPr>
     </a:lvl9pPr>
   </p:defaultTextStyle>
+  <p:extLst>
+    <p:ext uri="{EFAFB233-063F-42B5-8137-9DF3F51BA10A}">
+      <p15:sldGuideLst xmlns:p15="http://schemas.microsoft.com/office/powerpoint/2012/main"/>
+    </p:ext>
+  </p:extLst>
 </p:presentation>
 </file>
 
 <file path=ppt/notesMasters/notesMaster1.xml><?xml version="1.0" encoding="utf-8"?>
-<p:notesMaster xmlns:a="http://schemas.openxmlformats.org/drawingml/2006/main" xmlns:r="http://schemas.openxmlformats.org/officeDocument/2006/relationships" xmlns:mc="http://schemas.openxmlformats.org/markup-compatibility/2006" xmlns:mv="urn:schemas-microsoft-com:mac:vml" xmlns:p="http://schemas.openxmlformats.org/presentationml/2006/main" xmlns:c="http://schemas.openxmlformats.org/drawingml/2006/chart" xmlns:dgm="http://schemas.openxmlformats.org/drawingml/2006/diagram" xmlns:o="urn:schemas-microsoft-com:office:office" xmlns:v="urn:schemas-microsoft-com:vml" xmlns:pvml="urn:schemas-microsoft-com:office:powerpoint" xmlns:com="http://schemas.openxmlformats.org/drawingml/2006/compatibility" xmlns:p14="http://schemas.microsoft.com/office/powerpoint/2010/main" xmlns:p15="http://schemas.microsoft.com/office/powerpoint/2012/main" xmlns:ahyp="http://schemas.microsoft.com/office/drawing/2018/hyperlinkcolor">
+<p:notesMaster xmlns:a="http://schemas.openxmlformats.org/drawingml/2006/main" xmlns:r="http://schemas.openxmlformats.org/officeDocument/2006/relationships" xmlns:p="http://schemas.openxmlformats.org/presentationml/2006/main">
   <p:cSld>
     <p:bg>
       <p:bgPr>
         <a:solidFill>
           <a:schemeClr val="lt1"/>
         </a:solidFill>
+        <a:effectLst/>
       </p:bgPr>
     </p:bg>
     <p:spTree>
       <p:nvGrpSpPr>
-        <p:cNvPr id="2" name="Shape 2"/>
+        <p:cNvPr id="1" name="Shape 2"/>
         <p:cNvGrpSpPr/>
         <p:nvPr/>
       </p:nvGrpSpPr>
@@ -311,9 +318,11 @@
       <p:sp>
         <p:nvSpPr>
           <p:cNvPr id="3" name="Google Shape;3;n"/>
-          <p:cNvSpPr txBox="1"/>
+          <p:cNvSpPr txBox="1">
+            <a:spLocks noGrp="1"/>
+          </p:cNvSpPr>
           <p:nvPr>
-            <p:ph idx="2" type="hdr"/>
+            <p:ph type="hdr" idx="2"/>
           </p:nvPr>
         </p:nvSpPr>
         <p:spPr>
@@ -330,11 +339,11 @@
           </a:ln>
         </p:spPr>
         <p:txBody>
-          <a:bodyPr anchorCtr="0" anchor="t" bIns="45700" lIns="91425" spcFirstLastPara="1" rIns="91425" wrap="square" tIns="45700">
+          <a:bodyPr spcFirstLastPara="1" wrap="square" lIns="91425" tIns="45700" rIns="91425" bIns="45700" anchor="t" anchorCtr="0">
             <a:noAutofit/>
           </a:bodyPr>
           <a:lstStyle>
-            <a:lvl1pPr lvl="0" marR="0" rtl="0" algn="l">
+            <a:lvl1pPr marR="0" lvl="0" algn="l" rtl="0">
               <a:spcBef>
                 <a:spcPts val="0"/>
               </a:spcBef>
@@ -343,7 +352,7 @@
               </a:spcAft>
               <a:buSzPts val="1400"/>
               <a:buNone/>
-              <a:defRPr b="0" i="0" sz="1200" u="none" cap="none" strike="noStrike">
+              <a:defRPr sz="1200" b="0" i="0" u="none" strike="noStrike" cap="none">
                 <a:solidFill>
                   <a:schemeClr val="dk1"/>
                 </a:solidFill>
@@ -353,7 +362,7 @@
                 <a:sym typeface="Calibri"/>
               </a:defRPr>
             </a:lvl1pPr>
-            <a:lvl2pPr lvl="1" marR="0" rtl="0" algn="l">
+            <a:lvl2pPr marR="0" lvl="1" algn="l" rtl="0">
               <a:spcBef>
                 <a:spcPts val="0"/>
               </a:spcBef>
@@ -362,7 +371,7 @@
               </a:spcAft>
               <a:buSzPts val="1400"/>
               <a:buNone/>
-              <a:defRPr b="0" i="0" sz="1800" u="none" cap="none" strike="noStrike">
+              <a:defRPr sz="1800" b="0" i="0" u="none" strike="noStrike" cap="none">
                 <a:solidFill>
                   <a:schemeClr val="dk1"/>
                 </a:solidFill>
@@ -372,7 +381,7 @@
                 <a:sym typeface="Calibri"/>
               </a:defRPr>
             </a:lvl2pPr>
-            <a:lvl3pPr lvl="2" marR="0" rtl="0" algn="l">
+            <a:lvl3pPr marR="0" lvl="2" algn="l" rtl="0">
               <a:spcBef>
                 <a:spcPts val="0"/>
               </a:spcBef>
@@ -381,7 +390,7 @@
               </a:spcAft>
               <a:buSzPts val="1400"/>
               <a:buNone/>
-              <a:defRPr b="0" i="0" sz="1800" u="none" cap="none" strike="noStrike">
+              <a:defRPr sz="1800" b="0" i="0" u="none" strike="noStrike" cap="none">
                 <a:solidFill>
                   <a:schemeClr val="dk1"/>
                 </a:solidFill>
@@ -391,7 +400,7 @@
                 <a:sym typeface="Calibri"/>
               </a:defRPr>
             </a:lvl3pPr>
-            <a:lvl4pPr lvl="3" marR="0" rtl="0" algn="l">
+            <a:lvl4pPr marR="0" lvl="3" algn="l" rtl="0">
               <a:spcBef>
                 <a:spcPts val="0"/>
               </a:spcBef>
@@ -400,7 +409,7 @@
               </a:spcAft>
               <a:buSzPts val="1400"/>
               <a:buNone/>
-              <a:defRPr b="0" i="0" sz="1800" u="none" cap="none" strike="noStrike">
+              <a:defRPr sz="1800" b="0" i="0" u="none" strike="noStrike" cap="none">
                 <a:solidFill>
                   <a:schemeClr val="dk1"/>
                 </a:solidFill>
@@ -410,7 +419,7 @@
                 <a:sym typeface="Calibri"/>
               </a:defRPr>
             </a:lvl4pPr>
-            <a:lvl5pPr lvl="4" marR="0" rtl="0" algn="l">
+            <a:lvl5pPr marR="0" lvl="4" algn="l" rtl="0">
               <a:spcBef>
                 <a:spcPts val="0"/>
               </a:spcBef>
@@ -419,7 +428,7 @@
               </a:spcAft>
               <a:buSzPts val="1400"/>
               <a:buNone/>
-              <a:defRPr b="0" i="0" sz="1800" u="none" cap="none" strike="noStrike">
+              <a:defRPr sz="1800" b="0" i="0" u="none" strike="noStrike" cap="none">
                 <a:solidFill>
                   <a:schemeClr val="dk1"/>
                 </a:solidFill>
@@ -429,7 +438,7 @@
                 <a:sym typeface="Calibri"/>
               </a:defRPr>
             </a:lvl5pPr>
-            <a:lvl6pPr lvl="5" marR="0" rtl="0" algn="l">
+            <a:lvl6pPr marR="0" lvl="5" algn="l" rtl="0">
               <a:spcBef>
                 <a:spcPts val="0"/>
               </a:spcBef>
@@ -438,7 +447,7 @@
               </a:spcAft>
               <a:buSzPts val="1400"/>
               <a:buNone/>
-              <a:defRPr b="0" i="0" sz="1800" u="none" cap="none" strike="noStrike">
+              <a:defRPr sz="1800" b="0" i="0" u="none" strike="noStrike" cap="none">
                 <a:solidFill>
                   <a:schemeClr val="dk1"/>
                 </a:solidFill>
@@ -448,7 +457,7 @@
                 <a:sym typeface="Calibri"/>
               </a:defRPr>
             </a:lvl6pPr>
-            <a:lvl7pPr lvl="6" marR="0" rtl="0" algn="l">
+            <a:lvl7pPr marR="0" lvl="6" algn="l" rtl="0">
               <a:spcBef>
                 <a:spcPts val="0"/>
               </a:spcBef>
@@ -457,7 +466,7 @@
               </a:spcAft>
               <a:buSzPts val="1400"/>
               <a:buNone/>
-              <a:defRPr b="0" i="0" sz="1800" u="none" cap="none" strike="noStrike">
+              <a:defRPr sz="1800" b="0" i="0" u="none" strike="noStrike" cap="none">
                 <a:solidFill>
                   <a:schemeClr val="dk1"/>
                 </a:solidFill>
@@ -467,7 +476,7 @@
                 <a:sym typeface="Calibri"/>
               </a:defRPr>
             </a:lvl7pPr>
-            <a:lvl8pPr lvl="7" marR="0" rtl="0" algn="l">
+            <a:lvl8pPr marR="0" lvl="7" algn="l" rtl="0">
               <a:spcBef>
                 <a:spcPts val="0"/>
               </a:spcBef>
@@ -476,7 +485,7 @@
               </a:spcAft>
               <a:buSzPts val="1400"/>
               <a:buNone/>
-              <a:defRPr b="0" i="0" sz="1800" u="none" cap="none" strike="noStrike">
+              <a:defRPr sz="1800" b="0" i="0" u="none" strike="noStrike" cap="none">
                 <a:solidFill>
                   <a:schemeClr val="dk1"/>
                 </a:solidFill>
@@ -486,7 +495,7 @@
                 <a:sym typeface="Calibri"/>
               </a:defRPr>
             </a:lvl8pPr>
-            <a:lvl9pPr lvl="8" marR="0" rtl="0" algn="l">
+            <a:lvl9pPr marR="0" lvl="8" algn="l" rtl="0">
               <a:spcBef>
                 <a:spcPts val="0"/>
               </a:spcBef>
@@ -495,7 +504,7 @@
               </a:spcAft>
               <a:buSzPts val="1400"/>
               <a:buNone/>
-              <a:defRPr b="0" i="0" sz="1800" u="none" cap="none" strike="noStrike">
+              <a:defRPr sz="1800" b="0" i="0" u="none" strike="noStrike" cap="none">
                 <a:solidFill>
                   <a:schemeClr val="dk1"/>
                 </a:solidFill>
@@ -506,15 +515,19 @@
               </a:defRPr>
             </a:lvl9pPr>
           </a:lstStyle>
-          <a:p/>
+          <a:p>
+            <a:endParaRPr/>
+          </a:p>
         </p:txBody>
       </p:sp>
       <p:sp>
         <p:nvSpPr>
           <p:cNvPr id="4" name="Google Shape;4;n"/>
-          <p:cNvSpPr txBox="1"/>
+          <p:cNvSpPr txBox="1">
+            <a:spLocks noGrp="1"/>
+          </p:cNvSpPr>
           <p:nvPr>
-            <p:ph idx="10" type="dt"/>
+            <p:ph type="dt" idx="10"/>
           </p:nvPr>
         </p:nvSpPr>
         <p:spPr>
@@ -531,11 +544,11 @@
           </a:ln>
         </p:spPr>
         <p:txBody>
-          <a:bodyPr anchorCtr="0" anchor="t" bIns="45700" lIns="91425" spcFirstLastPara="1" rIns="91425" wrap="square" tIns="45700">
+          <a:bodyPr spcFirstLastPara="1" wrap="square" lIns="91425" tIns="45700" rIns="91425" bIns="45700" anchor="t" anchorCtr="0">
             <a:noAutofit/>
           </a:bodyPr>
           <a:lstStyle>
-            <a:lvl1pPr lvl="0" marR="0" rtl="0" algn="r">
+            <a:lvl1pPr marR="0" lvl="0" algn="r" rtl="0">
               <a:spcBef>
                 <a:spcPts val="0"/>
               </a:spcBef>
@@ -544,7 +557,7 @@
               </a:spcAft>
               <a:buSzPts val="1400"/>
               <a:buNone/>
-              <a:defRPr b="0" i="0" sz="1200" u="none" cap="none" strike="noStrike">
+              <a:defRPr sz="1200" b="0" i="0" u="none" strike="noStrike" cap="none">
                 <a:solidFill>
                   <a:schemeClr val="dk1"/>
                 </a:solidFill>
@@ -554,7 +567,7 @@
                 <a:sym typeface="Calibri"/>
               </a:defRPr>
             </a:lvl1pPr>
-            <a:lvl2pPr lvl="1" marR="0" rtl="0" algn="l">
+            <a:lvl2pPr marR="0" lvl="1" algn="l" rtl="0">
               <a:spcBef>
                 <a:spcPts val="0"/>
               </a:spcBef>
@@ -563,7 +576,7 @@
               </a:spcAft>
               <a:buSzPts val="1400"/>
               <a:buNone/>
-              <a:defRPr b="0" i="0" sz="1800" u="none" cap="none" strike="noStrike">
+              <a:defRPr sz="1800" b="0" i="0" u="none" strike="noStrike" cap="none">
                 <a:solidFill>
                   <a:schemeClr val="dk1"/>
                 </a:solidFill>
@@ -573,7 +586,7 @@
                 <a:sym typeface="Calibri"/>
               </a:defRPr>
             </a:lvl2pPr>
-            <a:lvl3pPr lvl="2" marR="0" rtl="0" algn="l">
+            <a:lvl3pPr marR="0" lvl="2" algn="l" rtl="0">
               <a:spcBef>
                 <a:spcPts val="0"/>
               </a:spcBef>
@@ -582,7 +595,7 @@
               </a:spcAft>
               <a:buSzPts val="1400"/>
               <a:buNone/>
-              <a:defRPr b="0" i="0" sz="1800" u="none" cap="none" strike="noStrike">
+              <a:defRPr sz="1800" b="0" i="0" u="none" strike="noStrike" cap="none">
                 <a:solidFill>
                   <a:schemeClr val="dk1"/>
                 </a:solidFill>
@@ -592,7 +605,7 @@
                 <a:sym typeface="Calibri"/>
               </a:defRPr>
             </a:lvl3pPr>
-            <a:lvl4pPr lvl="3" marR="0" rtl="0" algn="l">
+            <a:lvl4pPr marR="0" lvl="3" algn="l" rtl="0">
               <a:spcBef>
                 <a:spcPts val="0"/>
               </a:spcBef>
@@ -601,7 +614,7 @@
               </a:spcAft>
               <a:buSzPts val="1400"/>
               <a:buNone/>
-              <a:defRPr b="0" i="0" sz="1800" u="none" cap="none" strike="noStrike">
+              <a:defRPr sz="1800" b="0" i="0" u="none" strike="noStrike" cap="none">
                 <a:solidFill>
                   <a:schemeClr val="dk1"/>
                 </a:solidFill>
@@ -611,7 +624,7 @@
                 <a:sym typeface="Calibri"/>
               </a:defRPr>
             </a:lvl4pPr>
-            <a:lvl5pPr lvl="4" marR="0" rtl="0" algn="l">
+            <a:lvl5pPr marR="0" lvl="4" algn="l" rtl="0">
               <a:spcBef>
                 <a:spcPts val="0"/>
               </a:spcBef>
@@ -620,7 +633,7 @@
               </a:spcAft>
               <a:buSzPts val="1400"/>
               <a:buNone/>
-              <a:defRPr b="0" i="0" sz="1800" u="none" cap="none" strike="noStrike">
+              <a:defRPr sz="1800" b="0" i="0" u="none" strike="noStrike" cap="none">
                 <a:solidFill>
                   <a:schemeClr val="dk1"/>
                 </a:solidFill>
@@ -630,7 +643,7 @@
                 <a:sym typeface="Calibri"/>
               </a:defRPr>
             </a:lvl5pPr>
-            <a:lvl6pPr lvl="5" marR="0" rtl="0" algn="l">
+            <a:lvl6pPr marR="0" lvl="5" algn="l" rtl="0">
               <a:spcBef>
                 <a:spcPts val="0"/>
               </a:spcBef>
@@ -639,7 +652,7 @@
               </a:spcAft>
               <a:buSzPts val="1400"/>
               <a:buNone/>
-              <a:defRPr b="0" i="0" sz="1800" u="none" cap="none" strike="noStrike">
+              <a:defRPr sz="1800" b="0" i="0" u="none" strike="noStrike" cap="none">
                 <a:solidFill>
                   <a:schemeClr val="dk1"/>
                 </a:solidFill>
@@ -649,7 +662,7 @@
                 <a:sym typeface="Calibri"/>
               </a:defRPr>
             </a:lvl6pPr>
-            <a:lvl7pPr lvl="6" marR="0" rtl="0" algn="l">
+            <a:lvl7pPr marR="0" lvl="6" algn="l" rtl="0">
               <a:spcBef>
                 <a:spcPts val="0"/>
               </a:spcBef>
@@ -658,7 +671,7 @@
               </a:spcAft>
               <a:buSzPts val="1400"/>
               <a:buNone/>
-              <a:defRPr b="0" i="0" sz="1800" u="none" cap="none" strike="noStrike">
+              <a:defRPr sz="1800" b="0" i="0" u="none" strike="noStrike" cap="none">
                 <a:solidFill>
                   <a:schemeClr val="dk1"/>
                 </a:solidFill>
@@ -668,7 +681,7 @@
                 <a:sym typeface="Calibri"/>
               </a:defRPr>
             </a:lvl7pPr>
-            <a:lvl8pPr lvl="7" marR="0" rtl="0" algn="l">
+            <a:lvl8pPr marR="0" lvl="7" algn="l" rtl="0">
               <a:spcBef>
                 <a:spcPts val="0"/>
               </a:spcBef>
@@ -677,7 +690,7 @@
               </a:spcAft>
               <a:buSzPts val="1400"/>
               <a:buNone/>
-              <a:defRPr b="0" i="0" sz="1800" u="none" cap="none" strike="noStrike">
+              <a:defRPr sz="1800" b="0" i="0" u="none" strike="noStrike" cap="none">
                 <a:solidFill>
                   <a:schemeClr val="dk1"/>
                 </a:solidFill>
@@ -687,7 +700,7 @@
                 <a:sym typeface="Calibri"/>
               </a:defRPr>
             </a:lvl8pPr>
-            <a:lvl9pPr lvl="8" marR="0" rtl="0" algn="l">
+            <a:lvl9pPr marR="0" lvl="8" algn="l" rtl="0">
               <a:spcBef>
                 <a:spcPts val="0"/>
               </a:spcBef>
@@ -696,7 +709,7 @@
               </a:spcAft>
               <a:buSzPts val="1400"/>
               <a:buNone/>
-              <a:defRPr b="0" i="0" sz="1800" u="none" cap="none" strike="noStrike">
+              <a:defRPr sz="1800" b="0" i="0" u="none" strike="noStrike" cap="none">
                 <a:solidFill>
                   <a:schemeClr val="dk1"/>
                 </a:solidFill>
@@ -707,15 +720,19 @@
               </a:defRPr>
             </a:lvl9pPr>
           </a:lstStyle>
-          <a:p/>
+          <a:p>
+            <a:endParaRPr/>
+          </a:p>
         </p:txBody>
       </p:sp>
       <p:sp>
         <p:nvSpPr>
           <p:cNvPr id="5" name="Google Shape;5;n"/>
-          <p:cNvSpPr/>
+          <p:cNvSpPr>
+            <a:spLocks noGrp="1" noRot="1" noChangeAspect="1"/>
+          </p:cNvSpPr>
           <p:nvPr>
-            <p:ph idx="3" type="sldImg"/>
+            <p:ph type="sldImg" idx="3"/>
           </p:nvPr>
         </p:nvSpPr>
         <p:spPr>
@@ -724,9 +741,13 @@
             <a:ext cx="5486400" cy="3086100"/>
           </a:xfrm>
           <a:custGeom>
-            <a:rect b="b" l="l" r="r" t="t"/>
+            <a:avLst/>
+            <a:gdLst/>
+            <a:ahLst/>
+            <a:cxnLst/>
+            <a:rect l="l" t="t" r="r" b="b"/>
             <a:pathLst>
-              <a:path extrusionOk="0" h="120000" w="120000">
+              <a:path w="120000" h="120000" extrusionOk="0">
                 <a:moveTo>
                   <a:pt x="0" y="0"/>
                 </a:moveTo>
@@ -744,23 +765,25 @@
             </a:pathLst>
           </a:custGeom>
           <a:noFill/>
-          <a:ln cap="flat" cmpd="sng" w="12700">
+          <a:ln w="12700" cap="flat" cmpd="sng">
             <a:solidFill>
               <a:srgbClr val="000000"/>
             </a:solidFill>
             <a:prstDash val="solid"/>
             <a:round/>
-            <a:headEnd len="sm" w="sm" type="none"/>
-            <a:tailEnd len="sm" w="sm" type="none"/>
+            <a:headEnd type="none" w="sm" len="sm"/>
+            <a:tailEnd type="none" w="sm" len="sm"/>
           </a:ln>
         </p:spPr>
       </p:sp>
       <p:sp>
         <p:nvSpPr>
           <p:cNvPr id="6" name="Google Shape;6;n"/>
-          <p:cNvSpPr txBox="1"/>
+          <p:cNvSpPr txBox="1">
+            <a:spLocks noGrp="1"/>
+          </p:cNvSpPr>
           <p:nvPr>
-            <p:ph idx="1" type="body"/>
+            <p:ph type="body" idx="1"/>
           </p:nvPr>
         </p:nvSpPr>
         <p:spPr>
@@ -777,11 +800,11 @@
           </a:ln>
         </p:spPr>
         <p:txBody>
-          <a:bodyPr anchorCtr="0" anchor="t" bIns="45700" lIns="91425" spcFirstLastPara="1" rIns="91425" wrap="square" tIns="45700">
+          <a:bodyPr spcFirstLastPara="1" wrap="square" lIns="91425" tIns="45700" rIns="91425" bIns="45700" anchor="t" anchorCtr="0">
             <a:noAutofit/>
           </a:bodyPr>
           <a:lstStyle>
-            <a:lvl1pPr indent="-228600" lvl="0" marL="457200" marR="0" rtl="0" algn="l">
+            <a:lvl1pPr marL="457200" marR="0" lvl="0" indent="-228600" algn="l" rtl="0">
               <a:spcBef>
                 <a:spcPts val="0"/>
               </a:spcBef>
@@ -790,7 +813,7 @@
               </a:spcAft>
               <a:buSzPts val="1400"/>
               <a:buNone/>
-              <a:defRPr b="0" i="0" sz="1200" u="none" cap="none" strike="noStrike">
+              <a:defRPr sz="1200" b="0" i="0" u="none" strike="noStrike" cap="none">
                 <a:solidFill>
                   <a:schemeClr val="dk1"/>
                 </a:solidFill>
@@ -800,7 +823,7 @@
                 <a:sym typeface="Calibri"/>
               </a:defRPr>
             </a:lvl1pPr>
-            <a:lvl2pPr indent="-228600" lvl="1" marL="914400" marR="0" rtl="0" algn="l">
+            <a:lvl2pPr marL="914400" marR="0" lvl="1" indent="-228600" algn="l" rtl="0">
               <a:spcBef>
                 <a:spcPts val="0"/>
               </a:spcBef>
@@ -809,7 +832,7 @@
               </a:spcAft>
               <a:buSzPts val="1400"/>
               <a:buNone/>
-              <a:defRPr b="0" i="0" sz="1200" u="none" cap="none" strike="noStrike">
+              <a:defRPr sz="1200" b="0" i="0" u="none" strike="noStrike" cap="none">
                 <a:solidFill>
                   <a:schemeClr val="dk1"/>
                 </a:solidFill>
@@ -819,7 +842,7 @@
                 <a:sym typeface="Calibri"/>
               </a:defRPr>
             </a:lvl2pPr>
-            <a:lvl3pPr indent="-228600" lvl="2" marL="1371600" marR="0" rtl="0" algn="l">
+            <a:lvl3pPr marL="1371600" marR="0" lvl="2" indent="-228600" algn="l" rtl="0">
               <a:spcBef>
                 <a:spcPts val="0"/>
               </a:spcBef>
@@ -828,7 +851,7 @@
               </a:spcAft>
               <a:buSzPts val="1400"/>
               <a:buNone/>
-              <a:defRPr b="0" i="0" sz="1200" u="none" cap="none" strike="noStrike">
+              <a:defRPr sz="1200" b="0" i="0" u="none" strike="noStrike" cap="none">
                 <a:solidFill>
                   <a:schemeClr val="dk1"/>
                 </a:solidFill>
@@ -838,7 +861,7 @@
                 <a:sym typeface="Calibri"/>
               </a:defRPr>
             </a:lvl3pPr>
-            <a:lvl4pPr indent="-228600" lvl="3" marL="1828800" marR="0" rtl="0" algn="l">
+            <a:lvl4pPr marL="1828800" marR="0" lvl="3" indent="-228600" algn="l" rtl="0">
               <a:spcBef>
                 <a:spcPts val="0"/>
               </a:spcBef>
@@ -847,7 +870,7 @@
               </a:spcAft>
               <a:buSzPts val="1400"/>
               <a:buNone/>
-              <a:defRPr b="0" i="0" sz="1200" u="none" cap="none" strike="noStrike">
+              <a:defRPr sz="1200" b="0" i="0" u="none" strike="noStrike" cap="none">
                 <a:solidFill>
                   <a:schemeClr val="dk1"/>
                 </a:solidFill>
@@ -857,7 +880,7 @@
                 <a:sym typeface="Calibri"/>
               </a:defRPr>
             </a:lvl4pPr>
-            <a:lvl5pPr indent="-228600" lvl="4" marL="2286000" marR="0" rtl="0" algn="l">
+            <a:lvl5pPr marL="2286000" marR="0" lvl="4" indent="-228600" algn="l" rtl="0">
               <a:spcBef>
                 <a:spcPts val="0"/>
               </a:spcBef>
@@ -866,7 +889,7 @@
               </a:spcAft>
               <a:buSzPts val="1400"/>
               <a:buNone/>
-              <a:defRPr b="0" i="0" sz="1200" u="none" cap="none" strike="noStrike">
+              <a:defRPr sz="1200" b="0" i="0" u="none" strike="noStrike" cap="none">
                 <a:solidFill>
                   <a:schemeClr val="dk1"/>
                 </a:solidFill>
@@ -876,7 +899,7 @@
                 <a:sym typeface="Calibri"/>
               </a:defRPr>
             </a:lvl5pPr>
-            <a:lvl6pPr indent="-228600" lvl="5" marL="2743200" marR="0" rtl="0" algn="l">
+            <a:lvl6pPr marL="2743200" marR="0" lvl="5" indent="-228600" algn="l" rtl="0">
               <a:spcBef>
                 <a:spcPts val="0"/>
               </a:spcBef>
@@ -885,7 +908,7 @@
               </a:spcAft>
               <a:buSzPts val="1400"/>
               <a:buNone/>
-              <a:defRPr b="0" i="0" sz="1200" u="none" cap="none" strike="noStrike">
+              <a:defRPr sz="1200" b="0" i="0" u="none" strike="noStrike" cap="none">
                 <a:solidFill>
                   <a:schemeClr val="dk1"/>
                 </a:solidFill>
@@ -895,7 +918,7 @@
                 <a:sym typeface="Calibri"/>
               </a:defRPr>
             </a:lvl6pPr>
-            <a:lvl7pPr indent="-228600" lvl="6" marL="3200400" marR="0" rtl="0" algn="l">
+            <a:lvl7pPr marL="3200400" marR="0" lvl="6" indent="-228600" algn="l" rtl="0">
               <a:spcBef>
                 <a:spcPts val="0"/>
               </a:spcBef>
@@ -904,7 +927,7 @@
               </a:spcAft>
               <a:buSzPts val="1400"/>
               <a:buNone/>
-              <a:defRPr b="0" i="0" sz="1200" u="none" cap="none" strike="noStrike">
+              <a:defRPr sz="1200" b="0" i="0" u="none" strike="noStrike" cap="none">
                 <a:solidFill>
                   <a:schemeClr val="dk1"/>
                 </a:solidFill>
@@ -914,7 +937,7 @@
                 <a:sym typeface="Calibri"/>
               </a:defRPr>
             </a:lvl7pPr>
-            <a:lvl8pPr indent="-228600" lvl="7" marL="3657600" marR="0" rtl="0" algn="l">
+            <a:lvl8pPr marL="3657600" marR="0" lvl="7" indent="-228600" algn="l" rtl="0">
               <a:spcBef>
                 <a:spcPts val="0"/>
               </a:spcBef>
@@ -923,7 +946,7 @@
               </a:spcAft>
               <a:buSzPts val="1400"/>
               <a:buNone/>
-              <a:defRPr b="0" i="0" sz="1200" u="none" cap="none" strike="noStrike">
+              <a:defRPr sz="1200" b="0" i="0" u="none" strike="noStrike" cap="none">
                 <a:solidFill>
                   <a:schemeClr val="dk1"/>
                 </a:solidFill>
@@ -933,7 +956,7 @@
                 <a:sym typeface="Calibri"/>
               </a:defRPr>
             </a:lvl8pPr>
-            <a:lvl9pPr indent="-228600" lvl="8" marL="4114800" marR="0" rtl="0" algn="l">
+            <a:lvl9pPr marL="4114800" marR="0" lvl="8" indent="-228600" algn="l" rtl="0">
               <a:spcBef>
                 <a:spcPts val="0"/>
               </a:spcBef>
@@ -942,7 +965,7 @@
               </a:spcAft>
               <a:buSzPts val="1400"/>
               <a:buNone/>
-              <a:defRPr b="0" i="0" sz="1200" u="none" cap="none" strike="noStrike">
+              <a:defRPr sz="1200" b="0" i="0" u="none" strike="noStrike" cap="none">
                 <a:solidFill>
                   <a:schemeClr val="dk1"/>
                 </a:solidFill>
@@ -953,15 +976,19 @@
               </a:defRPr>
             </a:lvl9pPr>
           </a:lstStyle>
-          <a:p/>
+          <a:p>
+            <a:endParaRPr/>
+          </a:p>
         </p:txBody>
       </p:sp>
       <p:sp>
         <p:nvSpPr>
           <p:cNvPr id="7" name="Google Shape;7;n"/>
-          <p:cNvSpPr txBox="1"/>
+          <p:cNvSpPr txBox="1">
+            <a:spLocks noGrp="1"/>
+          </p:cNvSpPr>
           <p:nvPr>
-            <p:ph idx="11" type="ftr"/>
+            <p:ph type="ftr" idx="11"/>
           </p:nvPr>
         </p:nvSpPr>
         <p:spPr>
@@ -978,11 +1005,11 @@
           </a:ln>
         </p:spPr>
         <p:txBody>
-          <a:bodyPr anchorCtr="0" anchor="b" bIns="45700" lIns="91425" spcFirstLastPara="1" rIns="91425" wrap="square" tIns="45700">
+          <a:bodyPr spcFirstLastPara="1" wrap="square" lIns="91425" tIns="45700" rIns="91425" bIns="45700" anchor="b" anchorCtr="0">
             <a:noAutofit/>
           </a:bodyPr>
           <a:lstStyle>
-            <a:lvl1pPr lvl="0" marR="0" rtl="0" algn="l">
+            <a:lvl1pPr marR="0" lvl="0" algn="l" rtl="0">
               <a:spcBef>
                 <a:spcPts val="0"/>
               </a:spcBef>
@@ -991,7 +1018,7 @@
               </a:spcAft>
               <a:buSzPts val="1400"/>
               <a:buNone/>
-              <a:defRPr b="0" i="0" sz="1200" u="none" cap="none" strike="noStrike">
+              <a:defRPr sz="1200" b="0" i="0" u="none" strike="noStrike" cap="none">
                 <a:solidFill>
                   <a:schemeClr val="dk1"/>
                 </a:solidFill>
@@ -1001,7 +1028,7 @@
                 <a:sym typeface="Calibri"/>
               </a:defRPr>
             </a:lvl1pPr>
-            <a:lvl2pPr lvl="1" marR="0" rtl="0" algn="l">
+            <a:lvl2pPr marR="0" lvl="1" algn="l" rtl="0">
               <a:spcBef>
                 <a:spcPts val="0"/>
               </a:spcBef>
@@ -1010,7 +1037,7 @@
               </a:spcAft>
               <a:buSzPts val="1400"/>
               <a:buNone/>
-              <a:defRPr b="0" i="0" sz="1800" u="none" cap="none" strike="noStrike">
+              <a:defRPr sz="1800" b="0" i="0" u="none" strike="noStrike" cap="none">
                 <a:solidFill>
                   <a:schemeClr val="dk1"/>
                 </a:solidFill>
@@ -1020,7 +1047,7 @@
                 <a:sym typeface="Calibri"/>
               </a:defRPr>
             </a:lvl2pPr>
-            <a:lvl3pPr lvl="2" marR="0" rtl="0" algn="l">
+            <a:lvl3pPr marR="0" lvl="2" algn="l" rtl="0">
               <a:spcBef>
                 <a:spcPts val="0"/>
               </a:spcBef>
@@ -1029,7 +1056,7 @@
               </a:spcAft>
               <a:buSzPts val="1400"/>
               <a:buNone/>
-              <a:defRPr b="0" i="0" sz="1800" u="none" cap="none" strike="noStrike">
+              <a:defRPr sz="1800" b="0" i="0" u="none" strike="noStrike" cap="none">
                 <a:solidFill>
                   <a:schemeClr val="dk1"/>
                 </a:solidFill>
@@ -1039,7 +1066,7 @@
                 <a:sym typeface="Calibri"/>
               </a:defRPr>
             </a:lvl3pPr>
-            <a:lvl4pPr lvl="3" marR="0" rtl="0" algn="l">
+            <a:lvl4pPr marR="0" lvl="3" algn="l" rtl="0">
               <a:spcBef>
                 <a:spcPts val="0"/>
               </a:spcBef>
@@ -1048,7 +1075,7 @@
               </a:spcAft>
               <a:buSzPts val="1400"/>
               <a:buNone/>
-              <a:defRPr b="0" i="0" sz="1800" u="none" cap="none" strike="noStrike">
+              <a:defRPr sz="1800" b="0" i="0" u="none" strike="noStrike" cap="none">
                 <a:solidFill>
                   <a:schemeClr val="dk1"/>
                 </a:solidFill>
@@ -1058,7 +1085,7 @@
                 <a:sym typeface="Calibri"/>
               </a:defRPr>
             </a:lvl4pPr>
-            <a:lvl5pPr lvl="4" marR="0" rtl="0" algn="l">
+            <a:lvl5pPr marR="0" lvl="4" algn="l" rtl="0">
               <a:spcBef>
                 <a:spcPts val="0"/>
               </a:spcBef>
@@ -1067,7 +1094,7 @@
               </a:spcAft>
               <a:buSzPts val="1400"/>
               <a:buNone/>
-              <a:defRPr b="0" i="0" sz="1800" u="none" cap="none" strike="noStrike">
+              <a:defRPr sz="1800" b="0" i="0" u="none" strike="noStrike" cap="none">
                 <a:solidFill>
                   <a:schemeClr val="dk1"/>
                 </a:solidFill>
@@ -1077,7 +1104,7 @@
                 <a:sym typeface="Calibri"/>
               </a:defRPr>
             </a:lvl5pPr>
-            <a:lvl6pPr lvl="5" marR="0" rtl="0" algn="l">
+            <a:lvl6pPr marR="0" lvl="5" algn="l" rtl="0">
               <a:spcBef>
                 <a:spcPts val="0"/>
               </a:spcBef>
@@ -1086,7 +1113,7 @@
               </a:spcAft>
               <a:buSzPts val="1400"/>
               <a:buNone/>
-              <a:defRPr b="0" i="0" sz="1800" u="none" cap="none" strike="noStrike">
+              <a:defRPr sz="1800" b="0" i="0" u="none" strike="noStrike" cap="none">
                 <a:solidFill>
                   <a:schemeClr val="dk1"/>
                 </a:solidFill>
@@ -1096,7 +1123,7 @@
                 <a:sym typeface="Calibri"/>
               </a:defRPr>
             </a:lvl6pPr>
-            <a:lvl7pPr lvl="6" marR="0" rtl="0" algn="l">
+            <a:lvl7pPr marR="0" lvl="6" algn="l" rtl="0">
               <a:spcBef>
                 <a:spcPts val="0"/>
               </a:spcBef>
@@ -1105,7 +1132,7 @@
               </a:spcAft>
               <a:buSzPts val="1400"/>
               <a:buNone/>
-              <a:defRPr b="0" i="0" sz="1800" u="none" cap="none" strike="noStrike">
+              <a:defRPr sz="1800" b="0" i="0" u="none" strike="noStrike" cap="none">
                 <a:solidFill>
                   <a:schemeClr val="dk1"/>
                 </a:solidFill>
@@ -1115,7 +1142,7 @@
                 <a:sym typeface="Calibri"/>
               </a:defRPr>
             </a:lvl7pPr>
-            <a:lvl8pPr lvl="7" marR="0" rtl="0" algn="l">
+            <a:lvl8pPr marR="0" lvl="7" algn="l" rtl="0">
               <a:spcBef>
                 <a:spcPts val="0"/>
               </a:spcBef>
@@ -1124,7 +1151,7 @@
               </a:spcAft>
               <a:buSzPts val="1400"/>
               <a:buNone/>
-              <a:defRPr b="0" i="0" sz="1800" u="none" cap="none" strike="noStrike">
+              <a:defRPr sz="1800" b="0" i="0" u="none" strike="noStrike" cap="none">
                 <a:solidFill>
                   <a:schemeClr val="dk1"/>
                 </a:solidFill>
@@ -1134,7 +1161,7 @@
                 <a:sym typeface="Calibri"/>
               </a:defRPr>
             </a:lvl8pPr>
-            <a:lvl9pPr lvl="8" marR="0" rtl="0" algn="l">
+            <a:lvl9pPr marR="0" lvl="8" algn="l" rtl="0">
               <a:spcBef>
                 <a:spcPts val="0"/>
               </a:spcBef>
@@ -1143,7 +1170,7 @@
               </a:spcAft>
               <a:buSzPts val="1400"/>
               <a:buNone/>
-              <a:defRPr b="0" i="0" sz="1800" u="none" cap="none" strike="noStrike">
+              <a:defRPr sz="1800" b="0" i="0" u="none" strike="noStrike" cap="none">
                 <a:solidFill>
                   <a:schemeClr val="dk1"/>
                 </a:solidFill>
@@ -1154,15 +1181,19 @@
               </a:defRPr>
             </a:lvl9pPr>
           </a:lstStyle>
-          <a:p/>
+          <a:p>
+            <a:endParaRPr/>
+          </a:p>
         </p:txBody>
       </p:sp>
       <p:sp>
         <p:nvSpPr>
           <p:cNvPr id="8" name="Google Shape;8;n"/>
-          <p:cNvSpPr txBox="1"/>
+          <p:cNvSpPr txBox="1">
+            <a:spLocks noGrp="1"/>
+          </p:cNvSpPr>
           <p:nvPr>
-            <p:ph idx="12" type="sldNum"/>
+            <p:ph type="sldNum" idx="12"/>
           </p:nvPr>
         </p:nvSpPr>
         <p:spPr>
@@ -1179,12 +1210,12 @@
           </a:ln>
         </p:spPr>
         <p:txBody>
-          <a:bodyPr anchorCtr="0" anchor="b" bIns="45700" lIns="91425" spcFirstLastPara="1" rIns="91425" wrap="square" tIns="45700">
-            <a:noAutofit/>
-          </a:bodyPr>
-          <a:lstStyle/>
-          <a:p>
-            <a:pPr indent="0" lvl="0" marL="0" marR="0" rtl="0" algn="r">
+          <a:bodyPr spcFirstLastPara="1" wrap="square" lIns="91425" tIns="45700" rIns="91425" bIns="45700" anchor="b" anchorCtr="0">
+            <a:noAutofit/>
+          </a:bodyPr>
+          <a:lstStyle/>
+          <a:p>
+            <a:pPr marL="0" marR="0" lvl="0" indent="0" algn="r" rtl="0">
               <a:spcBef>
                 <a:spcPts val="0"/>
               </a:spcBef>
@@ -1194,7 +1225,7 @@
               <a:buNone/>
             </a:pPr>
             <a:fld id="{00000000-1234-1234-1234-123412341234}" type="slidenum">
-              <a:rPr b="0" i="0" lang="en-US" sz="1200" u="none" cap="none" strike="noStrike">
+              <a:rPr lang="en-US" sz="1200" b="0" i="0" u="none" strike="noStrike" cap="none">
                 <a:solidFill>
                   <a:schemeClr val="dk1"/>
                 </a:solidFill>
@@ -1205,7 +1236,7 @@
               </a:rPr>
               <a:t>‹#›</a:t>
             </a:fld>
-            <a:endParaRPr b="0" i="0" sz="1200" u="none" cap="none" strike="noStrike">
+            <a:endParaRPr sz="1200" b="0" i="0" u="none" strike="noStrike" cap="none">
               <a:solidFill>
                 <a:schemeClr val="dk1"/>
               </a:solidFill>
@@ -1219,9 +1250,9 @@
       </p:sp>
     </p:spTree>
   </p:cSld>
-  <p:clrMap accent1="accent1" accent2="accent2" accent3="accent3" accent4="accent4" accent5="accent5" accent6="accent6" bg1="lt1" bg2="dk2" tx1="dk1" tx2="lt2" folHlink="folHlink" hlink="hlink"/>
+  <p:clrMap bg1="lt1" tx1="dk1" bg2="dk2" tx2="lt2" accent1="accent1" accent2="accent2" accent3="accent3" accent4="accent4" accent5="accent5" accent6="accent6" hlink="hlink" folHlink="folHlink"/>
   <p:notesStyle>
-    <a:defPPr lvl="0" marR="0" rtl="0" algn="l">
+    <a:defPPr marR="0" lvl="0" algn="l" rtl="0">
       <a:lnSpc>
         <a:spcPct val="100000"/>
       </a:lnSpc>
@@ -1232,7 +1263,7 @@
         <a:spcPts val="0"/>
       </a:spcAft>
     </a:defPPr>
-    <a:lvl1pPr lvl="0" marR="0" rtl="0" algn="l">
+    <a:lvl1pPr marR="0" lvl="0" algn="l" rtl="0">
       <a:lnSpc>
         <a:spcPct val="100000"/>
       </a:lnSpc>
@@ -1246,7 +1277,7 @@
         <a:srgbClr val="000000"/>
       </a:buClr>
       <a:buFont typeface="Arial"/>
-      <a:defRPr b="0" i="0" spc="0" sz="1400" u="none" cap="none" strike="noStrike">
+      <a:defRPr sz="1400" b="0" i="0" u="none" strike="noStrike" cap="none" spc="0">
         <a:solidFill>
           <a:srgbClr val="000000"/>
         </a:solidFill>
@@ -1256,7 +1287,7 @@
         <a:sym typeface="Arial"/>
       </a:defRPr>
     </a:lvl1pPr>
-    <a:lvl2pPr lvl="1" marR="0" rtl="0" algn="l">
+    <a:lvl2pPr marR="0" lvl="1" algn="l" rtl="0">
       <a:lnSpc>
         <a:spcPct val="100000"/>
       </a:lnSpc>
@@ -1270,7 +1301,7 @@
         <a:srgbClr val="000000"/>
       </a:buClr>
       <a:buFont typeface="Arial"/>
-      <a:defRPr b="0" i="0" spc="0" sz="1400" u="none" cap="none" strike="noStrike">
+      <a:defRPr sz="1400" b="0" i="0" u="none" strike="noStrike" cap="none" spc="0">
         <a:solidFill>
           <a:srgbClr val="000000"/>
         </a:solidFill>
@@ -1280,7 +1311,7 @@
         <a:sym typeface="Arial"/>
       </a:defRPr>
     </a:lvl2pPr>
-    <a:lvl3pPr lvl="2" marR="0" rtl="0" algn="l">
+    <a:lvl3pPr marR="0" lvl="2" algn="l" rtl="0">
       <a:lnSpc>
         <a:spcPct val="100000"/>
       </a:lnSpc>
@@ -1294,7 +1325,7 @@
         <a:srgbClr val="000000"/>
       </a:buClr>
       <a:buFont typeface="Arial"/>
-      <a:defRPr b="0" i="0" spc="0" sz="1400" u="none" cap="none" strike="noStrike">
+      <a:defRPr sz="1400" b="0" i="0" u="none" strike="noStrike" cap="none" spc="0">
         <a:solidFill>
           <a:srgbClr val="000000"/>
         </a:solidFill>
@@ -1304,7 +1335,7 @@
         <a:sym typeface="Arial"/>
       </a:defRPr>
     </a:lvl3pPr>
-    <a:lvl4pPr lvl="3" marR="0" rtl="0" algn="l">
+    <a:lvl4pPr marR="0" lvl="3" algn="l" rtl="0">
       <a:lnSpc>
         <a:spcPct val="100000"/>
       </a:lnSpc>
@@ -1318,7 +1349,7 @@
         <a:srgbClr val="000000"/>
       </a:buClr>
       <a:buFont typeface="Arial"/>
-      <a:defRPr b="0" i="0" spc="0" sz="1400" u="none" cap="none" strike="noStrike">
+      <a:defRPr sz="1400" b="0" i="0" u="none" strike="noStrike" cap="none" spc="0">
         <a:solidFill>
           <a:srgbClr val="000000"/>
         </a:solidFill>
@@ -1328,7 +1359,7 @@
         <a:sym typeface="Arial"/>
       </a:defRPr>
     </a:lvl4pPr>
-    <a:lvl5pPr lvl="4" marR="0" rtl="0" algn="l">
+    <a:lvl5pPr marR="0" lvl="4" algn="l" rtl="0">
       <a:lnSpc>
         <a:spcPct val="100000"/>
       </a:lnSpc>
@@ -1342,7 +1373,7 @@
         <a:srgbClr val="000000"/>
       </a:buClr>
       <a:buFont typeface="Arial"/>
-      <a:defRPr b="0" i="0" spc="0" sz="1400" u="none" cap="none" strike="noStrike">
+      <a:defRPr sz="1400" b="0" i="0" u="none" strike="noStrike" cap="none" spc="0">
         <a:solidFill>
           <a:srgbClr val="000000"/>
         </a:solidFill>
@@ -1352,7 +1383,7 @@
         <a:sym typeface="Arial"/>
       </a:defRPr>
     </a:lvl5pPr>
-    <a:lvl6pPr lvl="5" marR="0" rtl="0" algn="l">
+    <a:lvl6pPr marR="0" lvl="5" algn="l" rtl="0">
       <a:lnSpc>
         <a:spcPct val="100000"/>
       </a:lnSpc>
@@ -1366,7 +1397,7 @@
         <a:srgbClr val="000000"/>
       </a:buClr>
       <a:buFont typeface="Arial"/>
-      <a:defRPr b="0" i="0" spc="0" sz="1400" u="none" cap="none" strike="noStrike">
+      <a:defRPr sz="1400" b="0" i="0" u="none" strike="noStrike" cap="none" spc="0">
         <a:solidFill>
           <a:srgbClr val="000000"/>
         </a:solidFill>
@@ -1376,7 +1407,7 @@
         <a:sym typeface="Arial"/>
       </a:defRPr>
     </a:lvl6pPr>
-    <a:lvl7pPr lvl="6" marR="0" rtl="0" algn="l">
+    <a:lvl7pPr marR="0" lvl="6" algn="l" rtl="0">
       <a:lnSpc>
         <a:spcPct val="100000"/>
       </a:lnSpc>
@@ -1390,7 +1421,7 @@
         <a:srgbClr val="000000"/>
       </a:buClr>
       <a:buFont typeface="Arial"/>
-      <a:defRPr b="0" i="0" spc="0" sz="1400" u="none" cap="none" strike="noStrike">
+      <a:defRPr sz="1400" b="0" i="0" u="none" strike="noStrike" cap="none" spc="0">
         <a:solidFill>
           <a:srgbClr val="000000"/>
         </a:solidFill>
@@ -1400,7 +1431,7 @@
         <a:sym typeface="Arial"/>
       </a:defRPr>
     </a:lvl7pPr>
-    <a:lvl8pPr lvl="7" marR="0" rtl="0" algn="l">
+    <a:lvl8pPr marR="0" lvl="7" algn="l" rtl="0">
       <a:lnSpc>
         <a:spcPct val="100000"/>
       </a:lnSpc>
@@ -1414,7 +1445,7 @@
         <a:srgbClr val="000000"/>
       </a:buClr>
       <a:buFont typeface="Arial"/>
-      <a:defRPr b="0" i="0" spc="0" sz="1400" u="none" cap="none" strike="noStrike">
+      <a:defRPr sz="1400" b="0" i="0" u="none" strike="noStrike" cap="none" spc="0">
         <a:solidFill>
           <a:srgbClr val="000000"/>
         </a:solidFill>
@@ -1424,7 +1455,7 @@
         <a:sym typeface="Arial"/>
       </a:defRPr>
     </a:lvl8pPr>
-    <a:lvl9pPr lvl="8" marR="0" rtl="0" algn="l">
+    <a:lvl9pPr marR="0" lvl="8" algn="l" rtl="0">
       <a:lnSpc>
         <a:spcPct val="100000"/>
       </a:lnSpc>
@@ -1438,7 +1469,7 @@
         <a:srgbClr val="000000"/>
       </a:buClr>
       <a:buFont typeface="Arial"/>
-      <a:defRPr b="0" i="0" spc="0" sz="1400" u="none" cap="none" strike="noStrike">
+      <a:defRPr sz="1400" b="0" i="0" u="none" strike="noStrike" cap="none" spc="0">
         <a:solidFill>
           <a:srgbClr val="000000"/>
         </a:solidFill>
@@ -1453,11 +1484,11 @@
 </file>
 
 <file path=ppt/notesSlides/notesSlide1.xml><?xml version="1.0" encoding="utf-8"?>
-<p:notes xmlns:a="http://schemas.openxmlformats.org/drawingml/2006/main" xmlns:r="http://schemas.openxmlformats.org/officeDocument/2006/relationships" xmlns:mc="http://schemas.openxmlformats.org/markup-compatibility/2006" xmlns:mv="urn:schemas-microsoft-com:mac:vml" xmlns:p="http://schemas.openxmlformats.org/presentationml/2006/main" xmlns:c="http://schemas.openxmlformats.org/drawingml/2006/chart" xmlns:dgm="http://schemas.openxmlformats.org/drawingml/2006/diagram" xmlns:o="urn:schemas-microsoft-com:office:office" xmlns:v="urn:schemas-microsoft-com:vml" xmlns:pvml="urn:schemas-microsoft-com:office:powerpoint" xmlns:com="http://schemas.openxmlformats.org/drawingml/2006/compatibility" xmlns:p14="http://schemas.microsoft.com/office/powerpoint/2010/main" xmlns:p15="http://schemas.microsoft.com/office/powerpoint/2012/main" xmlns:ahyp="http://schemas.microsoft.com/office/drawing/2018/hyperlinkcolor" showMasterPhAnim="0" showMasterSp="0">
+<p:notes xmlns:a="http://schemas.openxmlformats.org/drawingml/2006/main" xmlns:r="http://schemas.openxmlformats.org/officeDocument/2006/relationships" xmlns:p="http://schemas.openxmlformats.org/presentationml/2006/main" showMasterSp="0" showMasterPhAnim="0">
   <p:cSld>
     <p:spTree>
       <p:nvGrpSpPr>
-        <p:cNvPr id="17" name="Shape 17"/>
+        <p:cNvPr id="1" name="Shape 17"/>
         <p:cNvGrpSpPr/>
         <p:nvPr/>
       </p:nvGrpSpPr>
@@ -1472,9 +1503,11 @@
       <p:sp>
         <p:nvSpPr>
           <p:cNvPr id="18" name="Google Shape;18;p1:notes"/>
-          <p:cNvSpPr/>
+          <p:cNvSpPr>
+            <a:spLocks noGrp="1" noRot="1" noChangeAspect="1"/>
+          </p:cNvSpPr>
           <p:nvPr>
-            <p:ph idx="2" type="sldImg"/>
+            <p:ph type="sldImg" idx="2"/>
           </p:nvPr>
         </p:nvSpPr>
         <p:spPr>
@@ -1483,9 +1516,13 @@
             <a:ext cx="5486400" cy="3086100"/>
           </a:xfrm>
           <a:custGeom>
-            <a:rect b="b" l="l" r="r" t="t"/>
+            <a:avLst/>
+            <a:gdLst/>
+            <a:ahLst/>
+            <a:cxnLst/>
+            <a:rect l="l" t="t" r="r" b="b"/>
             <a:pathLst>
-              <a:path extrusionOk="0" h="120000" w="120000">
+              <a:path w="120000" h="120000" extrusionOk="0">
                 <a:moveTo>
                   <a:pt x="0" y="0"/>
                 </a:moveTo>
@@ -1503,23 +1540,25 @@
             </a:pathLst>
           </a:custGeom>
           <a:noFill/>
-          <a:ln cap="flat" cmpd="sng" w="12700">
+          <a:ln w="12700" cap="flat" cmpd="sng">
             <a:solidFill>
               <a:srgbClr val="000000"/>
             </a:solidFill>
             <a:prstDash val="solid"/>
             <a:round/>
-            <a:headEnd len="sm" w="sm" type="none"/>
-            <a:tailEnd len="sm" w="sm" type="none"/>
+            <a:headEnd type="none" w="sm" len="sm"/>
+            <a:tailEnd type="none" w="sm" len="sm"/>
           </a:ln>
         </p:spPr>
       </p:sp>
       <p:sp>
         <p:nvSpPr>
           <p:cNvPr id="19" name="Google Shape;19;p1:notes"/>
-          <p:cNvSpPr txBox="1"/>
+          <p:cNvSpPr txBox="1">
+            <a:spLocks noGrp="1"/>
+          </p:cNvSpPr>
           <p:nvPr>
-            <p:ph idx="1" type="body"/>
+            <p:ph type="body" idx="1"/>
           </p:nvPr>
         </p:nvSpPr>
         <p:spPr>
@@ -1536,12 +1575,12 @@
           </a:ln>
         </p:spPr>
         <p:txBody>
-          <a:bodyPr anchorCtr="0" anchor="t" bIns="45700" lIns="91425" spcFirstLastPara="1" rIns="91425" wrap="square" tIns="45700">
-            <a:noAutofit/>
-          </a:bodyPr>
-          <a:lstStyle/>
-          <a:p>
-            <a:pPr indent="0" lvl="0" marL="0" rtl="0" algn="l">
+          <a:bodyPr spcFirstLastPara="1" wrap="square" lIns="91425" tIns="45700" rIns="91425" bIns="45700" anchor="t" anchorCtr="0">
+            <a:noAutofit/>
+          </a:bodyPr>
+          <a:lstStyle/>
+          <a:p>
+            <a:pPr marL="0" lvl="0" indent="0" algn="l" rtl="0">
               <a:spcBef>
                 <a:spcPts val="0"/>
               </a:spcBef>
@@ -1561,9 +1600,11 @@
       <p:sp>
         <p:nvSpPr>
           <p:cNvPr id="20" name="Google Shape;20;p1:notes"/>
-          <p:cNvSpPr txBox="1"/>
+          <p:cNvSpPr txBox="1">
+            <a:spLocks noGrp="1"/>
+          </p:cNvSpPr>
           <p:nvPr>
-            <p:ph idx="12" type="sldNum"/>
+            <p:ph type="sldNum" idx="12"/>
           </p:nvPr>
         </p:nvSpPr>
         <p:spPr>
@@ -1580,12 +1621,12 @@
           </a:ln>
         </p:spPr>
         <p:txBody>
-          <a:bodyPr anchorCtr="0" anchor="b" bIns="45700" lIns="91425" spcFirstLastPara="1" rIns="91425" wrap="square" tIns="45700">
-            <a:noAutofit/>
-          </a:bodyPr>
-          <a:lstStyle/>
-          <a:p>
-            <a:pPr indent="0" lvl="0" marL="0" rtl="0" algn="r">
+          <a:bodyPr spcFirstLastPara="1" wrap="square" lIns="91425" tIns="45700" rIns="91425" bIns="45700" anchor="b" anchorCtr="0">
+            <a:noAutofit/>
+          </a:bodyPr>
+          <a:lstStyle/>
+          <a:p>
+            <a:pPr marL="0" lvl="0" indent="0" algn="r" rtl="0">
               <a:spcBef>
                 <a:spcPts val="0"/>
               </a:spcBef>
@@ -1596,7 +1637,7 @@
             </a:pPr>
             <a:fld id="{00000000-1234-1234-1234-123412341234}" type="slidenum">
               <a:rPr lang="en-US"/>
-              <a:t>‹#›</a:t>
+              <a:t>1</a:t>
             </a:fld>
             <a:endParaRPr/>
           </a:p>
@@ -1611,11 +1652,11 @@
 </file>
 
 <file path=ppt/notesSlides/notesSlide2.xml><?xml version="1.0" encoding="utf-8"?>
-<p:notes xmlns:a="http://schemas.openxmlformats.org/drawingml/2006/main" xmlns:r="http://schemas.openxmlformats.org/officeDocument/2006/relationships" xmlns:mc="http://schemas.openxmlformats.org/markup-compatibility/2006" xmlns:mv="urn:schemas-microsoft-com:mac:vml" xmlns:p="http://schemas.openxmlformats.org/presentationml/2006/main" xmlns:c="http://schemas.openxmlformats.org/drawingml/2006/chart" xmlns:dgm="http://schemas.openxmlformats.org/drawingml/2006/diagram" xmlns:o="urn:schemas-microsoft-com:office:office" xmlns:v="urn:schemas-microsoft-com:vml" xmlns:pvml="urn:schemas-microsoft-com:office:powerpoint" xmlns:com="http://schemas.openxmlformats.org/drawingml/2006/compatibility" xmlns:p14="http://schemas.microsoft.com/office/powerpoint/2010/main" xmlns:p15="http://schemas.microsoft.com/office/powerpoint/2012/main" xmlns:ahyp="http://schemas.microsoft.com/office/drawing/2018/hyperlinkcolor" showMasterPhAnim="0" showMasterSp="0">
+<p:notes xmlns:a="http://schemas.openxmlformats.org/drawingml/2006/main" xmlns:r="http://schemas.openxmlformats.org/officeDocument/2006/relationships" xmlns:p="http://schemas.openxmlformats.org/presentationml/2006/main" showMasterSp="0" showMasterPhAnim="0">
   <p:cSld>
     <p:spTree>
       <p:nvGrpSpPr>
-        <p:cNvPr id="36" name="Shape 36"/>
+        <p:cNvPr id="1" name="Shape 36"/>
         <p:cNvGrpSpPr/>
         <p:nvPr/>
       </p:nvGrpSpPr>
@@ -1630,9 +1671,11 @@
       <p:sp>
         <p:nvSpPr>
           <p:cNvPr id="37" name="Google Shape;37;p2:notes"/>
-          <p:cNvSpPr/>
+          <p:cNvSpPr>
+            <a:spLocks noGrp="1" noRot="1" noChangeAspect="1"/>
+          </p:cNvSpPr>
           <p:nvPr>
-            <p:ph idx="2" type="sldImg"/>
+            <p:ph type="sldImg" idx="2"/>
           </p:nvPr>
         </p:nvSpPr>
         <p:spPr>
@@ -1641,9 +1684,13 @@
             <a:ext cx="5486400" cy="3086100"/>
           </a:xfrm>
           <a:custGeom>
-            <a:rect b="b" l="l" r="r" t="t"/>
+            <a:avLst/>
+            <a:gdLst/>
+            <a:ahLst/>
+            <a:cxnLst/>
+            <a:rect l="l" t="t" r="r" b="b"/>
             <a:pathLst>
-              <a:path extrusionOk="0" h="120000" w="120000">
+              <a:path w="120000" h="120000" extrusionOk="0">
                 <a:moveTo>
                   <a:pt x="0" y="0"/>
                 </a:moveTo>
@@ -1661,23 +1708,25 @@
             </a:pathLst>
           </a:custGeom>
           <a:noFill/>
-          <a:ln cap="flat" cmpd="sng" w="12700">
+          <a:ln w="12700" cap="flat" cmpd="sng">
             <a:solidFill>
               <a:srgbClr val="000000"/>
             </a:solidFill>
             <a:prstDash val="solid"/>
             <a:round/>
-            <a:headEnd len="sm" w="sm" type="none"/>
-            <a:tailEnd len="sm" w="sm" type="none"/>
+            <a:headEnd type="none" w="sm" len="sm"/>
+            <a:tailEnd type="none" w="sm" len="sm"/>
           </a:ln>
         </p:spPr>
       </p:sp>
       <p:sp>
         <p:nvSpPr>
           <p:cNvPr id="38" name="Google Shape;38;p2:notes"/>
-          <p:cNvSpPr txBox="1"/>
+          <p:cNvSpPr txBox="1">
+            <a:spLocks noGrp="1"/>
+          </p:cNvSpPr>
           <p:nvPr>
-            <p:ph idx="1" type="body"/>
+            <p:ph type="body" idx="1"/>
           </p:nvPr>
         </p:nvSpPr>
         <p:spPr>
@@ -1694,23 +1743,20 @@
           </a:ln>
         </p:spPr>
         <p:txBody>
-          <a:bodyPr anchorCtr="0" anchor="t" bIns="45700" lIns="91425" spcFirstLastPara="1" rIns="91425" wrap="square" tIns="45700">
-            <a:noAutofit/>
-          </a:bodyPr>
-          <a:lstStyle/>
-          <a:p>
-            <a:pPr indent="0" lvl="0" marL="0" rtl="0" algn="l">
-              <a:spcBef>
-                <a:spcPts val="0"/>
-              </a:spcBef>
-              <a:spcAft>
-                <a:spcPts val="0"/>
-              </a:spcAft>
-              <a:buNone/>
-            </a:pPr>
-            <a:r>
-              <a:t/>
-            </a:r>
+          <a:bodyPr spcFirstLastPara="1" wrap="square" lIns="91425" tIns="45700" rIns="91425" bIns="45700" anchor="t" anchorCtr="0">
+            <a:noAutofit/>
+          </a:bodyPr>
+          <a:lstStyle/>
+          <a:p>
+            <a:pPr marL="0" lvl="0" indent="0" algn="l" rtl="0">
+              <a:spcBef>
+                <a:spcPts val="0"/>
+              </a:spcBef>
+              <a:spcAft>
+                <a:spcPts val="0"/>
+              </a:spcAft>
+              <a:buNone/>
+            </a:pPr>
             <a:endParaRPr/>
           </a:p>
         </p:txBody>
@@ -1718,9 +1764,11 @@
       <p:sp>
         <p:nvSpPr>
           <p:cNvPr id="39" name="Google Shape;39;p2:notes"/>
-          <p:cNvSpPr txBox="1"/>
+          <p:cNvSpPr txBox="1">
+            <a:spLocks noGrp="1"/>
+          </p:cNvSpPr>
           <p:nvPr>
-            <p:ph idx="12" type="sldNum"/>
+            <p:ph type="sldNum" idx="12"/>
           </p:nvPr>
         </p:nvSpPr>
         <p:spPr>
@@ -1737,12 +1785,12 @@
           </a:ln>
         </p:spPr>
         <p:txBody>
-          <a:bodyPr anchorCtr="0" anchor="b" bIns="45700" lIns="91425" spcFirstLastPara="1" rIns="91425" wrap="square" tIns="45700">
-            <a:noAutofit/>
-          </a:bodyPr>
-          <a:lstStyle/>
-          <a:p>
-            <a:pPr indent="0" lvl="0" marL="0" rtl="0" algn="r">
+          <a:bodyPr spcFirstLastPara="1" wrap="square" lIns="91425" tIns="45700" rIns="91425" bIns="45700" anchor="b" anchorCtr="0">
+            <a:noAutofit/>
+          </a:bodyPr>
+          <a:lstStyle/>
+          <a:p>
+            <a:pPr marL="0" lvl="0" indent="0" algn="r" rtl="0">
               <a:spcBef>
                 <a:spcPts val="0"/>
               </a:spcBef>
@@ -1753,7 +1801,7 @@
             </a:pPr>
             <a:fld id="{00000000-1234-1234-1234-123412341234}" type="slidenum">
               <a:rPr lang="en-US"/>
-              <a:t>‹#›</a:t>
+              <a:t>2</a:t>
             </a:fld>
             <a:endParaRPr/>
           </a:p>
@@ -1768,11 +1816,11 @@
 </file>
 
 <file path=ppt/notesSlides/notesSlide3.xml><?xml version="1.0" encoding="utf-8"?>
-<p:notes xmlns:a="http://schemas.openxmlformats.org/drawingml/2006/main" xmlns:r="http://schemas.openxmlformats.org/officeDocument/2006/relationships" xmlns:mc="http://schemas.openxmlformats.org/markup-compatibility/2006" xmlns:mv="urn:schemas-microsoft-com:mac:vml" xmlns:p="http://schemas.openxmlformats.org/presentationml/2006/main" xmlns:c="http://schemas.openxmlformats.org/drawingml/2006/chart" xmlns:dgm="http://schemas.openxmlformats.org/drawingml/2006/diagram" xmlns:o="urn:schemas-microsoft-com:office:office" xmlns:v="urn:schemas-microsoft-com:vml" xmlns:pvml="urn:schemas-microsoft-com:office:powerpoint" xmlns:com="http://schemas.openxmlformats.org/drawingml/2006/compatibility" xmlns:p14="http://schemas.microsoft.com/office/powerpoint/2010/main" xmlns:p15="http://schemas.microsoft.com/office/powerpoint/2012/main" xmlns:ahyp="http://schemas.microsoft.com/office/drawing/2018/hyperlinkcolor" showMasterPhAnim="0" showMasterSp="0">
+<p:notes xmlns:a="http://schemas.openxmlformats.org/drawingml/2006/main" xmlns:r="http://schemas.openxmlformats.org/officeDocument/2006/relationships" xmlns:p="http://schemas.openxmlformats.org/presentationml/2006/main" showMasterSp="0" showMasterPhAnim="0">
   <p:cSld>
     <p:spTree>
       <p:nvGrpSpPr>
-        <p:cNvPr id="65" name="Shape 65"/>
+        <p:cNvPr id="1" name="Shape 65"/>
         <p:cNvGrpSpPr/>
         <p:nvPr/>
       </p:nvGrpSpPr>
@@ -1787,9 +1835,11 @@
       <p:sp>
         <p:nvSpPr>
           <p:cNvPr id="66" name="Google Shape;66;p3:notes"/>
-          <p:cNvSpPr/>
+          <p:cNvSpPr>
+            <a:spLocks noGrp="1" noRot="1" noChangeAspect="1"/>
+          </p:cNvSpPr>
           <p:nvPr>
-            <p:ph idx="2" type="sldImg"/>
+            <p:ph type="sldImg" idx="2"/>
           </p:nvPr>
         </p:nvSpPr>
         <p:spPr>
@@ -1798,9 +1848,13 @@
             <a:ext cx="5486400" cy="3086100"/>
           </a:xfrm>
           <a:custGeom>
-            <a:rect b="b" l="l" r="r" t="t"/>
+            <a:avLst/>
+            <a:gdLst/>
+            <a:ahLst/>
+            <a:cxnLst/>
+            <a:rect l="l" t="t" r="r" b="b"/>
             <a:pathLst>
-              <a:path extrusionOk="0" h="120000" w="120000">
+              <a:path w="120000" h="120000" extrusionOk="0">
                 <a:moveTo>
                   <a:pt x="0" y="0"/>
                 </a:moveTo>
@@ -1818,23 +1872,25 @@
             </a:pathLst>
           </a:custGeom>
           <a:noFill/>
-          <a:ln cap="flat" cmpd="sng" w="12700">
+          <a:ln w="12700" cap="flat" cmpd="sng">
             <a:solidFill>
               <a:srgbClr val="000000"/>
             </a:solidFill>
             <a:prstDash val="solid"/>
             <a:round/>
-            <a:headEnd len="sm" w="sm" type="none"/>
-            <a:tailEnd len="sm" w="sm" type="none"/>
+            <a:headEnd type="none" w="sm" len="sm"/>
+            <a:tailEnd type="none" w="sm" len="sm"/>
           </a:ln>
         </p:spPr>
       </p:sp>
       <p:sp>
         <p:nvSpPr>
           <p:cNvPr id="67" name="Google Shape;67;p3:notes"/>
-          <p:cNvSpPr txBox="1"/>
+          <p:cNvSpPr txBox="1">
+            <a:spLocks noGrp="1"/>
+          </p:cNvSpPr>
           <p:nvPr>
-            <p:ph idx="1" type="body"/>
+            <p:ph type="body" idx="1"/>
           </p:nvPr>
         </p:nvSpPr>
         <p:spPr>
@@ -1851,23 +1907,20 @@
           </a:ln>
         </p:spPr>
         <p:txBody>
-          <a:bodyPr anchorCtr="0" anchor="t" bIns="45700" lIns="91425" spcFirstLastPara="1" rIns="91425" wrap="square" tIns="45700">
-            <a:noAutofit/>
-          </a:bodyPr>
-          <a:lstStyle/>
-          <a:p>
-            <a:pPr indent="0" lvl="0" marL="0" rtl="0" algn="l">
-              <a:spcBef>
-                <a:spcPts val="0"/>
-              </a:spcBef>
-              <a:spcAft>
-                <a:spcPts val="0"/>
-              </a:spcAft>
-              <a:buNone/>
-            </a:pPr>
-            <a:r>
-              <a:t/>
-            </a:r>
+          <a:bodyPr spcFirstLastPara="1" wrap="square" lIns="91425" tIns="45700" rIns="91425" bIns="45700" anchor="t" anchorCtr="0">
+            <a:noAutofit/>
+          </a:bodyPr>
+          <a:lstStyle/>
+          <a:p>
+            <a:pPr marL="0" lvl="0" indent="0" algn="l" rtl="0">
+              <a:spcBef>
+                <a:spcPts val="0"/>
+              </a:spcBef>
+              <a:spcAft>
+                <a:spcPts val="0"/>
+              </a:spcAft>
+              <a:buNone/>
+            </a:pPr>
             <a:endParaRPr/>
           </a:p>
         </p:txBody>
@@ -1875,9 +1928,11 @@
       <p:sp>
         <p:nvSpPr>
           <p:cNvPr id="68" name="Google Shape;68;p3:notes"/>
-          <p:cNvSpPr txBox="1"/>
+          <p:cNvSpPr txBox="1">
+            <a:spLocks noGrp="1"/>
+          </p:cNvSpPr>
           <p:nvPr>
-            <p:ph idx="12" type="sldNum"/>
+            <p:ph type="sldNum" idx="12"/>
           </p:nvPr>
         </p:nvSpPr>
         <p:spPr>
@@ -1894,12 +1949,12 @@
           </a:ln>
         </p:spPr>
         <p:txBody>
-          <a:bodyPr anchorCtr="0" anchor="b" bIns="45700" lIns="91425" spcFirstLastPara="1" rIns="91425" wrap="square" tIns="45700">
-            <a:noAutofit/>
-          </a:bodyPr>
-          <a:lstStyle/>
-          <a:p>
-            <a:pPr indent="0" lvl="0" marL="0" rtl="0" algn="r">
+          <a:bodyPr spcFirstLastPara="1" wrap="square" lIns="91425" tIns="45700" rIns="91425" bIns="45700" anchor="b" anchorCtr="0">
+            <a:noAutofit/>
+          </a:bodyPr>
+          <a:lstStyle/>
+          <a:p>
+            <a:pPr marL="0" lvl="0" indent="0" algn="r" rtl="0">
               <a:spcBef>
                 <a:spcPts val="0"/>
               </a:spcBef>
@@ -1910,7 +1965,7 @@
             </a:pPr>
             <a:fld id="{00000000-1234-1234-1234-123412341234}" type="slidenum">
               <a:rPr lang="en-US"/>
-              <a:t>‹#›</a:t>
+              <a:t>3</a:t>
             </a:fld>
             <a:endParaRPr/>
           </a:p>
@@ -1925,11 +1980,11 @@
 </file>
 
 <file path=ppt/notesSlides/notesSlide4.xml><?xml version="1.0" encoding="utf-8"?>
-<p:notes xmlns:a="http://schemas.openxmlformats.org/drawingml/2006/main" xmlns:r="http://schemas.openxmlformats.org/officeDocument/2006/relationships" xmlns:mc="http://schemas.openxmlformats.org/markup-compatibility/2006" xmlns:mv="urn:schemas-microsoft-com:mac:vml" xmlns:p="http://schemas.openxmlformats.org/presentationml/2006/main" xmlns:c="http://schemas.openxmlformats.org/drawingml/2006/chart" xmlns:dgm="http://schemas.openxmlformats.org/drawingml/2006/diagram" xmlns:o="urn:schemas-microsoft-com:office:office" xmlns:v="urn:schemas-microsoft-com:vml" xmlns:pvml="urn:schemas-microsoft-com:office:powerpoint" xmlns:com="http://schemas.openxmlformats.org/drawingml/2006/compatibility" xmlns:p14="http://schemas.microsoft.com/office/powerpoint/2010/main" xmlns:p15="http://schemas.microsoft.com/office/powerpoint/2012/main" xmlns:ahyp="http://schemas.microsoft.com/office/drawing/2018/hyperlinkcolor" showMasterPhAnim="0" showMasterSp="0">
+<p:notes xmlns:a="http://schemas.openxmlformats.org/drawingml/2006/main" xmlns:r="http://schemas.openxmlformats.org/officeDocument/2006/relationships" xmlns:p="http://schemas.openxmlformats.org/presentationml/2006/main" showMasterSp="0" showMasterPhAnim="0">
   <p:cSld>
     <p:spTree>
       <p:nvGrpSpPr>
-        <p:cNvPr id="100" name="Shape 100"/>
+        <p:cNvPr id="1" name="Shape 100"/>
         <p:cNvGrpSpPr/>
         <p:nvPr/>
       </p:nvGrpSpPr>
@@ -1944,9 +1999,11 @@
       <p:sp>
         <p:nvSpPr>
           <p:cNvPr id="101" name="Google Shape;101;p4:notes"/>
-          <p:cNvSpPr/>
+          <p:cNvSpPr>
+            <a:spLocks noGrp="1" noRot="1" noChangeAspect="1"/>
+          </p:cNvSpPr>
           <p:nvPr>
-            <p:ph idx="2" type="sldImg"/>
+            <p:ph type="sldImg" idx="2"/>
           </p:nvPr>
         </p:nvSpPr>
         <p:spPr>
@@ -1955,9 +2012,13 @@
             <a:ext cx="5486400" cy="3086100"/>
           </a:xfrm>
           <a:custGeom>
-            <a:rect b="b" l="l" r="r" t="t"/>
+            <a:avLst/>
+            <a:gdLst/>
+            <a:ahLst/>
+            <a:cxnLst/>
+            <a:rect l="l" t="t" r="r" b="b"/>
             <a:pathLst>
-              <a:path extrusionOk="0" h="120000" w="120000">
+              <a:path w="120000" h="120000" extrusionOk="0">
                 <a:moveTo>
                   <a:pt x="0" y="0"/>
                 </a:moveTo>
@@ -1975,23 +2036,25 @@
             </a:pathLst>
           </a:custGeom>
           <a:noFill/>
-          <a:ln cap="flat" cmpd="sng" w="12700">
+          <a:ln w="12700" cap="flat" cmpd="sng">
             <a:solidFill>
               <a:srgbClr val="000000"/>
             </a:solidFill>
             <a:prstDash val="solid"/>
             <a:round/>
-            <a:headEnd len="sm" w="sm" type="none"/>
-            <a:tailEnd len="sm" w="sm" type="none"/>
+            <a:headEnd type="none" w="sm" len="sm"/>
+            <a:tailEnd type="none" w="sm" len="sm"/>
           </a:ln>
         </p:spPr>
       </p:sp>
       <p:sp>
         <p:nvSpPr>
           <p:cNvPr id="102" name="Google Shape;102;p4:notes"/>
-          <p:cNvSpPr txBox="1"/>
+          <p:cNvSpPr txBox="1">
+            <a:spLocks noGrp="1"/>
+          </p:cNvSpPr>
           <p:nvPr>
-            <p:ph idx="1" type="body"/>
+            <p:ph type="body" idx="1"/>
           </p:nvPr>
         </p:nvSpPr>
         <p:spPr>
@@ -2008,23 +2071,20 @@
           </a:ln>
         </p:spPr>
         <p:txBody>
-          <a:bodyPr anchorCtr="0" anchor="t" bIns="45700" lIns="91425" spcFirstLastPara="1" rIns="91425" wrap="square" tIns="45700">
-            <a:noAutofit/>
-          </a:bodyPr>
-          <a:lstStyle/>
-          <a:p>
-            <a:pPr indent="0" lvl="0" marL="0" rtl="0" algn="l">
-              <a:spcBef>
-                <a:spcPts val="0"/>
-              </a:spcBef>
-              <a:spcAft>
-                <a:spcPts val="0"/>
-              </a:spcAft>
-              <a:buNone/>
-            </a:pPr>
-            <a:r>
-              <a:t/>
-            </a:r>
+          <a:bodyPr spcFirstLastPara="1" wrap="square" lIns="91425" tIns="45700" rIns="91425" bIns="45700" anchor="t" anchorCtr="0">
+            <a:noAutofit/>
+          </a:bodyPr>
+          <a:lstStyle/>
+          <a:p>
+            <a:pPr marL="0" lvl="0" indent="0" algn="l" rtl="0">
+              <a:spcBef>
+                <a:spcPts val="0"/>
+              </a:spcBef>
+              <a:spcAft>
+                <a:spcPts val="0"/>
+              </a:spcAft>
+              <a:buNone/>
+            </a:pPr>
             <a:endParaRPr/>
           </a:p>
         </p:txBody>
@@ -2032,9 +2092,11 @@
       <p:sp>
         <p:nvSpPr>
           <p:cNvPr id="103" name="Google Shape;103;p4:notes"/>
-          <p:cNvSpPr txBox="1"/>
+          <p:cNvSpPr txBox="1">
+            <a:spLocks noGrp="1"/>
+          </p:cNvSpPr>
           <p:nvPr>
-            <p:ph idx="12" type="sldNum"/>
+            <p:ph type="sldNum" idx="12"/>
           </p:nvPr>
         </p:nvSpPr>
         <p:spPr>
@@ -2051,12 +2113,12 @@
           </a:ln>
         </p:spPr>
         <p:txBody>
-          <a:bodyPr anchorCtr="0" anchor="b" bIns="45700" lIns="91425" spcFirstLastPara="1" rIns="91425" wrap="square" tIns="45700">
-            <a:noAutofit/>
-          </a:bodyPr>
-          <a:lstStyle/>
-          <a:p>
-            <a:pPr indent="0" lvl="0" marL="0" rtl="0" algn="r">
+          <a:bodyPr spcFirstLastPara="1" wrap="square" lIns="91425" tIns="45700" rIns="91425" bIns="45700" anchor="b" anchorCtr="0">
+            <a:noAutofit/>
+          </a:bodyPr>
+          <a:lstStyle/>
+          <a:p>
+            <a:pPr marL="0" lvl="0" indent="0" algn="r" rtl="0">
               <a:spcBef>
                 <a:spcPts val="0"/>
               </a:spcBef>
@@ -2067,7 +2129,7 @@
             </a:pPr>
             <a:fld id="{00000000-1234-1234-1234-123412341234}" type="slidenum">
               <a:rPr lang="en-US"/>
-              <a:t>‹#›</a:t>
+              <a:t>4</a:t>
             </a:fld>
             <a:endParaRPr/>
           </a:p>
@@ -2082,11 +2144,11 @@
 </file>
 
 <file path=ppt/notesSlides/notesSlide5.xml><?xml version="1.0" encoding="utf-8"?>
-<p:notes xmlns:a="http://schemas.openxmlformats.org/drawingml/2006/main" xmlns:r="http://schemas.openxmlformats.org/officeDocument/2006/relationships" xmlns:mc="http://schemas.openxmlformats.org/markup-compatibility/2006" xmlns:mv="urn:schemas-microsoft-com:mac:vml" xmlns:p="http://schemas.openxmlformats.org/presentationml/2006/main" xmlns:c="http://schemas.openxmlformats.org/drawingml/2006/chart" xmlns:dgm="http://schemas.openxmlformats.org/drawingml/2006/diagram" xmlns:o="urn:schemas-microsoft-com:office:office" xmlns:v="urn:schemas-microsoft-com:vml" xmlns:pvml="urn:schemas-microsoft-com:office:powerpoint" xmlns:com="http://schemas.openxmlformats.org/drawingml/2006/compatibility" xmlns:p14="http://schemas.microsoft.com/office/powerpoint/2010/main" xmlns:p15="http://schemas.microsoft.com/office/powerpoint/2012/main" xmlns:ahyp="http://schemas.microsoft.com/office/drawing/2018/hyperlinkcolor" showMasterPhAnim="0" showMasterSp="0">
+<p:notes xmlns:a="http://schemas.openxmlformats.org/drawingml/2006/main" xmlns:r="http://schemas.openxmlformats.org/officeDocument/2006/relationships" xmlns:p="http://schemas.openxmlformats.org/presentationml/2006/main" showMasterSp="0" showMasterPhAnim="0">
   <p:cSld>
     <p:spTree>
       <p:nvGrpSpPr>
-        <p:cNvPr id="116" name="Shape 116"/>
+        <p:cNvPr id="1" name="Shape 116"/>
         <p:cNvGrpSpPr/>
         <p:nvPr/>
       </p:nvGrpSpPr>
@@ -2101,9 +2163,11 @@
       <p:sp>
         <p:nvSpPr>
           <p:cNvPr id="117" name="Google Shape;117;p5:notes"/>
-          <p:cNvSpPr/>
+          <p:cNvSpPr>
+            <a:spLocks noGrp="1" noRot="1" noChangeAspect="1"/>
+          </p:cNvSpPr>
           <p:nvPr>
-            <p:ph idx="2" type="sldImg"/>
+            <p:ph type="sldImg" idx="2"/>
           </p:nvPr>
         </p:nvSpPr>
         <p:spPr>
@@ -2112,9 +2176,13 @@
             <a:ext cx="5486400" cy="3086100"/>
           </a:xfrm>
           <a:custGeom>
-            <a:rect b="b" l="l" r="r" t="t"/>
+            <a:avLst/>
+            <a:gdLst/>
+            <a:ahLst/>
+            <a:cxnLst/>
+            <a:rect l="l" t="t" r="r" b="b"/>
             <a:pathLst>
-              <a:path extrusionOk="0" h="120000" w="120000">
+              <a:path w="120000" h="120000" extrusionOk="0">
                 <a:moveTo>
                   <a:pt x="0" y="0"/>
                 </a:moveTo>
@@ -2132,23 +2200,25 @@
             </a:pathLst>
           </a:custGeom>
           <a:noFill/>
-          <a:ln cap="flat" cmpd="sng" w="12700">
+          <a:ln w="12700" cap="flat" cmpd="sng">
             <a:solidFill>
               <a:srgbClr val="000000"/>
             </a:solidFill>
             <a:prstDash val="solid"/>
             <a:round/>
-            <a:headEnd len="sm" w="sm" type="none"/>
-            <a:tailEnd len="sm" w="sm" type="none"/>
+            <a:headEnd type="none" w="sm" len="sm"/>
+            <a:tailEnd type="none" w="sm" len="sm"/>
           </a:ln>
         </p:spPr>
       </p:sp>
       <p:sp>
         <p:nvSpPr>
           <p:cNvPr id="118" name="Google Shape;118;p5:notes"/>
-          <p:cNvSpPr txBox="1"/>
+          <p:cNvSpPr txBox="1">
+            <a:spLocks noGrp="1"/>
+          </p:cNvSpPr>
           <p:nvPr>
-            <p:ph idx="1" type="body"/>
+            <p:ph type="body" idx="1"/>
           </p:nvPr>
         </p:nvSpPr>
         <p:spPr>
@@ -2165,23 +2235,20 @@
           </a:ln>
         </p:spPr>
         <p:txBody>
-          <a:bodyPr anchorCtr="0" anchor="t" bIns="45700" lIns="91425" spcFirstLastPara="1" rIns="91425" wrap="square" tIns="45700">
-            <a:noAutofit/>
-          </a:bodyPr>
-          <a:lstStyle/>
-          <a:p>
-            <a:pPr indent="0" lvl="0" marL="0" rtl="0" algn="l">
-              <a:spcBef>
-                <a:spcPts val="0"/>
-              </a:spcBef>
-              <a:spcAft>
-                <a:spcPts val="0"/>
-              </a:spcAft>
-              <a:buNone/>
-            </a:pPr>
-            <a:r>
-              <a:t/>
-            </a:r>
+          <a:bodyPr spcFirstLastPara="1" wrap="square" lIns="91425" tIns="45700" rIns="91425" bIns="45700" anchor="t" anchorCtr="0">
+            <a:noAutofit/>
+          </a:bodyPr>
+          <a:lstStyle/>
+          <a:p>
+            <a:pPr marL="0" lvl="0" indent="0" algn="l" rtl="0">
+              <a:spcBef>
+                <a:spcPts val="0"/>
+              </a:spcBef>
+              <a:spcAft>
+                <a:spcPts val="0"/>
+              </a:spcAft>
+              <a:buNone/>
+            </a:pPr>
             <a:endParaRPr/>
           </a:p>
         </p:txBody>
@@ -2189,9 +2256,11 @@
       <p:sp>
         <p:nvSpPr>
           <p:cNvPr id="119" name="Google Shape;119;p5:notes"/>
-          <p:cNvSpPr txBox="1"/>
+          <p:cNvSpPr txBox="1">
+            <a:spLocks noGrp="1"/>
+          </p:cNvSpPr>
           <p:nvPr>
-            <p:ph idx="12" type="sldNum"/>
+            <p:ph type="sldNum" idx="12"/>
           </p:nvPr>
         </p:nvSpPr>
         <p:spPr>
@@ -2208,12 +2277,12 @@
           </a:ln>
         </p:spPr>
         <p:txBody>
-          <a:bodyPr anchorCtr="0" anchor="b" bIns="45700" lIns="91425" spcFirstLastPara="1" rIns="91425" wrap="square" tIns="45700">
-            <a:noAutofit/>
-          </a:bodyPr>
-          <a:lstStyle/>
-          <a:p>
-            <a:pPr indent="0" lvl="0" marL="0" rtl="0" algn="r">
+          <a:bodyPr spcFirstLastPara="1" wrap="square" lIns="91425" tIns="45700" rIns="91425" bIns="45700" anchor="b" anchorCtr="0">
+            <a:noAutofit/>
+          </a:bodyPr>
+          <a:lstStyle/>
+          <a:p>
+            <a:pPr marL="0" lvl="0" indent="0" algn="r" rtl="0">
               <a:spcBef>
                 <a:spcPts val="0"/>
               </a:spcBef>
@@ -2224,7 +2293,7 @@
             </a:pPr>
             <a:fld id="{00000000-1234-1234-1234-123412341234}" type="slidenum">
               <a:rPr lang="en-US"/>
-              <a:t>‹#›</a:t>
+              <a:t>5</a:t>
             </a:fld>
             <a:endParaRPr/>
           </a:p>
@@ -2239,11 +2308,11 @@
 </file>
 
 <file path=ppt/notesSlides/notesSlide6.xml><?xml version="1.0" encoding="utf-8"?>
-<p:notes xmlns:a="http://schemas.openxmlformats.org/drawingml/2006/main" xmlns:r="http://schemas.openxmlformats.org/officeDocument/2006/relationships" xmlns:mc="http://schemas.openxmlformats.org/markup-compatibility/2006" xmlns:mv="urn:schemas-microsoft-com:mac:vml" xmlns:p="http://schemas.openxmlformats.org/presentationml/2006/main" xmlns:c="http://schemas.openxmlformats.org/drawingml/2006/chart" xmlns:dgm="http://schemas.openxmlformats.org/drawingml/2006/diagram" xmlns:o="urn:schemas-microsoft-com:office:office" xmlns:v="urn:schemas-microsoft-com:vml" xmlns:pvml="urn:schemas-microsoft-com:office:powerpoint" xmlns:com="http://schemas.openxmlformats.org/drawingml/2006/compatibility" xmlns:p14="http://schemas.microsoft.com/office/powerpoint/2010/main" xmlns:p15="http://schemas.microsoft.com/office/powerpoint/2012/main" xmlns:ahyp="http://schemas.microsoft.com/office/drawing/2018/hyperlinkcolor" showMasterPhAnim="0" showMasterSp="0">
+<p:notes xmlns:a="http://schemas.openxmlformats.org/drawingml/2006/main" xmlns:r="http://schemas.openxmlformats.org/officeDocument/2006/relationships" xmlns:p="http://schemas.openxmlformats.org/presentationml/2006/main" showMasterSp="0" showMasterPhAnim="0">
   <p:cSld>
     <p:spTree>
       <p:nvGrpSpPr>
-        <p:cNvPr id="141" name="Shape 141"/>
+        <p:cNvPr id="1" name="Shape 141"/>
         <p:cNvGrpSpPr/>
         <p:nvPr/>
       </p:nvGrpSpPr>
@@ -2258,9 +2327,11 @@
       <p:sp>
         <p:nvSpPr>
           <p:cNvPr id="142" name="Google Shape;142;p6:notes"/>
-          <p:cNvSpPr/>
+          <p:cNvSpPr>
+            <a:spLocks noGrp="1" noRot="1" noChangeAspect="1"/>
+          </p:cNvSpPr>
           <p:nvPr>
-            <p:ph idx="2" type="sldImg"/>
+            <p:ph type="sldImg" idx="2"/>
           </p:nvPr>
         </p:nvSpPr>
         <p:spPr>
@@ -2269,9 +2340,13 @@
             <a:ext cx="5486400" cy="3086100"/>
           </a:xfrm>
           <a:custGeom>
-            <a:rect b="b" l="l" r="r" t="t"/>
+            <a:avLst/>
+            <a:gdLst/>
+            <a:ahLst/>
+            <a:cxnLst/>
+            <a:rect l="l" t="t" r="r" b="b"/>
             <a:pathLst>
-              <a:path extrusionOk="0" h="120000" w="120000">
+              <a:path w="120000" h="120000" extrusionOk="0">
                 <a:moveTo>
                   <a:pt x="0" y="0"/>
                 </a:moveTo>
@@ -2289,23 +2364,25 @@
             </a:pathLst>
           </a:custGeom>
           <a:noFill/>
-          <a:ln cap="flat" cmpd="sng" w="12700">
+          <a:ln w="12700" cap="flat" cmpd="sng">
             <a:solidFill>
               <a:srgbClr val="000000"/>
             </a:solidFill>
             <a:prstDash val="solid"/>
             <a:round/>
-            <a:headEnd len="sm" w="sm" type="none"/>
-            <a:tailEnd len="sm" w="sm" type="none"/>
+            <a:headEnd type="none" w="sm" len="sm"/>
+            <a:tailEnd type="none" w="sm" len="sm"/>
           </a:ln>
         </p:spPr>
       </p:sp>
       <p:sp>
         <p:nvSpPr>
           <p:cNvPr id="143" name="Google Shape;143;p6:notes"/>
-          <p:cNvSpPr txBox="1"/>
+          <p:cNvSpPr txBox="1">
+            <a:spLocks noGrp="1"/>
+          </p:cNvSpPr>
           <p:nvPr>
-            <p:ph idx="1" type="body"/>
+            <p:ph type="body" idx="1"/>
           </p:nvPr>
         </p:nvSpPr>
         <p:spPr>
@@ -2322,23 +2399,20 @@
           </a:ln>
         </p:spPr>
         <p:txBody>
-          <a:bodyPr anchorCtr="0" anchor="t" bIns="45700" lIns="91425" spcFirstLastPara="1" rIns="91425" wrap="square" tIns="45700">
-            <a:noAutofit/>
-          </a:bodyPr>
-          <a:lstStyle/>
-          <a:p>
-            <a:pPr indent="0" lvl="0" marL="0" rtl="0" algn="l">
-              <a:spcBef>
-                <a:spcPts val="0"/>
-              </a:spcBef>
-              <a:spcAft>
-                <a:spcPts val="0"/>
-              </a:spcAft>
-              <a:buNone/>
-            </a:pPr>
-            <a:r>
-              <a:t/>
-            </a:r>
+          <a:bodyPr spcFirstLastPara="1" wrap="square" lIns="91425" tIns="45700" rIns="91425" bIns="45700" anchor="t" anchorCtr="0">
+            <a:noAutofit/>
+          </a:bodyPr>
+          <a:lstStyle/>
+          <a:p>
+            <a:pPr marL="0" lvl="0" indent="0" algn="l" rtl="0">
+              <a:spcBef>
+                <a:spcPts val="0"/>
+              </a:spcBef>
+              <a:spcAft>
+                <a:spcPts val="0"/>
+              </a:spcAft>
+              <a:buNone/>
+            </a:pPr>
             <a:endParaRPr/>
           </a:p>
         </p:txBody>
@@ -2346,9 +2420,11 @@
       <p:sp>
         <p:nvSpPr>
           <p:cNvPr id="144" name="Google Shape;144;p6:notes"/>
-          <p:cNvSpPr txBox="1"/>
+          <p:cNvSpPr txBox="1">
+            <a:spLocks noGrp="1"/>
+          </p:cNvSpPr>
           <p:nvPr>
-            <p:ph idx="12" type="sldNum"/>
+            <p:ph type="sldNum" idx="12"/>
           </p:nvPr>
         </p:nvSpPr>
         <p:spPr>
@@ -2365,12 +2441,12 @@
           </a:ln>
         </p:spPr>
         <p:txBody>
-          <a:bodyPr anchorCtr="0" anchor="b" bIns="45700" lIns="91425" spcFirstLastPara="1" rIns="91425" wrap="square" tIns="45700">
-            <a:noAutofit/>
-          </a:bodyPr>
-          <a:lstStyle/>
-          <a:p>
-            <a:pPr indent="0" lvl="0" marL="0" rtl="0" algn="r">
+          <a:bodyPr spcFirstLastPara="1" wrap="square" lIns="91425" tIns="45700" rIns="91425" bIns="45700" anchor="b" anchorCtr="0">
+            <a:noAutofit/>
+          </a:bodyPr>
+          <a:lstStyle/>
+          <a:p>
+            <a:pPr marL="0" lvl="0" indent="0" algn="r" rtl="0">
               <a:spcBef>
                 <a:spcPts val="0"/>
               </a:spcBef>
@@ -2381,7 +2457,7 @@
             </a:pPr>
             <a:fld id="{00000000-1234-1234-1234-123412341234}" type="slidenum">
               <a:rPr lang="en-US"/>
-              <a:t>‹#›</a:t>
+              <a:t>6</a:t>
             </a:fld>
             <a:endParaRPr/>
           </a:p>
@@ -2396,11 +2472,11 @@
 </file>
 
 <file path=ppt/notesSlides/notesSlide7.xml><?xml version="1.0" encoding="utf-8"?>
-<p:notes xmlns:a="http://schemas.openxmlformats.org/drawingml/2006/main" xmlns:r="http://schemas.openxmlformats.org/officeDocument/2006/relationships" xmlns:mc="http://schemas.openxmlformats.org/markup-compatibility/2006" xmlns:mv="urn:schemas-microsoft-com:mac:vml" xmlns:p="http://schemas.openxmlformats.org/presentationml/2006/main" xmlns:c="http://schemas.openxmlformats.org/drawingml/2006/chart" xmlns:dgm="http://schemas.openxmlformats.org/drawingml/2006/diagram" xmlns:o="urn:schemas-microsoft-com:office:office" xmlns:v="urn:schemas-microsoft-com:vml" xmlns:pvml="urn:schemas-microsoft-com:office:powerpoint" xmlns:com="http://schemas.openxmlformats.org/drawingml/2006/compatibility" xmlns:p14="http://schemas.microsoft.com/office/powerpoint/2010/main" xmlns:p15="http://schemas.microsoft.com/office/powerpoint/2012/main" xmlns:ahyp="http://schemas.microsoft.com/office/drawing/2018/hyperlinkcolor" showMasterPhAnim="0" showMasterSp="0">
+<p:notes xmlns:a="http://schemas.openxmlformats.org/drawingml/2006/main" xmlns:r="http://schemas.openxmlformats.org/officeDocument/2006/relationships" xmlns:p="http://schemas.openxmlformats.org/presentationml/2006/main" showMasterSp="0" showMasterPhAnim="0">
   <p:cSld>
     <p:spTree>
       <p:nvGrpSpPr>
-        <p:cNvPr id="158" name="Shape 158"/>
+        <p:cNvPr id="1" name="Shape 158"/>
         <p:cNvGrpSpPr/>
         <p:nvPr/>
       </p:nvGrpSpPr>
@@ -2415,9 +2491,11 @@
       <p:sp>
         <p:nvSpPr>
           <p:cNvPr id="159" name="Google Shape;159;p7:notes"/>
-          <p:cNvSpPr/>
+          <p:cNvSpPr>
+            <a:spLocks noGrp="1" noRot="1" noChangeAspect="1"/>
+          </p:cNvSpPr>
           <p:nvPr>
-            <p:ph idx="2" type="sldImg"/>
+            <p:ph type="sldImg" idx="2"/>
           </p:nvPr>
         </p:nvSpPr>
         <p:spPr>
@@ -2426,9 +2504,13 @@
             <a:ext cx="5486400" cy="3086100"/>
           </a:xfrm>
           <a:custGeom>
-            <a:rect b="b" l="l" r="r" t="t"/>
+            <a:avLst/>
+            <a:gdLst/>
+            <a:ahLst/>
+            <a:cxnLst/>
+            <a:rect l="l" t="t" r="r" b="b"/>
             <a:pathLst>
-              <a:path extrusionOk="0" h="120000" w="120000">
+              <a:path w="120000" h="120000" extrusionOk="0">
                 <a:moveTo>
                   <a:pt x="0" y="0"/>
                 </a:moveTo>
@@ -2446,23 +2528,25 @@
             </a:pathLst>
           </a:custGeom>
           <a:noFill/>
-          <a:ln cap="flat" cmpd="sng" w="12700">
+          <a:ln w="12700" cap="flat" cmpd="sng">
             <a:solidFill>
               <a:srgbClr val="000000"/>
             </a:solidFill>
             <a:prstDash val="solid"/>
             <a:round/>
-            <a:headEnd len="sm" w="sm" type="none"/>
-            <a:tailEnd len="sm" w="sm" type="none"/>
+            <a:headEnd type="none" w="sm" len="sm"/>
+            <a:tailEnd type="none" w="sm" len="sm"/>
           </a:ln>
         </p:spPr>
       </p:sp>
       <p:sp>
         <p:nvSpPr>
           <p:cNvPr id="160" name="Google Shape;160;p7:notes"/>
-          <p:cNvSpPr txBox="1"/>
+          <p:cNvSpPr txBox="1">
+            <a:spLocks noGrp="1"/>
+          </p:cNvSpPr>
           <p:nvPr>
-            <p:ph idx="1" type="body"/>
+            <p:ph type="body" idx="1"/>
           </p:nvPr>
         </p:nvSpPr>
         <p:spPr>
@@ -2479,33 +2563,32 @@
           </a:ln>
         </p:spPr>
         <p:txBody>
-          <a:bodyPr anchorCtr="0" anchor="t" bIns="45700" lIns="91425" spcFirstLastPara="1" rIns="91425" wrap="square" tIns="45700">
-            <a:noAutofit/>
-          </a:bodyPr>
-          <a:lstStyle/>
-          <a:p>
-            <a:pPr indent="0" lvl="0" marL="0" rtl="0" algn="l">
-              <a:spcBef>
-                <a:spcPts val="0"/>
-              </a:spcBef>
-              <a:spcAft>
-                <a:spcPts val="0"/>
-              </a:spcAft>
-              <a:buNone/>
-            </a:pPr>
-            <a:r>
-              <a:t/>
-            </a:r>
-            <a:endParaRPr/>
+          <a:bodyPr spcFirstLastPara="1" wrap="square" lIns="91425" tIns="45700" rIns="91425" bIns="45700" anchor="t" anchorCtr="0">
+            <a:noAutofit/>
+          </a:bodyPr>
+          <a:lstStyle/>
+          <a:p>
+            <a:pPr marL="0" lvl="0" indent="0" algn="l" rtl="0">
+              <a:spcBef>
+                <a:spcPts val="0"/>
+              </a:spcBef>
+              <a:spcAft>
+                <a:spcPts val="0"/>
+              </a:spcAft>
+              <a:buNone/>
+            </a:pPr>
+            <a:endParaRPr dirty="0"/>
           </a:p>
         </p:txBody>
       </p:sp>
       <p:sp>
         <p:nvSpPr>
           <p:cNvPr id="161" name="Google Shape;161;p7:notes"/>
-          <p:cNvSpPr txBox="1"/>
+          <p:cNvSpPr txBox="1">
+            <a:spLocks noGrp="1"/>
+          </p:cNvSpPr>
           <p:nvPr>
-            <p:ph idx="12" type="sldNum"/>
+            <p:ph type="sldNum" idx="12"/>
           </p:nvPr>
         </p:nvSpPr>
         <p:spPr>
@@ -2522,12 +2605,12 @@
           </a:ln>
         </p:spPr>
         <p:txBody>
-          <a:bodyPr anchorCtr="0" anchor="b" bIns="45700" lIns="91425" spcFirstLastPara="1" rIns="91425" wrap="square" tIns="45700">
-            <a:noAutofit/>
-          </a:bodyPr>
-          <a:lstStyle/>
-          <a:p>
-            <a:pPr indent="0" lvl="0" marL="0" rtl="0" algn="r">
+          <a:bodyPr spcFirstLastPara="1" wrap="square" lIns="91425" tIns="45700" rIns="91425" bIns="45700" anchor="b" anchorCtr="0">
+            <a:noAutofit/>
+          </a:bodyPr>
+          <a:lstStyle/>
+          <a:p>
+            <a:pPr marL="0" lvl="0" indent="0" algn="r" rtl="0">
               <a:spcBef>
                 <a:spcPts val="0"/>
               </a:spcBef>
@@ -2538,7 +2621,7 @@
             </a:pPr>
             <a:fld id="{00000000-1234-1234-1234-123412341234}" type="slidenum">
               <a:rPr lang="en-US"/>
-              <a:t>‹#›</a:t>
+              <a:t>7</a:t>
             </a:fld>
             <a:endParaRPr/>
           </a:p>
@@ -2553,18 +2636,19 @@
 </file>
 
 <file path=ppt/slideLayouts/slideLayout1.xml><?xml version="1.0" encoding="utf-8"?>
-<p:sldLayout xmlns:a="http://schemas.openxmlformats.org/drawingml/2006/main" xmlns:r="http://schemas.openxmlformats.org/officeDocument/2006/relationships" xmlns:mc="http://schemas.openxmlformats.org/markup-compatibility/2006" xmlns:mv="urn:schemas-microsoft-com:mac:vml" xmlns:p="http://schemas.openxmlformats.org/presentationml/2006/main" xmlns:c="http://schemas.openxmlformats.org/drawingml/2006/chart" xmlns:dgm="http://schemas.openxmlformats.org/drawingml/2006/diagram" xmlns:o="urn:schemas-microsoft-com:office:office" xmlns:v="urn:schemas-microsoft-com:vml" xmlns:pvml="urn:schemas-microsoft-com:office:powerpoint" xmlns:com="http://schemas.openxmlformats.org/drawingml/2006/compatibility" xmlns:p14="http://schemas.microsoft.com/office/powerpoint/2010/main" xmlns:p15="http://schemas.microsoft.com/office/powerpoint/2012/main" xmlns:ahyp="http://schemas.microsoft.com/office/drawing/2018/hyperlinkcolor" matchingName="Slide master 1">
+<p:sldLayout xmlns:a="http://schemas.openxmlformats.org/drawingml/2006/main" xmlns:r="http://schemas.openxmlformats.org/officeDocument/2006/relationships" xmlns:p="http://schemas.openxmlformats.org/presentationml/2006/main" matchingName="Slide master 1">
   <p:cSld name="Slide master 1">
     <p:bg>
       <p:bgPr>
         <a:solidFill>
           <a:srgbClr val="050505"/>
         </a:solidFill>
+        <a:effectLst/>
       </p:bgPr>
     </p:bg>
     <p:spTree>
       <p:nvGrpSpPr>
-        <p:cNvPr id="10" name="Shape 10"/>
+        <p:cNvPr id="1" name="Shape 10"/>
         <p:cNvGrpSpPr/>
         <p:nvPr/>
       </p:nvGrpSpPr>
@@ -2578,7 +2662,7 @@
       </p:grpSpPr>
       <p:pic>
         <p:nvPicPr>
-          <p:cNvPr descr="preencoded.png" id="11" name="Google Shape;11;p2"/>
+          <p:cNvPr id="11" name="Google Shape;11;p2" descr="preencoded.png"/>
           <p:cNvPicPr preferRelativeResize="0"/>
           <p:nvPr/>
         </p:nvPicPr>
@@ -2586,7 +2670,7 @@
           <a:blip r:embed="rId2">
             <a:alphaModFix/>
           </a:blip>
-          <a:srcRect b="0" l="0" r="0" t="0"/>
+          <a:srcRect/>
           <a:stretch/>
         </p:blipFill>
         <p:spPr>
@@ -2605,7 +2689,7 @@
       </p:pic>
       <p:pic>
         <p:nvPicPr>
-          <p:cNvPr descr="preencoded.png" id="12" name="Google Shape;12;p2"/>
+          <p:cNvPr id="12" name="Google Shape;12;p2" descr="preencoded.png"/>
           <p:cNvPicPr preferRelativeResize="0"/>
           <p:nvPr/>
         </p:nvPicPr>
@@ -2613,7 +2697,7 @@
           <a:blip r:embed="rId3">
             <a:alphaModFix/>
           </a:blip>
-          <a:srcRect b="0" l="0" r="0" t="0"/>
+          <a:srcRect/>
           <a:stretch/>
         </p:blipFill>
         <p:spPr>
@@ -2632,7 +2716,7 @@
       </p:pic>
       <p:pic>
         <p:nvPicPr>
-          <p:cNvPr descr="preencoded.png" id="13" name="Google Shape;13;p2">
+          <p:cNvPr id="13" name="Google Shape;13;p2" descr="preencoded.png">
             <a:hlinkClick r:id="rId4"/>
           </p:cNvPr>
           <p:cNvPicPr preferRelativeResize="0"/>
@@ -2642,7 +2726,7 @@
           <a:blip r:embed="rId5">
             <a:alphaModFix/>
           </a:blip>
-          <a:srcRect b="0" l="0" r="0" t="0"/>
+          <a:srcRect/>
           <a:stretch/>
         </p:blipFill>
         <p:spPr>
@@ -2668,18 +2752,19 @@
 </file>
 
 <file path=ppt/slideLayouts/slideLayout2.xml><?xml version="1.0" encoding="utf-8"?>
-<p:sldLayout xmlns:a="http://schemas.openxmlformats.org/drawingml/2006/main" xmlns:r="http://schemas.openxmlformats.org/officeDocument/2006/relationships" xmlns:mc="http://schemas.openxmlformats.org/markup-compatibility/2006" xmlns:mv="urn:schemas-microsoft-com:mac:vml" xmlns:p="http://schemas.openxmlformats.org/presentationml/2006/main" xmlns:c="http://schemas.openxmlformats.org/drawingml/2006/chart" xmlns:dgm="http://schemas.openxmlformats.org/drawingml/2006/diagram" xmlns:o="urn:schemas-microsoft-com:office:office" xmlns:v="urn:schemas-microsoft-com:vml" xmlns:pvml="urn:schemas-microsoft-com:office:powerpoint" xmlns:com="http://schemas.openxmlformats.org/drawingml/2006/compatibility" xmlns:p14="http://schemas.microsoft.com/office/powerpoint/2010/main" xmlns:p15="http://schemas.microsoft.com/office/powerpoint/2012/main" xmlns:ahyp="http://schemas.microsoft.com/office/drawing/2018/hyperlinkcolor" matchingName="Slide master 2">
+<p:sldLayout xmlns:a="http://schemas.openxmlformats.org/drawingml/2006/main" xmlns:r="http://schemas.openxmlformats.org/officeDocument/2006/relationships" xmlns:p="http://schemas.openxmlformats.org/presentationml/2006/main" matchingName="Slide master 2">
   <p:cSld name="Slide master 2">
     <p:bg>
       <p:bgPr>
         <a:solidFill>
           <a:srgbClr val="050505"/>
         </a:solidFill>
+        <a:effectLst/>
       </p:bgPr>
     </p:bg>
     <p:spTree>
       <p:nvGrpSpPr>
-        <p:cNvPr id="14" name="Shape 14"/>
+        <p:cNvPr id="1" name="Shape 14"/>
         <p:cNvGrpSpPr/>
         <p:nvPr/>
       </p:nvGrpSpPr>
@@ -2693,7 +2778,7 @@
       </p:grpSpPr>
       <p:pic>
         <p:nvPicPr>
-          <p:cNvPr descr="preencoded.png" id="15" name="Google Shape;15;p3">
+          <p:cNvPr id="15" name="Google Shape;15;p3" descr="preencoded.png">
             <a:hlinkClick r:id="rId2"/>
           </p:cNvPr>
           <p:cNvPicPr preferRelativeResize="0"/>
@@ -2703,7 +2788,7 @@
           <a:blip r:embed="rId3">
             <a:alphaModFix/>
           </a:blip>
-          <a:srcRect b="0" l="0" r="0" t="0"/>
+          <a:srcRect/>
           <a:stretch/>
         </p:blipFill>
         <p:spPr>
@@ -2729,18 +2814,19 @@
 </file>
 
 <file path=ppt/slideLayouts/slideLayout3.xml><?xml version="1.0" encoding="utf-8"?>
-<p:sldLayout xmlns:a="http://schemas.openxmlformats.org/drawingml/2006/main" xmlns:r="http://schemas.openxmlformats.org/officeDocument/2006/relationships" xmlns:mc="http://schemas.openxmlformats.org/markup-compatibility/2006" xmlns:mv="urn:schemas-microsoft-com:mac:vml" xmlns:p="http://schemas.openxmlformats.org/presentationml/2006/main" xmlns:c="http://schemas.openxmlformats.org/drawingml/2006/chart" xmlns:dgm="http://schemas.openxmlformats.org/drawingml/2006/diagram" xmlns:o="urn:schemas-microsoft-com:office:office" xmlns:v="urn:schemas-microsoft-com:vml" xmlns:pvml="urn:schemas-microsoft-com:office:powerpoint" xmlns:com="http://schemas.openxmlformats.org/drawingml/2006/compatibility" xmlns:p14="http://schemas.microsoft.com/office/powerpoint/2010/main" xmlns:p15="http://schemas.microsoft.com/office/powerpoint/2012/main" xmlns:ahyp="http://schemas.microsoft.com/office/drawing/2018/hyperlinkcolor" matchingName="DEFAULT">
+<p:sldLayout xmlns:a="http://schemas.openxmlformats.org/drawingml/2006/main" xmlns:r="http://schemas.openxmlformats.org/officeDocument/2006/relationships" xmlns:p="http://schemas.openxmlformats.org/presentationml/2006/main" matchingName="DEFAULT">
   <p:cSld name="DEFAULT">
     <p:bg>
       <p:bgPr>
         <a:solidFill>
           <a:schemeClr val="lt1"/>
         </a:solidFill>
+        <a:effectLst/>
       </p:bgPr>
     </p:bg>
     <p:spTree>
       <p:nvGrpSpPr>
-        <p:cNvPr id="16" name="Shape 16"/>
+        <p:cNvPr id="1" name="Shape 16"/>
         <p:cNvGrpSpPr/>
         <p:nvPr/>
       </p:nvGrpSpPr>
@@ -2761,11 +2847,16 @@
 </file>
 
 <file path=ppt/slideMasters/slideMaster1.xml><?xml version="1.0" encoding="utf-8"?>
-<p:sldMaster xmlns:a="http://schemas.openxmlformats.org/drawingml/2006/main" xmlns:r="http://schemas.openxmlformats.org/officeDocument/2006/relationships" xmlns:mc="http://schemas.openxmlformats.org/markup-compatibility/2006" xmlns:mv="urn:schemas-microsoft-com:mac:vml" xmlns:p="http://schemas.openxmlformats.org/presentationml/2006/main" xmlns:c="http://schemas.openxmlformats.org/drawingml/2006/chart" xmlns:dgm="http://schemas.openxmlformats.org/drawingml/2006/diagram" xmlns:o="urn:schemas-microsoft-com:office:office" xmlns:v="urn:schemas-microsoft-com:vml" xmlns:pvml="urn:schemas-microsoft-com:office:powerpoint" xmlns:com="http://schemas.openxmlformats.org/drawingml/2006/compatibility" xmlns:p14="http://schemas.microsoft.com/office/powerpoint/2010/main" xmlns:p15="http://schemas.microsoft.com/office/powerpoint/2012/main" xmlns:ahyp="http://schemas.microsoft.com/office/drawing/2018/hyperlinkcolor">
+<p:sldMaster xmlns:a="http://schemas.openxmlformats.org/drawingml/2006/main" xmlns:r="http://schemas.openxmlformats.org/officeDocument/2006/relationships" xmlns:p="http://schemas.openxmlformats.org/presentationml/2006/main">
   <p:cSld>
+    <p:bg>
+      <p:bgRef idx="1001">
+        <a:schemeClr val="bg1"/>
+      </p:bgRef>
+    </p:bg>
     <p:spTree>
       <p:nvGrpSpPr>
-        <p:cNvPr id="9" name="Shape 9"/>
+        <p:cNvPr id="1" name="Shape 9"/>
         <p:cNvGrpSpPr/>
         <p:nvPr/>
       </p:nvGrpSpPr>
@@ -2779,16 +2870,16 @@
       </p:grpSpPr>
     </p:spTree>
   </p:cSld>
-  <p:clrMap accent1="accent1" accent2="accent2" accent3="accent3" accent4="accent4" accent5="accent5" accent6="accent6" bg1="lt1" bg2="dk2" tx1="dk1" tx2="lt2" folHlink="folHlink" hlink="hlink"/>
+  <p:clrMap bg1="lt1" tx1="dk1" bg2="dk2" tx2="lt2" accent1="accent1" accent2="accent2" accent3="accent3" accent4="accent4" accent5="accent5" accent6="accent6" hlink="hlink" folHlink="folHlink"/>
   <p:sldLayoutIdLst>
     <p:sldLayoutId id="2147483648" r:id="rId1"/>
     <p:sldLayoutId id="2147483649" r:id="rId2"/>
     <p:sldLayoutId id="2147483650" r:id="rId3"/>
   </p:sldLayoutIdLst>
-  <p:hf dt="0" ftr="0" hdr="0" sldNum="0"/>
+  <p:hf sldNum="0" hdr="0" ftr="0" dt="0"/>
   <p:txStyles>
     <p:titleStyle>
-      <a:defPPr lvl="0" marR="0" rtl="0" algn="l">
+      <a:defPPr marR="0" lvl="0" algn="l" rtl="0">
         <a:lnSpc>
           <a:spcPct val="100000"/>
         </a:lnSpc>
@@ -2799,7 +2890,7 @@
           <a:spcPts val="0"/>
         </a:spcAft>
       </a:defPPr>
-      <a:lvl1pPr lvl="0" marR="0" rtl="0" algn="l">
+      <a:lvl1pPr marR="0" lvl="0" algn="l" rtl="0">
         <a:lnSpc>
           <a:spcPct val="100000"/>
         </a:lnSpc>
@@ -2813,7 +2904,7 @@
           <a:srgbClr val="000000"/>
         </a:buClr>
         <a:buFont typeface="Arial"/>
-        <a:defRPr b="0" i="0" spc="0" sz="1400" u="none" cap="none" strike="noStrike">
+        <a:defRPr sz="1400" b="0" i="0" u="none" strike="noStrike" cap="none" spc="0">
           <a:solidFill>
             <a:srgbClr val="000000"/>
           </a:solidFill>
@@ -2823,7 +2914,7 @@
           <a:sym typeface="Arial"/>
         </a:defRPr>
       </a:lvl1pPr>
-      <a:lvl2pPr lvl="1" marR="0" rtl="0" algn="l">
+      <a:lvl2pPr marR="0" lvl="1" algn="l" rtl="0">
         <a:lnSpc>
           <a:spcPct val="100000"/>
         </a:lnSpc>
@@ -2837,7 +2928,7 @@
           <a:srgbClr val="000000"/>
         </a:buClr>
         <a:buFont typeface="Arial"/>
-        <a:defRPr b="0" i="0" spc="0" sz="1400" u="none" cap="none" strike="noStrike">
+        <a:defRPr sz="1400" b="0" i="0" u="none" strike="noStrike" cap="none" spc="0">
           <a:solidFill>
             <a:srgbClr val="000000"/>
           </a:solidFill>
@@ -2847,7 +2938,7 @@
           <a:sym typeface="Arial"/>
         </a:defRPr>
       </a:lvl2pPr>
-      <a:lvl3pPr lvl="2" marR="0" rtl="0" algn="l">
+      <a:lvl3pPr marR="0" lvl="2" algn="l" rtl="0">
         <a:lnSpc>
           <a:spcPct val="100000"/>
         </a:lnSpc>
@@ -2861,7 +2952,7 @@
           <a:srgbClr val="000000"/>
         </a:buClr>
         <a:buFont typeface="Arial"/>
-        <a:defRPr b="0" i="0" spc="0" sz="1400" u="none" cap="none" strike="noStrike">
+        <a:defRPr sz="1400" b="0" i="0" u="none" strike="noStrike" cap="none" spc="0">
           <a:solidFill>
             <a:srgbClr val="000000"/>
           </a:solidFill>
@@ -2871,7 +2962,7 @@
           <a:sym typeface="Arial"/>
         </a:defRPr>
       </a:lvl3pPr>
-      <a:lvl4pPr lvl="3" marR="0" rtl="0" algn="l">
+      <a:lvl4pPr marR="0" lvl="3" algn="l" rtl="0">
         <a:lnSpc>
           <a:spcPct val="100000"/>
         </a:lnSpc>
@@ -2885,7 +2976,7 @@
           <a:srgbClr val="000000"/>
         </a:buClr>
         <a:buFont typeface="Arial"/>
-        <a:defRPr b="0" i="0" spc="0" sz="1400" u="none" cap="none" strike="noStrike">
+        <a:defRPr sz="1400" b="0" i="0" u="none" strike="noStrike" cap="none" spc="0">
           <a:solidFill>
             <a:srgbClr val="000000"/>
           </a:solidFill>
@@ -2895,7 +2986,7 @@
           <a:sym typeface="Arial"/>
         </a:defRPr>
       </a:lvl4pPr>
-      <a:lvl5pPr lvl="4" marR="0" rtl="0" algn="l">
+      <a:lvl5pPr marR="0" lvl="4" algn="l" rtl="0">
         <a:lnSpc>
           <a:spcPct val="100000"/>
         </a:lnSpc>
@@ -2909,7 +3000,7 @@
           <a:srgbClr val="000000"/>
         </a:buClr>
         <a:buFont typeface="Arial"/>
-        <a:defRPr b="0" i="0" spc="0" sz="1400" u="none" cap="none" strike="noStrike">
+        <a:defRPr sz="1400" b="0" i="0" u="none" strike="noStrike" cap="none" spc="0">
           <a:solidFill>
             <a:srgbClr val="000000"/>
           </a:solidFill>
@@ -2919,7 +3010,7 @@
           <a:sym typeface="Arial"/>
         </a:defRPr>
       </a:lvl5pPr>
-      <a:lvl6pPr lvl="5" marR="0" rtl="0" algn="l">
+      <a:lvl6pPr marR="0" lvl="5" algn="l" rtl="0">
         <a:lnSpc>
           <a:spcPct val="100000"/>
         </a:lnSpc>
@@ -2933,7 +3024,7 @@
           <a:srgbClr val="000000"/>
         </a:buClr>
         <a:buFont typeface="Arial"/>
-        <a:defRPr b="0" i="0" spc="0" sz="1400" u="none" cap="none" strike="noStrike">
+        <a:defRPr sz="1400" b="0" i="0" u="none" strike="noStrike" cap="none" spc="0">
           <a:solidFill>
             <a:srgbClr val="000000"/>
           </a:solidFill>
@@ -2943,7 +3034,7 @@
           <a:sym typeface="Arial"/>
         </a:defRPr>
       </a:lvl6pPr>
-      <a:lvl7pPr lvl="6" marR="0" rtl="0" algn="l">
+      <a:lvl7pPr marR="0" lvl="6" algn="l" rtl="0">
         <a:lnSpc>
           <a:spcPct val="100000"/>
         </a:lnSpc>
@@ -2957,7 +3048,7 @@
           <a:srgbClr val="000000"/>
         </a:buClr>
         <a:buFont typeface="Arial"/>
-        <a:defRPr b="0" i="0" spc="0" sz="1400" u="none" cap="none" strike="noStrike">
+        <a:defRPr sz="1400" b="0" i="0" u="none" strike="noStrike" cap="none" spc="0">
           <a:solidFill>
             <a:srgbClr val="000000"/>
           </a:solidFill>
@@ -2967,7 +3058,7 @@
           <a:sym typeface="Arial"/>
         </a:defRPr>
       </a:lvl7pPr>
-      <a:lvl8pPr lvl="7" marR="0" rtl="0" algn="l">
+      <a:lvl8pPr marR="0" lvl="7" algn="l" rtl="0">
         <a:lnSpc>
           <a:spcPct val="100000"/>
         </a:lnSpc>
@@ -2981,7 +3072,7 @@
           <a:srgbClr val="000000"/>
         </a:buClr>
         <a:buFont typeface="Arial"/>
-        <a:defRPr b="0" i="0" spc="0" sz="1400" u="none" cap="none" strike="noStrike">
+        <a:defRPr sz="1400" b="0" i="0" u="none" strike="noStrike" cap="none" spc="0">
           <a:solidFill>
             <a:srgbClr val="000000"/>
           </a:solidFill>
@@ -2991,7 +3082,7 @@
           <a:sym typeface="Arial"/>
         </a:defRPr>
       </a:lvl8pPr>
-      <a:lvl9pPr lvl="8" marR="0" rtl="0" algn="l">
+      <a:lvl9pPr marR="0" lvl="8" algn="l" rtl="0">
         <a:lnSpc>
           <a:spcPct val="100000"/>
         </a:lnSpc>
@@ -3005,7 +3096,7 @@
           <a:srgbClr val="000000"/>
         </a:buClr>
         <a:buFont typeface="Arial"/>
-        <a:defRPr b="0" i="0" spc="0" sz="1400" u="none" cap="none" strike="noStrike">
+        <a:defRPr sz="1400" b="0" i="0" u="none" strike="noStrike" cap="none" spc="0">
           <a:solidFill>
             <a:srgbClr val="000000"/>
           </a:solidFill>
@@ -3017,7 +3108,7 @@
       </a:lvl9pPr>
     </p:titleStyle>
     <p:bodyStyle>
-      <a:defPPr lvl="0" marR="0" rtl="0" algn="l">
+      <a:defPPr marR="0" lvl="0" algn="l" rtl="0">
         <a:lnSpc>
           <a:spcPct val="100000"/>
         </a:lnSpc>
@@ -3028,7 +3119,7 @@
           <a:spcPts val="0"/>
         </a:spcAft>
       </a:defPPr>
-      <a:lvl1pPr lvl="0" marR="0" rtl="0" algn="l">
+      <a:lvl1pPr marR="0" lvl="0" algn="l" rtl="0">
         <a:lnSpc>
           <a:spcPct val="100000"/>
         </a:lnSpc>
@@ -3042,7 +3133,7 @@
           <a:srgbClr val="000000"/>
         </a:buClr>
         <a:buFont typeface="Arial"/>
-        <a:defRPr b="0" i="0" spc="0" sz="1400" u="none" cap="none" strike="noStrike">
+        <a:defRPr sz="1400" b="0" i="0" u="none" strike="noStrike" cap="none" spc="0">
           <a:solidFill>
             <a:srgbClr val="000000"/>
           </a:solidFill>
@@ -3052,7 +3143,7 @@
           <a:sym typeface="Arial"/>
         </a:defRPr>
       </a:lvl1pPr>
-      <a:lvl2pPr lvl="1" marR="0" rtl="0" algn="l">
+      <a:lvl2pPr marR="0" lvl="1" algn="l" rtl="0">
         <a:lnSpc>
           <a:spcPct val="100000"/>
         </a:lnSpc>
@@ -3066,7 +3157,7 @@
           <a:srgbClr val="000000"/>
         </a:buClr>
         <a:buFont typeface="Arial"/>
-        <a:defRPr b="0" i="0" spc="0" sz="1400" u="none" cap="none" strike="noStrike">
+        <a:defRPr sz="1400" b="0" i="0" u="none" strike="noStrike" cap="none" spc="0">
           <a:solidFill>
             <a:srgbClr val="000000"/>
           </a:solidFill>
@@ -3076,7 +3167,7 @@
           <a:sym typeface="Arial"/>
         </a:defRPr>
       </a:lvl2pPr>
-      <a:lvl3pPr lvl="2" marR="0" rtl="0" algn="l">
+      <a:lvl3pPr marR="0" lvl="2" algn="l" rtl="0">
         <a:lnSpc>
           <a:spcPct val="100000"/>
         </a:lnSpc>
@@ -3090,7 +3181,7 @@
           <a:srgbClr val="000000"/>
         </a:buClr>
         <a:buFont typeface="Arial"/>
-        <a:defRPr b="0" i="0" spc="0" sz="1400" u="none" cap="none" strike="noStrike">
+        <a:defRPr sz="1400" b="0" i="0" u="none" strike="noStrike" cap="none" spc="0">
           <a:solidFill>
             <a:srgbClr val="000000"/>
           </a:solidFill>
@@ -3100,7 +3191,7 @@
           <a:sym typeface="Arial"/>
         </a:defRPr>
       </a:lvl3pPr>
-      <a:lvl4pPr lvl="3" marR="0" rtl="0" algn="l">
+      <a:lvl4pPr marR="0" lvl="3" algn="l" rtl="0">
         <a:lnSpc>
           <a:spcPct val="100000"/>
         </a:lnSpc>
@@ -3114,7 +3205,7 @@
           <a:srgbClr val="000000"/>
         </a:buClr>
         <a:buFont typeface="Arial"/>
-        <a:defRPr b="0" i="0" spc="0" sz="1400" u="none" cap="none" strike="noStrike">
+        <a:defRPr sz="1400" b="0" i="0" u="none" strike="noStrike" cap="none" spc="0">
           <a:solidFill>
             <a:srgbClr val="000000"/>
           </a:solidFill>
@@ -3124,7 +3215,7 @@
           <a:sym typeface="Arial"/>
         </a:defRPr>
       </a:lvl4pPr>
-      <a:lvl5pPr lvl="4" marR="0" rtl="0" algn="l">
+      <a:lvl5pPr marR="0" lvl="4" algn="l" rtl="0">
         <a:lnSpc>
           <a:spcPct val="100000"/>
         </a:lnSpc>
@@ -3138,7 +3229,7 @@
           <a:srgbClr val="000000"/>
         </a:buClr>
         <a:buFont typeface="Arial"/>
-        <a:defRPr b="0" i="0" spc="0" sz="1400" u="none" cap="none" strike="noStrike">
+        <a:defRPr sz="1400" b="0" i="0" u="none" strike="noStrike" cap="none" spc="0">
           <a:solidFill>
             <a:srgbClr val="000000"/>
           </a:solidFill>
@@ -3148,7 +3239,7 @@
           <a:sym typeface="Arial"/>
         </a:defRPr>
       </a:lvl5pPr>
-      <a:lvl6pPr lvl="5" marR="0" rtl="0" algn="l">
+      <a:lvl6pPr marR="0" lvl="5" algn="l" rtl="0">
         <a:lnSpc>
           <a:spcPct val="100000"/>
         </a:lnSpc>
@@ -3162,7 +3253,7 @@
           <a:srgbClr val="000000"/>
         </a:buClr>
         <a:buFont typeface="Arial"/>
-        <a:defRPr b="0" i="0" spc="0" sz="1400" u="none" cap="none" strike="noStrike">
+        <a:defRPr sz="1400" b="0" i="0" u="none" strike="noStrike" cap="none" spc="0">
           <a:solidFill>
             <a:srgbClr val="000000"/>
           </a:solidFill>
@@ -3172,7 +3263,7 @@
           <a:sym typeface="Arial"/>
         </a:defRPr>
       </a:lvl6pPr>
-      <a:lvl7pPr lvl="6" marR="0" rtl="0" algn="l">
+      <a:lvl7pPr marR="0" lvl="6" algn="l" rtl="0">
         <a:lnSpc>
           <a:spcPct val="100000"/>
         </a:lnSpc>
@@ -3186,7 +3277,7 @@
           <a:srgbClr val="000000"/>
         </a:buClr>
         <a:buFont typeface="Arial"/>
-        <a:defRPr b="0" i="0" spc="0" sz="1400" u="none" cap="none" strike="noStrike">
+        <a:defRPr sz="1400" b="0" i="0" u="none" strike="noStrike" cap="none" spc="0">
           <a:solidFill>
             <a:srgbClr val="000000"/>
           </a:solidFill>
@@ -3196,7 +3287,7 @@
           <a:sym typeface="Arial"/>
         </a:defRPr>
       </a:lvl7pPr>
-      <a:lvl8pPr lvl="7" marR="0" rtl="0" algn="l">
+      <a:lvl8pPr marR="0" lvl="7" algn="l" rtl="0">
         <a:lnSpc>
           <a:spcPct val="100000"/>
         </a:lnSpc>
@@ -3210,7 +3301,7 @@
           <a:srgbClr val="000000"/>
         </a:buClr>
         <a:buFont typeface="Arial"/>
-        <a:defRPr b="0" i="0" spc="0" sz="1400" u="none" cap="none" strike="noStrike">
+        <a:defRPr sz="1400" b="0" i="0" u="none" strike="noStrike" cap="none" spc="0">
           <a:solidFill>
             <a:srgbClr val="000000"/>
           </a:solidFill>
@@ -3220,7 +3311,7 @@
           <a:sym typeface="Arial"/>
         </a:defRPr>
       </a:lvl8pPr>
-      <a:lvl9pPr lvl="8" marR="0" rtl="0" algn="l">
+      <a:lvl9pPr marR="0" lvl="8" algn="l" rtl="0">
         <a:lnSpc>
           <a:spcPct val="100000"/>
         </a:lnSpc>
@@ -3234,7 +3325,7 @@
           <a:srgbClr val="000000"/>
         </a:buClr>
         <a:buFont typeface="Arial"/>
-        <a:defRPr b="0" i="0" spc="0" sz="1400" u="none" cap="none" strike="noStrike">
+        <a:defRPr sz="1400" b="0" i="0" u="none" strike="noStrike" cap="none" spc="0">
           <a:solidFill>
             <a:srgbClr val="000000"/>
           </a:solidFill>
@@ -3246,7 +3337,7 @@
       </a:lvl9pPr>
     </p:bodyStyle>
     <p:otherStyle>
-      <a:defPPr lvl="0" marR="0" rtl="0" algn="l">
+      <a:defPPr marR="0" lvl="0" algn="l" rtl="0">
         <a:lnSpc>
           <a:spcPct val="100000"/>
         </a:lnSpc>
@@ -3257,7 +3348,7 @@
           <a:spcPts val="0"/>
         </a:spcAft>
       </a:defPPr>
-      <a:lvl1pPr lvl="0" marR="0" rtl="0" algn="l">
+      <a:lvl1pPr marR="0" lvl="0" algn="l" rtl="0">
         <a:lnSpc>
           <a:spcPct val="100000"/>
         </a:lnSpc>
@@ -3271,7 +3362,7 @@
           <a:srgbClr val="000000"/>
         </a:buClr>
         <a:buFont typeface="Arial"/>
-        <a:defRPr b="0" i="0" spc="0" sz="1400" u="none" cap="none" strike="noStrike">
+        <a:defRPr sz="1400" b="0" i="0" u="none" strike="noStrike" cap="none" spc="0">
           <a:solidFill>
             <a:srgbClr val="000000"/>
           </a:solidFill>
@@ -3281,7 +3372,7 @@
           <a:sym typeface="Arial"/>
         </a:defRPr>
       </a:lvl1pPr>
-      <a:lvl2pPr lvl="1" marR="0" rtl="0" algn="l">
+      <a:lvl2pPr marR="0" lvl="1" algn="l" rtl="0">
         <a:lnSpc>
           <a:spcPct val="100000"/>
         </a:lnSpc>
@@ -3295,7 +3386,7 @@
           <a:srgbClr val="000000"/>
         </a:buClr>
         <a:buFont typeface="Arial"/>
-        <a:defRPr b="0" i="0" spc="0" sz="1400" u="none" cap="none" strike="noStrike">
+        <a:defRPr sz="1400" b="0" i="0" u="none" strike="noStrike" cap="none" spc="0">
           <a:solidFill>
             <a:srgbClr val="000000"/>
           </a:solidFill>
@@ -3305,7 +3396,7 @@
           <a:sym typeface="Arial"/>
         </a:defRPr>
       </a:lvl2pPr>
-      <a:lvl3pPr lvl="2" marR="0" rtl="0" algn="l">
+      <a:lvl3pPr marR="0" lvl="2" algn="l" rtl="0">
         <a:lnSpc>
           <a:spcPct val="100000"/>
         </a:lnSpc>
@@ -3319,7 +3410,7 @@
           <a:srgbClr val="000000"/>
         </a:buClr>
         <a:buFont typeface="Arial"/>
-        <a:defRPr b="0" i="0" spc="0" sz="1400" u="none" cap="none" strike="noStrike">
+        <a:defRPr sz="1400" b="0" i="0" u="none" strike="noStrike" cap="none" spc="0">
           <a:solidFill>
             <a:srgbClr val="000000"/>
           </a:solidFill>
@@ -3329,7 +3420,7 @@
           <a:sym typeface="Arial"/>
         </a:defRPr>
       </a:lvl3pPr>
-      <a:lvl4pPr lvl="3" marR="0" rtl="0" algn="l">
+      <a:lvl4pPr marR="0" lvl="3" algn="l" rtl="0">
         <a:lnSpc>
           <a:spcPct val="100000"/>
         </a:lnSpc>
@@ -3343,7 +3434,7 @@
           <a:srgbClr val="000000"/>
         </a:buClr>
         <a:buFont typeface="Arial"/>
-        <a:defRPr b="0" i="0" spc="0" sz="1400" u="none" cap="none" strike="noStrike">
+        <a:defRPr sz="1400" b="0" i="0" u="none" strike="noStrike" cap="none" spc="0">
           <a:solidFill>
             <a:srgbClr val="000000"/>
           </a:solidFill>
@@ -3353,7 +3444,7 @@
           <a:sym typeface="Arial"/>
         </a:defRPr>
       </a:lvl4pPr>
-      <a:lvl5pPr lvl="4" marR="0" rtl="0" algn="l">
+      <a:lvl5pPr marR="0" lvl="4" algn="l" rtl="0">
         <a:lnSpc>
           <a:spcPct val="100000"/>
         </a:lnSpc>
@@ -3367,7 +3458,7 @@
           <a:srgbClr val="000000"/>
         </a:buClr>
         <a:buFont typeface="Arial"/>
-        <a:defRPr b="0" i="0" spc="0" sz="1400" u="none" cap="none" strike="noStrike">
+        <a:defRPr sz="1400" b="0" i="0" u="none" strike="noStrike" cap="none" spc="0">
           <a:solidFill>
             <a:srgbClr val="000000"/>
           </a:solidFill>
@@ -3377,7 +3468,7 @@
           <a:sym typeface="Arial"/>
         </a:defRPr>
       </a:lvl5pPr>
-      <a:lvl6pPr lvl="5" marR="0" rtl="0" algn="l">
+      <a:lvl6pPr marR="0" lvl="5" algn="l" rtl="0">
         <a:lnSpc>
           <a:spcPct val="100000"/>
         </a:lnSpc>
@@ -3391,7 +3482,7 @@
           <a:srgbClr val="000000"/>
         </a:buClr>
         <a:buFont typeface="Arial"/>
-        <a:defRPr b="0" i="0" spc="0" sz="1400" u="none" cap="none" strike="noStrike">
+        <a:defRPr sz="1400" b="0" i="0" u="none" strike="noStrike" cap="none" spc="0">
           <a:solidFill>
             <a:srgbClr val="000000"/>
           </a:solidFill>
@@ -3401,7 +3492,7 @@
           <a:sym typeface="Arial"/>
         </a:defRPr>
       </a:lvl6pPr>
-      <a:lvl7pPr lvl="6" marR="0" rtl="0" algn="l">
+      <a:lvl7pPr marR="0" lvl="6" algn="l" rtl="0">
         <a:lnSpc>
           <a:spcPct val="100000"/>
         </a:lnSpc>
@@ -3415,7 +3506,7 @@
           <a:srgbClr val="000000"/>
         </a:buClr>
         <a:buFont typeface="Arial"/>
-        <a:defRPr b="0" i="0" spc="0" sz="1400" u="none" cap="none" strike="noStrike">
+        <a:defRPr sz="1400" b="0" i="0" u="none" strike="noStrike" cap="none" spc="0">
           <a:solidFill>
             <a:srgbClr val="000000"/>
           </a:solidFill>
@@ -3425,7 +3516,7 @@
           <a:sym typeface="Arial"/>
         </a:defRPr>
       </a:lvl7pPr>
-      <a:lvl8pPr lvl="7" marR="0" rtl="0" algn="l">
+      <a:lvl8pPr marR="0" lvl="7" algn="l" rtl="0">
         <a:lnSpc>
           <a:spcPct val="100000"/>
         </a:lnSpc>
@@ -3439,7 +3530,7 @@
           <a:srgbClr val="000000"/>
         </a:buClr>
         <a:buFont typeface="Arial"/>
-        <a:defRPr b="0" i="0" spc="0" sz="1400" u="none" cap="none" strike="noStrike">
+        <a:defRPr sz="1400" b="0" i="0" u="none" strike="noStrike" cap="none" spc="0">
           <a:solidFill>
             <a:srgbClr val="000000"/>
           </a:solidFill>
@@ -3449,7 +3540,7 @@
           <a:sym typeface="Arial"/>
         </a:defRPr>
       </a:lvl8pPr>
-      <a:lvl9pPr lvl="8" marR="0" rtl="0" algn="l">
+      <a:lvl9pPr marR="0" lvl="8" algn="l" rtl="0">
         <a:lnSpc>
           <a:spcPct val="100000"/>
         </a:lnSpc>
@@ -3463,7 +3554,7 @@
           <a:srgbClr val="000000"/>
         </a:buClr>
         <a:buFont typeface="Arial"/>
-        <a:defRPr b="0" i="0" spc="0" sz="1400" u="none" cap="none" strike="noStrike">
+        <a:defRPr sz="1400" b="0" i="0" u="none" strike="noStrike" cap="none" spc="0">
           <a:solidFill>
             <a:srgbClr val="000000"/>
           </a:solidFill>
@@ -3479,11 +3570,11 @@
 </file>
 
 <file path=ppt/slides/slide1.xml><?xml version="1.0" encoding="utf-8"?>
-<p:sld xmlns:a="http://schemas.openxmlformats.org/drawingml/2006/main" xmlns:r="http://schemas.openxmlformats.org/officeDocument/2006/relationships" xmlns:mc="http://schemas.openxmlformats.org/markup-compatibility/2006" xmlns:mv="urn:schemas-microsoft-com:mac:vml" xmlns:p="http://schemas.openxmlformats.org/presentationml/2006/main" xmlns:c="http://schemas.openxmlformats.org/drawingml/2006/chart" xmlns:dgm="http://schemas.openxmlformats.org/drawingml/2006/diagram" xmlns:o="urn:schemas-microsoft-com:office:office" xmlns:v="urn:schemas-microsoft-com:vml" xmlns:pvml="urn:schemas-microsoft-com:office:powerpoint" xmlns:com="http://schemas.openxmlformats.org/drawingml/2006/compatibility" xmlns:p14="http://schemas.microsoft.com/office/powerpoint/2010/main" xmlns:p15="http://schemas.microsoft.com/office/powerpoint/2012/main" xmlns:ahyp="http://schemas.microsoft.com/office/drawing/2018/hyperlinkcolor">
+<p:sld xmlns:a="http://schemas.openxmlformats.org/drawingml/2006/main" xmlns:r="http://schemas.openxmlformats.org/officeDocument/2006/relationships" xmlns:p="http://schemas.openxmlformats.org/presentationml/2006/main">
   <p:cSld>
     <p:spTree>
       <p:nvGrpSpPr>
-        <p:cNvPr id="21" name="Shape 21"/>
+        <p:cNvPr id="1" name="Shape 21"/>
         <p:cNvGrpSpPr/>
         <p:nvPr/>
       </p:nvGrpSpPr>
@@ -3515,12 +3606,12 @@
           </a:ln>
         </p:spPr>
         <p:txBody>
-          <a:bodyPr anchorCtr="0" anchor="t" bIns="0" lIns="0" spcFirstLastPara="1" rIns="0" wrap="square" tIns="0">
-            <a:noAutofit/>
-          </a:bodyPr>
-          <a:lstStyle/>
-          <a:p>
-            <a:pPr indent="0" lvl="0" marL="0" marR="0" rtl="0" algn="l">
+          <a:bodyPr spcFirstLastPara="1" wrap="square" lIns="0" tIns="0" rIns="0" bIns="0" anchor="t" anchorCtr="0">
+            <a:noAutofit/>
+          </a:bodyPr>
+          <a:lstStyle/>
+          <a:p>
+            <a:pPr marL="0" marR="0" lvl="0" indent="0" algn="l" rtl="0">
               <a:lnSpc>
                 <a:spcPct val="78000"/>
               </a:lnSpc>
@@ -3538,7 +3629,7 @@
               <a:buNone/>
             </a:pPr>
             <a:r>
-              <a:rPr b="1" i="0" lang="en-US" sz="3550" u="none" cap="none" strike="noStrike">
+              <a:rPr lang="en-US" sz="3550" b="1" i="0" u="none" strike="noStrike" cap="none">
                 <a:solidFill>
                   <a:srgbClr val="FFFFFF"/>
                 </a:solidFill>
@@ -3549,7 +3640,7 @@
               </a:rPr>
               <a:t>REAL-TIME NLP</a:t>
             </a:r>
-            <a:endParaRPr b="0" i="0" sz="3550" u="none" cap="none" strike="noStrike">
+            <a:endParaRPr sz="3550" b="0" i="0" u="none" strike="noStrike" cap="none">
               <a:solidFill>
                 <a:schemeClr val="dk1"/>
               </a:solidFill>
@@ -3560,7 +3651,7 @@
             </a:endParaRPr>
           </a:p>
           <a:p>
-            <a:pPr indent="0" lvl="0" marL="0" marR="0" rtl="0" algn="l">
+            <a:pPr marL="0" marR="0" lvl="0" indent="0" algn="l" rtl="0">
               <a:lnSpc>
                 <a:spcPct val="78000"/>
               </a:lnSpc>
@@ -3578,7 +3669,7 @@
               <a:buNone/>
             </a:pPr>
             <a:r>
-              <a:rPr b="1" i="0" lang="en-US" sz="3550" u="none" cap="none" strike="noStrike">
+              <a:rPr lang="en-US" sz="3550" b="1" i="0" u="none" strike="noStrike" cap="none">
                 <a:solidFill>
                   <a:srgbClr val="FFFFFF"/>
                 </a:solidFill>
@@ -3589,7 +3680,7 @@
               </a:rPr>
               <a:t>RISK ENGINE</a:t>
             </a:r>
-            <a:endParaRPr b="0" i="0" sz="3550" u="none" cap="none" strike="noStrike">
+            <a:endParaRPr sz="3550" b="0" i="0" u="none" strike="noStrike" cap="none">
               <a:solidFill>
                 <a:schemeClr val="dk1"/>
               </a:solidFill>
@@ -3621,12 +3712,12 @@
           </a:ln>
         </p:spPr>
         <p:txBody>
-          <a:bodyPr anchorCtr="0" anchor="t" bIns="0" lIns="0" spcFirstLastPara="1" rIns="0" wrap="square" tIns="0">
-            <a:noAutofit/>
-          </a:bodyPr>
-          <a:lstStyle/>
-          <a:p>
-            <a:pPr indent="0" lvl="0" marL="0" marR="0" rtl="0" algn="l">
+          <a:bodyPr spcFirstLastPara="1" wrap="square" lIns="0" tIns="0" rIns="0" bIns="0" anchor="t" anchorCtr="0">
+            <a:noAutofit/>
+          </a:bodyPr>
+          <a:lstStyle/>
+          <a:p>
+            <a:pPr marL="0" marR="0" lvl="0" indent="0" algn="l" rtl="0">
               <a:lnSpc>
                 <a:spcPct val="118000"/>
               </a:lnSpc>
@@ -3644,7 +3735,7 @@
               <a:buNone/>
             </a:pPr>
             <a:r>
-              <a:rPr b="0" i="0" lang="en-US" sz="1150" u="none" cap="none" strike="noStrike">
+              <a:rPr lang="en-US" sz="1150" b="0" i="0" u="none" strike="noStrike" cap="none">
                 <a:solidFill>
                   <a:srgbClr val="FFFFFF"/>
                 </a:solidFill>
@@ -3655,7 +3746,7 @@
               </a:rPr>
               <a:t>By : Ayush Pattanaik (IIIT Bhubaneswar)</a:t>
             </a:r>
-            <a:endParaRPr b="0" i="0" sz="1150" u="none" cap="none" strike="noStrike">
+            <a:endParaRPr sz="1150" b="0" i="0" u="none" strike="noStrike" cap="none">
               <a:solidFill>
                 <a:schemeClr val="dk1"/>
               </a:solidFill>
@@ -3680,7 +3771,7 @@
           </a:xfrm>
           <a:prstGeom prst="roundRect">
             <a:avLst>
-              <a:gd fmla="val 50000" name="adj"/>
+              <a:gd name="adj" fmla="val 50000"/>
             </a:avLst>
           </a:prstGeom>
           <a:solidFill>
@@ -3691,23 +3782,20 @@
           </a:ln>
         </p:spPr>
         <p:txBody>
-          <a:bodyPr anchorCtr="0" anchor="ctr" bIns="91425" lIns="91425" spcFirstLastPara="1" rIns="91425" wrap="square" tIns="91425">
-            <a:noAutofit/>
-          </a:bodyPr>
-          <a:lstStyle/>
-          <a:p>
-            <a:pPr indent="0" lvl="0" marL="0" rtl="0" algn="l">
-              <a:spcBef>
-                <a:spcPts val="0"/>
-              </a:spcBef>
-              <a:spcAft>
-                <a:spcPts val="0"/>
-              </a:spcAft>
-              <a:buNone/>
-            </a:pPr>
-            <a:r>
-              <a:t/>
-            </a:r>
+          <a:bodyPr spcFirstLastPara="1" wrap="square" lIns="91425" tIns="91425" rIns="91425" bIns="91425" anchor="ctr" anchorCtr="0">
+            <a:noAutofit/>
+          </a:bodyPr>
+          <a:lstStyle/>
+          <a:p>
+            <a:pPr marL="0" lvl="0" indent="0" algn="l" rtl="0">
+              <a:spcBef>
+                <a:spcPts val="0"/>
+              </a:spcBef>
+              <a:spcAft>
+                <a:spcPts val="0"/>
+              </a:spcAft>
+              <a:buNone/>
+            </a:pPr>
             <a:endParaRPr/>
           </a:p>
         </p:txBody>
@@ -3720,7 +3808,7 @@
         </p:nvSpPr>
         <p:spPr>
           <a:xfrm>
-            <a:off x="291405" y="2284065"/>
+            <a:off x="273360" y="2214040"/>
             <a:ext cx="5515049" cy="477738"/>
           </a:xfrm>
           <a:prstGeom prst="rect">
@@ -3732,12 +3820,12 @@
           </a:ln>
         </p:spPr>
         <p:txBody>
-          <a:bodyPr anchorCtr="0" anchor="t" bIns="0" lIns="0" spcFirstLastPara="1" rIns="0" wrap="square" tIns="0">
-            <a:noAutofit/>
-          </a:bodyPr>
-          <a:lstStyle/>
-          <a:p>
-            <a:pPr indent="0" lvl="0" marL="0" marR="0" rtl="0" algn="l">
+          <a:bodyPr spcFirstLastPara="1" wrap="square" lIns="0" tIns="0" rIns="0" bIns="0" anchor="t" anchorCtr="0">
+            <a:noAutofit/>
+          </a:bodyPr>
+          <a:lstStyle/>
+          <a:p>
+            <a:pPr marL="0" marR="0" lvl="0" indent="0" algn="l" rtl="0">
               <a:lnSpc>
                 <a:spcPct val="110000"/>
               </a:lnSpc>
@@ -3755,7 +3843,7 @@
               <a:buNone/>
             </a:pPr>
             <a:r>
-              <a:rPr b="0" i="0" lang="en-US" sz="1400" u="none" cap="none" strike="noStrike">
+              <a:rPr lang="en-US" sz="1400" b="0" i="0" u="none" strike="noStrike" cap="none" dirty="0">
                 <a:solidFill>
                   <a:srgbClr val="FFFFFF"/>
                 </a:solidFill>
@@ -3766,7 +3854,7 @@
               </a:rPr>
               <a:t>Turning real-time financial news and social media chatter into automated portfolio decisions.</a:t>
             </a:r>
-            <a:endParaRPr b="0" i="0" sz="1400" u="none" cap="none" strike="noStrike">
+            <a:endParaRPr sz="1400" b="0" i="0" u="none" strike="noStrike" cap="none" dirty="0">
               <a:solidFill>
                 <a:schemeClr val="dk1"/>
               </a:solidFill>
@@ -3786,7 +3874,7 @@
         </p:nvSpPr>
         <p:spPr>
           <a:xfrm>
-            <a:off x="291405" y="3205163"/>
+            <a:off x="273360" y="2976452"/>
             <a:ext cx="5515049" cy="680963"/>
           </a:xfrm>
           <a:prstGeom prst="rect">
@@ -3798,12 +3886,12 @@
           </a:ln>
         </p:spPr>
         <p:txBody>
-          <a:bodyPr anchorCtr="0" anchor="t" bIns="0" lIns="0" spcFirstLastPara="1" rIns="0" wrap="square" tIns="0">
-            <a:noAutofit/>
-          </a:bodyPr>
-          <a:lstStyle/>
-          <a:p>
-            <a:pPr indent="0" lvl="0" marL="0" marR="0" rtl="0" algn="l">
+          <a:bodyPr spcFirstLastPara="1" wrap="square" lIns="0" tIns="0" rIns="0" bIns="0" anchor="t" anchorCtr="0">
+            <a:noAutofit/>
+          </a:bodyPr>
+          <a:lstStyle/>
+          <a:p>
+            <a:pPr marL="0" marR="0" lvl="0" indent="0" algn="l" rtl="0">
               <a:lnSpc>
                 <a:spcPct val="118000"/>
               </a:lnSpc>
@@ -3821,7 +3909,7 @@
               <a:buNone/>
             </a:pPr>
             <a:r>
-              <a:rPr b="0" i="0" lang="en-US" sz="1000" u="none" cap="none" strike="noStrike">
+              <a:rPr lang="en-US" sz="1200" b="0" i="0" u="none" strike="noStrike" cap="none" dirty="0">
                 <a:solidFill>
                   <a:srgbClr val="FFFFFF"/>
                 </a:solidFill>
@@ -3830,9 +3918,372 @@
                 <a:cs typeface="Exo"/>
                 <a:sym typeface="Exo"/>
               </a:rPr>
-              <a:t>An AI pipeline that reads breaking text, extracts impacted tickers, scores sentiment through an ensemble, and dynamically rebalances a 15-stock US blue-chip universe.</a:t>
-            </a:r>
-            <a:endParaRPr b="0" i="0" sz="1000" u="none" cap="none" strike="noStrike">
+              <a:t>An </a:t>
+            </a:r>
+            <a:r>
+              <a:rPr lang="en-US" sz="1200" b="0" i="1" u="none" strike="noStrike" cap="none" dirty="0">
+                <a:solidFill>
+                  <a:srgbClr val="FFFFFF"/>
+                </a:solidFill>
+                <a:latin typeface="Exo"/>
+                <a:ea typeface="Exo"/>
+                <a:cs typeface="Exo"/>
+                <a:sym typeface="Exo"/>
+              </a:rPr>
+              <a:t>AI pipeline</a:t>
+            </a:r>
+            <a:r>
+              <a:rPr lang="en-US" sz="1200" b="0" i="0" u="none" strike="noStrike" cap="none" dirty="0">
+                <a:solidFill>
+                  <a:srgbClr val="FFFFFF"/>
+                </a:solidFill>
+                <a:latin typeface="Exo"/>
+                <a:ea typeface="Exo"/>
+                <a:cs typeface="Exo"/>
+                <a:sym typeface="Exo"/>
+              </a:rPr>
+              <a:t> that  :</a:t>
+            </a:r>
+          </a:p>
+          <a:p>
+            <a:pPr marL="0" marR="0" lvl="0" indent="0" algn="l" rtl="0">
+              <a:lnSpc>
+                <a:spcPct val="118000"/>
+              </a:lnSpc>
+              <a:spcBef>
+                <a:spcPts val="0"/>
+              </a:spcBef>
+              <a:spcAft>
+                <a:spcPts val="0"/>
+              </a:spcAft>
+              <a:buClr>
+                <a:srgbClr val="FFFFFF"/>
+              </a:buClr>
+              <a:buSzPts val="1000"/>
+              <a:buFont typeface="Exo"/>
+              <a:buNone/>
+            </a:pPr>
+            <a:endParaRPr lang="en-US" sz="1000" b="0" i="0" u="none" strike="noStrike" cap="none" dirty="0">
+              <a:solidFill>
+                <a:srgbClr val="FFFFFF"/>
+              </a:solidFill>
+              <a:latin typeface="Exo"/>
+              <a:ea typeface="Exo"/>
+              <a:cs typeface="Exo"/>
+              <a:sym typeface="Exo"/>
+            </a:endParaRPr>
+          </a:p>
+          <a:p>
+            <a:pPr marL="0" marR="0" lvl="0" indent="0" algn="l" rtl="0">
+              <a:lnSpc>
+                <a:spcPct val="118000"/>
+              </a:lnSpc>
+              <a:spcBef>
+                <a:spcPts val="0"/>
+              </a:spcBef>
+              <a:spcAft>
+                <a:spcPts val="0"/>
+              </a:spcAft>
+              <a:buClr>
+                <a:srgbClr val="FFFFFF"/>
+              </a:buClr>
+              <a:buSzPts val="1000"/>
+              <a:buFont typeface="Exo"/>
+              <a:buNone/>
+            </a:pPr>
+            <a:r>
+              <a:rPr lang="en-US" sz="1000" dirty="0">
+                <a:solidFill>
+                  <a:srgbClr val="FFFFFF"/>
+                </a:solidFill>
+                <a:latin typeface="Exo"/>
+                <a:ea typeface="Exo"/>
+                <a:cs typeface="Exo"/>
+                <a:sym typeface="Exo"/>
+              </a:rPr>
+              <a:t>R</a:t>
+            </a:r>
+            <a:r>
+              <a:rPr lang="en-US" sz="1000" b="0" i="0" u="none" strike="noStrike" cap="none" dirty="0">
+                <a:solidFill>
+                  <a:srgbClr val="FFFFFF"/>
+                </a:solidFill>
+                <a:latin typeface="Exo"/>
+                <a:ea typeface="Exo"/>
+                <a:cs typeface="Exo"/>
+                <a:sym typeface="Exo"/>
+              </a:rPr>
+              <a:t>eads </a:t>
+            </a:r>
+            <a:r>
+              <a:rPr lang="en-US" sz="1000" dirty="0">
+                <a:solidFill>
+                  <a:srgbClr val="FFFFFF"/>
+                </a:solidFill>
+                <a:latin typeface="Exo"/>
+                <a:ea typeface="Exo"/>
+                <a:cs typeface="Exo"/>
+                <a:sym typeface="Exo"/>
+              </a:rPr>
+              <a:t>news articles and social</a:t>
+            </a:r>
+            <a:r>
+              <a:rPr lang="en-US" sz="1000" b="0" i="0" u="none" strike="noStrike" cap="none" dirty="0">
+                <a:solidFill>
+                  <a:srgbClr val="FFFFFF"/>
+                </a:solidFill>
+                <a:latin typeface="Exo"/>
+                <a:ea typeface="Exo"/>
+                <a:cs typeface="Exo"/>
+                <a:sym typeface="Exo"/>
+              </a:rPr>
+              <a:t> texts, </a:t>
+            </a:r>
+          </a:p>
+          <a:p>
+            <a:pPr marL="0" marR="0" lvl="0" indent="0" algn="l" rtl="0">
+              <a:lnSpc>
+                <a:spcPct val="118000"/>
+              </a:lnSpc>
+              <a:spcBef>
+                <a:spcPts val="0"/>
+              </a:spcBef>
+              <a:spcAft>
+                <a:spcPts val="0"/>
+              </a:spcAft>
+              <a:buClr>
+                <a:srgbClr val="FFFFFF"/>
+              </a:buClr>
+              <a:buSzPts val="1000"/>
+              <a:buFont typeface="Exo"/>
+              <a:buNone/>
+            </a:pPr>
+            <a:r>
+              <a:rPr lang="en-US" sz="1000" dirty="0">
+                <a:solidFill>
+                  <a:srgbClr val="FFFFFF"/>
+                </a:solidFill>
+                <a:latin typeface="Exo"/>
+                <a:ea typeface="Exo"/>
+                <a:cs typeface="Exo"/>
+                <a:sym typeface="Exo"/>
+              </a:rPr>
+              <a:t>E</a:t>
+            </a:r>
+            <a:r>
+              <a:rPr lang="en-US" sz="1000" b="0" i="0" u="none" strike="noStrike" cap="none" dirty="0">
+                <a:solidFill>
+                  <a:srgbClr val="FFFFFF"/>
+                </a:solidFill>
+                <a:latin typeface="Exo"/>
+                <a:ea typeface="Exo"/>
+                <a:cs typeface="Exo"/>
+                <a:sym typeface="Exo"/>
+              </a:rPr>
+              <a:t>xtracts impacted tickers, </a:t>
+            </a:r>
+          </a:p>
+          <a:p>
+            <a:pPr marL="0" marR="0" lvl="0" indent="0" algn="l" rtl="0">
+              <a:lnSpc>
+                <a:spcPct val="118000"/>
+              </a:lnSpc>
+              <a:spcBef>
+                <a:spcPts val="0"/>
+              </a:spcBef>
+              <a:spcAft>
+                <a:spcPts val="0"/>
+              </a:spcAft>
+              <a:buClr>
+                <a:srgbClr val="FFFFFF"/>
+              </a:buClr>
+              <a:buSzPts val="1000"/>
+              <a:buFont typeface="Exo"/>
+              <a:buNone/>
+            </a:pPr>
+            <a:r>
+              <a:rPr lang="en-US" sz="1000" dirty="0">
+                <a:solidFill>
+                  <a:srgbClr val="FFFFFF"/>
+                </a:solidFill>
+                <a:latin typeface="Exo"/>
+                <a:ea typeface="Exo"/>
+                <a:cs typeface="Exo"/>
+                <a:sym typeface="Exo"/>
+              </a:rPr>
+              <a:t>S</a:t>
+            </a:r>
+            <a:r>
+              <a:rPr lang="en-US" sz="1000" b="0" i="0" u="none" strike="noStrike" cap="none" dirty="0">
+                <a:solidFill>
+                  <a:srgbClr val="FFFFFF"/>
+                </a:solidFill>
+                <a:latin typeface="Exo"/>
+                <a:ea typeface="Exo"/>
+                <a:cs typeface="Exo"/>
+                <a:sym typeface="Exo"/>
+              </a:rPr>
+              <a:t>cores sentiment through an ensemble</a:t>
+            </a:r>
+            <a:r>
+              <a:rPr lang="en-US" sz="1000" dirty="0">
+                <a:solidFill>
+                  <a:srgbClr val="FFFFFF"/>
+                </a:solidFill>
+                <a:latin typeface="Exo"/>
+                <a:ea typeface="Exo"/>
+                <a:cs typeface="Exo"/>
+                <a:sym typeface="Exo"/>
+              </a:rPr>
+              <a:t>  and</a:t>
+            </a:r>
+            <a:endParaRPr lang="en-US" sz="1000" b="0" i="0" u="none" strike="noStrike" cap="none" dirty="0">
+              <a:solidFill>
+                <a:srgbClr val="FFFFFF"/>
+              </a:solidFill>
+              <a:latin typeface="Exo"/>
+              <a:ea typeface="Exo"/>
+              <a:cs typeface="Exo"/>
+              <a:sym typeface="Exo"/>
+            </a:endParaRPr>
+          </a:p>
+          <a:p>
+            <a:pPr lvl="0">
+              <a:lnSpc>
+                <a:spcPct val="118000"/>
+              </a:lnSpc>
+              <a:buClr>
+                <a:srgbClr val="FFFFFF"/>
+              </a:buClr>
+              <a:buSzPts val="1000"/>
+            </a:pPr>
+            <a:r>
+              <a:rPr lang="en-US" sz="1000" b="0" i="0" u="none" strike="noStrike" cap="none" dirty="0">
+                <a:solidFill>
+                  <a:srgbClr val="FFFFFF"/>
+                </a:solidFill>
+                <a:latin typeface="Exo"/>
+                <a:ea typeface="Exo"/>
+                <a:cs typeface="Exo"/>
+                <a:sym typeface="Exo"/>
+              </a:rPr>
+              <a:t>Dynamically rebalances a </a:t>
+            </a:r>
+            <a:r>
+              <a:rPr lang="en-US" sz="1000" dirty="0">
+                <a:solidFill>
+                  <a:srgbClr val="FFFFFF"/>
+                </a:solidFill>
+                <a:latin typeface="Exo"/>
+                <a:ea typeface="Exo"/>
+                <a:cs typeface="Exo"/>
+                <a:sym typeface="Exo"/>
+              </a:rPr>
+              <a:t>universe  of </a:t>
+            </a:r>
+            <a:r>
+              <a:rPr lang="en-US" sz="1000" b="0" i="0" u="none" strike="noStrike" cap="none" dirty="0">
+                <a:solidFill>
+                  <a:srgbClr val="FFFFFF"/>
+                </a:solidFill>
+                <a:latin typeface="Exo"/>
+                <a:ea typeface="Exo"/>
+                <a:cs typeface="Exo"/>
+                <a:sym typeface="Exo"/>
+              </a:rPr>
+              <a:t>15 US blue-chip stocks,</a:t>
+            </a:r>
+          </a:p>
+          <a:p>
+            <a:pPr lvl="0">
+              <a:lnSpc>
+                <a:spcPct val="118000"/>
+              </a:lnSpc>
+              <a:buClr>
+                <a:srgbClr val="FFFFFF"/>
+              </a:buClr>
+              <a:buSzPts val="1000"/>
+            </a:pPr>
+            <a:r>
+              <a:rPr lang="en-US" sz="1000" b="0" i="0" u="none" strike="noStrike" cap="none" dirty="0">
+                <a:solidFill>
+                  <a:srgbClr val="FFFFFF"/>
+                </a:solidFill>
+                <a:latin typeface="Exo"/>
+                <a:ea typeface="Exo"/>
+                <a:cs typeface="Exo"/>
+                <a:sym typeface="Exo"/>
+              </a:rPr>
+              <a:t> </a:t>
+            </a:r>
+          </a:p>
+          <a:p>
+            <a:pPr marL="0" marR="0" lvl="0" indent="0" algn="l" rtl="0">
+              <a:lnSpc>
+                <a:spcPct val="118000"/>
+              </a:lnSpc>
+              <a:spcBef>
+                <a:spcPts val="0"/>
+              </a:spcBef>
+              <a:spcAft>
+                <a:spcPts val="0"/>
+              </a:spcAft>
+              <a:buClr>
+                <a:srgbClr val="FFFFFF"/>
+              </a:buClr>
+              <a:buSzPts val="1000"/>
+              <a:buFont typeface="Exo"/>
+              <a:buNone/>
+            </a:pPr>
+            <a:r>
+              <a:rPr lang="en-US" sz="1200" dirty="0">
+                <a:solidFill>
+                  <a:srgbClr val="FFFFFF"/>
+                </a:solidFill>
+                <a:latin typeface="Exo"/>
+                <a:ea typeface="Exo"/>
+                <a:cs typeface="Exo"/>
+                <a:sym typeface="Exo"/>
+              </a:rPr>
+              <a:t>A</a:t>
+            </a:r>
+            <a:r>
+              <a:rPr lang="en-US" sz="1200" b="0" i="0" u="none" strike="noStrike" cap="none" dirty="0">
+                <a:solidFill>
+                  <a:srgbClr val="FFFFFF"/>
+                </a:solidFill>
+                <a:latin typeface="Exo"/>
+                <a:ea typeface="Exo"/>
+                <a:cs typeface="Exo"/>
+                <a:sym typeface="Exo"/>
+              </a:rPr>
+              <a:t>ll within</a:t>
+            </a:r>
+            <a:r>
+              <a:rPr lang="en-US" sz="1200" dirty="0">
+                <a:solidFill>
+                  <a:srgbClr val="FFFFFF"/>
+                </a:solidFill>
+                <a:latin typeface="Exo"/>
+                <a:ea typeface="Exo"/>
+                <a:cs typeface="Exo"/>
+                <a:sym typeface="Exo"/>
+              </a:rPr>
+              <a:t> few minutes</a:t>
+            </a:r>
+            <a:r>
+              <a:rPr lang="en-US" sz="1000" dirty="0">
+                <a:solidFill>
+                  <a:srgbClr val="FFFFFF"/>
+                </a:solidFill>
+                <a:latin typeface="Exo"/>
+                <a:ea typeface="Exo"/>
+                <a:cs typeface="Exo"/>
+                <a:sym typeface="Exo"/>
+              </a:rPr>
+              <a:t>.</a:t>
+            </a:r>
+            <a:endParaRPr sz="1000" b="0" i="0" u="none" strike="noStrike" cap="none" dirty="0">
               <a:solidFill>
                 <a:schemeClr val="dk1"/>
               </a:solidFill>
@@ -3852,7 +4303,7 @@
         </p:nvSpPr>
         <p:spPr>
           <a:xfrm>
-            <a:off x="291405" y="4019476"/>
+            <a:off x="273360" y="3994249"/>
             <a:ext cx="2022128" cy="136178"/>
           </a:xfrm>
           <a:prstGeom prst="rect">
@@ -3864,12 +4315,12 @@
           </a:ln>
         </p:spPr>
         <p:txBody>
-          <a:bodyPr anchorCtr="0" anchor="t" bIns="0" lIns="0" spcFirstLastPara="1" rIns="0" wrap="square" tIns="0">
-            <a:noAutofit/>
-          </a:bodyPr>
-          <a:lstStyle/>
-          <a:p>
-            <a:pPr indent="0" lvl="0" marL="0" marR="0" rtl="0" algn="l">
+          <a:bodyPr spcFirstLastPara="1" wrap="square" lIns="0" tIns="0" rIns="0" bIns="0" anchor="t" anchorCtr="0">
+            <a:noAutofit/>
+          </a:bodyPr>
+          <a:lstStyle/>
+          <a:p>
+            <a:pPr marL="0" marR="0" lvl="0" indent="0" algn="l" rtl="0">
               <a:lnSpc>
                 <a:spcPct val="108000"/>
               </a:lnSpc>
@@ -3886,19 +4337,7 @@
               <a:buFont typeface="Fira Mono Medium"/>
               <a:buNone/>
             </a:pPr>
-            <a:r>
-              <a:rPr b="0" i="0" lang="en-US" sz="850" u="none" cap="none" strike="noStrike">
-                <a:solidFill>
-                  <a:srgbClr val="FFFFFF"/>
-                </a:solidFill>
-                <a:latin typeface="Fira Mono Medium"/>
-                <a:ea typeface="Fira Mono Medium"/>
-                <a:cs typeface="Fira Mono Medium"/>
-                <a:sym typeface="Fira Mono Medium"/>
-              </a:rPr>
-              <a:t>UNIVERSE</a:t>
-            </a:r>
-            <a:endParaRPr b="0" i="0" sz="850" u="none" cap="none" strike="noStrike">
+            <a:endParaRPr sz="850" b="0" i="0" u="none" strike="noStrike" cap="none" dirty="0">
               <a:solidFill>
                 <a:schemeClr val="dk1"/>
               </a:solidFill>
@@ -3918,8 +4357,8 @@
         </p:nvSpPr>
         <p:spPr>
           <a:xfrm>
-            <a:off x="291405" y="4241378"/>
-            <a:ext cx="2022128" cy="182538"/>
+            <a:off x="3030884" y="4879775"/>
+            <a:ext cx="3635553" cy="136178"/>
           </a:xfrm>
           <a:prstGeom prst="rect">
             <a:avLst/>
@@ -3930,12 +4369,12 @@
           </a:ln>
         </p:spPr>
         <p:txBody>
-          <a:bodyPr anchorCtr="0" anchor="t" bIns="0" lIns="0" spcFirstLastPara="1" rIns="0" wrap="square" tIns="0">
-            <a:noAutofit/>
-          </a:bodyPr>
-          <a:lstStyle/>
-          <a:p>
-            <a:pPr indent="0" lvl="0" marL="0" marR="0" rtl="0" algn="l">
+          <a:bodyPr spcFirstLastPara="1" wrap="square" lIns="0" tIns="0" rIns="0" bIns="0" anchor="t" anchorCtr="0">
+            <a:noAutofit/>
+          </a:bodyPr>
+          <a:lstStyle/>
+          <a:p>
+            <a:pPr marL="0" marR="0" lvl="0" indent="0" algn="l" rtl="0">
               <a:lnSpc>
                 <a:spcPct val="118000"/>
               </a:lnSpc>
@@ -3953,18 +4392,72 @@
               <a:buNone/>
             </a:pPr>
             <a:r>
-              <a:rPr b="0" i="0" lang="en-US" sz="1000" u="none" cap="none" strike="noStrike">
+              <a:rPr lang="en-US" sz="800" b="0" i="0" u="none" strike="noStrike" cap="none" dirty="0">
                 <a:solidFill>
                   <a:srgbClr val="FFFFFF"/>
                 </a:solidFill>
-                <a:latin typeface="Exo"/>
+                <a:latin typeface="Courier New" panose="02070309020205020404" pitchFamily="49" charset="0"/>
                 <a:ea typeface="Exo"/>
-                <a:cs typeface="Exo"/>
+                <a:cs typeface="Courier New" panose="02070309020205020404" pitchFamily="49" charset="0"/>
                 <a:sym typeface="Exo"/>
               </a:rPr>
-              <a:t>15 US Blue-Chips</a:t>
-            </a:r>
-            <a:endParaRPr b="0" i="0" sz="1000" u="none" cap="none" strike="noStrike">
+              <a:t>S&amp;P Global and Crisil Hackathon 2026 , Phase 3 submission</a:t>
+            </a:r>
+            <a:endParaRPr sz="800" b="0" i="0" u="none" strike="noStrike" cap="none" dirty="0">
+              <a:solidFill>
+                <a:schemeClr val="dk1"/>
+              </a:solidFill>
+              <a:latin typeface="Courier New" panose="02070309020205020404" pitchFamily="49" charset="0"/>
+              <a:ea typeface="Calibri"/>
+              <a:cs typeface="Courier New" panose="02070309020205020404" pitchFamily="49" charset="0"/>
+              <a:sym typeface="Calibri"/>
+            </a:endParaRPr>
+          </a:p>
+        </p:txBody>
+      </p:sp>
+      <p:sp>
+        <p:nvSpPr>
+          <p:cNvPr id="30" name="Google Shape;30;p5"/>
+          <p:cNvSpPr/>
+          <p:nvPr/>
+        </p:nvSpPr>
+        <p:spPr>
+          <a:xfrm>
+            <a:off x="2465933" y="4241378"/>
+            <a:ext cx="1685999" cy="182538"/>
+          </a:xfrm>
+          <a:prstGeom prst="rect">
+            <a:avLst/>
+          </a:prstGeom>
+          <a:noFill/>
+          <a:ln>
+            <a:noFill/>
+          </a:ln>
+        </p:spPr>
+        <p:txBody>
+          <a:bodyPr spcFirstLastPara="1" wrap="square" lIns="0" tIns="0" rIns="0" bIns="0" anchor="t" anchorCtr="0">
+            <a:noAutofit/>
+          </a:bodyPr>
+          <a:lstStyle/>
+          <a:p>
+            <a:pPr marL="0" marR="0" lvl="0" indent="0" algn="l" rtl="0">
+              <a:lnSpc>
+                <a:spcPct val="118000"/>
+              </a:lnSpc>
+              <a:spcBef>
+                <a:spcPts val="0"/>
+              </a:spcBef>
+              <a:spcAft>
+                <a:spcPts val="0"/>
+              </a:spcAft>
+              <a:buClr>
+                <a:srgbClr val="FFFFFF"/>
+              </a:buClr>
+              <a:buSzPts val="1000"/>
+              <a:buFont typeface="Exo"/>
+              <a:buNone/>
+            </a:pPr>
+            <a:endParaRPr sz="1000" b="0" i="0" u="none" strike="noStrike" cap="none" dirty="0">
               <a:solidFill>
                 <a:schemeClr val="dk1"/>
               </a:solidFill>
@@ -3978,14 +4471,14 @@
       </p:sp>
       <p:sp>
         <p:nvSpPr>
-          <p:cNvPr id="29" name="Google Shape;29;p5"/>
+          <p:cNvPr id="31" name="Google Shape;31;p5"/>
           <p:cNvSpPr/>
           <p:nvPr/>
         </p:nvSpPr>
         <p:spPr>
           <a:xfrm>
-            <a:off x="2465933" y="4019476"/>
-            <a:ext cx="1685999" cy="136178"/>
+            <a:off x="4304333" y="4019476"/>
+            <a:ext cx="1502122" cy="136178"/>
           </a:xfrm>
           <a:prstGeom prst="rect">
             <a:avLst/>
@@ -3996,12 +4489,12 @@
           </a:ln>
         </p:spPr>
         <p:txBody>
-          <a:bodyPr anchorCtr="0" anchor="t" bIns="0" lIns="0" spcFirstLastPara="1" rIns="0" wrap="square" tIns="0">
-            <a:noAutofit/>
-          </a:bodyPr>
-          <a:lstStyle/>
-          <a:p>
-            <a:pPr indent="0" lvl="0" marL="0" marR="0" rtl="0" algn="l">
+          <a:bodyPr spcFirstLastPara="1" wrap="square" lIns="0" tIns="0" rIns="0" bIns="0" anchor="t" anchorCtr="0">
+            <a:noAutofit/>
+          </a:bodyPr>
+          <a:lstStyle/>
+          <a:p>
+            <a:pPr marL="0" marR="0" lvl="0" indent="0" algn="l" rtl="0">
               <a:lnSpc>
                 <a:spcPct val="108000"/>
               </a:lnSpc>
@@ -4018,19 +4511,7 @@
               <a:buFont typeface="Fira Mono Medium"/>
               <a:buNone/>
             </a:pPr>
-            <a:r>
-              <a:rPr b="0" i="0" lang="en-US" sz="850" u="none" cap="none" strike="noStrike">
-                <a:solidFill>
-                  <a:srgbClr val="FFFFFF"/>
-                </a:solidFill>
-                <a:latin typeface="Fira Mono Medium"/>
-                <a:ea typeface="Fira Mono Medium"/>
-                <a:cs typeface="Fira Mono Medium"/>
-                <a:sym typeface="Fira Mono Medium"/>
-              </a:rPr>
-              <a:t>LATENCY</a:t>
-            </a:r>
-            <a:endParaRPr b="0" i="0" sz="850" u="none" cap="none" strike="noStrike">
+            <a:endParaRPr sz="850" b="0" i="0" u="none" strike="noStrike" cap="none" dirty="0">
               <a:solidFill>
                 <a:schemeClr val="dk1"/>
               </a:solidFill>
@@ -4044,14 +4525,14 @@
       </p:sp>
       <p:sp>
         <p:nvSpPr>
-          <p:cNvPr id="30" name="Google Shape;30;p5"/>
+          <p:cNvPr id="32" name="Google Shape;32;p5"/>
           <p:cNvSpPr/>
           <p:nvPr/>
         </p:nvSpPr>
         <p:spPr>
           <a:xfrm>
-            <a:off x="2465933" y="4241378"/>
-            <a:ext cx="1685999" cy="182538"/>
+            <a:off x="4304333" y="4241378"/>
+            <a:ext cx="1502122" cy="182538"/>
           </a:xfrm>
           <a:prstGeom prst="rect">
             <a:avLst/>
@@ -4062,12 +4543,12 @@
           </a:ln>
         </p:spPr>
         <p:txBody>
-          <a:bodyPr anchorCtr="0" anchor="t" bIns="0" lIns="0" spcFirstLastPara="1" rIns="0" wrap="square" tIns="0">
-            <a:noAutofit/>
-          </a:bodyPr>
-          <a:lstStyle/>
-          <a:p>
-            <a:pPr indent="0" lvl="0" marL="0" marR="0" rtl="0" algn="l">
+          <a:bodyPr spcFirstLastPara="1" wrap="square" lIns="0" tIns="0" rIns="0" bIns="0" anchor="t" anchorCtr="0">
+            <a:noAutofit/>
+          </a:bodyPr>
+          <a:lstStyle/>
+          <a:p>
+            <a:pPr marL="0" marR="0" lvl="0" indent="0" algn="l" rtl="0">
               <a:lnSpc>
                 <a:spcPct val="118000"/>
               </a:lnSpc>
@@ -4084,19 +4565,7 @@
               <a:buFont typeface="Exo"/>
               <a:buNone/>
             </a:pPr>
-            <a:r>
-              <a:rPr b="0" i="0" lang="en-US" sz="1000" u="none" cap="none" strike="noStrike">
-                <a:solidFill>
-                  <a:srgbClr val="FFFFFF"/>
-                </a:solidFill>
-                <a:latin typeface="Exo"/>
-                <a:ea typeface="Exo"/>
-                <a:cs typeface="Exo"/>
-                <a:sym typeface="Exo"/>
-              </a:rPr>
-              <a:t>Sub-second Ingestion</a:t>
-            </a:r>
-            <a:endParaRPr b="0" i="0" sz="1000" u="none" cap="none" strike="noStrike">
+            <a:endParaRPr sz="1000" b="0" i="0" u="none" strike="noStrike" cap="none" dirty="0">
               <a:solidFill>
                 <a:schemeClr val="dk1"/>
               </a:solidFill>
@@ -4110,224 +4579,6 @@
       </p:sp>
       <p:sp>
         <p:nvSpPr>
-          <p:cNvPr id="31" name="Google Shape;31;p5"/>
-          <p:cNvSpPr/>
-          <p:nvPr/>
-        </p:nvSpPr>
-        <p:spPr>
-          <a:xfrm>
-            <a:off x="4304333" y="4019476"/>
-            <a:ext cx="1502122" cy="136178"/>
-          </a:xfrm>
-          <a:prstGeom prst="rect">
-            <a:avLst/>
-          </a:prstGeom>
-          <a:noFill/>
-          <a:ln>
-            <a:noFill/>
-          </a:ln>
-        </p:spPr>
-        <p:txBody>
-          <a:bodyPr anchorCtr="0" anchor="t" bIns="0" lIns="0" spcFirstLastPara="1" rIns="0" wrap="square" tIns="0">
-            <a:noAutofit/>
-          </a:bodyPr>
-          <a:lstStyle/>
-          <a:p>
-            <a:pPr indent="0" lvl="0" marL="0" marR="0" rtl="0" algn="l">
-              <a:lnSpc>
-                <a:spcPct val="108000"/>
-              </a:lnSpc>
-              <a:spcBef>
-                <a:spcPts val="0"/>
-              </a:spcBef>
-              <a:spcAft>
-                <a:spcPts val="0"/>
-              </a:spcAft>
-              <a:buClr>
-                <a:srgbClr val="FFFFFF"/>
-              </a:buClr>
-              <a:buSzPts val="850"/>
-              <a:buFont typeface="Fira Mono Medium"/>
-              <a:buNone/>
-            </a:pPr>
-            <a:r>
-              <a:rPr b="0" i="0" lang="en-US" sz="850" u="none" cap="none" strike="noStrike">
-                <a:solidFill>
-                  <a:srgbClr val="FFFFFF"/>
-                </a:solidFill>
-                <a:latin typeface="Fira Mono Medium"/>
-                <a:ea typeface="Fira Mono Medium"/>
-                <a:cs typeface="Fira Mono Medium"/>
-                <a:sym typeface="Fira Mono Medium"/>
-              </a:rPr>
-              <a:t>STATUS</a:t>
-            </a:r>
-            <a:endParaRPr b="0" i="0" sz="850" u="none" cap="none" strike="noStrike">
-              <a:solidFill>
-                <a:schemeClr val="dk1"/>
-              </a:solidFill>
-              <a:latin typeface="Calibri"/>
-              <a:ea typeface="Calibri"/>
-              <a:cs typeface="Calibri"/>
-              <a:sym typeface="Calibri"/>
-            </a:endParaRPr>
-          </a:p>
-        </p:txBody>
-      </p:sp>
-      <p:sp>
-        <p:nvSpPr>
-          <p:cNvPr id="32" name="Google Shape;32;p5"/>
-          <p:cNvSpPr/>
-          <p:nvPr/>
-        </p:nvSpPr>
-        <p:spPr>
-          <a:xfrm>
-            <a:off x="4304333" y="4241378"/>
-            <a:ext cx="1502122" cy="182538"/>
-          </a:xfrm>
-          <a:prstGeom prst="rect">
-            <a:avLst/>
-          </a:prstGeom>
-          <a:noFill/>
-          <a:ln>
-            <a:noFill/>
-          </a:ln>
-        </p:spPr>
-        <p:txBody>
-          <a:bodyPr anchorCtr="0" anchor="t" bIns="0" lIns="0" spcFirstLastPara="1" rIns="0" wrap="square" tIns="0">
-            <a:noAutofit/>
-          </a:bodyPr>
-          <a:lstStyle/>
-          <a:p>
-            <a:pPr indent="0" lvl="0" marL="0" marR="0" rtl="0" algn="l">
-              <a:lnSpc>
-                <a:spcPct val="118000"/>
-              </a:lnSpc>
-              <a:spcBef>
-                <a:spcPts val="0"/>
-              </a:spcBef>
-              <a:spcAft>
-                <a:spcPts val="0"/>
-              </a:spcAft>
-              <a:buClr>
-                <a:srgbClr val="FFFFFF"/>
-              </a:buClr>
-              <a:buSzPts val="1000"/>
-              <a:buFont typeface="Exo"/>
-              <a:buNone/>
-            </a:pPr>
-            <a:r>
-              <a:rPr b="0" i="0" lang="en-US" sz="1000" u="none" cap="none" strike="noStrike">
-                <a:solidFill>
-                  <a:srgbClr val="FFFFFF"/>
-                </a:solidFill>
-                <a:latin typeface="Exo"/>
-                <a:ea typeface="Exo"/>
-                <a:cs typeface="Exo"/>
-                <a:sym typeface="Exo"/>
-              </a:rPr>
-              <a:t>Live Engine</a:t>
-            </a:r>
-            <a:endParaRPr b="0" i="0" sz="1000" u="none" cap="none" strike="noStrike">
-              <a:solidFill>
-                <a:schemeClr val="dk1"/>
-              </a:solidFill>
-              <a:latin typeface="Calibri"/>
-              <a:ea typeface="Calibri"/>
-              <a:cs typeface="Calibri"/>
-              <a:sym typeface="Calibri"/>
-            </a:endParaRPr>
-          </a:p>
-        </p:txBody>
-      </p:sp>
-      <p:sp>
-        <p:nvSpPr>
-          <p:cNvPr id="33" name="Google Shape;33;p5"/>
-          <p:cNvSpPr/>
-          <p:nvPr/>
-        </p:nvSpPr>
-        <p:spPr>
-          <a:xfrm>
-            <a:off x="2308771" y="4019476"/>
-            <a:ext cx="9525" cy="404440"/>
-          </a:xfrm>
-          <a:prstGeom prst="rect">
-            <a:avLst/>
-          </a:prstGeom>
-          <a:solidFill>
-            <a:srgbClr val="3F3F3F"/>
-          </a:solidFill>
-          <a:ln>
-            <a:noFill/>
-          </a:ln>
-        </p:spPr>
-        <p:txBody>
-          <a:bodyPr anchorCtr="0" anchor="ctr" bIns="91425" lIns="91425" spcFirstLastPara="1" rIns="91425" wrap="square" tIns="91425">
-            <a:noAutofit/>
-          </a:bodyPr>
-          <a:lstStyle/>
-          <a:p>
-            <a:pPr indent="0" lvl="0" marL="0" rtl="0" algn="l">
-              <a:spcBef>
-                <a:spcPts val="0"/>
-              </a:spcBef>
-              <a:spcAft>
-                <a:spcPts val="0"/>
-              </a:spcAft>
-              <a:buNone/>
-            </a:pPr>
-            <a:r>
-              <a:t/>
-            </a:r>
-            <a:endParaRPr/>
-          </a:p>
-        </p:txBody>
-      </p:sp>
-      <p:sp>
-        <p:nvSpPr>
-          <p:cNvPr id="34" name="Google Shape;34;p5"/>
-          <p:cNvSpPr/>
-          <p:nvPr/>
-        </p:nvSpPr>
-        <p:spPr>
-          <a:xfrm>
-            <a:off x="4147170" y="4019476"/>
-            <a:ext cx="9525" cy="404440"/>
-          </a:xfrm>
-          <a:prstGeom prst="rect">
-            <a:avLst/>
-          </a:prstGeom>
-          <a:solidFill>
-            <a:srgbClr val="3F3F3F"/>
-          </a:solidFill>
-          <a:ln>
-            <a:noFill/>
-          </a:ln>
-        </p:spPr>
-        <p:txBody>
-          <a:bodyPr anchorCtr="0" anchor="ctr" bIns="91425" lIns="91425" spcFirstLastPara="1" rIns="91425" wrap="square" tIns="91425">
-            <a:noAutofit/>
-          </a:bodyPr>
-          <a:lstStyle/>
-          <a:p>
-            <a:pPr indent="0" lvl="0" marL="0" rtl="0" algn="l">
-              <a:spcBef>
-                <a:spcPts val="0"/>
-              </a:spcBef>
-              <a:spcAft>
-                <a:spcPts val="0"/>
-              </a:spcAft>
-              <a:buNone/>
-            </a:pPr>
-            <a:r>
-              <a:t/>
-            </a:r>
-            <a:endParaRPr/>
-          </a:p>
-        </p:txBody>
-      </p:sp>
-      <p:sp>
-        <p:nvSpPr>
           <p:cNvPr id="35" name="Google Shape;35;p5"/>
           <p:cNvSpPr txBox="1"/>
           <p:nvPr/>
@@ -4348,23 +4599,20 @@
           </a:ln>
         </p:spPr>
         <p:txBody>
-          <a:bodyPr anchorCtr="0" anchor="t" bIns="91425" lIns="91425" spcFirstLastPara="1" rIns="91425" wrap="square" tIns="91425">
-            <a:noAutofit/>
-          </a:bodyPr>
-          <a:lstStyle/>
-          <a:p>
-            <a:pPr indent="0" lvl="0" marL="0" rtl="0" algn="l">
-              <a:spcBef>
-                <a:spcPts val="0"/>
-              </a:spcBef>
-              <a:spcAft>
-                <a:spcPts val="0"/>
-              </a:spcAft>
-              <a:buNone/>
-            </a:pPr>
-            <a:r>
-              <a:t/>
-            </a:r>
+          <a:bodyPr spcFirstLastPara="1" wrap="square" lIns="91425" tIns="91425" rIns="91425" bIns="91425" anchor="t" anchorCtr="0">
+            <a:noAutofit/>
+          </a:bodyPr>
+          <a:lstStyle/>
+          <a:p>
+            <a:pPr marL="0" lvl="0" indent="0" algn="l" rtl="0">
+              <a:spcBef>
+                <a:spcPts val="0"/>
+              </a:spcBef>
+              <a:spcAft>
+                <a:spcPts val="0"/>
+              </a:spcAft>
+              <a:buNone/>
+            </a:pPr>
             <a:endParaRPr/>
           </a:p>
         </p:txBody>
@@ -4378,11 +4626,11 @@
 </file>
 
 <file path=ppt/slides/slide2.xml><?xml version="1.0" encoding="utf-8"?>
-<p:sld xmlns:a="http://schemas.openxmlformats.org/drawingml/2006/main" xmlns:r="http://schemas.openxmlformats.org/officeDocument/2006/relationships" xmlns:mc="http://schemas.openxmlformats.org/markup-compatibility/2006" xmlns:mv="urn:schemas-microsoft-com:mac:vml" xmlns:p="http://schemas.openxmlformats.org/presentationml/2006/main" xmlns:c="http://schemas.openxmlformats.org/drawingml/2006/chart" xmlns:dgm="http://schemas.openxmlformats.org/drawingml/2006/diagram" xmlns:o="urn:schemas-microsoft-com:office:office" xmlns:v="urn:schemas-microsoft-com:vml" xmlns:pvml="urn:schemas-microsoft-com:office:powerpoint" xmlns:com="http://schemas.openxmlformats.org/drawingml/2006/compatibility" xmlns:p14="http://schemas.microsoft.com/office/powerpoint/2010/main" xmlns:p15="http://schemas.microsoft.com/office/powerpoint/2012/main" xmlns:ahyp="http://schemas.microsoft.com/office/drawing/2018/hyperlinkcolor">
+<p:sld xmlns:a="http://schemas.openxmlformats.org/drawingml/2006/main" xmlns:r="http://schemas.openxmlformats.org/officeDocument/2006/relationships" xmlns:p="http://schemas.openxmlformats.org/presentationml/2006/main">
   <p:cSld>
     <p:spTree>
       <p:nvGrpSpPr>
-        <p:cNvPr id="40" name="Shape 40"/>
+        <p:cNvPr id="1" name="Shape 40"/>
         <p:cNvGrpSpPr/>
         <p:nvPr/>
       </p:nvGrpSpPr>
@@ -4414,12 +4662,12 @@
           </a:ln>
         </p:spPr>
         <p:txBody>
-          <a:bodyPr anchorCtr="0" anchor="t" bIns="0" lIns="0" spcFirstLastPara="1" rIns="0" wrap="square" tIns="0">
-            <a:noAutofit/>
-          </a:bodyPr>
-          <a:lstStyle/>
-          <a:p>
-            <a:pPr indent="0" lvl="0" marL="0" marR="0" rtl="0" algn="l">
+          <a:bodyPr spcFirstLastPara="1" wrap="square" lIns="0" tIns="0" rIns="0" bIns="0" anchor="t" anchorCtr="0">
+            <a:noAutofit/>
+          </a:bodyPr>
+          <a:lstStyle/>
+          <a:p>
+            <a:pPr marL="0" marR="0" lvl="0" indent="0" algn="l" rtl="0">
               <a:lnSpc>
                 <a:spcPct val="108000"/>
               </a:lnSpc>
@@ -4437,7 +4685,7 @@
               <a:buNone/>
             </a:pPr>
             <a:r>
-              <a:rPr b="0" i="0" lang="en-US" sz="850" u="none" cap="none" strike="noStrike">
+              <a:rPr lang="en-US" sz="850" b="0" i="0" u="none" strike="noStrike" cap="none">
                 <a:solidFill>
                   <a:srgbClr val="B5B5B5"/>
                 </a:solidFill>
@@ -4448,7 +4696,7 @@
               </a:rPr>
               <a:t>THE PROBLEM SPACE</a:t>
             </a:r>
-            <a:endParaRPr b="0" i="0" sz="850" u="none" cap="none" strike="noStrike">
+            <a:endParaRPr sz="850" b="0" i="0" u="none" strike="noStrike" cap="none">
               <a:solidFill>
                 <a:schemeClr val="dk1"/>
               </a:solidFill>
@@ -4480,12 +4728,12 @@
           </a:ln>
         </p:spPr>
         <p:txBody>
-          <a:bodyPr anchorCtr="0" anchor="t" bIns="0" lIns="0" spcFirstLastPara="1" rIns="0" wrap="square" tIns="0">
-            <a:noAutofit/>
-          </a:bodyPr>
-          <a:lstStyle/>
-          <a:p>
-            <a:pPr indent="0" lvl="0" marL="0" marR="0" rtl="0" algn="l">
+          <a:bodyPr spcFirstLastPara="1" wrap="square" lIns="0" tIns="0" rIns="0" bIns="0" anchor="t" anchorCtr="0">
+            <a:noAutofit/>
+          </a:bodyPr>
+          <a:lstStyle/>
+          <a:p>
+            <a:pPr marL="0" marR="0" lvl="0" indent="0" algn="l" rtl="0">
               <a:lnSpc>
                 <a:spcPct val="89000"/>
               </a:lnSpc>
@@ -4503,7 +4751,7 @@
               <a:buNone/>
             </a:pPr>
             <a:r>
-              <a:rPr b="0" i="0" lang="en-US" sz="2550" u="none" cap="none" strike="noStrike">
+              <a:rPr lang="en-US" sz="2550" b="0" i="0" u="none" strike="noStrike" cap="none">
                 <a:solidFill>
                   <a:srgbClr val="ECECEC"/>
                 </a:solidFill>
@@ -4514,7 +4762,7 @@
               </a:rPr>
               <a:t>Financial text is messy, nuanced, and full of noise</a:t>
             </a:r>
-            <a:endParaRPr b="0" i="0" sz="2550" u="none" cap="none" strike="noStrike">
+            <a:endParaRPr sz="2550" b="0" i="0" u="none" strike="noStrike" cap="none">
               <a:solidFill>
                 <a:schemeClr val="dk1"/>
               </a:solidFill>
@@ -4539,7 +4787,7 @@
           </a:xfrm>
           <a:prstGeom prst="roundRect">
             <a:avLst>
-              <a:gd fmla="val 50000" name="adj"/>
+              <a:gd name="adj" fmla="val 50000"/>
             </a:avLst>
           </a:prstGeom>
           <a:solidFill>
@@ -4550,23 +4798,20 @@
           </a:ln>
         </p:spPr>
         <p:txBody>
-          <a:bodyPr anchorCtr="0" anchor="ctr" bIns="91425" lIns="91425" spcFirstLastPara="1" rIns="91425" wrap="square" tIns="91425">
-            <a:noAutofit/>
-          </a:bodyPr>
-          <a:lstStyle/>
-          <a:p>
-            <a:pPr indent="0" lvl="0" marL="0" rtl="0" algn="l">
-              <a:spcBef>
-                <a:spcPts val="0"/>
-              </a:spcBef>
-              <a:spcAft>
-                <a:spcPts val="0"/>
-              </a:spcAft>
-              <a:buNone/>
-            </a:pPr>
-            <a:r>
-              <a:t/>
-            </a:r>
+          <a:bodyPr spcFirstLastPara="1" wrap="square" lIns="91425" tIns="91425" rIns="91425" bIns="91425" anchor="ctr" anchorCtr="0">
+            <a:noAutofit/>
+          </a:bodyPr>
+          <a:lstStyle/>
+          <a:p>
+            <a:pPr marL="0" lvl="0" indent="0" algn="l" rtl="0">
+              <a:spcBef>
+                <a:spcPts val="0"/>
+              </a:spcBef>
+              <a:spcAft>
+                <a:spcPts val="0"/>
+              </a:spcAft>
+              <a:buNone/>
+            </a:pPr>
             <a:endParaRPr/>
           </a:p>
         </p:txBody>
@@ -4591,12 +4836,12 @@
           </a:ln>
         </p:spPr>
         <p:txBody>
-          <a:bodyPr anchorCtr="0" anchor="t" bIns="0" lIns="0" spcFirstLastPara="1" rIns="0" wrap="square" tIns="0">
-            <a:noAutofit/>
-          </a:bodyPr>
-          <a:lstStyle/>
-          <a:p>
-            <a:pPr indent="0" lvl="0" marL="0" marR="0" rtl="0" algn="l">
+          <a:bodyPr spcFirstLastPara="1" wrap="square" lIns="0" tIns="0" rIns="0" bIns="0" anchor="t" anchorCtr="0">
+            <a:noAutofit/>
+          </a:bodyPr>
+          <a:lstStyle/>
+          <a:p>
+            <a:pPr marL="0" marR="0" lvl="0" indent="0" algn="l" rtl="0">
               <a:lnSpc>
                 <a:spcPct val="118000"/>
               </a:lnSpc>
@@ -4614,7 +4859,7 @@
               <a:buNone/>
             </a:pPr>
             <a:r>
-              <a:rPr b="0" i="0" lang="en-US" sz="1350" u="none" cap="none" strike="noStrike">
+              <a:rPr lang="en-US" sz="1350" b="0" i="0" u="none" strike="noStrike" cap="none">
                 <a:solidFill>
                   <a:srgbClr val="D5D5D5"/>
                 </a:solidFill>
@@ -4625,7 +4870,7 @@
               </a:rPr>
               <a:t>Three structural hurdles break standard NLP systems before they reach production.</a:t>
             </a:r>
-            <a:endParaRPr b="0" i="0" sz="1350" u="none" cap="none" strike="noStrike">
+            <a:endParaRPr sz="1350" b="0" i="0" u="none" strike="noStrike" cap="none">
               <a:solidFill>
                 <a:schemeClr val="dk1"/>
               </a:solidFill>
@@ -4659,23 +4904,20 @@
           </a:ln>
         </p:spPr>
         <p:txBody>
-          <a:bodyPr anchorCtr="0" anchor="ctr" bIns="91425" lIns="91425" spcFirstLastPara="1" rIns="91425" wrap="square" tIns="91425">
-            <a:noAutofit/>
-          </a:bodyPr>
-          <a:lstStyle/>
-          <a:p>
-            <a:pPr indent="0" lvl="0" marL="0" rtl="0" algn="l">
-              <a:spcBef>
-                <a:spcPts val="0"/>
-              </a:spcBef>
-              <a:spcAft>
-                <a:spcPts val="0"/>
-              </a:spcAft>
-              <a:buNone/>
-            </a:pPr>
-            <a:r>
-              <a:t/>
-            </a:r>
+          <a:bodyPr spcFirstLastPara="1" wrap="square" lIns="91425" tIns="91425" rIns="91425" bIns="91425" anchor="ctr" anchorCtr="0">
+            <a:noAutofit/>
+          </a:bodyPr>
+          <a:lstStyle/>
+          <a:p>
+            <a:pPr marL="0" lvl="0" indent="0" algn="l" rtl="0">
+              <a:spcBef>
+                <a:spcPts val="0"/>
+              </a:spcBef>
+              <a:spcAft>
+                <a:spcPts val="0"/>
+              </a:spcAft>
+              <a:buNone/>
+            </a:pPr>
             <a:endParaRPr/>
           </a:p>
         </p:txBody>
@@ -4700,12 +4942,12 @@
           </a:ln>
         </p:spPr>
         <p:txBody>
-          <a:bodyPr anchorCtr="0" anchor="t" bIns="0" lIns="0" spcFirstLastPara="1" rIns="0" wrap="square" tIns="0">
-            <a:noAutofit/>
-          </a:bodyPr>
-          <a:lstStyle/>
-          <a:p>
-            <a:pPr indent="0" lvl="0" marL="0" marR="0" rtl="0" algn="l">
+          <a:bodyPr spcFirstLastPara="1" wrap="square" lIns="0" tIns="0" rIns="0" bIns="0" anchor="t" anchorCtr="0">
+            <a:noAutofit/>
+          </a:bodyPr>
+          <a:lstStyle/>
+          <a:p>
+            <a:pPr marL="0" marR="0" lvl="0" indent="0" algn="l" rtl="0">
               <a:lnSpc>
                 <a:spcPct val="78000"/>
               </a:lnSpc>
@@ -4723,7 +4965,7 @@
               <a:buNone/>
             </a:pPr>
             <a:r>
-              <a:rPr b="1" i="0" lang="en-US" sz="2350" u="none" cap="none" strike="noStrike">
+              <a:rPr lang="en-US" sz="2350" b="1" i="0" u="none" strike="noStrike" cap="none">
                 <a:solidFill>
                   <a:srgbClr val="D5D5D5"/>
                 </a:solidFill>
@@ -4734,7 +4976,7 @@
               </a:rPr>
               <a:t>01</a:t>
             </a:r>
-            <a:endParaRPr b="0" i="0" sz="2350" u="none" cap="none" strike="noStrike">
+            <a:endParaRPr sz="2350" b="0" i="0" u="none" strike="noStrike" cap="none">
               <a:solidFill>
                 <a:schemeClr val="dk1"/>
               </a:solidFill>
@@ -4766,12 +5008,12 @@
           </a:ln>
         </p:spPr>
         <p:txBody>
-          <a:bodyPr anchorCtr="0" anchor="t" bIns="0" lIns="0" spcFirstLastPara="1" rIns="0" wrap="square" tIns="0">
-            <a:noAutofit/>
-          </a:bodyPr>
-          <a:lstStyle/>
-          <a:p>
-            <a:pPr indent="0" lvl="0" marL="0" marR="0" rtl="0" algn="l">
+          <a:bodyPr spcFirstLastPara="1" wrap="square" lIns="0" tIns="0" rIns="0" bIns="0" anchor="t" anchorCtr="0">
+            <a:noAutofit/>
+          </a:bodyPr>
+          <a:lstStyle/>
+          <a:p>
+            <a:pPr marL="0" marR="0" lvl="0" indent="0" algn="l" rtl="0">
               <a:lnSpc>
                 <a:spcPct val="108000"/>
               </a:lnSpc>
@@ -4789,7 +5031,7 @@
               <a:buNone/>
             </a:pPr>
             <a:r>
-              <a:rPr b="0" i="0" lang="en-US" sz="900" u="none" cap="none" strike="noStrike">
+              <a:rPr lang="en-US" sz="900" b="0" i="0" u="none" strike="noStrike" cap="none">
                 <a:solidFill>
                   <a:srgbClr val="D5D5D5"/>
                 </a:solidFill>
@@ -4800,7 +5042,7 @@
               </a:rPr>
               <a:t>HIGH NOISE </a:t>
             </a:r>
-            <a:endParaRPr b="0" i="0" sz="900" u="none" cap="none" strike="noStrike">
+            <a:endParaRPr sz="900" b="0" i="0" u="none" strike="noStrike" cap="none">
               <a:solidFill>
                 <a:schemeClr val="dk1"/>
               </a:solidFill>
@@ -4811,7 +5053,7 @@
             </a:endParaRPr>
           </a:p>
           <a:p>
-            <a:pPr indent="0" lvl="0" marL="0" marR="0" rtl="0" algn="l">
+            <a:pPr marL="0" marR="0" lvl="0" indent="0" algn="l" rtl="0">
               <a:lnSpc>
                 <a:spcPct val="108000"/>
               </a:lnSpc>
@@ -4829,7 +5071,7 @@
               <a:buNone/>
             </a:pPr>
             <a:r>
-              <a:rPr b="0" i="0" lang="en-US" sz="900" u="none" cap="none" strike="noStrike">
+              <a:rPr lang="en-US" sz="900" b="0" i="0" u="none" strike="noStrike" cap="none">
                 <a:solidFill>
                   <a:srgbClr val="D5D5D5"/>
                 </a:solidFill>
@@ -4840,7 +5082,7 @@
               </a:rPr>
               <a:t>FLOOR</a:t>
             </a:r>
-            <a:endParaRPr b="0" i="0" sz="900" u="none" cap="none" strike="noStrike">
+            <a:endParaRPr sz="900" b="0" i="0" u="none" strike="noStrike" cap="none">
               <a:solidFill>
                 <a:schemeClr val="dk1"/>
               </a:solidFill>
@@ -4865,7 +5107,7 @@
           </a:xfrm>
           <a:prstGeom prst="roundRect">
             <a:avLst>
-              <a:gd fmla="val 50000" name="adj"/>
+              <a:gd name="adj" fmla="val 50000"/>
             </a:avLst>
           </a:prstGeom>
           <a:solidFill>
@@ -4876,23 +5118,20 @@
           </a:ln>
         </p:spPr>
         <p:txBody>
-          <a:bodyPr anchorCtr="0" anchor="ctr" bIns="91425" lIns="91425" spcFirstLastPara="1" rIns="91425" wrap="square" tIns="91425">
-            <a:noAutofit/>
-          </a:bodyPr>
-          <a:lstStyle/>
-          <a:p>
-            <a:pPr indent="0" lvl="0" marL="0" rtl="0" algn="l">
-              <a:spcBef>
-                <a:spcPts val="0"/>
-              </a:spcBef>
-              <a:spcAft>
-                <a:spcPts val="0"/>
-              </a:spcAft>
-              <a:buNone/>
-            </a:pPr>
-            <a:r>
-              <a:t/>
-            </a:r>
+          <a:bodyPr spcFirstLastPara="1" wrap="square" lIns="91425" tIns="91425" rIns="91425" bIns="91425" anchor="ctr" anchorCtr="0">
+            <a:noAutofit/>
+          </a:bodyPr>
+          <a:lstStyle/>
+          <a:p>
+            <a:pPr marL="0" lvl="0" indent="0" algn="l" rtl="0">
+              <a:spcBef>
+                <a:spcPts val="0"/>
+              </a:spcBef>
+              <a:spcAft>
+                <a:spcPts val="0"/>
+              </a:spcAft>
+              <a:buNone/>
+            </a:pPr>
             <a:endParaRPr/>
           </a:p>
         </p:txBody>
@@ -4917,12 +5156,12 @@
           </a:ln>
         </p:spPr>
         <p:txBody>
-          <a:bodyPr anchorCtr="0" anchor="t" bIns="0" lIns="0" spcFirstLastPara="1" rIns="0" wrap="square" tIns="0">
-            <a:noAutofit/>
-          </a:bodyPr>
-          <a:lstStyle/>
-          <a:p>
-            <a:pPr indent="0" lvl="0" marL="0" marR="0" rtl="0" algn="l">
+          <a:bodyPr spcFirstLastPara="1" wrap="square" lIns="0" tIns="0" rIns="0" bIns="0" anchor="t" anchorCtr="0">
+            <a:noAutofit/>
+          </a:bodyPr>
+          <a:lstStyle/>
+          <a:p>
+            <a:pPr marL="0" marR="0" lvl="0" indent="0" algn="l" rtl="0">
               <a:lnSpc>
                 <a:spcPct val="118000"/>
               </a:lnSpc>
@@ -4940,7 +5179,7 @@
               <a:buNone/>
             </a:pPr>
             <a:r>
-              <a:rPr b="0" i="0" lang="en-US" sz="1000" u="none" cap="none" strike="noStrike">
+              <a:rPr lang="en-US" sz="1000" b="0" i="0" u="none" strike="noStrike" cap="none">
                 <a:solidFill>
                   <a:srgbClr val="D5D5D5"/>
                 </a:solidFill>
@@ -4951,7 +5190,7 @@
               </a:rPr>
               <a:t>Raw financial web crawls return celebrity gossip, clickbait, and unrelated PR spam that dilute genuine market fundamentals.</a:t>
             </a:r>
-            <a:endParaRPr b="0" i="0" sz="1000" u="none" cap="none" strike="noStrike">
+            <a:endParaRPr sz="1000" b="0" i="0" u="none" strike="noStrike" cap="none">
               <a:solidFill>
                 <a:schemeClr val="dk1"/>
               </a:solidFill>
@@ -4983,12 +5222,12 @@
           </a:ln>
         </p:spPr>
         <p:txBody>
-          <a:bodyPr anchorCtr="0" anchor="t" bIns="0" lIns="0" spcFirstLastPara="1" rIns="0" wrap="square" tIns="0">
-            <a:noAutofit/>
-          </a:bodyPr>
-          <a:lstStyle/>
-          <a:p>
-            <a:pPr indent="0" lvl="0" marL="0" marR="0" rtl="0" algn="l">
+          <a:bodyPr spcFirstLastPara="1" wrap="square" lIns="0" tIns="0" rIns="0" bIns="0" anchor="t" anchorCtr="0">
+            <a:noAutofit/>
+          </a:bodyPr>
+          <a:lstStyle/>
+          <a:p>
+            <a:pPr marL="0" marR="0" lvl="0" indent="0" algn="l" rtl="0">
               <a:lnSpc>
                 <a:spcPct val="108000"/>
               </a:lnSpc>
@@ -5006,7 +5245,7 @@
               <a:buNone/>
             </a:pPr>
             <a:r>
-              <a:rPr b="0" i="0" lang="en-US" sz="850" u="none" cap="none" strike="noStrike">
+              <a:rPr lang="en-US" sz="850" b="0" i="0" u="none" strike="noStrike" cap="none">
                 <a:solidFill>
                   <a:srgbClr val="D5D5D5"/>
                 </a:solidFill>
@@ -5017,7 +5256,7 @@
               </a:rPr>
               <a:t>IMPACT ON : DATA INGESTION</a:t>
             </a:r>
-            <a:endParaRPr b="0" i="0" sz="850" u="none" cap="none" strike="noStrike">
+            <a:endParaRPr sz="850" b="0" i="0" u="none" strike="noStrike" cap="none">
               <a:solidFill>
                 <a:schemeClr val="dk1"/>
               </a:solidFill>
@@ -5051,23 +5290,20 @@
           </a:ln>
         </p:spPr>
         <p:txBody>
-          <a:bodyPr anchorCtr="0" anchor="ctr" bIns="91425" lIns="91425" spcFirstLastPara="1" rIns="91425" wrap="square" tIns="91425">
-            <a:noAutofit/>
-          </a:bodyPr>
-          <a:lstStyle/>
-          <a:p>
-            <a:pPr indent="0" lvl="0" marL="0" rtl="0" algn="l">
-              <a:spcBef>
-                <a:spcPts val="0"/>
-              </a:spcBef>
-              <a:spcAft>
-                <a:spcPts val="0"/>
-              </a:spcAft>
-              <a:buNone/>
-            </a:pPr>
-            <a:r>
-              <a:t/>
-            </a:r>
+          <a:bodyPr spcFirstLastPara="1" wrap="square" lIns="91425" tIns="91425" rIns="91425" bIns="91425" anchor="ctr" anchorCtr="0">
+            <a:noAutofit/>
+          </a:bodyPr>
+          <a:lstStyle/>
+          <a:p>
+            <a:pPr marL="0" lvl="0" indent="0" algn="l" rtl="0">
+              <a:spcBef>
+                <a:spcPts val="0"/>
+              </a:spcBef>
+              <a:spcAft>
+                <a:spcPts val="0"/>
+              </a:spcAft>
+              <a:buNone/>
+            </a:pPr>
             <a:endParaRPr/>
           </a:p>
         </p:txBody>
@@ -5092,12 +5328,12 @@
           </a:ln>
         </p:spPr>
         <p:txBody>
-          <a:bodyPr anchorCtr="0" anchor="t" bIns="0" lIns="0" spcFirstLastPara="1" rIns="0" wrap="square" tIns="0">
-            <a:noAutofit/>
-          </a:bodyPr>
-          <a:lstStyle/>
-          <a:p>
-            <a:pPr indent="0" lvl="0" marL="0" marR="0" rtl="0" algn="l">
+          <a:bodyPr spcFirstLastPara="1" wrap="square" lIns="0" tIns="0" rIns="0" bIns="0" anchor="t" anchorCtr="0">
+            <a:noAutofit/>
+          </a:bodyPr>
+          <a:lstStyle/>
+          <a:p>
+            <a:pPr marL="0" marR="0" lvl="0" indent="0" algn="l" rtl="0">
               <a:lnSpc>
                 <a:spcPct val="78000"/>
               </a:lnSpc>
@@ -5115,7 +5351,7 @@
               <a:buNone/>
             </a:pPr>
             <a:r>
-              <a:rPr b="1" i="0" lang="en-US" sz="2350" u="none" cap="none" strike="noStrike">
+              <a:rPr lang="en-US" sz="2350" b="1" i="0" u="none" strike="noStrike" cap="none">
                 <a:solidFill>
                   <a:srgbClr val="FFFFFF"/>
                 </a:solidFill>
@@ -5126,7 +5362,7 @@
               </a:rPr>
               <a:t>02</a:t>
             </a:r>
-            <a:endParaRPr b="0" i="0" sz="2350" u="none" cap="none" strike="noStrike">
+            <a:endParaRPr sz="2350" b="0" i="0" u="none" strike="noStrike" cap="none">
               <a:solidFill>
                 <a:schemeClr val="dk1"/>
               </a:solidFill>
@@ -5158,12 +5394,12 @@
           </a:ln>
         </p:spPr>
         <p:txBody>
-          <a:bodyPr anchorCtr="0" anchor="t" bIns="0" lIns="0" spcFirstLastPara="1" rIns="0" wrap="square" tIns="0">
-            <a:noAutofit/>
-          </a:bodyPr>
-          <a:lstStyle/>
-          <a:p>
-            <a:pPr indent="0" lvl="0" marL="0" marR="0" rtl="0" algn="l">
+          <a:bodyPr spcFirstLastPara="1" wrap="square" lIns="0" tIns="0" rIns="0" bIns="0" anchor="t" anchorCtr="0">
+            <a:noAutofit/>
+          </a:bodyPr>
+          <a:lstStyle/>
+          <a:p>
+            <a:pPr marL="0" marR="0" lvl="0" indent="0" algn="l" rtl="0">
               <a:lnSpc>
                 <a:spcPct val="108000"/>
               </a:lnSpc>
@@ -5181,7 +5417,7 @@
               <a:buNone/>
             </a:pPr>
             <a:r>
-              <a:rPr b="0" i="0" lang="en-US" sz="900" u="none" cap="none" strike="noStrike">
+              <a:rPr lang="en-US" sz="900" b="0" i="0" u="none" strike="noStrike" cap="none">
                 <a:solidFill>
                   <a:srgbClr val="FFFFFF"/>
                 </a:solidFill>
@@ -5192,7 +5428,7 @@
               </a:rPr>
               <a:t>CONTEXTUAL NUANCE</a:t>
             </a:r>
-            <a:endParaRPr b="0" i="0" sz="900" u="none" cap="none" strike="noStrike">
+            <a:endParaRPr sz="900" b="0" i="0" u="none" strike="noStrike" cap="none">
               <a:solidFill>
                 <a:schemeClr val="dk1"/>
               </a:solidFill>
@@ -5217,7 +5453,7 @@
           </a:xfrm>
           <a:prstGeom prst="roundRect">
             <a:avLst>
-              <a:gd fmla="val 50000" name="adj"/>
+              <a:gd name="adj" fmla="val 50000"/>
             </a:avLst>
           </a:prstGeom>
           <a:solidFill>
@@ -5228,23 +5464,20 @@
           </a:ln>
         </p:spPr>
         <p:txBody>
-          <a:bodyPr anchorCtr="0" anchor="ctr" bIns="91425" lIns="91425" spcFirstLastPara="1" rIns="91425" wrap="square" tIns="91425">
-            <a:noAutofit/>
-          </a:bodyPr>
-          <a:lstStyle/>
-          <a:p>
-            <a:pPr indent="0" lvl="0" marL="0" rtl="0" algn="l">
-              <a:spcBef>
-                <a:spcPts val="0"/>
-              </a:spcBef>
-              <a:spcAft>
-                <a:spcPts val="0"/>
-              </a:spcAft>
-              <a:buNone/>
-            </a:pPr>
-            <a:r>
-              <a:t/>
-            </a:r>
+          <a:bodyPr spcFirstLastPara="1" wrap="square" lIns="91425" tIns="91425" rIns="91425" bIns="91425" anchor="ctr" anchorCtr="0">
+            <a:noAutofit/>
+          </a:bodyPr>
+          <a:lstStyle/>
+          <a:p>
+            <a:pPr marL="0" lvl="0" indent="0" algn="l" rtl="0">
+              <a:spcBef>
+                <a:spcPts val="0"/>
+              </a:spcBef>
+              <a:spcAft>
+                <a:spcPts val="0"/>
+              </a:spcAft>
+              <a:buNone/>
+            </a:pPr>
             <a:endParaRPr/>
           </a:p>
         </p:txBody>
@@ -5269,12 +5502,12 @@
           </a:ln>
         </p:spPr>
         <p:txBody>
-          <a:bodyPr anchorCtr="0" anchor="t" bIns="0" lIns="0" spcFirstLastPara="1" rIns="0" wrap="square" tIns="0">
-            <a:noAutofit/>
-          </a:bodyPr>
-          <a:lstStyle/>
-          <a:p>
-            <a:pPr indent="0" lvl="0" marL="0" marR="0" rtl="0" algn="l">
+          <a:bodyPr spcFirstLastPara="1" wrap="square" lIns="0" tIns="0" rIns="0" bIns="0" anchor="t" anchorCtr="0">
+            <a:noAutofit/>
+          </a:bodyPr>
+          <a:lstStyle/>
+          <a:p>
+            <a:pPr marL="0" marR="0" lvl="0" indent="0" algn="l" rtl="0">
               <a:lnSpc>
                 <a:spcPct val="118000"/>
               </a:lnSpc>
@@ -5292,7 +5525,7 @@
               <a:buNone/>
             </a:pPr>
             <a:r>
-              <a:rPr b="0" i="0" lang="en-US" sz="1000" u="none" cap="none" strike="noStrike">
+              <a:rPr lang="en-US" sz="1000" b="0" i="0" u="none" strike="noStrike" cap="none">
                 <a:solidFill>
                   <a:srgbClr val="FFFFFF"/>
                 </a:solidFill>
@@ -5303,7 +5536,7 @@
               </a:rPr>
               <a:t>General AI trips on financial phrasing: "Ferrari's chairman is bullish on AI" should not trigger an Nvidia selloff, and "shrugged off recession fears" is not bad news.</a:t>
             </a:r>
-            <a:endParaRPr b="0" i="0" sz="1000" u="none" cap="none" strike="noStrike">
+            <a:endParaRPr sz="1000" b="0" i="0" u="none" strike="noStrike" cap="none">
               <a:solidFill>
                 <a:schemeClr val="dk1"/>
               </a:solidFill>
@@ -5335,12 +5568,12 @@
           </a:ln>
         </p:spPr>
         <p:txBody>
-          <a:bodyPr anchorCtr="0" anchor="t" bIns="0" lIns="0" spcFirstLastPara="1" rIns="0" wrap="square" tIns="0">
-            <a:noAutofit/>
-          </a:bodyPr>
-          <a:lstStyle/>
-          <a:p>
-            <a:pPr indent="0" lvl="0" marL="0" marR="0" rtl="0" algn="l">
+          <a:bodyPr spcFirstLastPara="1" wrap="square" lIns="0" tIns="0" rIns="0" bIns="0" anchor="t" anchorCtr="0">
+            <a:noAutofit/>
+          </a:bodyPr>
+          <a:lstStyle/>
+          <a:p>
+            <a:pPr marL="0" marR="0" lvl="0" indent="0" algn="l" rtl="0">
               <a:lnSpc>
                 <a:spcPct val="108000"/>
               </a:lnSpc>
@@ -5358,7 +5591,7 @@
               <a:buNone/>
             </a:pPr>
             <a:r>
-              <a:rPr b="0" i="0" lang="en-US" sz="850" u="none" cap="none" strike="noStrike">
+              <a:rPr lang="en-US" sz="850" b="0" i="0" u="none" strike="noStrike" cap="none">
                 <a:solidFill>
                   <a:srgbClr val="FFFFFF"/>
                 </a:solidFill>
@@ -5369,7 +5602,7 @@
               </a:rPr>
               <a:t>IMPACT ON : ENTITY EXTRACTION</a:t>
             </a:r>
-            <a:endParaRPr b="0" i="0" sz="850" u="none" cap="none" strike="noStrike">
+            <a:endParaRPr sz="850" b="0" i="0" u="none" strike="noStrike" cap="none">
               <a:solidFill>
                 <a:schemeClr val="dk1"/>
               </a:solidFill>
@@ -5403,23 +5636,20 @@
           </a:ln>
         </p:spPr>
         <p:txBody>
-          <a:bodyPr anchorCtr="0" anchor="ctr" bIns="91425" lIns="91425" spcFirstLastPara="1" rIns="91425" wrap="square" tIns="91425">
-            <a:noAutofit/>
-          </a:bodyPr>
-          <a:lstStyle/>
-          <a:p>
-            <a:pPr indent="0" lvl="0" marL="0" rtl="0" algn="l">
-              <a:spcBef>
-                <a:spcPts val="0"/>
-              </a:spcBef>
-              <a:spcAft>
-                <a:spcPts val="0"/>
-              </a:spcAft>
-              <a:buNone/>
-            </a:pPr>
-            <a:r>
-              <a:t/>
-            </a:r>
+          <a:bodyPr spcFirstLastPara="1" wrap="square" lIns="91425" tIns="91425" rIns="91425" bIns="91425" anchor="ctr" anchorCtr="0">
+            <a:noAutofit/>
+          </a:bodyPr>
+          <a:lstStyle/>
+          <a:p>
+            <a:pPr marL="0" lvl="0" indent="0" algn="l" rtl="0">
+              <a:spcBef>
+                <a:spcPts val="0"/>
+              </a:spcBef>
+              <a:spcAft>
+                <a:spcPts val="0"/>
+              </a:spcAft>
+              <a:buNone/>
+            </a:pPr>
             <a:endParaRPr/>
           </a:p>
         </p:txBody>
@@ -5444,12 +5674,12 @@
           </a:ln>
         </p:spPr>
         <p:txBody>
-          <a:bodyPr anchorCtr="0" anchor="t" bIns="0" lIns="0" spcFirstLastPara="1" rIns="0" wrap="square" tIns="0">
-            <a:noAutofit/>
-          </a:bodyPr>
-          <a:lstStyle/>
-          <a:p>
-            <a:pPr indent="0" lvl="0" marL="0" marR="0" rtl="0" algn="l">
+          <a:bodyPr spcFirstLastPara="1" wrap="square" lIns="0" tIns="0" rIns="0" bIns="0" anchor="t" anchorCtr="0">
+            <a:noAutofit/>
+          </a:bodyPr>
+          <a:lstStyle/>
+          <a:p>
+            <a:pPr marL="0" marR="0" lvl="0" indent="0" algn="l" rtl="0">
               <a:lnSpc>
                 <a:spcPct val="78000"/>
               </a:lnSpc>
@@ -5467,7 +5697,7 @@
               <a:buNone/>
             </a:pPr>
             <a:r>
-              <a:rPr b="1" i="0" lang="en-US" sz="2350" u="none" cap="none" strike="noStrike">
+              <a:rPr lang="en-US" sz="2350" b="1" i="0" u="none" strike="noStrike" cap="none">
                 <a:solidFill>
                   <a:srgbClr val="FFFFFF"/>
                 </a:solidFill>
@@ -5478,7 +5708,7 @@
               </a:rPr>
               <a:t>03</a:t>
             </a:r>
-            <a:endParaRPr b="0" i="0" sz="2350" u="none" cap="none" strike="noStrike">
+            <a:endParaRPr sz="2350" b="0" i="0" u="none" strike="noStrike" cap="none">
               <a:solidFill>
                 <a:schemeClr val="dk1"/>
               </a:solidFill>
@@ -5510,12 +5740,12 @@
           </a:ln>
         </p:spPr>
         <p:txBody>
-          <a:bodyPr anchorCtr="0" anchor="t" bIns="0" lIns="0" spcFirstLastPara="1" rIns="0" wrap="square" tIns="0">
-            <a:noAutofit/>
-          </a:bodyPr>
-          <a:lstStyle/>
-          <a:p>
-            <a:pPr indent="0" lvl="0" marL="0" marR="0" rtl="0" algn="l">
+          <a:bodyPr spcFirstLastPara="1" wrap="square" lIns="0" tIns="0" rIns="0" bIns="0" anchor="t" anchorCtr="0">
+            <a:noAutofit/>
+          </a:bodyPr>
+          <a:lstStyle/>
+          <a:p>
+            <a:pPr marL="0" marR="0" lvl="0" indent="0" algn="l" rtl="0">
               <a:lnSpc>
                 <a:spcPct val="108000"/>
               </a:lnSpc>
@@ -5533,7 +5763,7 @@
               <a:buNone/>
             </a:pPr>
             <a:r>
-              <a:rPr b="0" i="0" lang="en-US" sz="900" u="none" cap="none" strike="noStrike">
+              <a:rPr lang="en-US" sz="900" b="0" i="0" u="none" strike="noStrike" cap="none">
                 <a:solidFill>
                   <a:srgbClr val="FFFFFF"/>
                 </a:solidFill>
@@ -5544,7 +5774,7 @@
               </a:rPr>
               <a:t>SPEED V/S ACCURACY</a:t>
             </a:r>
-            <a:endParaRPr b="0" i="0" sz="900" u="none" cap="none" strike="noStrike">
+            <a:endParaRPr sz="900" b="0" i="0" u="none" strike="noStrike" cap="none">
               <a:solidFill>
                 <a:schemeClr val="dk1"/>
               </a:solidFill>
@@ -5569,7 +5799,7 @@
           </a:xfrm>
           <a:prstGeom prst="roundRect">
             <a:avLst>
-              <a:gd fmla="val 50000" name="adj"/>
+              <a:gd name="adj" fmla="val 50000"/>
             </a:avLst>
           </a:prstGeom>
           <a:solidFill>
@@ -5580,23 +5810,20 @@
           </a:ln>
         </p:spPr>
         <p:txBody>
-          <a:bodyPr anchorCtr="0" anchor="ctr" bIns="91425" lIns="91425" spcFirstLastPara="1" rIns="91425" wrap="square" tIns="91425">
-            <a:noAutofit/>
-          </a:bodyPr>
-          <a:lstStyle/>
-          <a:p>
-            <a:pPr indent="0" lvl="0" marL="0" rtl="0" algn="l">
-              <a:spcBef>
-                <a:spcPts val="0"/>
-              </a:spcBef>
-              <a:spcAft>
-                <a:spcPts val="0"/>
-              </a:spcAft>
-              <a:buNone/>
-            </a:pPr>
-            <a:r>
-              <a:t/>
-            </a:r>
+          <a:bodyPr spcFirstLastPara="1" wrap="square" lIns="91425" tIns="91425" rIns="91425" bIns="91425" anchor="ctr" anchorCtr="0">
+            <a:noAutofit/>
+          </a:bodyPr>
+          <a:lstStyle/>
+          <a:p>
+            <a:pPr marL="0" lvl="0" indent="0" algn="l" rtl="0">
+              <a:spcBef>
+                <a:spcPts val="0"/>
+              </a:spcBef>
+              <a:spcAft>
+                <a:spcPts val="0"/>
+              </a:spcAft>
+              <a:buNone/>
+            </a:pPr>
             <a:endParaRPr/>
           </a:p>
         </p:txBody>
@@ -5621,12 +5848,12 @@
           </a:ln>
         </p:spPr>
         <p:txBody>
-          <a:bodyPr anchorCtr="0" anchor="t" bIns="0" lIns="0" spcFirstLastPara="1" rIns="0" wrap="square" tIns="0">
-            <a:noAutofit/>
-          </a:bodyPr>
-          <a:lstStyle/>
-          <a:p>
-            <a:pPr indent="0" lvl="0" marL="0" marR="0" rtl="0" algn="l">
+          <a:bodyPr spcFirstLastPara="1" wrap="square" lIns="0" tIns="0" rIns="0" bIns="0" anchor="t" anchorCtr="0">
+            <a:noAutofit/>
+          </a:bodyPr>
+          <a:lstStyle/>
+          <a:p>
+            <a:pPr marL="0" marR="0" lvl="0" indent="0" algn="l" rtl="0">
               <a:lnSpc>
                 <a:spcPct val="118000"/>
               </a:lnSpc>
@@ -5644,7 +5871,7 @@
               <a:buNone/>
             </a:pPr>
             <a:r>
-              <a:rPr b="0" i="0" lang="en-US" sz="1000" u="none" cap="none" strike="noStrike">
+              <a:rPr lang="en-US" sz="1000" b="0" i="0" u="none" strike="noStrike" cap="none">
                 <a:solidFill>
                   <a:srgbClr val="FFFFFF"/>
                 </a:solidFill>
@@ -5655,7 +5882,7 @@
               </a:rPr>
               <a:t>Heavy transformer models deliver high precision but grind throughput to a halt if evaluated indiscriminately over every raw incoming feed.</a:t>
             </a:r>
-            <a:endParaRPr b="0" i="0" sz="1000" u="none" cap="none" strike="noStrike">
+            <a:endParaRPr sz="1000" b="0" i="0" u="none" strike="noStrike" cap="none">
               <a:solidFill>
                 <a:schemeClr val="dk1"/>
               </a:solidFill>
@@ -5687,12 +5914,12 @@
           </a:ln>
         </p:spPr>
         <p:txBody>
-          <a:bodyPr anchorCtr="0" anchor="t" bIns="0" lIns="0" spcFirstLastPara="1" rIns="0" wrap="square" tIns="0">
-            <a:noAutofit/>
-          </a:bodyPr>
-          <a:lstStyle/>
-          <a:p>
-            <a:pPr indent="0" lvl="0" marL="0" marR="0" rtl="0" algn="l">
+          <a:bodyPr spcFirstLastPara="1" wrap="square" lIns="0" tIns="0" rIns="0" bIns="0" anchor="t" anchorCtr="0">
+            <a:noAutofit/>
+          </a:bodyPr>
+          <a:lstStyle/>
+          <a:p>
+            <a:pPr marL="0" marR="0" lvl="0" indent="0" algn="l" rtl="0">
               <a:lnSpc>
                 <a:spcPct val="108000"/>
               </a:lnSpc>
@@ -5710,7 +5937,7 @@
               <a:buNone/>
             </a:pPr>
             <a:r>
-              <a:rPr b="0" i="0" lang="en-US" sz="850" u="none" cap="none" strike="noStrike">
+              <a:rPr lang="en-US" sz="850" b="0" i="0" u="none" strike="noStrike" cap="none">
                 <a:solidFill>
                   <a:srgbClr val="FFFFFF"/>
                 </a:solidFill>
@@ -5721,7 +5948,7 @@
               </a:rPr>
               <a:t>IMPACT ON : INFERENCE LATENCY</a:t>
             </a:r>
-            <a:endParaRPr b="0" i="0" sz="850" u="none" cap="none" strike="noStrike">
+            <a:endParaRPr sz="850" b="0" i="0" u="none" strike="noStrike" cap="none">
               <a:solidFill>
                 <a:schemeClr val="dk1"/>
               </a:solidFill>
@@ -5753,12 +5980,12 @@
           </a:ln>
         </p:spPr>
         <p:txBody>
-          <a:bodyPr anchorCtr="0" anchor="ctr" bIns="0" lIns="0" spcFirstLastPara="1" rIns="0" wrap="square" tIns="0">
-            <a:noAutofit/>
-          </a:bodyPr>
-          <a:lstStyle/>
-          <a:p>
-            <a:pPr indent="0" lvl="0" marL="0" marR="0" rtl="0" algn="l">
+          <a:bodyPr spcFirstLastPara="1" wrap="square" lIns="0" tIns="0" rIns="0" bIns="0" anchor="ctr" anchorCtr="0">
+            <a:noAutofit/>
+          </a:bodyPr>
+          <a:lstStyle/>
+          <a:p>
+            <a:pPr marL="0" marR="0" lvl="0" indent="0" algn="l" rtl="0">
               <a:lnSpc>
                 <a:spcPct val="118000"/>
               </a:lnSpc>
@@ -5776,7 +6003,7 @@
               <a:buNone/>
             </a:pPr>
             <a:r>
-              <a:rPr b="0" i="0" lang="en-US" sz="800" u="none" cap="none" strike="noStrike">
+              <a:rPr lang="en-US" sz="800" b="0" i="0" u="none" strike="noStrike" cap="none">
                 <a:solidFill>
                   <a:srgbClr val="9D9D9D"/>
                 </a:solidFill>
@@ -5787,7 +6014,7 @@
               </a:rPr>
               <a:t>02</a:t>
             </a:r>
-            <a:endParaRPr b="0" i="0" sz="800" u="none" cap="none" strike="noStrike">
+            <a:endParaRPr sz="800" b="0" i="0" u="none" strike="noStrike" cap="none">
               <a:solidFill>
                 <a:schemeClr val="dk1"/>
               </a:solidFill>
@@ -5821,23 +6048,20 @@
           </a:ln>
         </p:spPr>
         <p:txBody>
-          <a:bodyPr anchorCtr="0" anchor="t" bIns="91425" lIns="91425" spcFirstLastPara="1" rIns="91425" wrap="square" tIns="91425">
-            <a:noAutofit/>
-          </a:bodyPr>
-          <a:lstStyle/>
-          <a:p>
-            <a:pPr indent="0" lvl="0" marL="0" rtl="0" algn="l">
-              <a:spcBef>
-                <a:spcPts val="0"/>
-              </a:spcBef>
-              <a:spcAft>
-                <a:spcPts val="0"/>
-              </a:spcAft>
-              <a:buNone/>
-            </a:pPr>
-            <a:r>
-              <a:t/>
-            </a:r>
+          <a:bodyPr spcFirstLastPara="1" wrap="square" lIns="91425" tIns="91425" rIns="91425" bIns="91425" anchor="t" anchorCtr="0">
+            <a:noAutofit/>
+          </a:bodyPr>
+          <a:lstStyle/>
+          <a:p>
+            <a:pPr marL="0" lvl="0" indent="0" algn="l" rtl="0">
+              <a:spcBef>
+                <a:spcPts val="0"/>
+              </a:spcBef>
+              <a:spcAft>
+                <a:spcPts val="0"/>
+              </a:spcAft>
+              <a:buNone/>
+            </a:pPr>
             <a:endParaRPr/>
           </a:p>
         </p:txBody>
@@ -5851,11 +6075,11 @@
 </file>
 
 <file path=ppt/slides/slide3.xml><?xml version="1.0" encoding="utf-8"?>
-<p:sld xmlns:a="http://schemas.openxmlformats.org/drawingml/2006/main" xmlns:r="http://schemas.openxmlformats.org/officeDocument/2006/relationships" xmlns:mc="http://schemas.openxmlformats.org/markup-compatibility/2006" xmlns:mv="urn:schemas-microsoft-com:mac:vml" xmlns:p="http://schemas.openxmlformats.org/presentationml/2006/main" xmlns:c="http://schemas.openxmlformats.org/drawingml/2006/chart" xmlns:dgm="http://schemas.openxmlformats.org/drawingml/2006/diagram" xmlns:o="urn:schemas-microsoft-com:office:office" xmlns:v="urn:schemas-microsoft-com:vml" xmlns:pvml="urn:schemas-microsoft-com:office:powerpoint" xmlns:com="http://schemas.openxmlformats.org/drawingml/2006/compatibility" xmlns:p14="http://schemas.microsoft.com/office/powerpoint/2010/main" xmlns:p15="http://schemas.microsoft.com/office/powerpoint/2012/main" xmlns:ahyp="http://schemas.microsoft.com/office/drawing/2018/hyperlinkcolor">
+<p:sld xmlns:a="http://schemas.openxmlformats.org/drawingml/2006/main" xmlns:r="http://schemas.openxmlformats.org/officeDocument/2006/relationships" xmlns:p="http://schemas.openxmlformats.org/presentationml/2006/main">
   <p:cSld>
     <p:spTree>
       <p:nvGrpSpPr>
-        <p:cNvPr id="69" name="Shape 69"/>
+        <p:cNvPr id="1" name="Shape 69"/>
         <p:cNvGrpSpPr/>
         <p:nvPr/>
       </p:nvGrpSpPr>
@@ -5887,12 +6111,12 @@
           </a:ln>
         </p:spPr>
         <p:txBody>
-          <a:bodyPr anchorCtr="0" anchor="t" bIns="0" lIns="0" spcFirstLastPara="1" rIns="0" wrap="square" tIns="0">
-            <a:noAutofit/>
-          </a:bodyPr>
-          <a:lstStyle/>
-          <a:p>
-            <a:pPr indent="0" lvl="0" marL="0" marR="0" rtl="0" algn="l">
+          <a:bodyPr spcFirstLastPara="1" wrap="square" lIns="0" tIns="0" rIns="0" bIns="0" anchor="t" anchorCtr="0">
+            <a:noAutofit/>
+          </a:bodyPr>
+          <a:lstStyle/>
+          <a:p>
+            <a:pPr marL="0" marR="0" lvl="0" indent="0" algn="l" rtl="0">
               <a:lnSpc>
                 <a:spcPct val="108000"/>
               </a:lnSpc>
@@ -5910,7 +6134,7 @@
               <a:buNone/>
             </a:pPr>
             <a:r>
-              <a:rPr b="0" i="0" lang="en-US" sz="850" u="none" cap="none" strike="noStrike">
+              <a:rPr lang="en-US" sz="850" b="0" i="0" u="none" strike="noStrike" cap="none">
                 <a:solidFill>
                   <a:srgbClr val="B5B5B5"/>
                 </a:solidFill>
@@ -5921,7 +6145,7 @@
               </a:rPr>
               <a:t>ARCHITECTURE</a:t>
             </a:r>
-            <a:endParaRPr b="0" i="0" sz="850" u="none" cap="none" strike="noStrike">
+            <a:endParaRPr sz="850" b="0" i="0" u="none" strike="noStrike" cap="none">
               <a:solidFill>
                 <a:schemeClr val="dk1"/>
               </a:solidFill>
@@ -5953,12 +6177,12 @@
           </a:ln>
         </p:spPr>
         <p:txBody>
-          <a:bodyPr anchorCtr="0" anchor="t" bIns="0" lIns="0" spcFirstLastPara="1" rIns="0" wrap="square" tIns="0">
-            <a:noAutofit/>
-          </a:bodyPr>
-          <a:lstStyle/>
-          <a:p>
-            <a:pPr indent="0" lvl="0" marL="0" marR="0" rtl="0" algn="l">
+          <a:bodyPr spcFirstLastPara="1" wrap="square" lIns="0" tIns="0" rIns="0" bIns="0" anchor="t" anchorCtr="0">
+            <a:noAutofit/>
+          </a:bodyPr>
+          <a:lstStyle/>
+          <a:p>
+            <a:pPr marL="0" marR="0" lvl="0" indent="0" algn="l" rtl="0">
               <a:lnSpc>
                 <a:spcPct val="89000"/>
               </a:lnSpc>
@@ -5976,7 +6200,7 @@
               <a:buNone/>
             </a:pPr>
             <a:r>
-              <a:rPr b="0" i="0" lang="en-US" sz="2550" u="none" cap="none" strike="noStrike">
+              <a:rPr lang="en-US" sz="2550" b="0" i="0" u="none" strike="noStrike" cap="none">
                 <a:solidFill>
                   <a:srgbClr val="ECECEC"/>
                 </a:solidFill>
@@ -5987,7 +6211,7 @@
               </a:rPr>
               <a:t>How it works end to end : Four steps</a:t>
             </a:r>
-            <a:endParaRPr b="0" i="0" sz="2550" u="none" cap="none" strike="noStrike">
+            <a:endParaRPr sz="2550" b="0" i="0" u="none" strike="noStrike" cap="none">
               <a:solidFill>
                 <a:schemeClr val="dk1"/>
               </a:solidFill>
@@ -6019,12 +6243,12 @@
           </a:ln>
         </p:spPr>
         <p:txBody>
-          <a:bodyPr anchorCtr="0" anchor="t" bIns="0" lIns="0" spcFirstLastPara="1" rIns="0" wrap="square" tIns="0">
-            <a:noAutofit/>
-          </a:bodyPr>
-          <a:lstStyle/>
-          <a:p>
-            <a:pPr indent="0" lvl="0" marL="0" marR="0" rtl="0" algn="l">
+          <a:bodyPr spcFirstLastPara="1" wrap="square" lIns="0" tIns="0" rIns="0" bIns="0" anchor="t" anchorCtr="0">
+            <a:noAutofit/>
+          </a:bodyPr>
+          <a:lstStyle/>
+          <a:p>
+            <a:pPr marL="0" marR="0" lvl="0" indent="0" algn="l" rtl="0">
               <a:lnSpc>
                 <a:spcPct val="83000"/>
               </a:lnSpc>
@@ -6042,7 +6266,7 @@
               <a:buNone/>
             </a:pPr>
             <a:r>
-              <a:rPr b="0" i="0" lang="en-US" sz="1150" u="none" cap="none" strike="noStrike">
+              <a:rPr lang="en-US" sz="1150" b="0" i="0" u="none" strike="noStrike" cap="none">
                 <a:solidFill>
                   <a:srgbClr val="9BE1FF"/>
                 </a:solidFill>
@@ -6053,7 +6277,7 @@
               </a:rPr>
               <a:t>01</a:t>
             </a:r>
-            <a:endParaRPr b="0" i="0" sz="1150" u="none" cap="none" strike="noStrike">
+            <a:endParaRPr sz="1150" b="0" i="0" u="none" strike="noStrike" cap="none">
               <a:solidFill>
                 <a:schemeClr val="dk1"/>
               </a:solidFill>
@@ -6087,23 +6311,20 @@
           </a:ln>
         </p:spPr>
         <p:txBody>
-          <a:bodyPr anchorCtr="0" anchor="ctr" bIns="91425" lIns="91425" spcFirstLastPara="1" rIns="91425" wrap="square" tIns="91425">
-            <a:noAutofit/>
-          </a:bodyPr>
-          <a:lstStyle/>
-          <a:p>
-            <a:pPr indent="0" lvl="0" marL="0" rtl="0" algn="l">
-              <a:spcBef>
-                <a:spcPts val="0"/>
-              </a:spcBef>
-              <a:spcAft>
-                <a:spcPts val="0"/>
-              </a:spcAft>
-              <a:buNone/>
-            </a:pPr>
-            <a:r>
-              <a:t/>
-            </a:r>
+          <a:bodyPr spcFirstLastPara="1" wrap="square" lIns="91425" tIns="91425" rIns="91425" bIns="91425" anchor="ctr" anchorCtr="0">
+            <a:noAutofit/>
+          </a:bodyPr>
+          <a:lstStyle/>
+          <a:p>
+            <a:pPr marL="0" lvl="0" indent="0" algn="l" rtl="0">
+              <a:spcBef>
+                <a:spcPts val="0"/>
+              </a:spcBef>
+              <a:spcAft>
+                <a:spcPts val="0"/>
+              </a:spcAft>
+              <a:buNone/>
+            </a:pPr>
             <a:endParaRPr/>
           </a:p>
         </p:txBody>
@@ -6128,12 +6349,12 @@
           </a:ln>
         </p:spPr>
         <p:txBody>
-          <a:bodyPr anchorCtr="0" anchor="t" bIns="0" lIns="0" spcFirstLastPara="1" rIns="0" wrap="square" tIns="0">
-            <a:noAutofit/>
-          </a:bodyPr>
-          <a:lstStyle/>
-          <a:p>
-            <a:pPr indent="0" lvl="0" marL="0" marR="0" rtl="0" algn="l">
+          <a:bodyPr spcFirstLastPara="1" wrap="square" lIns="0" tIns="0" rIns="0" bIns="0" anchor="t" anchorCtr="0">
+            <a:noAutofit/>
+          </a:bodyPr>
+          <a:lstStyle/>
+          <a:p>
+            <a:pPr marL="0" marR="0" lvl="0" indent="0" algn="l" rtl="0">
               <a:lnSpc>
                 <a:spcPct val="108000"/>
               </a:lnSpc>
@@ -6151,7 +6372,7 @@
               <a:buNone/>
             </a:pPr>
             <a:r>
-              <a:rPr b="0" i="0" lang="en-US" sz="900" u="none" cap="none" strike="noStrike">
+              <a:rPr lang="en-US" sz="900" b="0" i="0" u="none" strike="noStrike" cap="none">
                 <a:solidFill>
                   <a:srgbClr val="D5D5D5"/>
                 </a:solidFill>
@@ -6162,7 +6383,7 @@
               </a:rPr>
               <a:t>CLEAN DATA INGESTION</a:t>
             </a:r>
-            <a:endParaRPr b="0" i="0" sz="900" u="none" cap="none" strike="noStrike">
+            <a:endParaRPr sz="900" b="0" i="0" u="none" strike="noStrike" cap="none">
               <a:solidFill>
                 <a:schemeClr val="dk1"/>
               </a:solidFill>
@@ -6194,12 +6415,12 @@
           </a:ln>
         </p:spPr>
         <p:txBody>
-          <a:bodyPr anchorCtr="0" anchor="t" bIns="0" lIns="0" spcFirstLastPara="1" rIns="0" wrap="square" tIns="0">
-            <a:noAutofit/>
-          </a:bodyPr>
-          <a:lstStyle/>
-          <a:p>
-            <a:pPr indent="0" lvl="0" marL="0" marR="0" rtl="0" algn="l">
+          <a:bodyPr spcFirstLastPara="1" wrap="square" lIns="0" tIns="0" rIns="0" bIns="0" anchor="t" anchorCtr="0">
+            <a:noAutofit/>
+          </a:bodyPr>
+          <a:lstStyle/>
+          <a:p>
+            <a:pPr marL="0" marR="0" lvl="0" indent="0" algn="l" rtl="0">
               <a:lnSpc>
                 <a:spcPct val="118000"/>
               </a:lnSpc>
@@ -6217,7 +6438,7 @@
               <a:buNone/>
             </a:pPr>
             <a:r>
-              <a:rPr b="0" i="0" lang="en-US" sz="1200" u="none" cap="none" strike="noStrike">
+              <a:rPr lang="en-US" sz="1200" b="0" i="0" u="none" strike="noStrike" cap="none">
                 <a:solidFill>
                   <a:srgbClr val="D5D5D5"/>
                 </a:solidFill>
@@ -6228,7 +6449,7 @@
               </a:rPr>
               <a:t>Live articles from 21 top financial outlets (Bloomberg, Reuters, WSJ, CNBC, FT, Barron's) plus a streaming social feed; anything not mentioning our companies or big macro institutions is dropped.</a:t>
             </a:r>
-            <a:endParaRPr b="0" i="0" sz="1200" u="none" cap="none" strike="noStrike">
+            <a:endParaRPr sz="1200" b="0" i="0" u="none" strike="noStrike" cap="none">
               <a:solidFill>
                 <a:schemeClr val="dk1"/>
               </a:solidFill>
@@ -6260,12 +6481,12 @@
           </a:ln>
         </p:spPr>
         <p:txBody>
-          <a:bodyPr anchorCtr="0" anchor="t" bIns="0" lIns="0" spcFirstLastPara="1" rIns="0" wrap="square" tIns="0">
-            <a:noAutofit/>
-          </a:bodyPr>
-          <a:lstStyle/>
-          <a:p>
-            <a:pPr indent="0" lvl="0" marL="0" marR="0" rtl="0" algn="l">
+          <a:bodyPr spcFirstLastPara="1" wrap="square" lIns="0" tIns="0" rIns="0" bIns="0" anchor="t" anchorCtr="0">
+            <a:noAutofit/>
+          </a:bodyPr>
+          <a:lstStyle/>
+          <a:p>
+            <a:pPr marL="0" marR="0" lvl="0" indent="0" algn="l" rtl="0">
               <a:lnSpc>
                 <a:spcPct val="83000"/>
               </a:lnSpc>
@@ -6283,7 +6504,7 @@
               <a:buNone/>
             </a:pPr>
             <a:r>
-              <a:rPr b="0" i="0" lang="en-US" sz="1150" u="none" cap="none" strike="noStrike">
+              <a:rPr lang="en-US" sz="1150" b="0" i="0" u="none" strike="noStrike" cap="none">
                 <a:solidFill>
                   <a:srgbClr val="9BE1FF"/>
                 </a:solidFill>
@@ -6294,7 +6515,7 @@
               </a:rPr>
               <a:t>02</a:t>
             </a:r>
-            <a:endParaRPr b="0" i="0" sz="1150" u="none" cap="none" strike="noStrike">
+            <a:endParaRPr sz="1150" b="0" i="0" u="none" strike="noStrike" cap="none">
               <a:solidFill>
                 <a:schemeClr val="dk1"/>
               </a:solidFill>
@@ -6328,23 +6549,20 @@
           </a:ln>
         </p:spPr>
         <p:txBody>
-          <a:bodyPr anchorCtr="0" anchor="ctr" bIns="91425" lIns="91425" spcFirstLastPara="1" rIns="91425" wrap="square" tIns="91425">
-            <a:noAutofit/>
-          </a:bodyPr>
-          <a:lstStyle/>
-          <a:p>
-            <a:pPr indent="0" lvl="0" marL="0" rtl="0" algn="l">
-              <a:spcBef>
-                <a:spcPts val="0"/>
-              </a:spcBef>
-              <a:spcAft>
-                <a:spcPts val="0"/>
-              </a:spcAft>
-              <a:buNone/>
-            </a:pPr>
-            <a:r>
-              <a:t/>
-            </a:r>
+          <a:bodyPr spcFirstLastPara="1" wrap="square" lIns="91425" tIns="91425" rIns="91425" bIns="91425" anchor="ctr" anchorCtr="0">
+            <a:noAutofit/>
+          </a:bodyPr>
+          <a:lstStyle/>
+          <a:p>
+            <a:pPr marL="0" lvl="0" indent="0" algn="l" rtl="0">
+              <a:spcBef>
+                <a:spcPts val="0"/>
+              </a:spcBef>
+              <a:spcAft>
+                <a:spcPts val="0"/>
+              </a:spcAft>
+              <a:buNone/>
+            </a:pPr>
             <a:endParaRPr/>
           </a:p>
         </p:txBody>
@@ -6369,12 +6587,12 @@
           </a:ln>
         </p:spPr>
         <p:txBody>
-          <a:bodyPr anchorCtr="0" anchor="t" bIns="0" lIns="0" spcFirstLastPara="1" rIns="0" wrap="square" tIns="0">
-            <a:noAutofit/>
-          </a:bodyPr>
-          <a:lstStyle/>
-          <a:p>
-            <a:pPr indent="0" lvl="0" marL="0" marR="0" rtl="0" algn="l">
+          <a:bodyPr spcFirstLastPara="1" wrap="square" lIns="0" tIns="0" rIns="0" bIns="0" anchor="t" anchorCtr="0">
+            <a:noAutofit/>
+          </a:bodyPr>
+          <a:lstStyle/>
+          <a:p>
+            <a:pPr marL="0" marR="0" lvl="0" indent="0" algn="l" rtl="0">
               <a:lnSpc>
                 <a:spcPct val="108000"/>
               </a:lnSpc>
@@ -6392,7 +6610,7 @@
               <a:buNone/>
             </a:pPr>
             <a:r>
-              <a:rPr b="0" i="0" lang="en-US" sz="900" u="none" cap="none" strike="noStrike">
+              <a:rPr lang="en-US" sz="900" b="0" i="0" u="none" strike="noStrike" cap="none">
                 <a:solidFill>
                   <a:srgbClr val="D5D5D5"/>
                 </a:solidFill>
@@ -6403,7 +6621,7 @@
               </a:rPr>
               <a:t>FINDING THE STOCKS</a:t>
             </a:r>
-            <a:endParaRPr b="0" i="0" sz="900" u="none" cap="none" strike="noStrike">
+            <a:endParaRPr sz="900" b="0" i="0" u="none" strike="noStrike" cap="none">
               <a:solidFill>
                 <a:schemeClr val="dk1"/>
               </a:solidFill>
@@ -6435,12 +6653,12 @@
           </a:ln>
         </p:spPr>
         <p:txBody>
-          <a:bodyPr anchorCtr="0" anchor="t" bIns="0" lIns="0" spcFirstLastPara="1" rIns="0" wrap="square" tIns="0">
-            <a:noAutofit/>
-          </a:bodyPr>
-          <a:lstStyle/>
-          <a:p>
-            <a:pPr indent="0" lvl="0" marL="0" marR="0" rtl="0" algn="l">
+          <a:bodyPr spcFirstLastPara="1" wrap="square" lIns="0" tIns="0" rIns="0" bIns="0" anchor="t" anchorCtr="0">
+            <a:noAutofit/>
+          </a:bodyPr>
+          <a:lstStyle/>
+          <a:p>
+            <a:pPr marL="0" marR="0" lvl="0" indent="0" algn="l" rtl="0">
               <a:lnSpc>
                 <a:spcPct val="118000"/>
               </a:lnSpc>
@@ -6458,7 +6676,7 @@
               <a:buNone/>
             </a:pPr>
             <a:r>
-              <a:rPr b="0" i="0" lang="en-US" sz="1200" u="none" cap="none" strike="noStrike">
+              <a:rPr lang="en-US" sz="1200" b="0" i="0" u="none" strike="noStrike" cap="none">
                 <a:solidFill>
                   <a:srgbClr val="D5D5D5"/>
                 </a:solidFill>
@@ -6469,7 +6687,7 @@
               </a:rPr>
               <a:t>Cashtags ($AAPL, $NVDA) and company names matched in microseconds; a Sector Knowledge Base links macro news like OPEC oil cuts or Fed rate hikes to the stocks they hurt or help.</a:t>
             </a:r>
-            <a:endParaRPr b="0" i="0" sz="1200" u="none" cap="none" strike="noStrike">
+            <a:endParaRPr sz="1200" b="0" i="0" u="none" strike="noStrike" cap="none">
               <a:solidFill>
                 <a:schemeClr val="dk1"/>
               </a:solidFill>
@@ -6501,12 +6719,12 @@
           </a:ln>
         </p:spPr>
         <p:txBody>
-          <a:bodyPr anchorCtr="0" anchor="t" bIns="0" lIns="0" spcFirstLastPara="1" rIns="0" wrap="square" tIns="0">
-            <a:noAutofit/>
-          </a:bodyPr>
-          <a:lstStyle/>
-          <a:p>
-            <a:pPr indent="0" lvl="0" marL="0" marR="0" rtl="0" algn="l">
+          <a:bodyPr spcFirstLastPara="1" wrap="square" lIns="0" tIns="0" rIns="0" bIns="0" anchor="t" anchorCtr="0">
+            <a:noAutofit/>
+          </a:bodyPr>
+          <a:lstStyle/>
+          <a:p>
+            <a:pPr marL="0" marR="0" lvl="0" indent="0" algn="l" rtl="0">
               <a:lnSpc>
                 <a:spcPct val="83000"/>
               </a:lnSpc>
@@ -6524,7 +6742,7 @@
               <a:buNone/>
             </a:pPr>
             <a:r>
-              <a:rPr b="0" i="0" lang="en-US" sz="1150" u="none" cap="none" strike="noStrike">
+              <a:rPr lang="en-US" sz="1150" b="0" i="0" u="none" strike="noStrike" cap="none">
                 <a:solidFill>
                   <a:srgbClr val="9BE1FF"/>
                 </a:solidFill>
@@ -6535,7 +6753,7 @@
               </a:rPr>
               <a:t>03</a:t>
             </a:r>
-            <a:endParaRPr b="0" i="0" sz="1150" u="none" cap="none" strike="noStrike">
+            <a:endParaRPr sz="1150" b="0" i="0" u="none" strike="noStrike" cap="none">
               <a:solidFill>
                 <a:schemeClr val="dk1"/>
               </a:solidFill>
@@ -6569,23 +6787,20 @@
           </a:ln>
         </p:spPr>
         <p:txBody>
-          <a:bodyPr anchorCtr="0" anchor="ctr" bIns="91425" lIns="91425" spcFirstLastPara="1" rIns="91425" wrap="square" tIns="91425">
-            <a:noAutofit/>
-          </a:bodyPr>
-          <a:lstStyle/>
-          <a:p>
-            <a:pPr indent="0" lvl="0" marL="0" rtl="0" algn="l">
-              <a:spcBef>
-                <a:spcPts val="0"/>
-              </a:spcBef>
-              <a:spcAft>
-                <a:spcPts val="0"/>
-              </a:spcAft>
-              <a:buNone/>
-            </a:pPr>
-            <a:r>
-              <a:t/>
-            </a:r>
+          <a:bodyPr spcFirstLastPara="1" wrap="square" lIns="91425" tIns="91425" rIns="91425" bIns="91425" anchor="ctr" anchorCtr="0">
+            <a:noAutofit/>
+          </a:bodyPr>
+          <a:lstStyle/>
+          <a:p>
+            <a:pPr marL="0" lvl="0" indent="0" algn="l" rtl="0">
+              <a:spcBef>
+                <a:spcPts val="0"/>
+              </a:spcBef>
+              <a:spcAft>
+                <a:spcPts val="0"/>
+              </a:spcAft>
+              <a:buNone/>
+            </a:pPr>
             <a:endParaRPr/>
           </a:p>
         </p:txBody>
@@ -6610,12 +6825,12 @@
           </a:ln>
         </p:spPr>
         <p:txBody>
-          <a:bodyPr anchorCtr="0" anchor="t" bIns="0" lIns="0" spcFirstLastPara="1" rIns="0" wrap="square" tIns="0">
-            <a:noAutofit/>
-          </a:bodyPr>
-          <a:lstStyle/>
-          <a:p>
-            <a:pPr indent="0" lvl="0" marL="0" marR="0" rtl="0" algn="l">
+          <a:bodyPr spcFirstLastPara="1" wrap="square" lIns="0" tIns="0" rIns="0" bIns="0" anchor="t" anchorCtr="0">
+            <a:noAutofit/>
+          </a:bodyPr>
+          <a:lstStyle/>
+          <a:p>
+            <a:pPr marL="0" marR="0" lvl="0" indent="0" algn="l" rtl="0">
               <a:lnSpc>
                 <a:spcPct val="108000"/>
               </a:lnSpc>
@@ -6633,7 +6848,7 @@
               <a:buNone/>
             </a:pPr>
             <a:r>
-              <a:rPr b="0" i="0" lang="en-US" sz="900" u="none" cap="none" strike="noStrike">
+              <a:rPr lang="en-US" sz="900" b="0" i="0" u="none" strike="noStrike" cap="none">
                 <a:solidFill>
                   <a:srgbClr val="D5D5D5"/>
                 </a:solidFill>
@@ -6644,7 +6859,7 @@
               </a:rPr>
               <a:t>UNDERSTANDING SENTIMENT</a:t>
             </a:r>
-            <a:endParaRPr b="0" i="0" sz="900" u="none" cap="none" strike="noStrike">
+            <a:endParaRPr sz="900" b="0" i="0" u="none" strike="noStrike" cap="none">
               <a:solidFill>
                 <a:schemeClr val="dk1"/>
               </a:solidFill>
@@ -6676,12 +6891,12 @@
           </a:ln>
         </p:spPr>
         <p:txBody>
-          <a:bodyPr anchorCtr="0" anchor="t" bIns="0" lIns="0" spcFirstLastPara="1" rIns="0" wrap="square" tIns="0">
-            <a:noAutofit/>
-          </a:bodyPr>
-          <a:lstStyle/>
-          <a:p>
-            <a:pPr indent="0" lvl="0" marL="0" marR="0" rtl="0" algn="l">
+          <a:bodyPr spcFirstLastPara="1" wrap="square" lIns="0" tIns="0" rIns="0" bIns="0" anchor="t" anchorCtr="0">
+            <a:noAutofit/>
+          </a:bodyPr>
+          <a:lstStyle/>
+          <a:p>
+            <a:pPr marL="0" marR="0" lvl="0" indent="0" algn="l" rtl="0">
               <a:lnSpc>
                 <a:spcPct val="118000"/>
               </a:lnSpc>
@@ -6699,7 +6914,7 @@
               <a:buNone/>
             </a:pPr>
             <a:r>
-              <a:rPr b="0" i="0" lang="en-US" sz="1200" u="none" cap="none" strike="noStrike">
+              <a:rPr lang="en-US" sz="1200" b="0" i="0" u="none" strike="noStrike" cap="none">
                 <a:solidFill>
                   <a:srgbClr val="D5D5D5"/>
                 </a:solidFill>
@@ -6710,7 +6925,7 @@
               </a:rPr>
               <a:t>ProsusAI and FinBERT for formal language + Twitter-RoBERTa and VADER (social slang and emphasis) + BART zero-shot classification.</a:t>
             </a:r>
-            <a:endParaRPr b="0" i="0" sz="1200" u="none" cap="none" strike="noStrike">
+            <a:endParaRPr sz="1200" b="0" i="0" u="none" strike="noStrike" cap="none">
               <a:solidFill>
                 <a:schemeClr val="dk1"/>
               </a:solidFill>
@@ -6742,12 +6957,12 @@
           </a:ln>
         </p:spPr>
         <p:txBody>
-          <a:bodyPr anchorCtr="0" anchor="t" bIns="0" lIns="0" spcFirstLastPara="1" rIns="0" wrap="square" tIns="0">
-            <a:noAutofit/>
-          </a:bodyPr>
-          <a:lstStyle/>
-          <a:p>
-            <a:pPr indent="0" lvl="0" marL="0" marR="0" rtl="0" algn="l">
+          <a:bodyPr spcFirstLastPara="1" wrap="square" lIns="0" tIns="0" rIns="0" bIns="0" anchor="t" anchorCtr="0">
+            <a:noAutofit/>
+          </a:bodyPr>
+          <a:lstStyle/>
+          <a:p>
+            <a:pPr marL="0" marR="0" lvl="0" indent="0" algn="l" rtl="0">
               <a:lnSpc>
                 <a:spcPct val="83000"/>
               </a:lnSpc>
@@ -6765,7 +6980,7 @@
               <a:buNone/>
             </a:pPr>
             <a:r>
-              <a:rPr b="0" i="0" lang="en-US" sz="1150" u="none" cap="none" strike="noStrike">
+              <a:rPr lang="en-US" sz="1150" b="0" i="0" u="none" strike="noStrike" cap="none">
                 <a:solidFill>
                   <a:srgbClr val="9BE1FF"/>
                 </a:solidFill>
@@ -6776,7 +6991,7 @@
               </a:rPr>
               <a:t>04</a:t>
             </a:r>
-            <a:endParaRPr b="0" i="0" sz="1150" u="none" cap="none" strike="noStrike">
+            <a:endParaRPr sz="1150" b="0" i="0" u="none" strike="noStrike" cap="none">
               <a:solidFill>
                 <a:schemeClr val="dk1"/>
               </a:solidFill>
@@ -6810,23 +7025,20 @@
           </a:ln>
         </p:spPr>
         <p:txBody>
-          <a:bodyPr anchorCtr="0" anchor="ctr" bIns="91425" lIns="91425" spcFirstLastPara="1" rIns="91425" wrap="square" tIns="91425">
-            <a:noAutofit/>
-          </a:bodyPr>
-          <a:lstStyle/>
-          <a:p>
-            <a:pPr indent="0" lvl="0" marL="0" rtl="0" algn="l">
-              <a:spcBef>
-                <a:spcPts val="0"/>
-              </a:spcBef>
-              <a:spcAft>
-                <a:spcPts val="0"/>
-              </a:spcAft>
-              <a:buNone/>
-            </a:pPr>
-            <a:r>
-              <a:t/>
-            </a:r>
+          <a:bodyPr spcFirstLastPara="1" wrap="square" lIns="91425" tIns="91425" rIns="91425" bIns="91425" anchor="ctr" anchorCtr="0">
+            <a:noAutofit/>
+          </a:bodyPr>
+          <a:lstStyle/>
+          <a:p>
+            <a:pPr marL="0" lvl="0" indent="0" algn="l" rtl="0">
+              <a:spcBef>
+                <a:spcPts val="0"/>
+              </a:spcBef>
+              <a:spcAft>
+                <a:spcPts val="0"/>
+              </a:spcAft>
+              <a:buNone/>
+            </a:pPr>
             <a:endParaRPr/>
           </a:p>
         </p:txBody>
@@ -6851,12 +7063,12 @@
           </a:ln>
         </p:spPr>
         <p:txBody>
-          <a:bodyPr anchorCtr="0" anchor="t" bIns="0" lIns="0" spcFirstLastPara="1" rIns="0" wrap="square" tIns="0">
-            <a:noAutofit/>
-          </a:bodyPr>
-          <a:lstStyle/>
-          <a:p>
-            <a:pPr indent="0" lvl="0" marL="0" marR="0" rtl="0" algn="l">
+          <a:bodyPr spcFirstLastPara="1" wrap="square" lIns="0" tIns="0" rIns="0" bIns="0" anchor="t" anchorCtr="0">
+            <a:noAutofit/>
+          </a:bodyPr>
+          <a:lstStyle/>
+          <a:p>
+            <a:pPr marL="0" marR="0" lvl="0" indent="0" algn="l" rtl="0">
               <a:lnSpc>
                 <a:spcPct val="108000"/>
               </a:lnSpc>
@@ -6874,7 +7086,7 @@
               <a:buNone/>
             </a:pPr>
             <a:r>
-              <a:rPr b="0" i="0" lang="en-US" sz="900" u="none" cap="none" strike="noStrike">
+              <a:rPr lang="en-US" sz="900" b="0" i="0" u="none" strike="noStrike" cap="none">
                 <a:solidFill>
                   <a:srgbClr val="D5D5D5"/>
                 </a:solidFill>
@@ -6885,7 +7097,7 @@
               </a:rPr>
               <a:t>PORTFOLIO REBALANCER</a:t>
             </a:r>
-            <a:endParaRPr b="0" i="0" sz="900" u="none" cap="none" strike="noStrike">
+            <a:endParaRPr sz="900" b="0" i="0" u="none" strike="noStrike" cap="none">
               <a:solidFill>
                 <a:schemeClr val="dk1"/>
               </a:solidFill>
@@ -6917,12 +7129,12 @@
           </a:ln>
         </p:spPr>
         <p:txBody>
-          <a:bodyPr anchorCtr="0" anchor="t" bIns="0" lIns="0" spcFirstLastPara="1" rIns="0" wrap="square" tIns="0">
-            <a:noAutofit/>
-          </a:bodyPr>
-          <a:lstStyle/>
-          <a:p>
-            <a:pPr indent="0" lvl="0" marL="0" marR="0" rtl="0" algn="l">
+          <a:bodyPr spcFirstLastPara="1" wrap="square" lIns="0" tIns="0" rIns="0" bIns="0" anchor="t" anchorCtr="0">
+            <a:noAutofit/>
+          </a:bodyPr>
+          <a:lstStyle/>
+          <a:p>
+            <a:pPr marL="0" marR="0" lvl="0" indent="0" algn="l" rtl="0">
               <a:lnSpc>
                 <a:spcPct val="118000"/>
               </a:lnSpc>
@@ -6940,7 +7152,7 @@
               <a:buNone/>
             </a:pPr>
             <a:r>
-              <a:rPr b="0" i="0" lang="en-US" sz="1200" u="none" cap="none" strike="noStrike">
+              <a:rPr lang="en-US" sz="1200" b="0" i="0" u="none" strike="noStrike" cap="none">
                 <a:solidFill>
                   <a:srgbClr val="D5D5D5"/>
                 </a:solidFill>
@@ -6951,7 +7163,7 @@
               </a:rPr>
               <a:t>Sentiment and impact severity adjust weights, with a 2% floor, then renormalize to 100%.</a:t>
             </a:r>
-            <a:endParaRPr b="0" i="0" sz="1200" u="none" cap="none" strike="noStrike">
+            <a:endParaRPr sz="1200" b="0" i="0" u="none" strike="noStrike" cap="none">
               <a:solidFill>
                 <a:schemeClr val="dk1"/>
               </a:solidFill>
@@ -6975,9 +7187,13 @@
             <a:ext cx="2057400" cy="624780"/>
           </a:xfrm>
           <a:custGeom>
-            <a:rect b="b" l="l" r="r" t="t"/>
+            <a:avLst/>
+            <a:gdLst/>
+            <a:ahLst/>
+            <a:cxnLst/>
+            <a:rect l="l" t="t" r="r" b="b"/>
             <a:pathLst>
-              <a:path extrusionOk="0" h="624780" w="2057400">
+              <a:path w="2057400" h="624780" extrusionOk="0">
                 <a:moveTo>
                   <a:pt x="7144" y="0"/>
                 </a:moveTo>
@@ -7015,23 +7231,20 @@
           </a:ln>
         </p:spPr>
         <p:txBody>
-          <a:bodyPr anchorCtr="0" anchor="ctr" bIns="91425" lIns="91425" spcFirstLastPara="1" rIns="91425" wrap="square" tIns="91425">
-            <a:noAutofit/>
-          </a:bodyPr>
-          <a:lstStyle/>
-          <a:p>
-            <a:pPr indent="0" lvl="0" marL="0" rtl="0" algn="l">
-              <a:spcBef>
-                <a:spcPts val="0"/>
-              </a:spcBef>
-              <a:spcAft>
-                <a:spcPts val="0"/>
-              </a:spcAft>
-              <a:buNone/>
-            </a:pPr>
-            <a:r>
-              <a:t/>
-            </a:r>
+          <a:bodyPr spcFirstLastPara="1" wrap="square" lIns="91425" tIns="91425" rIns="91425" bIns="91425" anchor="ctr" anchorCtr="0">
+            <a:noAutofit/>
+          </a:bodyPr>
+          <a:lstStyle/>
+          <a:p>
+            <a:pPr marL="0" lvl="0" indent="0" algn="l" rtl="0">
+              <a:spcBef>
+                <a:spcPts val="0"/>
+              </a:spcBef>
+              <a:spcAft>
+                <a:spcPts val="0"/>
+              </a:spcAft>
+              <a:buNone/>
+            </a:pPr>
             <a:endParaRPr/>
           </a:p>
         </p:txBody>
@@ -7056,12 +7269,12 @@
           </a:ln>
         </p:spPr>
         <p:txBody>
-          <a:bodyPr anchorCtr="0" anchor="t" bIns="0" lIns="0" spcFirstLastPara="1" rIns="0" wrap="square" tIns="0">
-            <a:noAutofit/>
-          </a:bodyPr>
-          <a:lstStyle/>
-          <a:p>
-            <a:pPr indent="0" lvl="0" marL="0" marR="0" rtl="0" algn="l">
+          <a:bodyPr spcFirstLastPara="1" wrap="square" lIns="0" tIns="0" rIns="0" bIns="0" anchor="t" anchorCtr="0">
+            <a:noAutofit/>
+          </a:bodyPr>
+          <a:lstStyle/>
+          <a:p>
+            <a:pPr marL="0" marR="0" lvl="0" indent="0" algn="l" rtl="0">
               <a:lnSpc>
                 <a:spcPct val="108000"/>
               </a:lnSpc>
@@ -7079,7 +7292,7 @@
               <a:buNone/>
             </a:pPr>
             <a:r>
-              <a:rPr b="0" i="0" lang="en-US" sz="850" u="none" cap="none" strike="noStrike">
+              <a:rPr lang="en-US" sz="850" b="0" i="0" u="none" strike="noStrike" cap="none">
                 <a:solidFill>
                   <a:srgbClr val="D5D5D5"/>
                 </a:solidFill>
@@ -7090,7 +7303,7 @@
               </a:rPr>
               <a:t>STAGE 01 · </a:t>
             </a:r>
-            <a:endParaRPr b="0" i="0" sz="850" u="none" cap="none" strike="noStrike">
+            <a:endParaRPr sz="850" b="0" i="0" u="none" strike="noStrike" cap="none">
               <a:solidFill>
                 <a:schemeClr val="dk1"/>
               </a:solidFill>
@@ -7101,7 +7314,7 @@
             </a:endParaRPr>
           </a:p>
           <a:p>
-            <a:pPr indent="0" lvl="0" marL="0" marR="0" rtl="0" algn="l">
+            <a:pPr marL="0" marR="0" lvl="0" indent="0" algn="l" rtl="0">
               <a:lnSpc>
                 <a:spcPct val="108000"/>
               </a:lnSpc>
@@ -7119,7 +7332,7 @@
               <a:buNone/>
             </a:pPr>
             <a:r>
-              <a:rPr b="0" i="0" lang="en-US" sz="850" u="none" cap="none" strike="noStrike">
+              <a:rPr lang="en-US" sz="850" b="0" i="0" u="none" strike="noStrike" cap="none">
                 <a:solidFill>
                   <a:srgbClr val="D5D5D5"/>
                 </a:solidFill>
@@ -7130,7 +7343,7 @@
               </a:rPr>
               <a:t>21 OUTLETS + SOCIAL FEED</a:t>
             </a:r>
-            <a:endParaRPr b="0" i="0" sz="850" u="none" cap="none" strike="noStrike">
+            <a:endParaRPr sz="850" b="0" i="0" u="none" strike="noStrike" cap="none">
               <a:solidFill>
                 <a:schemeClr val="dk1"/>
               </a:solidFill>
@@ -7164,23 +7377,20 @@
           </a:ln>
         </p:spPr>
         <p:txBody>
-          <a:bodyPr anchorCtr="0" anchor="ctr" bIns="91425" lIns="91425" spcFirstLastPara="1" rIns="91425" wrap="square" tIns="91425">
-            <a:noAutofit/>
-          </a:bodyPr>
-          <a:lstStyle/>
-          <a:p>
-            <a:pPr indent="0" lvl="0" marL="0" rtl="0" algn="l">
-              <a:spcBef>
-                <a:spcPts val="0"/>
-              </a:spcBef>
-              <a:spcAft>
-                <a:spcPts val="0"/>
-              </a:spcAft>
-              <a:buNone/>
-            </a:pPr>
-            <a:r>
-              <a:t/>
-            </a:r>
+          <a:bodyPr spcFirstLastPara="1" wrap="square" lIns="91425" tIns="91425" rIns="91425" bIns="91425" anchor="ctr" anchorCtr="0">
+            <a:noAutofit/>
+          </a:bodyPr>
+          <a:lstStyle/>
+          <a:p>
+            <a:pPr marL="0" lvl="0" indent="0" algn="l" rtl="0">
+              <a:spcBef>
+                <a:spcPts val="0"/>
+              </a:spcBef>
+              <a:spcAft>
+                <a:spcPts val="0"/>
+              </a:spcAft>
+              <a:buNone/>
+            </a:pPr>
             <a:endParaRPr/>
           </a:p>
         </p:txBody>
@@ -7205,12 +7415,12 @@
           </a:ln>
         </p:spPr>
         <p:txBody>
-          <a:bodyPr anchorCtr="0" anchor="t" bIns="0" lIns="0" spcFirstLastPara="1" rIns="0" wrap="square" tIns="0">
-            <a:noAutofit/>
-          </a:bodyPr>
-          <a:lstStyle/>
-          <a:p>
-            <a:pPr indent="0" lvl="0" marL="0" marR="0" rtl="0" algn="l">
+          <a:bodyPr spcFirstLastPara="1" wrap="square" lIns="0" tIns="0" rIns="0" bIns="0" anchor="t" anchorCtr="0">
+            <a:noAutofit/>
+          </a:bodyPr>
+          <a:lstStyle/>
+          <a:p>
+            <a:pPr marL="0" marR="0" lvl="0" indent="0" algn="l" rtl="0">
               <a:lnSpc>
                 <a:spcPct val="108000"/>
               </a:lnSpc>
@@ -7228,7 +7438,7 @@
               <a:buNone/>
             </a:pPr>
             <a:r>
-              <a:rPr b="0" i="0" lang="en-US" sz="850" u="none" cap="none" strike="noStrike">
+              <a:rPr lang="en-US" sz="850" b="0" i="0" u="none" strike="noStrike" cap="none">
                 <a:solidFill>
                   <a:srgbClr val="D5D5D5"/>
                 </a:solidFill>
@@ -7239,7 +7449,7 @@
               </a:rPr>
               <a:t>STAGE 02 · </a:t>
             </a:r>
-            <a:endParaRPr b="0" i="0" sz="850" u="none" cap="none" strike="noStrike">
+            <a:endParaRPr sz="850" b="0" i="0" u="none" strike="noStrike" cap="none">
               <a:solidFill>
                 <a:schemeClr val="dk1"/>
               </a:solidFill>
@@ -7250,7 +7460,7 @@
             </a:endParaRPr>
           </a:p>
           <a:p>
-            <a:pPr indent="0" lvl="0" marL="0" marR="0" rtl="0" algn="l">
+            <a:pPr marL="0" marR="0" lvl="0" indent="0" algn="l" rtl="0">
               <a:lnSpc>
                 <a:spcPct val="108000"/>
               </a:lnSpc>
@@ -7268,7 +7478,7 @@
               <a:buNone/>
             </a:pPr>
             <a:r>
-              <a:rPr b="0" i="0" lang="en-US" sz="850" u="none" cap="none" strike="noStrike">
+              <a:rPr lang="en-US" sz="850" b="0" i="0" u="none" strike="noStrike" cap="none">
                 <a:solidFill>
                   <a:srgbClr val="D5D5D5"/>
                 </a:solidFill>
@@ -7279,7 +7489,7 @@
               </a:rPr>
               <a:t>SECTOR KNOWLEDGE BASE</a:t>
             </a:r>
-            <a:endParaRPr b="0" i="0" sz="850" u="none" cap="none" strike="noStrike">
+            <a:endParaRPr sz="850" b="0" i="0" u="none" strike="noStrike" cap="none">
               <a:solidFill>
                 <a:schemeClr val="dk1"/>
               </a:solidFill>
@@ -7313,23 +7523,20 @@
           </a:ln>
         </p:spPr>
         <p:txBody>
-          <a:bodyPr anchorCtr="0" anchor="ctr" bIns="91425" lIns="91425" spcFirstLastPara="1" rIns="91425" wrap="square" tIns="91425">
-            <a:noAutofit/>
-          </a:bodyPr>
-          <a:lstStyle/>
-          <a:p>
-            <a:pPr indent="0" lvl="0" marL="0" rtl="0" algn="l">
-              <a:spcBef>
-                <a:spcPts val="0"/>
-              </a:spcBef>
-              <a:spcAft>
-                <a:spcPts val="0"/>
-              </a:spcAft>
-              <a:buNone/>
-            </a:pPr>
-            <a:r>
-              <a:t/>
-            </a:r>
+          <a:bodyPr spcFirstLastPara="1" wrap="square" lIns="91425" tIns="91425" rIns="91425" bIns="91425" anchor="ctr" anchorCtr="0">
+            <a:noAutofit/>
+          </a:bodyPr>
+          <a:lstStyle/>
+          <a:p>
+            <a:pPr marL="0" lvl="0" indent="0" algn="l" rtl="0">
+              <a:spcBef>
+                <a:spcPts val="0"/>
+              </a:spcBef>
+              <a:spcAft>
+                <a:spcPts val="0"/>
+              </a:spcAft>
+              <a:buNone/>
+            </a:pPr>
             <a:endParaRPr/>
           </a:p>
         </p:txBody>
@@ -7354,12 +7561,12 @@
           </a:ln>
         </p:spPr>
         <p:txBody>
-          <a:bodyPr anchorCtr="0" anchor="t" bIns="0" lIns="0" spcFirstLastPara="1" rIns="0" wrap="square" tIns="0">
-            <a:noAutofit/>
-          </a:bodyPr>
-          <a:lstStyle/>
-          <a:p>
-            <a:pPr indent="0" lvl="0" marL="0" marR="0" rtl="0" algn="l">
+          <a:bodyPr spcFirstLastPara="1" wrap="square" lIns="0" tIns="0" rIns="0" bIns="0" anchor="t" anchorCtr="0">
+            <a:noAutofit/>
+          </a:bodyPr>
+          <a:lstStyle/>
+          <a:p>
+            <a:pPr marL="0" marR="0" lvl="0" indent="0" algn="l" rtl="0">
               <a:lnSpc>
                 <a:spcPct val="108000"/>
               </a:lnSpc>
@@ -7377,7 +7584,7 @@
               <a:buNone/>
             </a:pPr>
             <a:r>
-              <a:rPr b="0" i="0" lang="en-US" sz="850" u="none" cap="none" strike="noStrike">
+              <a:rPr lang="en-US" sz="850" b="0" i="0" u="none" strike="noStrike" cap="none">
                 <a:solidFill>
                   <a:srgbClr val="D5D5D5"/>
                 </a:solidFill>
@@ -7388,7 +7595,7 @@
               </a:rPr>
               <a:t>STAGE 03 · </a:t>
             </a:r>
-            <a:endParaRPr b="0" i="0" sz="850" u="none" cap="none" strike="noStrike">
+            <a:endParaRPr sz="850" b="0" i="0" u="none" strike="noStrike" cap="none">
               <a:solidFill>
                 <a:schemeClr val="dk1"/>
               </a:solidFill>
@@ -7399,7 +7606,7 @@
             </a:endParaRPr>
           </a:p>
           <a:p>
-            <a:pPr indent="0" lvl="0" marL="0" marR="0" rtl="0" algn="l">
+            <a:pPr marL="0" marR="0" lvl="0" indent="0" algn="l" rtl="0">
               <a:lnSpc>
                 <a:spcPct val="108000"/>
               </a:lnSpc>
@@ -7417,7 +7624,7 @@
               <a:buNone/>
             </a:pPr>
             <a:r>
-              <a:rPr b="0" i="0" lang="en-US" sz="850" u="none" cap="none" strike="noStrike">
+              <a:rPr lang="en-US" sz="850" b="0" i="0" u="none" strike="noStrike" cap="none">
                 <a:solidFill>
                   <a:srgbClr val="D5D5D5"/>
                 </a:solidFill>
@@ -7428,7 +7635,7 @@
               </a:rPr>
               <a:t>SENTIMENT ENSEMBLE</a:t>
             </a:r>
-            <a:endParaRPr b="0" i="0" sz="850" u="none" cap="none" strike="noStrike">
+            <a:endParaRPr sz="850" b="0" i="0" u="none" strike="noStrike" cap="none">
               <a:solidFill>
                 <a:schemeClr val="dk1"/>
               </a:solidFill>
@@ -7452,9 +7659,13 @@
             <a:ext cx="2057400" cy="624780"/>
           </a:xfrm>
           <a:custGeom>
-            <a:rect b="b" l="l" r="r" t="t"/>
+            <a:avLst/>
+            <a:gdLst/>
+            <a:ahLst/>
+            <a:cxnLst/>
+            <a:rect l="l" t="t" r="r" b="b"/>
             <a:pathLst>
-              <a:path extrusionOk="0" h="624780" w="2057400">
+              <a:path w="2057400" h="624780" extrusionOk="0">
                 <a:moveTo>
                   <a:pt x="0" y="0"/>
                 </a:moveTo>
@@ -7497,23 +7708,20 @@
           </a:ln>
         </p:spPr>
         <p:txBody>
-          <a:bodyPr anchorCtr="0" anchor="ctr" bIns="91425" lIns="91425" spcFirstLastPara="1" rIns="91425" wrap="square" tIns="91425">
-            <a:noAutofit/>
-          </a:bodyPr>
-          <a:lstStyle/>
-          <a:p>
-            <a:pPr indent="0" lvl="0" marL="0" rtl="0" algn="l">
-              <a:spcBef>
-                <a:spcPts val="0"/>
-              </a:spcBef>
-              <a:spcAft>
-                <a:spcPts val="0"/>
-              </a:spcAft>
-              <a:buNone/>
-            </a:pPr>
-            <a:r>
-              <a:t/>
-            </a:r>
+          <a:bodyPr spcFirstLastPara="1" wrap="square" lIns="91425" tIns="91425" rIns="91425" bIns="91425" anchor="ctr" anchorCtr="0">
+            <a:noAutofit/>
+          </a:bodyPr>
+          <a:lstStyle/>
+          <a:p>
+            <a:pPr marL="0" lvl="0" indent="0" algn="l" rtl="0">
+              <a:spcBef>
+                <a:spcPts val="0"/>
+              </a:spcBef>
+              <a:spcAft>
+                <a:spcPts val="0"/>
+              </a:spcAft>
+              <a:buNone/>
+            </a:pPr>
             <a:endParaRPr/>
           </a:p>
         </p:txBody>
@@ -7538,12 +7746,12 @@
           </a:ln>
         </p:spPr>
         <p:txBody>
-          <a:bodyPr anchorCtr="0" anchor="t" bIns="0" lIns="0" spcFirstLastPara="1" rIns="0" wrap="square" tIns="0">
-            <a:noAutofit/>
-          </a:bodyPr>
-          <a:lstStyle/>
-          <a:p>
-            <a:pPr indent="0" lvl="0" marL="0" marR="0" rtl="0" algn="l">
+          <a:bodyPr spcFirstLastPara="1" wrap="square" lIns="0" tIns="0" rIns="0" bIns="0" anchor="t" anchorCtr="0">
+            <a:noAutofit/>
+          </a:bodyPr>
+          <a:lstStyle/>
+          <a:p>
+            <a:pPr marL="0" marR="0" lvl="0" indent="0" algn="l" rtl="0">
               <a:lnSpc>
                 <a:spcPct val="108000"/>
               </a:lnSpc>
@@ -7561,7 +7769,7 @@
               <a:buNone/>
             </a:pPr>
             <a:r>
-              <a:rPr b="0" i="0" lang="en-US" sz="850" u="none" cap="none" strike="noStrike">
+              <a:rPr lang="en-US" sz="850" b="0" i="0" u="none" strike="noStrike" cap="none">
                 <a:solidFill>
                   <a:srgbClr val="D5D5D5"/>
                 </a:solidFill>
@@ -7572,7 +7780,7 @@
               </a:rPr>
               <a:t>STAGE 04 · </a:t>
             </a:r>
-            <a:endParaRPr b="0" i="0" sz="850" u="none" cap="none" strike="noStrike">
+            <a:endParaRPr sz="850" b="0" i="0" u="none" strike="noStrike" cap="none">
               <a:solidFill>
                 <a:schemeClr val="dk1"/>
               </a:solidFill>
@@ -7583,7 +7791,7 @@
             </a:endParaRPr>
           </a:p>
           <a:p>
-            <a:pPr indent="0" lvl="0" marL="0" marR="0" rtl="0" algn="l">
+            <a:pPr marL="0" marR="0" lvl="0" indent="0" algn="l" rtl="0">
               <a:lnSpc>
                 <a:spcPct val="108000"/>
               </a:lnSpc>
@@ -7601,7 +7809,7 @@
               <a:buNone/>
             </a:pPr>
             <a:r>
-              <a:rPr b="0" i="0" lang="en-US" sz="850" u="none" cap="none" strike="noStrike">
+              <a:rPr lang="en-US" sz="850" b="0" i="0" u="none" strike="noStrike" cap="none">
                 <a:solidFill>
                   <a:srgbClr val="D5D5D5"/>
                 </a:solidFill>
@@ -7612,7 +7820,7 @@
               </a:rPr>
               <a:t>100% RENORMALIZED</a:t>
             </a:r>
-            <a:endParaRPr b="0" i="0" sz="850" u="none" cap="none" strike="noStrike">
+            <a:endParaRPr sz="850" b="0" i="0" u="none" strike="noStrike" cap="none">
               <a:solidFill>
                 <a:schemeClr val="dk1"/>
               </a:solidFill>
@@ -7646,23 +7854,20 @@
           </a:ln>
         </p:spPr>
         <p:txBody>
-          <a:bodyPr anchorCtr="0" anchor="ctr" bIns="91425" lIns="91425" spcFirstLastPara="1" rIns="91425" wrap="square" tIns="91425">
-            <a:noAutofit/>
-          </a:bodyPr>
-          <a:lstStyle/>
-          <a:p>
-            <a:pPr indent="0" lvl="0" marL="0" rtl="0" algn="l">
-              <a:spcBef>
-                <a:spcPts val="0"/>
-              </a:spcBef>
-              <a:spcAft>
-                <a:spcPts val="0"/>
-              </a:spcAft>
-              <a:buNone/>
-            </a:pPr>
-            <a:r>
-              <a:t/>
-            </a:r>
+          <a:bodyPr spcFirstLastPara="1" wrap="square" lIns="91425" tIns="91425" rIns="91425" bIns="91425" anchor="ctr" anchorCtr="0">
+            <a:noAutofit/>
+          </a:bodyPr>
+          <a:lstStyle/>
+          <a:p>
+            <a:pPr marL="0" lvl="0" indent="0" algn="l" rtl="0">
+              <a:spcBef>
+                <a:spcPts val="0"/>
+              </a:spcBef>
+              <a:spcAft>
+                <a:spcPts val="0"/>
+              </a:spcAft>
+              <a:buNone/>
+            </a:pPr>
             <a:endParaRPr/>
           </a:p>
         </p:txBody>
@@ -7689,23 +7894,20 @@
           </a:ln>
         </p:spPr>
         <p:txBody>
-          <a:bodyPr anchorCtr="0" anchor="ctr" bIns="91425" lIns="91425" spcFirstLastPara="1" rIns="91425" wrap="square" tIns="91425">
-            <a:noAutofit/>
-          </a:bodyPr>
-          <a:lstStyle/>
-          <a:p>
-            <a:pPr indent="0" lvl="0" marL="0" rtl="0" algn="l">
-              <a:spcBef>
-                <a:spcPts val="0"/>
-              </a:spcBef>
-              <a:spcAft>
-                <a:spcPts val="0"/>
-              </a:spcAft>
-              <a:buNone/>
-            </a:pPr>
-            <a:r>
-              <a:t/>
-            </a:r>
+          <a:bodyPr spcFirstLastPara="1" wrap="square" lIns="91425" tIns="91425" rIns="91425" bIns="91425" anchor="ctr" anchorCtr="0">
+            <a:noAutofit/>
+          </a:bodyPr>
+          <a:lstStyle/>
+          <a:p>
+            <a:pPr marL="0" lvl="0" indent="0" algn="l" rtl="0">
+              <a:spcBef>
+                <a:spcPts val="0"/>
+              </a:spcBef>
+              <a:spcAft>
+                <a:spcPts val="0"/>
+              </a:spcAft>
+              <a:buNone/>
+            </a:pPr>
             <a:endParaRPr/>
           </a:p>
         </p:txBody>
@@ -7732,23 +7934,20 @@
           </a:ln>
         </p:spPr>
         <p:txBody>
-          <a:bodyPr anchorCtr="0" anchor="ctr" bIns="91425" lIns="91425" spcFirstLastPara="1" rIns="91425" wrap="square" tIns="91425">
-            <a:noAutofit/>
-          </a:bodyPr>
-          <a:lstStyle/>
-          <a:p>
-            <a:pPr indent="0" lvl="0" marL="0" rtl="0" algn="l">
-              <a:spcBef>
-                <a:spcPts val="0"/>
-              </a:spcBef>
-              <a:spcAft>
-                <a:spcPts val="0"/>
-              </a:spcAft>
-              <a:buNone/>
-            </a:pPr>
-            <a:r>
-              <a:t/>
-            </a:r>
+          <a:bodyPr spcFirstLastPara="1" wrap="square" lIns="91425" tIns="91425" rIns="91425" bIns="91425" anchor="ctr" anchorCtr="0">
+            <a:noAutofit/>
+          </a:bodyPr>
+          <a:lstStyle/>
+          <a:p>
+            <a:pPr marL="0" lvl="0" indent="0" algn="l" rtl="0">
+              <a:spcBef>
+                <a:spcPts val="0"/>
+              </a:spcBef>
+              <a:spcAft>
+                <a:spcPts val="0"/>
+              </a:spcAft>
+              <a:buNone/>
+            </a:pPr>
             <a:endParaRPr/>
           </a:p>
         </p:txBody>
@@ -7775,23 +7974,20 @@
           </a:ln>
         </p:spPr>
         <p:txBody>
-          <a:bodyPr anchorCtr="0" anchor="t" bIns="91425" lIns="91425" spcFirstLastPara="1" rIns="91425" wrap="square" tIns="91425">
-            <a:noAutofit/>
-          </a:bodyPr>
-          <a:lstStyle/>
-          <a:p>
-            <a:pPr indent="0" lvl="0" marL="0" rtl="0" algn="l">
-              <a:spcBef>
-                <a:spcPts val="0"/>
-              </a:spcBef>
-              <a:spcAft>
-                <a:spcPts val="0"/>
-              </a:spcAft>
-              <a:buNone/>
-            </a:pPr>
-            <a:r>
-              <a:t/>
-            </a:r>
+          <a:bodyPr spcFirstLastPara="1" wrap="square" lIns="91425" tIns="91425" rIns="91425" bIns="91425" anchor="t" anchorCtr="0">
+            <a:noAutofit/>
+          </a:bodyPr>
+          <a:lstStyle/>
+          <a:p>
+            <a:pPr marL="0" lvl="0" indent="0" algn="l" rtl="0">
+              <a:spcBef>
+                <a:spcPts val="0"/>
+              </a:spcBef>
+              <a:spcAft>
+                <a:spcPts val="0"/>
+              </a:spcAft>
+              <a:buNone/>
+            </a:pPr>
             <a:endParaRPr/>
           </a:p>
         </p:txBody>
@@ -7805,11 +8001,11 @@
 </file>
 
 <file path=ppt/slides/slide4.xml><?xml version="1.0" encoding="utf-8"?>
-<p:sld xmlns:a="http://schemas.openxmlformats.org/drawingml/2006/main" xmlns:r="http://schemas.openxmlformats.org/officeDocument/2006/relationships" xmlns:mc="http://schemas.openxmlformats.org/markup-compatibility/2006" xmlns:mv="urn:schemas-microsoft-com:mac:vml" xmlns:p="http://schemas.openxmlformats.org/presentationml/2006/main" xmlns:c="http://schemas.openxmlformats.org/drawingml/2006/chart" xmlns:dgm="http://schemas.openxmlformats.org/drawingml/2006/diagram" xmlns:o="urn:schemas-microsoft-com:office:office" xmlns:v="urn:schemas-microsoft-com:vml" xmlns:pvml="urn:schemas-microsoft-com:office:powerpoint" xmlns:com="http://schemas.openxmlformats.org/drawingml/2006/compatibility" xmlns:p14="http://schemas.microsoft.com/office/powerpoint/2010/main" xmlns:p15="http://schemas.microsoft.com/office/powerpoint/2012/main" xmlns:ahyp="http://schemas.microsoft.com/office/drawing/2018/hyperlinkcolor">
+<p:sld xmlns:a="http://schemas.openxmlformats.org/drawingml/2006/main" xmlns:r="http://schemas.openxmlformats.org/officeDocument/2006/relationships" xmlns:p="http://schemas.openxmlformats.org/presentationml/2006/main">
   <p:cSld>
     <p:spTree>
       <p:nvGrpSpPr>
-        <p:cNvPr id="104" name="Shape 104"/>
+        <p:cNvPr id="1" name="Shape 104"/>
         <p:cNvGrpSpPr/>
         <p:nvPr/>
       </p:nvGrpSpPr>
@@ -7841,12 +8037,12 @@
           </a:ln>
         </p:spPr>
         <p:txBody>
-          <a:bodyPr anchorCtr="0" anchor="t" bIns="0" lIns="0" spcFirstLastPara="1" rIns="0" wrap="square" tIns="0">
-            <a:noAutofit/>
-          </a:bodyPr>
-          <a:lstStyle/>
-          <a:p>
-            <a:pPr indent="0" lvl="0" marL="0" marR="0" rtl="0" algn="l">
+          <a:bodyPr spcFirstLastPara="1" wrap="square" lIns="0" tIns="0" rIns="0" bIns="0" anchor="t" anchorCtr="0">
+            <a:noAutofit/>
+          </a:bodyPr>
+          <a:lstStyle/>
+          <a:p>
+            <a:pPr marL="0" marR="0" lvl="0" indent="0" algn="l" rtl="0">
               <a:lnSpc>
                 <a:spcPct val="108000"/>
               </a:lnSpc>
@@ -7864,7 +8060,7 @@
               <a:buNone/>
             </a:pPr>
             <a:r>
-              <a:rPr b="0" i="0" lang="en-US" sz="850" u="none" cap="none" strike="noStrike">
+              <a:rPr lang="en-US" sz="850" b="0" i="0" u="none" strike="noStrike" cap="none">
                 <a:solidFill>
                   <a:srgbClr val="B5B5B5"/>
                 </a:solidFill>
@@ -7875,7 +8071,7 @@
               </a:rPr>
               <a:t>SENTIMENT ENGINE</a:t>
             </a:r>
-            <a:endParaRPr b="0" i="0" sz="850" u="none" cap="none" strike="noStrike">
+            <a:endParaRPr sz="850" b="0" i="0" u="none" strike="noStrike" cap="none">
               <a:solidFill>
                 <a:schemeClr val="dk1"/>
               </a:solidFill>
@@ -7907,12 +8103,12 @@
           </a:ln>
         </p:spPr>
         <p:txBody>
-          <a:bodyPr anchorCtr="0" anchor="t" bIns="0" lIns="0" spcFirstLastPara="1" rIns="0" wrap="square" tIns="0">
-            <a:noAutofit/>
-          </a:bodyPr>
-          <a:lstStyle/>
-          <a:p>
-            <a:pPr indent="0" lvl="0" marL="0" marR="0" rtl="0" algn="l">
+          <a:bodyPr spcFirstLastPara="1" wrap="square" lIns="0" tIns="0" rIns="0" bIns="0" anchor="t" anchorCtr="0">
+            <a:noAutofit/>
+          </a:bodyPr>
+          <a:lstStyle/>
+          <a:p>
+            <a:pPr marL="0" marR="0" lvl="0" indent="0" algn="l" rtl="0">
               <a:lnSpc>
                 <a:spcPct val="89000"/>
               </a:lnSpc>
@@ -7930,7 +8126,7 @@
               <a:buNone/>
             </a:pPr>
             <a:r>
-              <a:rPr b="0" i="0" lang="en-US" sz="2550" u="none" cap="none" strike="noStrike">
+              <a:rPr lang="en-US" sz="2550" b="0" i="0" u="none" strike="noStrike" cap="none">
                 <a:solidFill>
                   <a:srgbClr val="ECECEC"/>
                 </a:solidFill>
@@ -7941,7 +8137,7 @@
               </a:rPr>
               <a:t>Language models plus guardrails get the sentiment right</a:t>
             </a:r>
-            <a:endParaRPr b="0" i="0" sz="2550" u="none" cap="none" strike="noStrike">
+            <a:endParaRPr sz="2550" b="0" i="0" u="none" strike="noStrike" cap="none">
               <a:solidFill>
                 <a:schemeClr val="dk1"/>
               </a:solidFill>
@@ -7966,7 +8162,7 @@
           </a:xfrm>
           <a:prstGeom prst="roundRect">
             <a:avLst>
-              <a:gd fmla="val 50000" name="adj"/>
+              <a:gd name="adj" fmla="val 50000"/>
             </a:avLst>
           </a:prstGeom>
           <a:solidFill>
@@ -7977,23 +8173,20 @@
           </a:ln>
         </p:spPr>
         <p:txBody>
-          <a:bodyPr anchorCtr="0" anchor="ctr" bIns="91425" lIns="91425" spcFirstLastPara="1" rIns="91425" wrap="square" tIns="91425">
-            <a:noAutofit/>
-          </a:bodyPr>
-          <a:lstStyle/>
-          <a:p>
-            <a:pPr indent="0" lvl="0" marL="0" rtl="0" algn="l">
-              <a:spcBef>
-                <a:spcPts val="0"/>
-              </a:spcBef>
-              <a:spcAft>
-                <a:spcPts val="0"/>
-              </a:spcAft>
-              <a:buNone/>
-            </a:pPr>
-            <a:r>
-              <a:t/>
-            </a:r>
+          <a:bodyPr spcFirstLastPara="1" wrap="square" lIns="91425" tIns="91425" rIns="91425" bIns="91425" anchor="ctr" anchorCtr="0">
+            <a:noAutofit/>
+          </a:bodyPr>
+          <a:lstStyle/>
+          <a:p>
+            <a:pPr marL="0" lvl="0" indent="0" algn="l" rtl="0">
+              <a:spcBef>
+                <a:spcPts val="0"/>
+              </a:spcBef>
+              <a:spcAft>
+                <a:spcPts val="0"/>
+              </a:spcAft>
+              <a:buNone/>
+            </a:pPr>
             <a:endParaRPr/>
           </a:p>
         </p:txBody>
@@ -8020,23 +8213,20 @@
           </a:ln>
         </p:spPr>
         <p:txBody>
-          <a:bodyPr anchorCtr="0" anchor="ctr" bIns="91425" lIns="91425" spcFirstLastPara="1" rIns="91425" wrap="square" tIns="91425">
-            <a:noAutofit/>
-          </a:bodyPr>
-          <a:lstStyle/>
-          <a:p>
-            <a:pPr indent="0" lvl="0" marL="0" rtl="0" algn="l">
-              <a:spcBef>
-                <a:spcPts val="0"/>
-              </a:spcBef>
-              <a:spcAft>
-                <a:spcPts val="0"/>
-              </a:spcAft>
-              <a:buNone/>
-            </a:pPr>
-            <a:r>
-              <a:t/>
-            </a:r>
+          <a:bodyPr spcFirstLastPara="1" wrap="square" lIns="91425" tIns="91425" rIns="91425" bIns="91425" anchor="ctr" anchorCtr="0">
+            <a:noAutofit/>
+          </a:bodyPr>
+          <a:lstStyle/>
+          <a:p>
+            <a:pPr marL="0" lvl="0" indent="0" algn="l" rtl="0">
+              <a:spcBef>
+                <a:spcPts val="0"/>
+              </a:spcBef>
+              <a:spcAft>
+                <a:spcPts val="0"/>
+              </a:spcAft>
+              <a:buNone/>
+            </a:pPr>
             <a:endParaRPr/>
           </a:p>
         </p:txBody>
@@ -8061,12 +8251,12 @@
           </a:ln>
         </p:spPr>
         <p:txBody>
-          <a:bodyPr anchorCtr="0" anchor="t" bIns="0" lIns="0" spcFirstLastPara="1" rIns="0" wrap="square" tIns="0">
-            <a:noAutofit/>
-          </a:bodyPr>
-          <a:lstStyle/>
-          <a:p>
-            <a:pPr indent="0" lvl="0" marL="0" marR="0" rtl="0" algn="l">
+          <a:bodyPr spcFirstLastPara="1" wrap="square" lIns="0" tIns="0" rIns="0" bIns="0" anchor="t" anchorCtr="0">
+            <a:noAutofit/>
+          </a:bodyPr>
+          <a:lstStyle/>
+          <a:p>
+            <a:pPr marL="0" marR="0" lvl="0" indent="0" algn="l" rtl="0">
               <a:lnSpc>
                 <a:spcPct val="110000"/>
               </a:lnSpc>
@@ -8084,7 +8274,7 @@
               <a:buNone/>
             </a:pPr>
             <a:r>
-              <a:rPr b="0" i="0" lang="en-US" sz="1850" u="none" cap="none" strike="noStrike">
+              <a:rPr lang="en-US" sz="1850" b="0" i="0" u="none" strike="noStrike" cap="none">
                 <a:solidFill>
                   <a:srgbClr val="D5D5D5"/>
                 </a:solidFill>
@@ -8095,7 +8285,7 @@
               </a:rPr>
               <a:t>Language Models</a:t>
             </a:r>
-            <a:endParaRPr b="0" i="0" sz="1850" u="none" cap="none" strike="noStrike">
+            <a:endParaRPr sz="1850" b="0" i="0" u="none" strike="noStrike" cap="none">
               <a:solidFill>
                 <a:schemeClr val="dk1"/>
               </a:solidFill>
@@ -8127,12 +8317,12 @@
           </a:ln>
         </p:spPr>
         <p:txBody>
-          <a:bodyPr anchorCtr="0" anchor="t" bIns="0" lIns="0" spcFirstLastPara="1" rIns="0" wrap="square" tIns="0">
-            <a:noAutofit/>
-          </a:bodyPr>
-          <a:lstStyle/>
-          <a:p>
-            <a:pPr indent="-233680" lvl="0" marL="233680" marR="0" rtl="0" algn="l">
+          <a:bodyPr spcFirstLastPara="1" wrap="square" lIns="0" tIns="0" rIns="0" bIns="0" anchor="t" anchorCtr="0">
+            <a:noAutofit/>
+          </a:bodyPr>
+          <a:lstStyle/>
+          <a:p>
+            <a:pPr marL="233680" marR="0" lvl="0" indent="-233680" algn="l" rtl="0">
               <a:lnSpc>
                 <a:spcPct val="118000"/>
               </a:lnSpc>
@@ -8150,7 +8340,7 @@
               <a:buChar char="•"/>
             </a:pPr>
             <a:r>
-              <a:rPr b="1" i="0" lang="en-US" sz="1150" u="none" cap="none" strike="noStrike">
+              <a:rPr lang="en-US" sz="1150" b="1" i="0" u="none" strike="noStrike" cap="none">
                 <a:solidFill>
                   <a:srgbClr val="D5D5D5"/>
                 </a:solidFill>
@@ -8162,7 +8352,7 @@
               <a:t>News vs social tuning:</a:t>
             </a:r>
             <a:r>
-              <a:rPr b="0" i="0" lang="en-US" sz="1150" u="none" cap="none" strike="noStrike">
+              <a:rPr lang="en-US" sz="1150" b="0" i="0" u="none" strike="noStrike" cap="none">
                 <a:solidFill>
                   <a:srgbClr val="D5D5D5"/>
                 </a:solidFill>
@@ -8173,7 +8363,7 @@
               </a:rPr>
               <a:t> Articles lean on FinBERT; tweets lean on Twitter-RoBERTa and VADER for slang phrases ("moon", "shorting hard", "massive beat").</a:t>
             </a:r>
-            <a:endParaRPr b="0" i="0" sz="1150" u="none" cap="none" strike="noStrike">
+            <a:endParaRPr sz="1150" b="0" i="0" u="none" strike="noStrike" cap="none">
               <a:solidFill>
                 <a:schemeClr val="dk1"/>
               </a:solidFill>
@@ -8184,7 +8374,7 @@
             </a:endParaRPr>
           </a:p>
           <a:p>
-            <a:pPr indent="-233680" lvl="0" marL="233680" marR="0" rtl="0" algn="l">
+            <a:pPr marL="233680" marR="0" lvl="0" indent="-233680" algn="l" rtl="0">
               <a:lnSpc>
                 <a:spcPct val="118000"/>
               </a:lnSpc>
@@ -8202,7 +8392,7 @@
               <a:buChar char="•"/>
             </a:pPr>
             <a:r>
-              <a:rPr b="1" i="0" lang="en-US" sz="1150" u="none" cap="none" strike="noStrike">
+              <a:rPr lang="en-US" sz="1150" b="1" i="0" u="none" strike="noStrike" cap="none">
                 <a:solidFill>
                   <a:srgbClr val="D5D5D5"/>
                 </a:solidFill>
@@ -8214,7 +8404,7 @@
               <a:t>Event categorization:</a:t>
             </a:r>
             <a:r>
-              <a:rPr b="0" i="0" lang="en-US" sz="1150" u="none" cap="none" strike="noStrike">
+              <a:rPr lang="en-US" sz="1150" b="0" i="0" u="none" strike="noStrike" cap="none">
                 <a:solidFill>
                   <a:srgbClr val="D5D5D5"/>
                 </a:solidFill>
@@ -8225,7 +8415,7 @@
               </a:rPr>
               <a:t> 9 categories, including Central Bank Policy, Earnings, Regulatory Risk, Valuation Bubble, Product Launch.</a:t>
             </a:r>
-            <a:endParaRPr b="0" i="0" sz="1150" u="none" cap="none" strike="noStrike">
+            <a:endParaRPr sz="1150" b="0" i="0" u="none" strike="noStrike" cap="none">
               <a:solidFill>
                 <a:schemeClr val="dk1"/>
               </a:solidFill>
@@ -8259,23 +8449,20 @@
           </a:ln>
         </p:spPr>
         <p:txBody>
-          <a:bodyPr anchorCtr="0" anchor="ctr" bIns="91425" lIns="91425" spcFirstLastPara="1" rIns="91425" wrap="square" tIns="91425">
-            <a:noAutofit/>
-          </a:bodyPr>
-          <a:lstStyle/>
-          <a:p>
-            <a:pPr indent="0" lvl="0" marL="0" rtl="0" algn="l">
-              <a:spcBef>
-                <a:spcPts val="0"/>
-              </a:spcBef>
-              <a:spcAft>
-                <a:spcPts val="0"/>
-              </a:spcAft>
-              <a:buNone/>
-            </a:pPr>
-            <a:r>
-              <a:t/>
-            </a:r>
+          <a:bodyPr spcFirstLastPara="1" wrap="square" lIns="91425" tIns="91425" rIns="91425" bIns="91425" anchor="ctr" anchorCtr="0">
+            <a:noAutofit/>
+          </a:bodyPr>
+          <a:lstStyle/>
+          <a:p>
+            <a:pPr marL="0" lvl="0" indent="0" algn="l" rtl="0">
+              <a:spcBef>
+                <a:spcPts val="0"/>
+              </a:spcBef>
+              <a:spcAft>
+                <a:spcPts val="0"/>
+              </a:spcAft>
+              <a:buNone/>
+            </a:pPr>
             <a:endParaRPr/>
           </a:p>
         </p:txBody>
@@ -8300,12 +8487,12 @@
           </a:ln>
         </p:spPr>
         <p:txBody>
-          <a:bodyPr anchorCtr="0" anchor="t" bIns="0" lIns="0" spcFirstLastPara="1" rIns="0" wrap="square" tIns="0">
-            <a:noAutofit/>
-          </a:bodyPr>
-          <a:lstStyle/>
-          <a:p>
-            <a:pPr indent="0" lvl="0" marL="0" marR="0" rtl="0" algn="l">
+          <a:bodyPr spcFirstLastPara="1" wrap="square" lIns="0" tIns="0" rIns="0" bIns="0" anchor="t" anchorCtr="0">
+            <a:noAutofit/>
+          </a:bodyPr>
+          <a:lstStyle/>
+          <a:p>
+            <a:pPr marL="0" marR="0" lvl="0" indent="0" algn="l" rtl="0">
               <a:lnSpc>
                 <a:spcPct val="110000"/>
               </a:lnSpc>
@@ -8323,7 +8510,7 @@
               <a:buNone/>
             </a:pPr>
             <a:r>
-              <a:rPr b="0" i="0" lang="en-US" sz="1850" u="none" cap="none" strike="noStrike">
+              <a:rPr lang="en-US" sz="1850" b="0" i="0" u="none" strike="noStrike" cap="none">
                 <a:solidFill>
                   <a:srgbClr val="FFFFFF"/>
                 </a:solidFill>
@@ -8334,7 +8521,7 @@
               </a:rPr>
               <a:t>Smart Guardrails</a:t>
             </a:r>
-            <a:endParaRPr b="0" i="0" sz="1850" u="none" cap="none" strike="noStrike">
+            <a:endParaRPr sz="1850" b="0" i="0" u="none" strike="noStrike" cap="none">
               <a:solidFill>
                 <a:schemeClr val="dk1"/>
               </a:solidFill>
@@ -8366,12 +8553,12 @@
           </a:ln>
         </p:spPr>
         <p:txBody>
-          <a:bodyPr anchorCtr="0" anchor="t" bIns="0" lIns="0" spcFirstLastPara="1" rIns="0" wrap="square" tIns="0">
-            <a:noAutofit/>
-          </a:bodyPr>
-          <a:lstStyle/>
-          <a:p>
-            <a:pPr indent="-233680" lvl="0" marL="233680" marR="0" rtl="0" algn="l">
+          <a:bodyPr spcFirstLastPara="1" wrap="square" lIns="0" tIns="0" rIns="0" bIns="0" anchor="t" anchorCtr="0">
+            <a:noAutofit/>
+          </a:bodyPr>
+          <a:lstStyle/>
+          <a:p>
+            <a:pPr marL="233680" marR="0" lvl="0" indent="-233680" algn="l" rtl="0">
               <a:lnSpc>
                 <a:spcPct val="118000"/>
               </a:lnSpc>
@@ -8389,7 +8576,7 @@
               <a:buChar char="•"/>
             </a:pPr>
             <a:r>
-              <a:rPr b="1" i="0" lang="en-US" sz="1150" u="none" cap="none" strike="noStrike">
+              <a:rPr lang="en-US" sz="1150" b="1" i="0" u="none" strike="noStrike" cap="none">
                 <a:solidFill>
                   <a:srgbClr val="FFFFFF"/>
                 </a:solidFill>
@@ -8401,7 +8588,7 @@
               <a:t>Negation detection:</a:t>
             </a:r>
             <a:r>
-              <a:rPr b="0" i="0" lang="en-US" sz="1150" u="none" cap="none" strike="noStrike">
+              <a:rPr lang="en-US" sz="1150" b="0" i="0" u="none" strike="noStrike" cap="none">
                 <a:solidFill>
                   <a:srgbClr val="FFFFFF"/>
                 </a:solidFill>
@@ -8412,7 +8599,7 @@
               </a:rPr>
               <a:t> "shrugged off", "dismissed fears", "downplayed risks" don't get labeled as a crisis.</a:t>
             </a:r>
-            <a:endParaRPr b="0" i="0" sz="1150" u="none" cap="none" strike="noStrike">
+            <a:endParaRPr sz="1150" b="0" i="0" u="none" strike="noStrike" cap="none">
               <a:solidFill>
                 <a:schemeClr val="dk1"/>
               </a:solidFill>
@@ -8423,7 +8610,7 @@
             </a:endParaRPr>
           </a:p>
           <a:p>
-            <a:pPr indent="-233680" lvl="0" marL="233680" marR="0" rtl="0" algn="l">
+            <a:pPr marL="233680" marR="0" lvl="0" indent="-233680" algn="l" rtl="0">
               <a:lnSpc>
                 <a:spcPct val="118000"/>
               </a:lnSpc>
@@ -8441,7 +8628,7 @@
               <a:buChar char="•"/>
             </a:pPr>
             <a:r>
-              <a:rPr b="1" i="0" lang="en-US" sz="1150" u="none" cap="none" strike="noStrike">
+              <a:rPr lang="en-US" sz="1150" b="1" i="0" u="none" strike="noStrike" cap="none">
                 <a:solidFill>
                   <a:srgbClr val="FFFFFF"/>
                 </a:solidFill>
@@ -8453,7 +8640,7 @@
               <a:t>No polarity inversion:</a:t>
             </a:r>
             <a:r>
-              <a:rPr b="0" i="0" lang="en-US" sz="1150" u="none" cap="none" strike="noStrike">
+              <a:rPr lang="en-US" sz="1150" b="0" i="0" u="none" strike="noStrike" cap="none">
                 <a:solidFill>
                   <a:srgbClr val="FFFFFF"/>
                 </a:solidFill>
@@ -8464,7 +8651,7 @@
               </a:rPr>
               <a:t> "bullish on AI" never gets flipped bearish by blunt keyword rules.</a:t>
             </a:r>
-            <a:endParaRPr b="0" i="0" sz="1150" u="none" cap="none" strike="noStrike">
+            <a:endParaRPr sz="1150" b="0" i="0" u="none" strike="noStrike" cap="none">
               <a:solidFill>
                 <a:schemeClr val="dk1"/>
               </a:solidFill>
@@ -8475,7 +8662,7 @@
             </a:endParaRPr>
           </a:p>
           <a:p>
-            <a:pPr indent="-233680" lvl="0" marL="233680" marR="0" rtl="0" algn="l">
+            <a:pPr marL="233680" marR="0" lvl="0" indent="-233680" algn="l" rtl="0">
               <a:lnSpc>
                 <a:spcPct val="118000"/>
               </a:lnSpc>
@@ -8493,7 +8680,7 @@
               <a:buChar char="•"/>
             </a:pPr>
             <a:r>
-              <a:rPr b="1" i="0" lang="en-US" sz="1150" u="none" cap="none" strike="noStrike">
+              <a:rPr lang="en-US" sz="1150" b="1" i="0" u="none" strike="noStrike" cap="none">
                 <a:solidFill>
                   <a:srgbClr val="FFFFFF"/>
                 </a:solidFill>
@@ -8505,7 +8692,7 @@
               <a:t>Context verification:</a:t>
             </a:r>
             <a:r>
-              <a:rPr b="0" i="0" lang="en-US" sz="1150" u="none" cap="none" strike="noStrike">
+              <a:rPr lang="en-US" sz="1150" b="0" i="0" u="none" strike="noStrike" cap="none">
                 <a:solidFill>
                   <a:srgbClr val="FFFFFF"/>
                 </a:solidFill>
@@ -8516,7 +8703,7 @@
               </a:rPr>
               <a:t> Only verified semiconductor, cloud/software, and hardware news can move tech holdings.</a:t>
             </a:r>
-            <a:endParaRPr b="0" i="0" sz="1150" u="none" cap="none" strike="noStrike">
+            <a:endParaRPr sz="1150" b="0" i="0" u="none" strike="noStrike" cap="none">
               <a:solidFill>
                 <a:schemeClr val="dk1"/>
               </a:solidFill>
@@ -8548,12 +8735,12 @@
           </a:ln>
         </p:spPr>
         <p:txBody>
-          <a:bodyPr anchorCtr="0" anchor="ctr" bIns="0" lIns="0" spcFirstLastPara="1" rIns="0" wrap="square" tIns="0">
-            <a:noAutofit/>
-          </a:bodyPr>
-          <a:lstStyle/>
-          <a:p>
-            <a:pPr indent="0" lvl="0" marL="0" marR="0" rtl="0" algn="l">
+          <a:bodyPr spcFirstLastPara="1" wrap="square" lIns="0" tIns="0" rIns="0" bIns="0" anchor="ctr" anchorCtr="0">
+            <a:noAutofit/>
+          </a:bodyPr>
+          <a:lstStyle/>
+          <a:p>
+            <a:pPr marL="0" marR="0" lvl="0" indent="0" algn="l" rtl="0">
               <a:lnSpc>
                 <a:spcPct val="118000"/>
               </a:lnSpc>
@@ -8571,7 +8758,7 @@
               <a:buNone/>
             </a:pPr>
             <a:r>
-              <a:rPr b="0" i="0" lang="en-US" sz="800" u="none" cap="none" strike="noStrike">
+              <a:rPr lang="en-US" sz="800" b="0" i="0" u="none" strike="noStrike" cap="none">
                 <a:solidFill>
                   <a:srgbClr val="9D9D9D"/>
                 </a:solidFill>
@@ -8582,7 +8769,7 @@
               </a:rPr>
               <a:t>04</a:t>
             </a:r>
-            <a:endParaRPr b="0" i="0" sz="800" u="none" cap="none" strike="noStrike">
+            <a:endParaRPr sz="800" b="0" i="0" u="none" strike="noStrike" cap="none">
               <a:solidFill>
                 <a:schemeClr val="dk1"/>
               </a:solidFill>
@@ -8616,23 +8803,20 @@
           </a:ln>
         </p:spPr>
         <p:txBody>
-          <a:bodyPr anchorCtr="0" anchor="t" bIns="91425" lIns="91425" spcFirstLastPara="1" rIns="91425" wrap="square" tIns="91425">
-            <a:noAutofit/>
-          </a:bodyPr>
-          <a:lstStyle/>
-          <a:p>
-            <a:pPr indent="0" lvl="0" marL="0" rtl="0" algn="l">
-              <a:spcBef>
-                <a:spcPts val="0"/>
-              </a:spcBef>
-              <a:spcAft>
-                <a:spcPts val="0"/>
-              </a:spcAft>
-              <a:buNone/>
-            </a:pPr>
-            <a:r>
-              <a:t/>
-            </a:r>
+          <a:bodyPr spcFirstLastPara="1" wrap="square" lIns="91425" tIns="91425" rIns="91425" bIns="91425" anchor="t" anchorCtr="0">
+            <a:noAutofit/>
+          </a:bodyPr>
+          <a:lstStyle/>
+          <a:p>
+            <a:pPr marL="0" lvl="0" indent="0" algn="l" rtl="0">
+              <a:spcBef>
+                <a:spcPts val="0"/>
+              </a:spcBef>
+              <a:spcAft>
+                <a:spcPts val="0"/>
+              </a:spcAft>
+              <a:buNone/>
+            </a:pPr>
             <a:endParaRPr/>
           </a:p>
         </p:txBody>
@@ -8646,11 +8830,11 @@
 </file>
 
 <file path=ppt/slides/slide5.xml><?xml version="1.0" encoding="utf-8"?>
-<p:sld xmlns:a="http://schemas.openxmlformats.org/drawingml/2006/main" xmlns:r="http://schemas.openxmlformats.org/officeDocument/2006/relationships" xmlns:mc="http://schemas.openxmlformats.org/markup-compatibility/2006" xmlns:mv="urn:schemas-microsoft-com:mac:vml" xmlns:p="http://schemas.openxmlformats.org/presentationml/2006/main" xmlns:c="http://schemas.openxmlformats.org/drawingml/2006/chart" xmlns:dgm="http://schemas.openxmlformats.org/drawingml/2006/diagram" xmlns:o="urn:schemas-microsoft-com:office:office" xmlns:v="urn:schemas-microsoft-com:vml" xmlns:pvml="urn:schemas-microsoft-com:office:powerpoint" xmlns:com="http://schemas.openxmlformats.org/drawingml/2006/compatibility" xmlns:p14="http://schemas.microsoft.com/office/powerpoint/2010/main" xmlns:p15="http://schemas.microsoft.com/office/powerpoint/2012/main" xmlns:ahyp="http://schemas.microsoft.com/office/drawing/2018/hyperlinkcolor">
+<p:sld xmlns:a="http://schemas.openxmlformats.org/drawingml/2006/main" xmlns:r="http://schemas.openxmlformats.org/officeDocument/2006/relationships" xmlns:p="http://schemas.openxmlformats.org/presentationml/2006/main">
   <p:cSld>
     <p:spTree>
       <p:nvGrpSpPr>
-        <p:cNvPr id="120" name="Shape 120"/>
+        <p:cNvPr id="1" name="Shape 120"/>
         <p:cNvGrpSpPr/>
         <p:nvPr/>
       </p:nvGrpSpPr>
@@ -8682,12 +8866,12 @@
           </a:ln>
         </p:spPr>
         <p:txBody>
-          <a:bodyPr anchorCtr="0" anchor="t" bIns="0" lIns="0" spcFirstLastPara="1" rIns="0" wrap="square" tIns="0">
-            <a:noAutofit/>
-          </a:bodyPr>
-          <a:lstStyle/>
-          <a:p>
-            <a:pPr indent="0" lvl="0" marL="0" marR="0" rtl="0" algn="l">
+          <a:bodyPr spcFirstLastPara="1" wrap="square" lIns="0" tIns="0" rIns="0" bIns="0" anchor="t" anchorCtr="0">
+            <a:noAutofit/>
+          </a:bodyPr>
+          <a:lstStyle/>
+          <a:p>
+            <a:pPr marL="0" marR="0" lvl="0" indent="0" algn="l" rtl="0">
               <a:lnSpc>
                 <a:spcPct val="89000"/>
               </a:lnSpc>
@@ -8705,7 +8889,7 @@
               <a:buNone/>
             </a:pPr>
             <a:r>
-              <a:rPr b="0" i="0" lang="en-US" sz="2550" u="none" cap="none" strike="noStrike">
+              <a:rPr lang="en-US" sz="2550" b="0" i="0" u="none" strike="noStrike" cap="none">
                 <a:solidFill>
                   <a:srgbClr val="ECECEC"/>
                 </a:solidFill>
@@ -8716,7 +8900,7 @@
               </a:rPr>
               <a:t>Three real engineering problems, and how they were fixed</a:t>
             </a:r>
-            <a:endParaRPr b="0" i="0" sz="2550" u="none" cap="none" strike="noStrike">
+            <a:endParaRPr sz="2550" b="0" i="0" u="none" strike="noStrike" cap="none">
               <a:solidFill>
                 <a:schemeClr val="dk1"/>
               </a:solidFill>
@@ -8750,23 +8934,20 @@
           </a:ln>
         </p:spPr>
         <p:txBody>
-          <a:bodyPr anchorCtr="0" anchor="ctr" bIns="91425" lIns="91425" spcFirstLastPara="1" rIns="91425" wrap="square" tIns="91425">
-            <a:noAutofit/>
-          </a:bodyPr>
-          <a:lstStyle/>
-          <a:p>
-            <a:pPr indent="0" lvl="0" marL="0" rtl="0" algn="l">
-              <a:spcBef>
-                <a:spcPts val="0"/>
-              </a:spcBef>
-              <a:spcAft>
-                <a:spcPts val="0"/>
-              </a:spcAft>
-              <a:buNone/>
-            </a:pPr>
-            <a:r>
-              <a:t/>
-            </a:r>
+          <a:bodyPr spcFirstLastPara="1" wrap="square" lIns="91425" tIns="91425" rIns="91425" bIns="91425" anchor="ctr" anchorCtr="0">
+            <a:noAutofit/>
+          </a:bodyPr>
+          <a:lstStyle/>
+          <a:p>
+            <a:pPr marL="0" lvl="0" indent="0" algn="l" rtl="0">
+              <a:spcBef>
+                <a:spcPts val="0"/>
+              </a:spcBef>
+              <a:spcAft>
+                <a:spcPts val="0"/>
+              </a:spcAft>
+              <a:buNone/>
+            </a:pPr>
             <a:endParaRPr/>
           </a:p>
         </p:txBody>
@@ -8791,12 +8972,12 @@
           </a:ln>
         </p:spPr>
         <p:txBody>
-          <a:bodyPr anchorCtr="0" anchor="t" bIns="0" lIns="0" spcFirstLastPara="1" rIns="0" wrap="square" tIns="0">
-            <a:noAutofit/>
-          </a:bodyPr>
-          <a:lstStyle/>
-          <a:p>
-            <a:pPr indent="0" lvl="0" marL="0" marR="0" rtl="0" algn="l">
+          <a:bodyPr spcFirstLastPara="1" wrap="square" lIns="0" tIns="0" rIns="0" bIns="0" anchor="t" anchorCtr="0">
+            <a:noAutofit/>
+          </a:bodyPr>
+          <a:lstStyle/>
+          <a:p>
+            <a:pPr marL="0" marR="0" lvl="0" indent="0" algn="l" rtl="0">
               <a:lnSpc>
                 <a:spcPct val="108000"/>
               </a:lnSpc>
@@ -8814,7 +8995,7 @@
               <a:buNone/>
             </a:pPr>
             <a:r>
-              <a:rPr b="0" i="0" lang="en-US" sz="850" u="none" cap="none" strike="noStrike">
+              <a:rPr lang="en-US" sz="850" b="0" i="0" u="none" strike="noStrike" cap="none">
                 <a:solidFill>
                   <a:srgbClr val="D5D5D5"/>
                 </a:solidFill>
@@ -8825,7 +9006,7 @@
               </a:rPr>
               <a:t>PROBLEM 01</a:t>
             </a:r>
-            <a:endParaRPr b="0" i="0" sz="850" u="none" cap="none" strike="noStrike">
+            <a:endParaRPr sz="850" b="0" i="0" u="none" strike="noStrike" cap="none">
               <a:solidFill>
                 <a:schemeClr val="dk1"/>
               </a:solidFill>
@@ -8857,12 +9038,12 @@
           </a:ln>
         </p:spPr>
         <p:txBody>
-          <a:bodyPr anchorCtr="0" anchor="t" bIns="0" lIns="0" spcFirstLastPara="1" rIns="0" wrap="square" tIns="0">
-            <a:noAutofit/>
-          </a:bodyPr>
-          <a:lstStyle/>
-          <a:p>
-            <a:pPr indent="0" lvl="0" marL="0" marR="0" rtl="0" algn="l">
+          <a:bodyPr spcFirstLastPara="1" wrap="square" lIns="0" tIns="0" rIns="0" bIns="0" anchor="t" anchorCtr="0">
+            <a:noAutofit/>
+          </a:bodyPr>
+          <a:lstStyle/>
+          <a:p>
+            <a:pPr marL="0" marR="0" lvl="0" indent="0" algn="l" rtl="0">
               <a:lnSpc>
                 <a:spcPct val="108000"/>
               </a:lnSpc>
@@ -8880,7 +9061,7 @@
               <a:buNone/>
             </a:pPr>
             <a:r>
-              <a:rPr b="0" i="0" lang="en-US" sz="900" u="none" cap="none" strike="noStrike">
+              <a:rPr lang="en-US" sz="900" b="0" i="0" u="none" strike="noStrike" cap="none">
                 <a:solidFill>
                   <a:srgbClr val="D5D5D5"/>
                 </a:solidFill>
@@ -8891,7 +9072,7 @@
               </a:rPr>
               <a:t>FILTERING OUT UNRELATED WEB NOISE</a:t>
             </a:r>
-            <a:endParaRPr b="0" i="0" sz="900" u="none" cap="none" strike="noStrike">
+            <a:endParaRPr sz="900" b="0" i="0" u="none" strike="noStrike" cap="none">
               <a:solidFill>
                 <a:schemeClr val="dk1"/>
               </a:solidFill>
@@ -8923,12 +9104,12 @@
           </a:ln>
         </p:spPr>
         <p:txBody>
-          <a:bodyPr anchorCtr="0" anchor="t" bIns="0" lIns="0" spcFirstLastPara="1" rIns="0" wrap="square" tIns="0">
-            <a:noAutofit/>
-          </a:bodyPr>
-          <a:lstStyle/>
-          <a:p>
-            <a:pPr indent="0" lvl="0" marL="0" marR="0" rtl="0" algn="l">
+          <a:bodyPr spcFirstLastPara="1" wrap="square" lIns="0" tIns="0" rIns="0" bIns="0" anchor="t" anchorCtr="0">
+            <a:noAutofit/>
+          </a:bodyPr>
+          <a:lstStyle/>
+          <a:p>
+            <a:pPr marL="0" marR="0" lvl="0" indent="0" algn="l" rtl="0">
               <a:lnSpc>
                 <a:spcPct val="118000"/>
               </a:lnSpc>
@@ -8945,10 +9126,7 @@
               <a:buFont typeface="Calibri"/>
               <a:buNone/>
             </a:pPr>
-            <a:r>
-              <a:t/>
-            </a:r>
-            <a:endParaRPr b="0" i="0" sz="1150" u="none" cap="none" strike="noStrike">
+            <a:endParaRPr sz="1150" b="0" i="0" u="none" strike="noStrike" cap="none">
               <a:solidFill>
                 <a:schemeClr val="dk1"/>
               </a:solidFill>
@@ -8959,7 +9137,7 @@
             </a:endParaRPr>
           </a:p>
           <a:p>
-            <a:pPr indent="0" lvl="0" marL="0" marR="0" rtl="0" algn="l">
+            <a:pPr marL="0" marR="0" lvl="0" indent="0" algn="l" rtl="0">
               <a:lnSpc>
                 <a:spcPct val="118000"/>
               </a:lnSpc>
@@ -8977,7 +9155,7 @@
               <a:buNone/>
             </a:pPr>
             <a:r>
-              <a:rPr b="0" i="0" lang="en-US" sz="1150" u="none" cap="none" strike="noStrike">
+              <a:rPr lang="en-US" sz="1150" b="0" i="0" u="none" strike="noStrike" cap="none">
                 <a:solidFill>
                   <a:srgbClr val="D5D5D5"/>
                 </a:solidFill>
@@ -8988,7 +9166,7 @@
               </a:rPr>
               <a:t>General web scraping pulled in irrelevant celebrity, gambling, and lifestyle articles.</a:t>
             </a:r>
-            <a:endParaRPr b="0" i="0" sz="1150" u="none" cap="none" strike="noStrike">
+            <a:endParaRPr sz="1150" b="0" i="0" u="none" strike="noStrike" cap="none">
               <a:solidFill>
                 <a:schemeClr val="dk1"/>
               </a:solidFill>
@@ -9013,7 +9191,7 @@
           </a:xfrm>
           <a:prstGeom prst="roundRect">
             <a:avLst>
-              <a:gd fmla="val 50000" name="adj"/>
+              <a:gd name="adj" fmla="val 50000"/>
             </a:avLst>
           </a:prstGeom>
           <a:solidFill>
@@ -9024,23 +9202,20 @@
           </a:ln>
         </p:spPr>
         <p:txBody>
-          <a:bodyPr anchorCtr="0" anchor="ctr" bIns="91425" lIns="91425" spcFirstLastPara="1" rIns="91425" wrap="square" tIns="91425">
-            <a:noAutofit/>
-          </a:bodyPr>
-          <a:lstStyle/>
-          <a:p>
-            <a:pPr indent="0" lvl="0" marL="0" rtl="0" algn="l">
-              <a:spcBef>
-                <a:spcPts val="0"/>
-              </a:spcBef>
-              <a:spcAft>
-                <a:spcPts val="0"/>
-              </a:spcAft>
-              <a:buNone/>
-            </a:pPr>
-            <a:r>
-              <a:t/>
-            </a:r>
+          <a:bodyPr spcFirstLastPara="1" wrap="square" lIns="91425" tIns="91425" rIns="91425" bIns="91425" anchor="ctr" anchorCtr="0">
+            <a:noAutofit/>
+          </a:bodyPr>
+          <a:lstStyle/>
+          <a:p>
+            <a:pPr marL="0" lvl="0" indent="0" algn="l" rtl="0">
+              <a:spcBef>
+                <a:spcPts val="0"/>
+              </a:spcBef>
+              <a:spcAft>
+                <a:spcPts val="0"/>
+              </a:spcAft>
+              <a:buNone/>
+            </a:pPr>
             <a:endParaRPr/>
           </a:p>
         </p:txBody>
@@ -9065,12 +9240,12 @@
           </a:ln>
         </p:spPr>
         <p:txBody>
-          <a:bodyPr anchorCtr="0" anchor="t" bIns="0" lIns="0" spcFirstLastPara="1" rIns="0" wrap="square" tIns="0">
-            <a:noAutofit/>
-          </a:bodyPr>
-          <a:lstStyle/>
-          <a:p>
-            <a:pPr indent="0" lvl="0" marL="0" marR="0" rtl="0" algn="l">
+          <a:bodyPr spcFirstLastPara="1" wrap="square" lIns="0" tIns="0" rIns="0" bIns="0" anchor="t" anchorCtr="0">
+            <a:noAutofit/>
+          </a:bodyPr>
+          <a:lstStyle/>
+          <a:p>
+            <a:pPr marL="0" marR="0" lvl="0" indent="0" algn="l" rtl="0">
               <a:lnSpc>
                 <a:spcPct val="118000"/>
               </a:lnSpc>
@@ -9088,7 +9263,7 @@
               <a:buNone/>
             </a:pPr>
             <a:r>
-              <a:rPr b="1" i="0" lang="en-US" sz="1150" u="none" cap="none" strike="noStrike">
+              <a:rPr lang="en-US" sz="1150" b="1" i="0" u="none" strike="noStrike" cap="none">
                 <a:solidFill>
                   <a:srgbClr val="D5D5D5"/>
                 </a:solidFill>
@@ -9100,7 +9275,7 @@
               <a:t>Fix: </a:t>
             </a:r>
             <a:r>
-              <a:rPr b="0" i="0" lang="en-US" sz="1150" u="none" cap="none" strike="noStrike">
+              <a:rPr lang="en-US" sz="1150" b="0" i="0" u="none" strike="noStrike" cap="none">
                 <a:solidFill>
                   <a:srgbClr val="D5D5D5"/>
                 </a:solidFill>
@@ -9111,7 +9286,7 @@
               </a:rPr>
               <a:t>Built strict checks —articles must directly touch our 15 portfolio stocks or genuine macro drivers, or they are dropped immediately..</a:t>
             </a:r>
-            <a:endParaRPr b="0" i="0" sz="1150" u="none" cap="none" strike="noStrike">
+            <a:endParaRPr sz="1150" b="0" i="0" u="none" strike="noStrike" cap="none">
               <a:solidFill>
                 <a:schemeClr val="dk1"/>
               </a:solidFill>
@@ -9145,23 +9320,20 @@
           </a:ln>
         </p:spPr>
         <p:txBody>
-          <a:bodyPr anchorCtr="0" anchor="ctr" bIns="91425" lIns="91425" spcFirstLastPara="1" rIns="91425" wrap="square" tIns="91425">
-            <a:noAutofit/>
-          </a:bodyPr>
-          <a:lstStyle/>
-          <a:p>
-            <a:pPr indent="0" lvl="0" marL="0" rtl="0" algn="l">
-              <a:spcBef>
-                <a:spcPts val="0"/>
-              </a:spcBef>
-              <a:spcAft>
-                <a:spcPts val="0"/>
-              </a:spcAft>
-              <a:buNone/>
-            </a:pPr>
-            <a:r>
-              <a:t/>
-            </a:r>
+          <a:bodyPr spcFirstLastPara="1" wrap="square" lIns="91425" tIns="91425" rIns="91425" bIns="91425" anchor="ctr" anchorCtr="0">
+            <a:noAutofit/>
+          </a:bodyPr>
+          <a:lstStyle/>
+          <a:p>
+            <a:pPr marL="0" lvl="0" indent="0" algn="l" rtl="0">
+              <a:spcBef>
+                <a:spcPts val="0"/>
+              </a:spcBef>
+              <a:spcAft>
+                <a:spcPts val="0"/>
+              </a:spcAft>
+              <a:buNone/>
+            </a:pPr>
             <a:endParaRPr/>
           </a:p>
         </p:txBody>
@@ -9186,12 +9358,12 @@
           </a:ln>
         </p:spPr>
         <p:txBody>
-          <a:bodyPr anchorCtr="0" anchor="t" bIns="0" lIns="0" spcFirstLastPara="1" rIns="0" wrap="square" tIns="0">
-            <a:noAutofit/>
-          </a:bodyPr>
-          <a:lstStyle/>
-          <a:p>
-            <a:pPr indent="0" lvl="0" marL="0" marR="0" rtl="0" algn="l">
+          <a:bodyPr spcFirstLastPara="1" wrap="square" lIns="0" tIns="0" rIns="0" bIns="0" anchor="t" anchorCtr="0">
+            <a:noAutofit/>
+          </a:bodyPr>
+          <a:lstStyle/>
+          <a:p>
+            <a:pPr marL="0" marR="0" lvl="0" indent="0" algn="l" rtl="0">
               <a:lnSpc>
                 <a:spcPct val="108000"/>
               </a:lnSpc>
@@ -9209,7 +9381,7 @@
               <a:buNone/>
             </a:pPr>
             <a:r>
-              <a:rPr b="0" i="0" lang="en-US" sz="850" u="none" cap="none" strike="noStrike">
+              <a:rPr lang="en-US" sz="850" b="0" i="0" u="none" strike="noStrike" cap="none">
                 <a:solidFill>
                   <a:srgbClr val="D5D5D5"/>
                 </a:solidFill>
@@ -9220,7 +9392,7 @@
               </a:rPr>
               <a:t>PROBLEM 02</a:t>
             </a:r>
-            <a:endParaRPr b="0" i="0" sz="850" u="none" cap="none" strike="noStrike">
+            <a:endParaRPr sz="850" b="0" i="0" u="none" strike="noStrike" cap="none">
               <a:solidFill>
                 <a:schemeClr val="dk1"/>
               </a:solidFill>
@@ -9252,12 +9424,12 @@
           </a:ln>
         </p:spPr>
         <p:txBody>
-          <a:bodyPr anchorCtr="0" anchor="t" bIns="0" lIns="0" spcFirstLastPara="1" rIns="0" wrap="square" tIns="0">
-            <a:noAutofit/>
-          </a:bodyPr>
-          <a:lstStyle/>
-          <a:p>
-            <a:pPr indent="0" lvl="0" marL="0" marR="0" rtl="0" algn="l">
+          <a:bodyPr spcFirstLastPara="1" wrap="square" lIns="0" tIns="0" rIns="0" bIns="0" anchor="t" anchorCtr="0">
+            <a:noAutofit/>
+          </a:bodyPr>
+          <a:lstStyle/>
+          <a:p>
+            <a:pPr marL="0" marR="0" lvl="0" indent="0" algn="l" rtl="0">
               <a:lnSpc>
                 <a:spcPct val="108000"/>
               </a:lnSpc>
@@ -9275,7 +9447,7 @@
               <a:buNone/>
             </a:pPr>
             <a:r>
-              <a:rPr b="0" i="0" lang="en-US" sz="900" u="none" cap="none" strike="noStrike">
+              <a:rPr lang="en-US" sz="900" b="0" i="0" u="none" strike="noStrike" cap="none">
                 <a:solidFill>
                   <a:srgbClr val="D5D5D5"/>
                 </a:solidFill>
@@ -9286,7 +9458,7 @@
               </a:rPr>
               <a:t>WRONG CONTEXT AND SPEAKERS</a:t>
             </a:r>
-            <a:endParaRPr b="0" i="0" sz="900" u="none" cap="none" strike="noStrike">
+            <a:endParaRPr sz="900" b="0" i="0" u="none" strike="noStrike" cap="none">
               <a:solidFill>
                 <a:schemeClr val="dk1"/>
               </a:solidFill>
@@ -9318,12 +9490,12 @@
           </a:ln>
         </p:spPr>
         <p:txBody>
-          <a:bodyPr anchorCtr="0" anchor="t" bIns="0" lIns="0" spcFirstLastPara="1" rIns="0" wrap="square" tIns="0">
-            <a:noAutofit/>
-          </a:bodyPr>
-          <a:lstStyle/>
-          <a:p>
-            <a:pPr indent="0" lvl="0" marL="0" marR="0" rtl="0" algn="l">
+          <a:bodyPr spcFirstLastPara="1" wrap="square" lIns="0" tIns="0" rIns="0" bIns="0" anchor="t" anchorCtr="0">
+            <a:noAutofit/>
+          </a:bodyPr>
+          <a:lstStyle/>
+          <a:p>
+            <a:pPr marL="0" marR="0" lvl="0" indent="0" algn="l" rtl="0">
               <a:lnSpc>
                 <a:spcPct val="118000"/>
               </a:lnSpc>
@@ -9341,7 +9513,7 @@
               <a:buNone/>
             </a:pPr>
             <a:r>
-              <a:rPr b="0" i="0" lang="en-US" sz="1150" u="none" cap="none" strike="noStrike">
+              <a:rPr lang="en-US" sz="1150" b="0" i="0" u="none" strike="noStrike" cap="none">
                 <a:solidFill>
                   <a:srgbClr val="D5D5D5"/>
                 </a:solidFill>
@@ -9352,7 +9524,7 @@
               </a:rPr>
               <a:t>"Ferrari's chairman is bullish on AI" gave Microsoft and Apple a -0.20 Slightly Bearish score.</a:t>
             </a:r>
-            <a:endParaRPr b="0" i="0" sz="1150" u="none" cap="none" strike="noStrike">
+            <a:endParaRPr sz="1150" b="0" i="0" u="none" strike="noStrike" cap="none">
               <a:solidFill>
                 <a:schemeClr val="dk1"/>
               </a:solidFill>
@@ -9377,7 +9549,7 @@
           </a:xfrm>
           <a:prstGeom prst="roundRect">
             <a:avLst>
-              <a:gd fmla="val 50000" name="adj"/>
+              <a:gd name="adj" fmla="val 50000"/>
             </a:avLst>
           </a:prstGeom>
           <a:solidFill>
@@ -9388,23 +9560,20 @@
           </a:ln>
         </p:spPr>
         <p:txBody>
-          <a:bodyPr anchorCtr="0" anchor="ctr" bIns="91425" lIns="91425" spcFirstLastPara="1" rIns="91425" wrap="square" tIns="91425">
-            <a:noAutofit/>
-          </a:bodyPr>
-          <a:lstStyle/>
-          <a:p>
-            <a:pPr indent="0" lvl="0" marL="0" rtl="0" algn="l">
-              <a:spcBef>
-                <a:spcPts val="0"/>
-              </a:spcBef>
-              <a:spcAft>
-                <a:spcPts val="0"/>
-              </a:spcAft>
-              <a:buNone/>
-            </a:pPr>
-            <a:r>
-              <a:t/>
-            </a:r>
+          <a:bodyPr spcFirstLastPara="1" wrap="square" lIns="91425" tIns="91425" rIns="91425" bIns="91425" anchor="ctr" anchorCtr="0">
+            <a:noAutofit/>
+          </a:bodyPr>
+          <a:lstStyle/>
+          <a:p>
+            <a:pPr marL="0" lvl="0" indent="0" algn="l" rtl="0">
+              <a:spcBef>
+                <a:spcPts val="0"/>
+              </a:spcBef>
+              <a:spcAft>
+                <a:spcPts val="0"/>
+              </a:spcAft>
+              <a:buNone/>
+            </a:pPr>
             <a:endParaRPr/>
           </a:p>
         </p:txBody>
@@ -9429,12 +9598,12 @@
           </a:ln>
         </p:spPr>
         <p:txBody>
-          <a:bodyPr anchorCtr="0" anchor="t" bIns="0" lIns="0" spcFirstLastPara="1" rIns="0" wrap="square" tIns="0">
-            <a:noAutofit/>
-          </a:bodyPr>
-          <a:lstStyle/>
-          <a:p>
-            <a:pPr indent="0" lvl="0" marL="0" marR="0" rtl="0" algn="l">
+          <a:bodyPr spcFirstLastPara="1" wrap="square" lIns="0" tIns="0" rIns="0" bIns="0" anchor="t" anchorCtr="0">
+            <a:noAutofit/>
+          </a:bodyPr>
+          <a:lstStyle/>
+          <a:p>
+            <a:pPr marL="0" marR="0" lvl="0" indent="0" algn="l" rtl="0">
               <a:lnSpc>
                 <a:spcPct val="118000"/>
               </a:lnSpc>
@@ -9452,7 +9621,7 @@
               <a:buNone/>
             </a:pPr>
             <a:r>
-              <a:rPr b="1" i="0" lang="en-US" sz="1150" u="none" cap="none" strike="noStrike">
+              <a:rPr lang="en-US" sz="1150" b="1" i="0" u="none" strike="noStrike" cap="none">
                 <a:solidFill>
                   <a:srgbClr val="D5D5D5"/>
                 </a:solidFill>
@@ -9464,7 +9633,7 @@
               <a:t>Fix:</a:t>
             </a:r>
             <a:r>
-              <a:rPr b="0" i="0" lang="en-US" sz="1150" u="none" cap="none" strike="noStrike">
+              <a:rPr lang="en-US" sz="1150" b="0" i="0" u="none" strike="noStrike" cap="none">
                 <a:solidFill>
                   <a:srgbClr val="D5D5D5"/>
                 </a:solidFill>
@@ -9475,7 +9644,7 @@
               </a:rPr>
               <a:t> Negation checks and tech-sector context requirements.</a:t>
             </a:r>
-            <a:endParaRPr b="0" i="0" sz="1150" u="none" cap="none" strike="noStrike">
+            <a:endParaRPr sz="1150" b="0" i="0" u="none" strike="noStrike" cap="none">
               <a:solidFill>
                 <a:schemeClr val="dk1"/>
               </a:solidFill>
@@ -9509,23 +9678,20 @@
           </a:ln>
         </p:spPr>
         <p:txBody>
-          <a:bodyPr anchorCtr="0" anchor="ctr" bIns="91425" lIns="91425" spcFirstLastPara="1" rIns="91425" wrap="square" tIns="91425">
-            <a:noAutofit/>
-          </a:bodyPr>
-          <a:lstStyle/>
-          <a:p>
-            <a:pPr indent="0" lvl="0" marL="0" rtl="0" algn="l">
-              <a:spcBef>
-                <a:spcPts val="0"/>
-              </a:spcBef>
-              <a:spcAft>
-                <a:spcPts val="0"/>
-              </a:spcAft>
-              <a:buNone/>
-            </a:pPr>
-            <a:r>
-              <a:t/>
-            </a:r>
+          <a:bodyPr spcFirstLastPara="1" wrap="square" lIns="91425" tIns="91425" rIns="91425" bIns="91425" anchor="ctr" anchorCtr="0">
+            <a:noAutofit/>
+          </a:bodyPr>
+          <a:lstStyle/>
+          <a:p>
+            <a:pPr marL="0" lvl="0" indent="0" algn="l" rtl="0">
+              <a:spcBef>
+                <a:spcPts val="0"/>
+              </a:spcBef>
+              <a:spcAft>
+                <a:spcPts val="0"/>
+              </a:spcAft>
+              <a:buNone/>
+            </a:pPr>
             <a:endParaRPr/>
           </a:p>
         </p:txBody>
@@ -9550,12 +9716,12 @@
           </a:ln>
         </p:spPr>
         <p:txBody>
-          <a:bodyPr anchorCtr="0" anchor="t" bIns="0" lIns="0" spcFirstLastPara="1" rIns="0" wrap="square" tIns="0">
-            <a:noAutofit/>
-          </a:bodyPr>
-          <a:lstStyle/>
-          <a:p>
-            <a:pPr indent="0" lvl="0" marL="0" marR="0" rtl="0" algn="l">
+          <a:bodyPr spcFirstLastPara="1" wrap="square" lIns="0" tIns="0" rIns="0" bIns="0" anchor="t" anchorCtr="0">
+            <a:noAutofit/>
+          </a:bodyPr>
+          <a:lstStyle/>
+          <a:p>
+            <a:pPr marL="0" marR="0" lvl="0" indent="0" algn="l" rtl="0">
               <a:lnSpc>
                 <a:spcPct val="108000"/>
               </a:lnSpc>
@@ -9573,7 +9739,7 @@
               <a:buNone/>
             </a:pPr>
             <a:r>
-              <a:rPr b="0" i="0" lang="en-US" sz="850" u="none" cap="none" strike="noStrike">
+              <a:rPr lang="en-US" sz="850" b="0" i="0" u="none" strike="noStrike" cap="none">
                 <a:solidFill>
                   <a:srgbClr val="D5D5D5"/>
                 </a:solidFill>
@@ -9584,7 +9750,7 @@
               </a:rPr>
               <a:t>PROBLEM 03</a:t>
             </a:r>
-            <a:endParaRPr b="0" i="0" sz="850" u="none" cap="none" strike="noStrike">
+            <a:endParaRPr sz="850" b="0" i="0" u="none" strike="noStrike" cap="none">
               <a:solidFill>
                 <a:schemeClr val="dk1"/>
               </a:solidFill>
@@ -9616,12 +9782,12 @@
           </a:ln>
         </p:spPr>
         <p:txBody>
-          <a:bodyPr anchorCtr="0" anchor="t" bIns="0" lIns="0" spcFirstLastPara="1" rIns="0" wrap="square" tIns="0">
-            <a:noAutofit/>
-          </a:bodyPr>
-          <a:lstStyle/>
-          <a:p>
-            <a:pPr indent="0" lvl="0" marL="0" marR="0" rtl="0" algn="l">
+          <a:bodyPr spcFirstLastPara="1" wrap="square" lIns="0" tIns="0" rIns="0" bIns="0" anchor="t" anchorCtr="0">
+            <a:noAutofit/>
+          </a:bodyPr>
+          <a:lstStyle/>
+          <a:p>
+            <a:pPr marL="0" marR="0" lvl="0" indent="0" algn="l" rtl="0">
               <a:lnSpc>
                 <a:spcPct val="108000"/>
               </a:lnSpc>
@@ -9639,7 +9805,7 @@
               <a:buNone/>
             </a:pPr>
             <a:r>
-              <a:rPr b="0" i="0" lang="en-US" sz="900" u="none" cap="none" strike="noStrike">
+              <a:rPr lang="en-US" sz="900" b="0" i="0" u="none" strike="noStrike" cap="none">
                 <a:solidFill>
                   <a:srgbClr val="D5D5D5"/>
                 </a:solidFill>
@@ -9650,7 +9816,7 @@
               </a:rPr>
               <a:t>INFERENCE SPEED</a:t>
             </a:r>
-            <a:endParaRPr b="0" i="0" sz="900" u="none" cap="none" strike="noStrike">
+            <a:endParaRPr sz="900" b="0" i="0" u="none" strike="noStrike" cap="none">
               <a:solidFill>
                 <a:schemeClr val="dk1"/>
               </a:solidFill>
@@ -9682,12 +9848,12 @@
           </a:ln>
         </p:spPr>
         <p:txBody>
-          <a:bodyPr anchorCtr="0" anchor="t" bIns="0" lIns="0" spcFirstLastPara="1" rIns="0" wrap="square" tIns="0">
-            <a:noAutofit/>
-          </a:bodyPr>
-          <a:lstStyle/>
-          <a:p>
-            <a:pPr indent="0" lvl="0" marL="0" marR="0" rtl="0" algn="l">
+          <a:bodyPr spcFirstLastPara="1" wrap="square" lIns="0" tIns="0" rIns="0" bIns="0" anchor="t" anchorCtr="0">
+            <a:noAutofit/>
+          </a:bodyPr>
+          <a:lstStyle/>
+          <a:p>
+            <a:pPr marL="0" marR="0" lvl="0" indent="0" algn="l" rtl="0">
               <a:lnSpc>
                 <a:spcPct val="118000"/>
               </a:lnSpc>
@@ -9704,10 +9870,7 @@
               <a:buFont typeface="Calibri"/>
               <a:buNone/>
             </a:pPr>
-            <a:r>
-              <a:t/>
-            </a:r>
-            <a:endParaRPr b="0" i="0" sz="1150" u="none" cap="none" strike="noStrike">
+            <a:endParaRPr sz="1150" b="0" i="0" u="none" strike="noStrike" cap="none">
               <a:solidFill>
                 <a:schemeClr val="dk1"/>
               </a:solidFill>
@@ -9718,7 +9881,7 @@
             </a:endParaRPr>
           </a:p>
           <a:p>
-            <a:pPr indent="0" lvl="0" marL="0" marR="0" rtl="0" algn="l">
+            <a:pPr marL="0" marR="0" lvl="0" indent="0" algn="l" rtl="0">
               <a:lnSpc>
                 <a:spcPct val="118000"/>
               </a:lnSpc>
@@ -9736,7 +9899,7 @@
               <a:buNone/>
             </a:pPr>
             <a:r>
-              <a:rPr b="0" i="0" lang="en-US" sz="1150" u="none" cap="none" strike="noStrike">
+              <a:rPr lang="en-US" sz="1150" b="0" i="0" u="none" strike="noStrike" cap="none">
                 <a:solidFill>
                   <a:srgbClr val="D5D5D5"/>
                 </a:solidFill>
@@ -9747,7 +9910,7 @@
               </a:rPr>
               <a:t>BART on 30 raw candidate articles took nearly 90 seconds.</a:t>
             </a:r>
-            <a:endParaRPr b="0" i="0" sz="1150" u="none" cap="none" strike="noStrike">
+            <a:endParaRPr sz="1150" b="0" i="0" u="none" strike="noStrike" cap="none">
               <a:solidFill>
                 <a:schemeClr val="dk1"/>
               </a:solidFill>
@@ -9772,7 +9935,7 @@
           </a:xfrm>
           <a:prstGeom prst="roundRect">
             <a:avLst>
-              <a:gd fmla="val 50000" name="adj"/>
+              <a:gd name="adj" fmla="val 50000"/>
             </a:avLst>
           </a:prstGeom>
           <a:solidFill>
@@ -9783,23 +9946,20 @@
           </a:ln>
         </p:spPr>
         <p:txBody>
-          <a:bodyPr anchorCtr="0" anchor="ctr" bIns="91425" lIns="91425" spcFirstLastPara="1" rIns="91425" wrap="square" tIns="91425">
-            <a:noAutofit/>
-          </a:bodyPr>
-          <a:lstStyle/>
-          <a:p>
-            <a:pPr indent="0" lvl="0" marL="0" rtl="0" algn="l">
-              <a:spcBef>
-                <a:spcPts val="0"/>
-              </a:spcBef>
-              <a:spcAft>
-                <a:spcPts val="0"/>
-              </a:spcAft>
-              <a:buNone/>
-            </a:pPr>
-            <a:r>
-              <a:t/>
-            </a:r>
+          <a:bodyPr spcFirstLastPara="1" wrap="square" lIns="91425" tIns="91425" rIns="91425" bIns="91425" anchor="ctr" anchorCtr="0">
+            <a:noAutofit/>
+          </a:bodyPr>
+          <a:lstStyle/>
+          <a:p>
+            <a:pPr marL="0" lvl="0" indent="0" algn="l" rtl="0">
+              <a:spcBef>
+                <a:spcPts val="0"/>
+              </a:spcBef>
+              <a:spcAft>
+                <a:spcPts val="0"/>
+              </a:spcAft>
+              <a:buNone/>
+            </a:pPr>
             <a:endParaRPr/>
           </a:p>
         </p:txBody>
@@ -9824,12 +9984,12 @@
           </a:ln>
         </p:spPr>
         <p:txBody>
-          <a:bodyPr anchorCtr="0" anchor="t" bIns="0" lIns="0" spcFirstLastPara="1" rIns="0" wrap="square" tIns="0">
-            <a:noAutofit/>
-          </a:bodyPr>
-          <a:lstStyle/>
-          <a:p>
-            <a:pPr indent="0" lvl="0" marL="0" marR="0" rtl="0" algn="l">
+          <a:bodyPr spcFirstLastPara="1" wrap="square" lIns="0" tIns="0" rIns="0" bIns="0" anchor="t" anchorCtr="0">
+            <a:noAutofit/>
+          </a:bodyPr>
+          <a:lstStyle/>
+          <a:p>
+            <a:pPr marL="0" marR="0" lvl="0" indent="0" algn="l" rtl="0">
               <a:lnSpc>
                 <a:spcPct val="118000"/>
               </a:lnSpc>
@@ -9847,7 +10007,7 @@
               <a:buNone/>
             </a:pPr>
             <a:r>
-              <a:rPr b="1" i="0" lang="en-US" sz="1150" u="none" cap="none" strike="noStrike">
+              <a:rPr lang="en-US" sz="1150" b="1" i="0" u="none" strike="noStrike" cap="none">
                 <a:solidFill>
                   <a:srgbClr val="D5D5D5"/>
                 </a:solidFill>
@@ -9859,7 +10019,7 @@
               <a:t>Fix:</a:t>
             </a:r>
             <a:r>
-              <a:rPr b="0" i="0" lang="en-US" sz="1150" u="none" cap="none" strike="noStrike">
+              <a:rPr lang="en-US" sz="1150" b="0" i="0" u="none" strike="noStrike" cap="none">
                 <a:solidFill>
                   <a:srgbClr val="D5D5D5"/>
                 </a:solidFill>
@@ -9870,7 +10030,7 @@
               </a:rPr>
               <a:t> Regex and keyword pre-screening drops irrelevant articles in under 20 milliseconds, so transformers run only on confirmed portfolio news.</a:t>
             </a:r>
-            <a:endParaRPr b="0" i="0" sz="1150" u="none" cap="none" strike="noStrike">
+            <a:endParaRPr sz="1150" b="0" i="0" u="none" strike="noStrike" cap="none">
               <a:solidFill>
                 <a:schemeClr val="dk1"/>
               </a:solidFill>
@@ -9904,23 +10064,20 @@
           </a:ln>
         </p:spPr>
         <p:txBody>
-          <a:bodyPr anchorCtr="0" anchor="t" bIns="91425" lIns="91425" spcFirstLastPara="1" rIns="91425" wrap="square" tIns="91425">
-            <a:noAutofit/>
-          </a:bodyPr>
-          <a:lstStyle/>
-          <a:p>
-            <a:pPr indent="0" lvl="0" marL="0" rtl="0" algn="l">
-              <a:spcBef>
-                <a:spcPts val="0"/>
-              </a:spcBef>
-              <a:spcAft>
-                <a:spcPts val="0"/>
-              </a:spcAft>
-              <a:buNone/>
-            </a:pPr>
-            <a:r>
-              <a:t/>
-            </a:r>
+          <a:bodyPr spcFirstLastPara="1" wrap="square" lIns="91425" tIns="91425" rIns="91425" bIns="91425" anchor="t" anchorCtr="0">
+            <a:noAutofit/>
+          </a:bodyPr>
+          <a:lstStyle/>
+          <a:p>
+            <a:pPr marL="0" lvl="0" indent="0" algn="l" rtl="0">
+              <a:spcBef>
+                <a:spcPts val="0"/>
+              </a:spcBef>
+              <a:spcAft>
+                <a:spcPts val="0"/>
+              </a:spcAft>
+              <a:buNone/>
+            </a:pPr>
             <a:endParaRPr/>
           </a:p>
         </p:txBody>
@@ -9934,11 +10091,11 @@
 </file>
 
 <file path=ppt/slides/slide6.xml><?xml version="1.0" encoding="utf-8"?>
-<p:sld xmlns:a="http://schemas.openxmlformats.org/drawingml/2006/main" xmlns:r="http://schemas.openxmlformats.org/officeDocument/2006/relationships" xmlns:mc="http://schemas.openxmlformats.org/markup-compatibility/2006" xmlns:mv="urn:schemas-microsoft-com:mac:vml" xmlns:p="http://schemas.openxmlformats.org/presentationml/2006/main" xmlns:c="http://schemas.openxmlformats.org/drawingml/2006/chart" xmlns:dgm="http://schemas.openxmlformats.org/drawingml/2006/diagram" xmlns:o="urn:schemas-microsoft-com:office:office" xmlns:v="urn:schemas-microsoft-com:vml" xmlns:pvml="urn:schemas-microsoft-com:office:powerpoint" xmlns:com="http://schemas.openxmlformats.org/drawingml/2006/compatibility" xmlns:p14="http://schemas.microsoft.com/office/powerpoint/2010/main" xmlns:p15="http://schemas.microsoft.com/office/powerpoint/2012/main" xmlns:ahyp="http://schemas.microsoft.com/office/drawing/2018/hyperlinkcolor">
+<p:sld xmlns:a="http://schemas.openxmlformats.org/drawingml/2006/main" xmlns:r="http://schemas.openxmlformats.org/officeDocument/2006/relationships" xmlns:p="http://schemas.openxmlformats.org/presentationml/2006/main">
   <p:cSld>
     <p:spTree>
       <p:nvGrpSpPr>
-        <p:cNvPr id="145" name="Shape 145"/>
+        <p:cNvPr id="1" name="Shape 145"/>
         <p:cNvGrpSpPr/>
         <p:nvPr/>
       </p:nvGrpSpPr>
@@ -9970,12 +10127,12 @@
           </a:ln>
         </p:spPr>
         <p:txBody>
-          <a:bodyPr anchorCtr="0" anchor="t" bIns="0" lIns="0" spcFirstLastPara="1" rIns="0" wrap="square" tIns="0">
-            <a:noAutofit/>
-          </a:bodyPr>
-          <a:lstStyle/>
-          <a:p>
-            <a:pPr indent="0" lvl="0" marL="0" marR="0" rtl="0" algn="l">
+          <a:bodyPr spcFirstLastPara="1" wrap="square" lIns="0" tIns="0" rIns="0" bIns="0" anchor="t" anchorCtr="0">
+            <a:noAutofit/>
+          </a:bodyPr>
+          <a:lstStyle/>
+          <a:p>
+            <a:pPr marL="0" marR="0" lvl="0" indent="0" algn="l" rtl="0">
               <a:lnSpc>
                 <a:spcPct val="108000"/>
               </a:lnSpc>
@@ -9993,7 +10150,7 @@
               <a:buNone/>
             </a:pPr>
             <a:r>
-              <a:rPr b="0" i="0" lang="en-US" sz="850" u="none" cap="none" strike="noStrike">
+              <a:rPr lang="en-US" sz="850" b="0" i="0" u="none" strike="noStrike" cap="none">
                 <a:solidFill>
                   <a:srgbClr val="B5B5B5"/>
                 </a:solidFill>
@@ -10004,7 +10161,7 @@
               </a:rPr>
               <a:t>EXECUTION &amp; MONITORING</a:t>
             </a:r>
-            <a:endParaRPr b="0" i="0" sz="850" u="none" cap="none" strike="noStrike">
+            <a:endParaRPr sz="850" b="0" i="0" u="none" strike="noStrike" cap="none">
               <a:solidFill>
                 <a:schemeClr val="dk1"/>
               </a:solidFill>
@@ -10036,12 +10193,12 @@
           </a:ln>
         </p:spPr>
         <p:txBody>
-          <a:bodyPr anchorCtr="0" anchor="t" bIns="0" lIns="0" spcFirstLastPara="1" rIns="0" wrap="square" tIns="0">
-            <a:noAutofit/>
-          </a:bodyPr>
-          <a:lstStyle/>
-          <a:p>
-            <a:pPr indent="0" lvl="0" marL="0" marR="0" rtl="0" algn="l">
+          <a:bodyPr spcFirstLastPara="1" wrap="square" lIns="0" tIns="0" rIns="0" bIns="0" anchor="t" anchorCtr="0">
+            <a:noAutofit/>
+          </a:bodyPr>
+          <a:lstStyle/>
+          <a:p>
+            <a:pPr marL="0" marR="0" lvl="0" indent="0" algn="l" rtl="0">
               <a:lnSpc>
                 <a:spcPct val="89000"/>
               </a:lnSpc>
@@ -10059,7 +10216,7 @@
               <a:buNone/>
             </a:pPr>
             <a:r>
-              <a:rPr b="0" i="0" lang="en-US" sz="2550" u="none" cap="none" strike="noStrike">
+              <a:rPr lang="en-US" sz="2550" b="0" i="0" u="none" strike="noStrike" cap="none">
                 <a:solidFill>
                   <a:srgbClr val="ECECEC"/>
                 </a:solidFill>
@@ -10070,7 +10227,7 @@
               </a:rPr>
               <a:t>The rebalancing math and the live dashboard</a:t>
             </a:r>
-            <a:endParaRPr b="0" i="0" sz="2550" u="none" cap="none" strike="noStrike">
+            <a:endParaRPr sz="2550" b="0" i="0" u="none" strike="noStrike" cap="none">
               <a:solidFill>
                 <a:schemeClr val="dk1"/>
               </a:solidFill>
@@ -10095,7 +10252,7 @@
           </a:xfrm>
           <a:prstGeom prst="roundRect">
             <a:avLst>
-              <a:gd fmla="val 50000" name="adj"/>
+              <a:gd name="adj" fmla="val 50000"/>
             </a:avLst>
           </a:prstGeom>
           <a:solidFill>
@@ -10106,23 +10263,20 @@
           </a:ln>
         </p:spPr>
         <p:txBody>
-          <a:bodyPr anchorCtr="0" anchor="ctr" bIns="91425" lIns="91425" spcFirstLastPara="1" rIns="91425" wrap="square" tIns="91425">
-            <a:noAutofit/>
-          </a:bodyPr>
-          <a:lstStyle/>
-          <a:p>
-            <a:pPr indent="0" lvl="0" marL="0" rtl="0" algn="l">
-              <a:spcBef>
-                <a:spcPts val="0"/>
-              </a:spcBef>
-              <a:spcAft>
-                <a:spcPts val="0"/>
-              </a:spcAft>
-              <a:buNone/>
-            </a:pPr>
-            <a:r>
-              <a:t/>
-            </a:r>
+          <a:bodyPr spcFirstLastPara="1" wrap="square" lIns="91425" tIns="91425" rIns="91425" bIns="91425" anchor="ctr" anchorCtr="0">
+            <a:noAutofit/>
+          </a:bodyPr>
+          <a:lstStyle/>
+          <a:p>
+            <a:pPr marL="0" lvl="0" indent="0" algn="l" rtl="0">
+              <a:spcBef>
+                <a:spcPts val="0"/>
+              </a:spcBef>
+              <a:spcAft>
+                <a:spcPts val="0"/>
+              </a:spcAft>
+              <a:buNone/>
+            </a:pPr>
             <a:endParaRPr/>
           </a:p>
         </p:txBody>
@@ -10149,23 +10303,20 @@
           </a:ln>
         </p:spPr>
         <p:txBody>
-          <a:bodyPr anchorCtr="0" anchor="ctr" bIns="91425" lIns="91425" spcFirstLastPara="1" rIns="91425" wrap="square" tIns="91425">
-            <a:noAutofit/>
-          </a:bodyPr>
-          <a:lstStyle/>
-          <a:p>
-            <a:pPr indent="0" lvl="0" marL="0" rtl="0" algn="l">
-              <a:spcBef>
-                <a:spcPts val="0"/>
-              </a:spcBef>
-              <a:spcAft>
-                <a:spcPts val="0"/>
-              </a:spcAft>
-              <a:buNone/>
-            </a:pPr>
-            <a:r>
-              <a:t/>
-            </a:r>
+          <a:bodyPr spcFirstLastPara="1" wrap="square" lIns="91425" tIns="91425" rIns="91425" bIns="91425" anchor="ctr" anchorCtr="0">
+            <a:noAutofit/>
+          </a:bodyPr>
+          <a:lstStyle/>
+          <a:p>
+            <a:pPr marL="0" lvl="0" indent="0" algn="l" rtl="0">
+              <a:spcBef>
+                <a:spcPts val="0"/>
+              </a:spcBef>
+              <a:spcAft>
+                <a:spcPts val="0"/>
+              </a:spcAft>
+              <a:buNone/>
+            </a:pPr>
             <a:endParaRPr/>
           </a:p>
         </p:txBody>
@@ -10190,12 +10341,12 @@
           </a:ln>
         </p:spPr>
         <p:txBody>
-          <a:bodyPr anchorCtr="0" anchor="t" bIns="0" lIns="0" spcFirstLastPara="1" rIns="0" wrap="square" tIns="0">
-            <a:noAutofit/>
-          </a:bodyPr>
-          <a:lstStyle/>
-          <a:p>
-            <a:pPr indent="0" lvl="0" marL="0" marR="0" rtl="0" algn="l">
+          <a:bodyPr spcFirstLastPara="1" wrap="square" lIns="0" tIns="0" rIns="0" bIns="0" anchor="t" anchorCtr="0">
+            <a:noAutofit/>
+          </a:bodyPr>
+          <a:lstStyle/>
+          <a:p>
+            <a:pPr marL="0" marR="0" lvl="0" indent="0" algn="l" rtl="0">
               <a:lnSpc>
                 <a:spcPct val="110000"/>
               </a:lnSpc>
@@ -10213,7 +10364,7 @@
               <a:buNone/>
             </a:pPr>
             <a:r>
-              <a:rPr b="0" i="0" lang="en-US" sz="1850" u="none" cap="none" strike="noStrike">
+              <a:rPr lang="en-US" sz="1850" b="0" i="0" u="none" strike="noStrike" cap="none">
                 <a:solidFill>
                   <a:srgbClr val="D5D5D5"/>
                 </a:solidFill>
@@ -10224,7 +10375,7 @@
               </a:rPr>
               <a:t>How the math works</a:t>
             </a:r>
-            <a:endParaRPr b="0" i="0" sz="1850" u="none" cap="none" strike="noStrike">
+            <a:endParaRPr sz="1850" b="0" i="0" u="none" strike="noStrike" cap="none">
               <a:solidFill>
                 <a:schemeClr val="dk1"/>
               </a:solidFill>
@@ -10256,12 +10407,12 @@
           </a:ln>
         </p:spPr>
         <p:txBody>
-          <a:bodyPr anchorCtr="0" anchor="t" bIns="0" lIns="0" spcFirstLastPara="1" rIns="0" wrap="square" tIns="0">
-            <a:noAutofit/>
-          </a:bodyPr>
-          <a:lstStyle/>
-          <a:p>
-            <a:pPr indent="-233680" lvl="0" marL="233680" marR="0" rtl="0" algn="l">
+          <a:bodyPr spcFirstLastPara="1" wrap="square" lIns="0" tIns="0" rIns="0" bIns="0" anchor="t" anchorCtr="0">
+            <a:noAutofit/>
+          </a:bodyPr>
+          <a:lstStyle/>
+          <a:p>
+            <a:pPr marL="233680" marR="0" lvl="0" indent="-233680" algn="l" rtl="0">
               <a:lnSpc>
                 <a:spcPct val="118000"/>
               </a:lnSpc>
@@ -10279,7 +10430,7 @@
               <a:buChar char="•"/>
             </a:pPr>
             <a:r>
-              <a:rPr b="0" i="0" lang="en-US" sz="1150" u="none" cap="none" strike="noStrike">
+              <a:rPr lang="en-US" sz="1150" b="0" i="0" u="none" strike="noStrike" cap="none">
                 <a:solidFill>
                   <a:srgbClr val="D5D5D5"/>
                 </a:solidFill>
@@ -10290,7 +10441,7 @@
               </a:rPr>
               <a:t>Each signal's adjustment delta = sentiment score × impact score</a:t>
             </a:r>
-            <a:endParaRPr b="0" i="0" sz="1150" u="none" cap="none" strike="noStrike">
+            <a:endParaRPr sz="1150" b="0" i="0" u="none" strike="noStrike" cap="none">
               <a:solidFill>
                 <a:schemeClr val="dk1"/>
               </a:solidFill>
@@ -10322,12 +10473,12 @@
           </a:ln>
         </p:spPr>
         <p:txBody>
-          <a:bodyPr anchorCtr="0" anchor="t" bIns="0" lIns="0" spcFirstLastPara="1" rIns="0" wrap="square" tIns="0">
-            <a:noAutofit/>
-          </a:bodyPr>
-          <a:lstStyle/>
-          <a:p>
-            <a:pPr indent="-233680" lvl="0" marL="233680" marR="0" rtl="0" algn="l">
+          <a:bodyPr spcFirstLastPara="1" wrap="square" lIns="0" tIns="0" rIns="0" bIns="0" anchor="t" anchorCtr="0">
+            <a:noAutofit/>
+          </a:bodyPr>
+          <a:lstStyle/>
+          <a:p>
+            <a:pPr marL="233680" marR="0" lvl="0" indent="-233680" algn="l" rtl="0">
               <a:lnSpc>
                 <a:spcPct val="118000"/>
               </a:lnSpc>
@@ -10345,7 +10496,7 @@
               <a:buChar char="•"/>
             </a:pPr>
             <a:r>
-              <a:rPr b="0" i="0" lang="en-US" sz="1150" u="none" cap="none" strike="noStrike">
+              <a:rPr lang="en-US" sz="1150" b="0" i="0" u="none" strike="noStrike" cap="none">
                 <a:solidFill>
                   <a:srgbClr val="D5D5D5"/>
                 </a:solidFill>
@@ -10356,7 +10507,7 @@
               </a:rPr>
               <a:t>Every stock stays above a 2% minimum weight to keep diversification</a:t>
             </a:r>
-            <a:endParaRPr b="0" i="0" sz="1150" u="none" cap="none" strike="noStrike">
+            <a:endParaRPr sz="1150" b="0" i="0" u="none" strike="noStrike" cap="none">
               <a:solidFill>
                 <a:schemeClr val="dk1"/>
               </a:solidFill>
@@ -10388,12 +10539,12 @@
           </a:ln>
         </p:spPr>
         <p:txBody>
-          <a:bodyPr anchorCtr="0" anchor="t" bIns="0" lIns="0" spcFirstLastPara="1" rIns="0" wrap="square" tIns="0">
-            <a:noAutofit/>
-          </a:bodyPr>
-          <a:lstStyle/>
-          <a:p>
-            <a:pPr indent="-233680" lvl="0" marL="233680" marR="0" rtl="0" algn="l">
+          <a:bodyPr spcFirstLastPara="1" wrap="square" lIns="0" tIns="0" rIns="0" bIns="0" anchor="t" anchorCtr="0">
+            <a:noAutofit/>
+          </a:bodyPr>
+          <a:lstStyle/>
+          <a:p>
+            <a:pPr marL="233680" marR="0" lvl="0" indent="-233680" algn="l" rtl="0">
               <a:lnSpc>
                 <a:spcPct val="118000"/>
               </a:lnSpc>
@@ -10411,7 +10562,7 @@
               <a:buChar char="•"/>
             </a:pPr>
             <a:r>
-              <a:rPr b="0" i="0" lang="en-US" sz="1150" u="none" cap="none" strike="noStrike">
+              <a:rPr lang="en-US" sz="1150" b="0" i="0" u="none" strike="noStrike" cap="none">
                 <a:solidFill>
                   <a:srgbClr val="D5D5D5"/>
                 </a:solidFill>
@@ -10422,7 +10573,7 @@
               </a:rPr>
               <a:t>All 15 weights are divided by their sum, so the portfolio always equals exactly 100%</a:t>
             </a:r>
-            <a:endParaRPr b="0" i="0" sz="1150" u="none" cap="none" strike="noStrike">
+            <a:endParaRPr sz="1150" b="0" i="0" u="none" strike="noStrike" cap="none">
               <a:solidFill>
                 <a:schemeClr val="dk1"/>
               </a:solidFill>
@@ -10454,12 +10605,12 @@
           </a:ln>
         </p:spPr>
         <p:txBody>
-          <a:bodyPr anchorCtr="0" anchor="t" bIns="0" lIns="0" spcFirstLastPara="1" rIns="0" wrap="square" tIns="0">
-            <a:noAutofit/>
-          </a:bodyPr>
-          <a:lstStyle/>
-          <a:p>
-            <a:pPr indent="0" lvl="0" marL="0" marR="0" rtl="0" algn="l">
+          <a:bodyPr spcFirstLastPara="1" wrap="square" lIns="0" tIns="0" rIns="0" bIns="0" anchor="t" anchorCtr="0">
+            <a:noAutofit/>
+          </a:bodyPr>
+          <a:lstStyle/>
+          <a:p>
+            <a:pPr marL="0" marR="0" lvl="0" indent="0" algn="l" rtl="0">
               <a:lnSpc>
                 <a:spcPct val="110000"/>
               </a:lnSpc>
@@ -10477,7 +10628,7 @@
               <a:buNone/>
             </a:pPr>
             <a:r>
-              <a:rPr b="0" i="0" lang="en-US" sz="1850" u="none" cap="none" strike="noStrike">
+              <a:rPr lang="en-US" sz="1850" b="0" i="0" u="none" strike="noStrike" cap="none">
                 <a:solidFill>
                   <a:srgbClr val="D5D5D5"/>
                 </a:solidFill>
@@ -10488,7 +10639,7 @@
               </a:rPr>
               <a:t>What the user sees in Streamlit</a:t>
             </a:r>
-            <a:endParaRPr b="0" i="0" sz="1850" u="none" cap="none" strike="noStrike">
+            <a:endParaRPr sz="1850" b="0" i="0" u="none" strike="noStrike" cap="none">
               <a:solidFill>
                 <a:schemeClr val="dk1"/>
               </a:solidFill>
@@ -10520,12 +10671,12 @@
           </a:ln>
         </p:spPr>
         <p:txBody>
-          <a:bodyPr anchorCtr="0" anchor="t" bIns="0" lIns="0" spcFirstLastPara="1" rIns="0" wrap="square" tIns="0">
-            <a:noAutofit/>
-          </a:bodyPr>
-          <a:lstStyle/>
-          <a:p>
-            <a:pPr indent="-233680" lvl="0" marL="233680" marR="0" rtl="0" algn="l">
+          <a:bodyPr spcFirstLastPara="1" wrap="square" lIns="0" tIns="0" rIns="0" bIns="0" anchor="t" anchorCtr="0">
+            <a:noAutofit/>
+          </a:bodyPr>
+          <a:lstStyle/>
+          <a:p>
+            <a:pPr marL="233680" marR="0" lvl="0" indent="-233680" algn="l" rtl="0">
               <a:lnSpc>
                 <a:spcPct val="118000"/>
               </a:lnSpc>
@@ -10543,7 +10694,7 @@
               <a:buChar char="•"/>
             </a:pPr>
             <a:r>
-              <a:rPr b="1" i="0" lang="en-US" sz="1150" u="none" cap="none" strike="noStrike">
+              <a:rPr lang="en-US" sz="1150" b="1" i="0" u="none" strike="noStrike" cap="none">
                 <a:solidFill>
                   <a:srgbClr val="D5D5D5"/>
                 </a:solidFill>
@@ -10555,7 +10706,7 @@
               <a:t>Top metrics:</a:t>
             </a:r>
             <a:r>
-              <a:rPr b="0" i="0" lang="en-US" sz="1150" u="none" cap="none" strike="noStrike">
+              <a:rPr lang="en-US" sz="1150" b="0" i="0" u="none" strike="noStrike" cap="none">
                 <a:solidFill>
                   <a:srgbClr val="D5D5D5"/>
                 </a:solidFill>
@@ -10566,7 +10717,7 @@
               </a:rPr>
               <a:t> Stocks in the index, signals processed, rebalance cycles run, bullish signals detected</a:t>
             </a:r>
-            <a:endParaRPr b="0" i="0" sz="1150" u="none" cap="none" strike="noStrike">
+            <a:endParaRPr sz="1150" b="0" i="0" u="none" strike="noStrike" cap="none">
               <a:solidFill>
                 <a:schemeClr val="dk1"/>
               </a:solidFill>
@@ -10577,7 +10728,7 @@
             </a:endParaRPr>
           </a:p>
           <a:p>
-            <a:pPr indent="-233680" lvl="0" marL="233680" marR="0" rtl="0" algn="l">
+            <a:pPr marL="233680" marR="0" lvl="0" indent="-233680" algn="l" rtl="0">
               <a:lnSpc>
                 <a:spcPct val="118000"/>
               </a:lnSpc>
@@ -10595,7 +10746,7 @@
               <a:buChar char="•"/>
             </a:pPr>
             <a:r>
-              <a:rPr b="1" i="0" lang="en-US" sz="1150" u="none" cap="none" strike="noStrike">
+              <a:rPr lang="en-US" sz="1150" b="1" i="0" u="none" strike="noStrike" cap="none">
                 <a:solidFill>
                   <a:srgbClr val="D5D5D5"/>
                 </a:solidFill>
@@ -10607,7 +10758,7 @@
               <a:t>Visual analytics:</a:t>
             </a:r>
             <a:r>
-              <a:rPr b="0" i="0" lang="en-US" sz="1150" u="none" cap="none" strike="noStrike">
+              <a:rPr lang="en-US" sz="1150" b="0" i="0" u="none" strike="noStrike" cap="none">
                 <a:solidFill>
                   <a:srgbClr val="D5D5D5"/>
                 </a:solidFill>
@@ -10618,7 +10769,7 @@
               </a:rPr>
               <a:t> Plotly donut chart of current weights, historical candlestick charts, cycle-by-cycle weight history tables</a:t>
             </a:r>
-            <a:endParaRPr b="0" i="0" sz="1150" u="none" cap="none" strike="noStrike">
+            <a:endParaRPr sz="1150" b="0" i="0" u="none" strike="noStrike" cap="none">
               <a:solidFill>
                 <a:schemeClr val="dk1"/>
               </a:solidFill>
@@ -10629,7 +10780,7 @@
             </a:endParaRPr>
           </a:p>
           <a:p>
-            <a:pPr indent="-233680" lvl="0" marL="233680" marR="0" rtl="0" algn="l">
+            <a:pPr marL="233680" marR="0" lvl="0" indent="-233680" algn="l" rtl="0">
               <a:lnSpc>
                 <a:spcPct val="118000"/>
               </a:lnSpc>
@@ -10647,7 +10798,7 @@
               <a:buChar char="•"/>
             </a:pPr>
             <a:r>
-              <a:rPr b="1" i="0" lang="en-US" sz="1150" u="none" cap="none" strike="noStrike">
+              <a:rPr lang="en-US" sz="1150" b="1" i="0" u="none" strike="noStrike" cap="none">
                 <a:solidFill>
                   <a:srgbClr val="D5D5D5"/>
                 </a:solidFill>
@@ -10659,7 +10810,7 @@
               <a:t>Signal inspector:</a:t>
             </a:r>
             <a:r>
-              <a:rPr b="0" i="0" lang="en-US" sz="1150" u="none" cap="none" strike="noStrike">
+              <a:rPr lang="en-US" sz="1150" b="0" i="0" u="none" strike="noStrike" cap="none">
                 <a:solidFill>
                   <a:srgbClr val="D5D5D5"/>
                 </a:solidFill>
@@ -10670,7 +10821,7 @@
               </a:rPr>
               <a:t> Expandable cards with the news snippet, event type, impact score, trajectory badge (Bullish or Bearish), per-ticker breakdown</a:t>
             </a:r>
-            <a:endParaRPr b="0" i="0" sz="1150" u="none" cap="none" strike="noStrike">
+            <a:endParaRPr sz="1150" b="0" i="0" u="none" strike="noStrike" cap="none">
               <a:solidFill>
                 <a:schemeClr val="dk1"/>
               </a:solidFill>
@@ -10702,12 +10853,12 @@
           </a:ln>
         </p:spPr>
         <p:txBody>
-          <a:bodyPr anchorCtr="0" anchor="ctr" bIns="0" lIns="0" spcFirstLastPara="1" rIns="0" wrap="square" tIns="0">
-            <a:noAutofit/>
-          </a:bodyPr>
-          <a:lstStyle/>
-          <a:p>
-            <a:pPr indent="0" lvl="0" marL="0" marR="0" rtl="0" algn="l">
+          <a:bodyPr spcFirstLastPara="1" wrap="square" lIns="0" tIns="0" rIns="0" bIns="0" anchor="ctr" anchorCtr="0">
+            <a:noAutofit/>
+          </a:bodyPr>
+          <a:lstStyle/>
+          <a:p>
+            <a:pPr marL="0" marR="0" lvl="0" indent="0" algn="l" rtl="0">
               <a:lnSpc>
                 <a:spcPct val="118000"/>
               </a:lnSpc>
@@ -10725,7 +10876,7 @@
               <a:buNone/>
             </a:pPr>
             <a:r>
-              <a:rPr b="0" i="0" lang="en-US" sz="800" u="none" cap="none" strike="noStrike">
+              <a:rPr lang="en-US" sz="800" b="0" i="0" u="none" strike="noStrike" cap="none">
                 <a:solidFill>
                   <a:srgbClr val="9D9D9D"/>
                 </a:solidFill>
@@ -10736,7 +10887,7 @@
               </a:rPr>
               <a:t>06</a:t>
             </a:r>
-            <a:endParaRPr b="0" i="0" sz="800" u="none" cap="none" strike="noStrike">
+            <a:endParaRPr sz="800" b="0" i="0" u="none" strike="noStrike" cap="none">
               <a:solidFill>
                 <a:schemeClr val="dk1"/>
               </a:solidFill>
@@ -10770,23 +10921,20 @@
           </a:ln>
         </p:spPr>
         <p:txBody>
-          <a:bodyPr anchorCtr="0" anchor="t" bIns="91425" lIns="91425" spcFirstLastPara="1" rIns="91425" wrap="square" tIns="91425">
-            <a:noAutofit/>
-          </a:bodyPr>
-          <a:lstStyle/>
-          <a:p>
-            <a:pPr indent="0" lvl="0" marL="0" rtl="0" algn="l">
-              <a:spcBef>
-                <a:spcPts val="0"/>
-              </a:spcBef>
-              <a:spcAft>
-                <a:spcPts val="0"/>
-              </a:spcAft>
-              <a:buNone/>
-            </a:pPr>
-            <a:r>
-              <a:t/>
-            </a:r>
+          <a:bodyPr spcFirstLastPara="1" wrap="square" lIns="91425" tIns="91425" rIns="91425" bIns="91425" anchor="t" anchorCtr="0">
+            <a:noAutofit/>
+          </a:bodyPr>
+          <a:lstStyle/>
+          <a:p>
+            <a:pPr marL="0" lvl="0" indent="0" algn="l" rtl="0">
+              <a:spcBef>
+                <a:spcPts val="0"/>
+              </a:spcBef>
+              <a:spcAft>
+                <a:spcPts val="0"/>
+              </a:spcAft>
+              <a:buNone/>
+            </a:pPr>
             <a:endParaRPr/>
           </a:p>
         </p:txBody>
@@ -10800,11 +10948,11 @@
 </file>
 
 <file path=ppt/slides/slide7.xml><?xml version="1.0" encoding="utf-8"?>
-<p:sld xmlns:a="http://schemas.openxmlformats.org/drawingml/2006/main" xmlns:r="http://schemas.openxmlformats.org/officeDocument/2006/relationships" xmlns:mc="http://schemas.openxmlformats.org/markup-compatibility/2006" xmlns:mv="urn:schemas-microsoft-com:mac:vml" xmlns:p="http://schemas.openxmlformats.org/presentationml/2006/main" xmlns:c="http://schemas.openxmlformats.org/drawingml/2006/chart" xmlns:dgm="http://schemas.openxmlformats.org/drawingml/2006/diagram" xmlns:o="urn:schemas-microsoft-com:office:office" xmlns:v="urn:schemas-microsoft-com:vml" xmlns:pvml="urn:schemas-microsoft-com:office:powerpoint" xmlns:com="http://schemas.openxmlformats.org/drawingml/2006/compatibility" xmlns:p14="http://schemas.microsoft.com/office/powerpoint/2010/main" xmlns:p15="http://schemas.microsoft.com/office/powerpoint/2012/main" xmlns:ahyp="http://schemas.microsoft.com/office/drawing/2018/hyperlinkcolor">
+<p:sld xmlns:a="http://schemas.openxmlformats.org/drawingml/2006/main" xmlns:r="http://schemas.openxmlformats.org/officeDocument/2006/relationships" xmlns:p="http://schemas.openxmlformats.org/presentationml/2006/main">
   <p:cSld>
     <p:spTree>
       <p:nvGrpSpPr>
-        <p:cNvPr id="162" name="Shape 162"/>
+        <p:cNvPr id="1" name="Shape 162"/>
         <p:cNvGrpSpPr/>
         <p:nvPr/>
       </p:nvGrpSpPr>
@@ -10836,12 +10984,12 @@
           </a:ln>
         </p:spPr>
         <p:txBody>
-          <a:bodyPr anchorCtr="0" anchor="t" bIns="0" lIns="0" spcFirstLastPara="1" rIns="0" wrap="square" tIns="0">
-            <a:noAutofit/>
-          </a:bodyPr>
-          <a:lstStyle/>
-          <a:p>
-            <a:pPr indent="0" lvl="0" marL="0" marR="0" rtl="0" algn="l">
+          <a:bodyPr spcFirstLastPara="1" wrap="square" lIns="0" tIns="0" rIns="0" bIns="0" anchor="t" anchorCtr="0">
+            <a:noAutofit/>
+          </a:bodyPr>
+          <a:lstStyle/>
+          <a:p>
+            <a:pPr marL="0" marR="0" lvl="0" indent="0" algn="l" rtl="0">
               <a:lnSpc>
                 <a:spcPct val="108000"/>
               </a:lnSpc>
@@ -10859,7 +11007,7 @@
               <a:buNone/>
             </a:pPr>
             <a:r>
-              <a:rPr b="0" i="0" lang="en-US" sz="850" u="none" cap="none" strike="noStrike">
+              <a:rPr lang="en-US" sz="850" b="0" i="0" u="none" strike="noStrike" cap="none">
                 <a:solidFill>
                   <a:srgbClr val="B5B5B5"/>
                 </a:solidFill>
@@ -10870,7 +11018,7 @@
               </a:rPr>
               <a:t>OUTCOMES &amp; ROADMAP</a:t>
             </a:r>
-            <a:endParaRPr b="0" i="0" sz="850" u="none" cap="none" strike="noStrike">
+            <a:endParaRPr sz="850" b="0" i="0" u="none" strike="noStrike" cap="none">
               <a:solidFill>
                 <a:schemeClr val="dk1"/>
               </a:solidFill>
@@ -10902,12 +11050,12 @@
           </a:ln>
         </p:spPr>
         <p:txBody>
-          <a:bodyPr anchorCtr="0" anchor="t" bIns="0" lIns="0" spcFirstLastPara="1" rIns="0" wrap="square" tIns="0">
-            <a:noAutofit/>
-          </a:bodyPr>
-          <a:lstStyle/>
-          <a:p>
-            <a:pPr indent="0" lvl="0" marL="0" marR="0" rtl="0" algn="l">
+          <a:bodyPr spcFirstLastPara="1" wrap="square" lIns="0" tIns="0" rIns="0" bIns="0" anchor="t" anchorCtr="0">
+            <a:noAutofit/>
+          </a:bodyPr>
+          <a:lstStyle/>
+          <a:p>
+            <a:pPr marL="0" marR="0" lvl="0" indent="0" algn="l" rtl="0">
               <a:lnSpc>
                 <a:spcPct val="89000"/>
               </a:lnSpc>
@@ -10925,7 +11073,7 @@
               <a:buNone/>
             </a:pPr>
             <a:r>
-              <a:rPr b="0" i="0" lang="en-US" sz="2550" u="none" cap="none" strike="noStrike">
+              <a:rPr lang="en-US" sz="2550" b="0" i="0" u="none" strike="noStrike" cap="none">
                 <a:solidFill>
                   <a:srgbClr val="ECECEC"/>
                 </a:solidFill>
@@ -10936,7 +11084,7 @@
               </a:rPr>
               <a:t>Results and what's next</a:t>
             </a:r>
-            <a:endParaRPr b="0" i="0" sz="2550" u="none" cap="none" strike="noStrike">
+            <a:endParaRPr sz="2550" b="0" i="0" u="none" strike="noStrike" cap="none">
               <a:solidFill>
                 <a:schemeClr val="dk1"/>
               </a:solidFill>
@@ -10961,7 +11109,7 @@
           </a:xfrm>
           <a:prstGeom prst="roundRect">
             <a:avLst>
-              <a:gd fmla="val 50000" name="adj"/>
+              <a:gd name="adj" fmla="val 50000"/>
             </a:avLst>
           </a:prstGeom>
           <a:solidFill>
@@ -10972,23 +11120,20 @@
           </a:ln>
         </p:spPr>
         <p:txBody>
-          <a:bodyPr anchorCtr="0" anchor="ctr" bIns="91425" lIns="91425" spcFirstLastPara="1" rIns="91425" wrap="square" tIns="91425">
-            <a:noAutofit/>
-          </a:bodyPr>
-          <a:lstStyle/>
-          <a:p>
-            <a:pPr indent="0" lvl="0" marL="0" rtl="0" algn="l">
-              <a:spcBef>
-                <a:spcPts val="0"/>
-              </a:spcBef>
-              <a:spcAft>
-                <a:spcPts val="0"/>
-              </a:spcAft>
-              <a:buNone/>
-            </a:pPr>
-            <a:r>
-              <a:t/>
-            </a:r>
+          <a:bodyPr spcFirstLastPara="1" wrap="square" lIns="91425" tIns="91425" rIns="91425" bIns="91425" anchor="ctr" anchorCtr="0">
+            <a:noAutofit/>
+          </a:bodyPr>
+          <a:lstStyle/>
+          <a:p>
+            <a:pPr marL="0" lvl="0" indent="0" algn="l" rtl="0">
+              <a:spcBef>
+                <a:spcPts val="0"/>
+              </a:spcBef>
+              <a:spcAft>
+                <a:spcPts val="0"/>
+              </a:spcAft>
+              <a:buNone/>
+            </a:pPr>
             <a:endParaRPr/>
           </a:p>
         </p:txBody>
@@ -11013,12 +11158,12 @@
           </a:ln>
         </p:spPr>
         <p:txBody>
-          <a:bodyPr anchorCtr="0" anchor="t" bIns="0" lIns="0" spcFirstLastPara="1" rIns="0" wrap="square" tIns="0">
-            <a:noAutofit/>
-          </a:bodyPr>
-          <a:lstStyle/>
-          <a:p>
-            <a:pPr indent="0" lvl="0" marL="0" marR="0" rtl="0" algn="l">
+          <a:bodyPr spcFirstLastPara="1" wrap="square" lIns="0" tIns="0" rIns="0" bIns="0" anchor="t" anchorCtr="0">
+            <a:noAutofit/>
+          </a:bodyPr>
+          <a:lstStyle/>
+          <a:p>
+            <a:pPr marL="0" marR="0" lvl="0" indent="0" algn="l" rtl="0">
               <a:lnSpc>
                 <a:spcPct val="108000"/>
               </a:lnSpc>
@@ -11036,7 +11181,7 @@
               <a:buNone/>
             </a:pPr>
             <a:r>
-              <a:rPr b="0" i="0" lang="en-US" sz="900" u="none" cap="none" strike="noStrike">
+              <a:rPr lang="en-US" sz="900" b="0" i="0" u="none" strike="noStrike" cap="none">
                 <a:solidFill>
                   <a:srgbClr val="D5D5D5"/>
                 </a:solidFill>
@@ -11047,7 +11192,7 @@
               </a:rPr>
               <a:t>KEY RESULTS -</a:t>
             </a:r>
-            <a:endParaRPr b="0" i="0" sz="900" u="none" cap="none" strike="noStrike">
+            <a:endParaRPr sz="900" b="0" i="0" u="none" strike="noStrike" cap="none">
               <a:solidFill>
                 <a:schemeClr val="dk1"/>
               </a:solidFill>
@@ -11079,12 +11224,12 @@
           </a:ln>
         </p:spPr>
         <p:txBody>
-          <a:bodyPr anchorCtr="0" anchor="t" bIns="0" lIns="0" spcFirstLastPara="1" rIns="0" wrap="square" tIns="0">
-            <a:noAutofit/>
-          </a:bodyPr>
-          <a:lstStyle/>
-          <a:p>
-            <a:pPr indent="0" lvl="0" marL="0" marR="0" rtl="0" algn="l">
+          <a:bodyPr spcFirstLastPara="1" wrap="square" lIns="0" tIns="0" rIns="0" bIns="0" anchor="t" anchorCtr="0">
+            <a:noAutofit/>
+          </a:bodyPr>
+          <a:lstStyle/>
+          <a:p>
+            <a:pPr marL="0" marR="0" lvl="0" indent="0" algn="l" rtl="0">
               <a:lnSpc>
                 <a:spcPct val="118000"/>
               </a:lnSpc>
@@ -11102,7 +11247,7 @@
               <a:buNone/>
             </a:pPr>
             <a:r>
-              <a:rPr b="1" i="0" lang="en-US" sz="1000" u="none" cap="none" strike="noStrike">
+              <a:rPr lang="en-US" sz="1000" b="1" i="0" u="none" strike="noStrike" cap="none">
                 <a:solidFill>
                   <a:srgbClr val="D5D5D5"/>
                 </a:solidFill>
@@ -11114,7 +11259,7 @@
               <a:t>1) Minimal noise:</a:t>
             </a:r>
             <a:r>
-              <a:rPr b="0" i="0" lang="en-US" sz="1000" u="none" cap="none" strike="noStrike">
+              <a:rPr lang="en-US" sz="1000" b="0" i="0" u="none" strike="noStrike" cap="none">
                 <a:solidFill>
                   <a:srgbClr val="D5D5D5"/>
                 </a:solidFill>
@@ -11125,7 +11270,7 @@
               </a:rPr>
               <a:t> Only reputable financial news that directly or indirectly affects the 15 stocks gets through.</a:t>
             </a:r>
-            <a:endParaRPr b="0" i="0" sz="1000" u="none" cap="none" strike="noStrike">
+            <a:endParaRPr sz="1000" b="0" i="0" u="none" strike="noStrike" cap="none">
               <a:solidFill>
                 <a:schemeClr val="dk1"/>
               </a:solidFill>
@@ -11136,7 +11281,7 @@
             </a:endParaRPr>
           </a:p>
           <a:p>
-            <a:pPr indent="0" lvl="0" marL="0" marR="0" rtl="0" algn="l">
+            <a:pPr marL="0" marR="0" lvl="0" indent="0" algn="l" rtl="0">
               <a:lnSpc>
                 <a:spcPct val="118000"/>
               </a:lnSpc>
@@ -11154,7 +11299,7 @@
               <a:buNone/>
             </a:pPr>
             <a:r>
-              <a:rPr b="1" i="0" lang="en-US" sz="1000" u="none" cap="none" strike="noStrike">
+              <a:rPr lang="en-US" sz="1000" b="1" i="0" u="none" strike="noStrike" cap="none">
                 <a:solidFill>
                   <a:srgbClr val="D5D5D5"/>
                 </a:solidFill>
@@ -11166,7 +11311,7 @@
               <a:t>2) Reliable logic:</a:t>
             </a:r>
             <a:r>
-              <a:rPr b="0" i="0" lang="en-US" sz="1000" u="none" cap="none" strike="noStrike">
+              <a:rPr lang="en-US" sz="1000" b="0" i="0" u="none" strike="noStrike" cap="none">
                 <a:solidFill>
                   <a:srgbClr val="D5D5D5"/>
                 </a:solidFill>
@@ -11177,7 +11322,7 @@
               </a:rPr>
               <a:t> Clear split between genuine risk events and dismissed fears.</a:t>
             </a:r>
-            <a:endParaRPr b="0" i="0" sz="1000" u="none" cap="none" strike="noStrike">
+            <a:endParaRPr sz="1000" b="0" i="0" u="none" strike="noStrike" cap="none">
               <a:solidFill>
                 <a:schemeClr val="dk1"/>
               </a:solidFill>
@@ -11188,7 +11333,7 @@
             </a:endParaRPr>
           </a:p>
           <a:p>
-            <a:pPr indent="0" lvl="0" marL="0" marR="0" rtl="0" algn="l">
+            <a:pPr marL="0" marR="0" lvl="0" indent="0" algn="l" rtl="0">
               <a:lnSpc>
                 <a:spcPct val="118000"/>
               </a:lnSpc>
@@ -11206,7 +11351,7 @@
               <a:buNone/>
             </a:pPr>
             <a:r>
-              <a:rPr b="1" i="0" lang="en-US" sz="1000" u="none" cap="none" strike="noStrike">
+              <a:rPr lang="en-US" sz="1000" b="1" i="0" u="none" strike="noStrike" cap="none">
                 <a:solidFill>
                   <a:srgbClr val="D5D5D5"/>
                 </a:solidFill>
@@ -11218,7 +11363,7 @@
               <a:t>3) Significantly fast:</a:t>
             </a:r>
             <a:r>
-              <a:rPr b="0" i="0" lang="en-US" sz="1000" u="none" cap="none" strike="noStrike">
+              <a:rPr lang="en-US" sz="1000" b="0" i="0" u="none" strike="noStrike" cap="none">
                 <a:solidFill>
                   <a:srgbClr val="D5D5D5"/>
                 </a:solidFill>
@@ -11229,7 +11374,7 @@
               </a:rPr>
               <a:t> A full 10-signal batch ingests and rebalances in a few seconds (or a few minutes , depending on the system configuration)</a:t>
             </a:r>
-            <a:endParaRPr b="0" i="0" sz="1000" u="none" cap="none" strike="noStrike">
+            <a:endParaRPr sz="1000" b="0" i="0" u="none" strike="noStrike" cap="none">
               <a:solidFill>
                 <a:schemeClr val="dk1"/>
               </a:solidFill>
@@ -11261,12 +11406,12 @@
           </a:ln>
         </p:spPr>
         <p:txBody>
-          <a:bodyPr anchorCtr="0" anchor="t" bIns="0" lIns="0" spcFirstLastPara="1" rIns="0" wrap="square" tIns="0">
-            <a:noAutofit/>
-          </a:bodyPr>
-          <a:lstStyle/>
-          <a:p>
-            <a:pPr indent="0" lvl="0" marL="0" marR="0" rtl="0" algn="l">
+          <a:bodyPr spcFirstLastPara="1" wrap="square" lIns="0" tIns="0" rIns="0" bIns="0" anchor="t" anchorCtr="0">
+            <a:noAutofit/>
+          </a:bodyPr>
+          <a:lstStyle/>
+          <a:p>
+            <a:pPr marL="0" marR="0" lvl="0" indent="0" algn="l" rtl="0">
               <a:lnSpc>
                 <a:spcPct val="108000"/>
               </a:lnSpc>
@@ -11284,7 +11429,7 @@
               <a:buNone/>
             </a:pPr>
             <a:r>
-              <a:rPr b="0" i="0" lang="en-US" sz="900" u="none" cap="none" strike="noStrike">
+              <a:rPr lang="en-US" sz="900" b="0" i="0" u="none" strike="noStrike" cap="none">
                 <a:solidFill>
                   <a:srgbClr val="D5D5D5"/>
                 </a:solidFill>
@@ -11295,7 +11440,7 @@
               </a:rPr>
               <a:t>NEXT STEPS -</a:t>
             </a:r>
-            <a:endParaRPr b="0" i="0" sz="900" u="none" cap="none" strike="noStrike">
+            <a:endParaRPr sz="900" b="0" i="0" u="none" strike="noStrike" cap="none">
               <a:solidFill>
                 <a:schemeClr val="dk1"/>
               </a:solidFill>
@@ -11327,17 +11472,61 @@
           </a:ln>
         </p:spPr>
         <p:txBody>
-          <a:bodyPr anchorCtr="0" anchor="t" bIns="0" lIns="0" spcFirstLastPara="1" rIns="0" wrap="square" tIns="0">
-            <a:noAutofit/>
-          </a:bodyPr>
-          <a:lstStyle/>
-          <a:p>
-            <a:pPr indent="0" lvl="0" marL="0" marR="0" rtl="0" algn="l">
+          <a:bodyPr spcFirstLastPara="1" wrap="square" lIns="0" tIns="0" rIns="0" bIns="0" anchor="t" anchorCtr="0">
+            <a:noAutofit/>
+          </a:bodyPr>
+          <a:lstStyle/>
+          <a:p>
+            <a:pPr lvl="0">
               <a:lnSpc>
                 <a:spcPct val="118000"/>
               </a:lnSpc>
-              <a:spcBef>
-                <a:spcPts val="0"/>
+              <a:buClr>
+                <a:srgbClr val="D5D5D5"/>
+              </a:buClr>
+              <a:buSzPts val="1000"/>
+            </a:pPr>
+            <a:r>
+              <a:rPr lang="en-US" sz="1000" b="0" i="0" u="none" strike="noStrike" cap="none" dirty="0">
+                <a:solidFill>
+                  <a:srgbClr val="D5D5D5"/>
+                </a:solidFill>
+                <a:latin typeface="Exo"/>
+                <a:ea typeface="Exo"/>
+                <a:cs typeface="Exo"/>
+                <a:sym typeface="Exo"/>
+              </a:rPr>
+              <a:t>1) </a:t>
+            </a:r>
+            <a:r>
+              <a:rPr lang="en-US" sz="1000" dirty="0">
+                <a:solidFill>
+                  <a:srgbClr val="D5D5D5"/>
+                </a:solidFill>
+                <a:latin typeface="Exo"/>
+                <a:ea typeface="Exo"/>
+                <a:cs typeface="Exo"/>
+                <a:sym typeface="Exo"/>
+              </a:rPr>
+              <a:t>Fully automate formal news and social text feed ingestion into the pipeline</a:t>
+            </a:r>
+            <a:endParaRPr lang="en-US" sz="1000" b="0" i="0" u="none" strike="noStrike" cap="none" dirty="0">
+              <a:solidFill>
+                <a:srgbClr val="D5D5D5"/>
+              </a:solidFill>
+              <a:latin typeface="Exo"/>
+              <a:ea typeface="Exo"/>
+              <a:cs typeface="Exo"/>
+              <a:sym typeface="Exo"/>
+            </a:endParaRPr>
+          </a:p>
+          <a:p>
+            <a:pPr marL="0" marR="0" lvl="0" indent="0" algn="l" rtl="0">
+              <a:lnSpc>
+                <a:spcPct val="118000"/>
+              </a:lnSpc>
+              <a:spcBef>
+                <a:spcPts val="650"/>
               </a:spcBef>
               <a:spcAft>
                 <a:spcPts val="0"/>
@@ -11350,7 +11539,7 @@
               <a:buNone/>
             </a:pPr>
             <a:r>
-              <a:rPr b="0" i="0" lang="en-US" sz="1000" u="none" cap="none" strike="noStrike">
+              <a:rPr lang="en-US" sz="1000" b="0" i="0" u="none" strike="noStrike" cap="none" dirty="0">
                 <a:solidFill>
                   <a:srgbClr val="D5D5D5"/>
                 </a:solidFill>
@@ -11359,9 +11548,9 @@
                 <a:cs typeface="Exo"/>
                 <a:sym typeface="Exo"/>
               </a:rPr>
-              <a:t>1) Add modularity so that stocks can be easily  added or removed using the dashboard itself</a:t>
-            </a:r>
-            <a:endParaRPr b="0" i="0" sz="1000" u="none" cap="none" strike="noStrike">
+              <a:t>2) Enhance model reasoning so that it can better understand indirect impact of things on stock prices (e.g. how a raw material bottleneck affects downstream chipmakers)</a:t>
+            </a:r>
+            <a:endParaRPr sz="1000" b="0" i="0" u="none" strike="noStrike" cap="none" dirty="0">
               <a:solidFill>
                 <a:schemeClr val="dk1"/>
               </a:solidFill>
@@ -11372,7 +11561,45 @@
             </a:endParaRPr>
           </a:p>
           <a:p>
-            <a:pPr indent="0" lvl="0" marL="0" marR="0" rtl="0" algn="l">
+            <a:pPr>
+              <a:lnSpc>
+                <a:spcPct val="118000"/>
+              </a:lnSpc>
+              <a:spcBef>
+                <a:spcPts val="650"/>
+              </a:spcBef>
+              <a:buClr>
+                <a:srgbClr val="D5D5D5"/>
+              </a:buClr>
+              <a:buSzPts val="1000"/>
+            </a:pPr>
+            <a:r>
+              <a:rPr lang="en-US" sz="1000" b="0" i="0" u="none" strike="noStrike" cap="none" dirty="0">
+                <a:solidFill>
+                  <a:srgbClr val="D5D5D5"/>
+                </a:solidFill>
+                <a:latin typeface="Exo"/>
+                <a:ea typeface="Exo"/>
+                <a:cs typeface="Exo"/>
+                <a:sym typeface="Exo"/>
+              </a:rPr>
+              <a:t>3)</a:t>
+            </a:r>
+            <a:r>
+              <a:rPr lang="en-US" sz="1000" dirty="0">
+                <a:solidFill>
+                  <a:srgbClr val="D5D5D5"/>
+                </a:solidFill>
+                <a:latin typeface="Exo"/>
+                <a:ea typeface="Exo"/>
+                <a:cs typeface="Exo"/>
+                <a:sym typeface="Exo"/>
+              </a:rPr>
+              <a:t> Add modularity so that stocks can be easily  added or removed using the dashboard itself</a:t>
+            </a:r>
+          </a:p>
+          <a:p>
+            <a:pPr marL="0" marR="0" lvl="0" indent="0" algn="l" rtl="0">
               <a:lnSpc>
                 <a:spcPct val="118000"/>
               </a:lnSpc>
@@ -11390,7 +11617,7 @@
               <a:buNone/>
             </a:pPr>
             <a:r>
-              <a:rPr b="0" i="0" lang="en-US" sz="1000" u="none" cap="none" strike="noStrike">
+              <a:rPr lang="en-US" sz="1000" b="0" i="0" u="none" strike="noStrike" cap="none" dirty="0">
                 <a:solidFill>
                   <a:srgbClr val="D5D5D5"/>
                 </a:solidFill>
@@ -11399,9 +11626,9 @@
                 <a:cs typeface="Exo"/>
                 <a:sym typeface="Exo"/>
               </a:rPr>
-              <a:t>2) Enhance model reasoning so that it can better understand indirect impact of things on stock prices (e.g. how a raw material bottleneck affects downstream chipmakers)</a:t>
-            </a:r>
-            <a:endParaRPr b="0" i="0" sz="1000" u="none" cap="none" strike="noStrike">
+              <a:t>4) Test rebalancing signals on historical data to optimize to optimize risk-adjusted returns</a:t>
+            </a:r>
+            <a:endParaRPr sz="1000" b="0" i="0" u="none" strike="noStrike" cap="none" dirty="0">
               <a:solidFill>
                 <a:schemeClr val="dk1"/>
               </a:solidFill>
@@ -11411,37 +11638,63 @@
               <a:sym typeface="Calibri"/>
             </a:endParaRPr>
           </a:p>
-          <a:p>
-            <a:pPr indent="0" lvl="0" marL="0" marR="0" rtl="0" algn="l">
+        </p:txBody>
+      </p:sp>
+      <p:sp>
+        <p:nvSpPr>
+          <p:cNvPr id="170" name="Google Shape;170;p11"/>
+          <p:cNvSpPr/>
+          <p:nvPr/>
+        </p:nvSpPr>
+        <p:spPr>
+          <a:xfrm>
+            <a:off x="457200" y="4857751"/>
+            <a:ext cx="4933950" cy="210435"/>
+          </a:xfrm>
+          <a:prstGeom prst="rect">
+            <a:avLst/>
+          </a:prstGeom>
+          <a:noFill/>
+          <a:ln>
+            <a:noFill/>
+          </a:ln>
+        </p:spPr>
+        <p:txBody>
+          <a:bodyPr spcFirstLastPara="1" wrap="square" lIns="0" tIns="76200" rIns="0" bIns="0" anchor="t" anchorCtr="0">
+            <a:noAutofit/>
+          </a:bodyPr>
+          <a:lstStyle/>
+          <a:p>
+            <a:pPr marL="0" marR="0" lvl="0" indent="0" algn="l" rtl="0">
               <a:lnSpc>
-                <a:spcPct val="118000"/>
+                <a:spcPct val="108000"/>
               </a:lnSpc>
               <a:spcBef>
-                <a:spcPts val="650"/>
+                <a:spcPts val="0"/>
               </a:spcBef>
               <a:spcAft>
                 <a:spcPts val="0"/>
               </a:spcAft>
               <a:buClr>
-                <a:srgbClr val="D5D5D5"/>
+                <a:srgbClr val="9D9D9D"/>
               </a:buClr>
-              <a:buSzPts val="1000"/>
-              <a:buFont typeface="Exo"/>
-              <a:buNone/>
-            </a:pPr>
-            <a:r>
-              <a:rPr b="0" i="0" lang="en-US" sz="1000" u="none" cap="none" strike="noStrike">
-                <a:solidFill>
-                  <a:srgbClr val="D5D5D5"/>
-                </a:solidFill>
-                <a:latin typeface="Exo"/>
-                <a:ea typeface="Exo"/>
-                <a:cs typeface="Exo"/>
-                <a:sym typeface="Exo"/>
-              </a:rPr>
-              <a:t>3) Test rebalancing signals on historical data to optimize to optimize risk-adjusted returns.</a:t>
-            </a:r>
-            <a:endParaRPr b="0" i="0" sz="1000" u="none" cap="none" strike="noStrike">
+              <a:buSzPts val="850"/>
+              <a:buFont typeface="Fira Mono Medium"/>
+              <a:buNone/>
+            </a:pPr>
+            <a:r>
+              <a:rPr lang="en-US" sz="850" b="0" i="0" u="none" strike="noStrike" cap="none" dirty="0">
+                <a:solidFill>
+                  <a:srgbClr val="9D9D9D"/>
+                </a:solidFill>
+                <a:latin typeface="Fira Mono Medium"/>
+                <a:ea typeface="Fira Mono Medium"/>
+                <a:cs typeface="Fira Mono Medium"/>
+                <a:sym typeface="Fira Mono Medium"/>
+              </a:rPr>
+              <a:t>                               THANK YOU ! </a:t>
+            </a:r>
+            <a:endParaRPr sz="850" b="0" i="0" u="none" strike="noStrike" cap="none" dirty="0">
               <a:solidFill>
                 <a:schemeClr val="dk1"/>
               </a:solidFill>
@@ -11453,75 +11706,9 @@
           </a:p>
         </p:txBody>
       </p:sp>
-      <p:sp>
-        <p:nvSpPr>
-          <p:cNvPr id="170" name="Google Shape;170;p11"/>
-          <p:cNvSpPr/>
-          <p:nvPr/>
-        </p:nvSpPr>
-        <p:spPr>
-          <a:xfrm>
-            <a:off x="457200" y="4750147"/>
-            <a:ext cx="4933950" cy="221903"/>
-          </a:xfrm>
-          <a:prstGeom prst="rect">
-            <a:avLst/>
-          </a:prstGeom>
-          <a:noFill/>
-          <a:ln>
-            <a:noFill/>
-          </a:ln>
-        </p:spPr>
-        <p:txBody>
-          <a:bodyPr anchorCtr="0" anchor="t" bIns="0" lIns="0" spcFirstLastPara="1" rIns="0" wrap="square" tIns="76200">
-            <a:noAutofit/>
-          </a:bodyPr>
-          <a:lstStyle/>
-          <a:p>
-            <a:pPr indent="0" lvl="0" marL="0" marR="0" rtl="0" algn="l">
-              <a:lnSpc>
-                <a:spcPct val="108000"/>
-              </a:lnSpc>
-              <a:spcBef>
-                <a:spcPts val="0"/>
-              </a:spcBef>
-              <a:spcAft>
-                <a:spcPts val="0"/>
-              </a:spcAft>
-              <a:buClr>
-                <a:srgbClr val="9D9D9D"/>
-              </a:buClr>
-              <a:buSzPts val="850"/>
-              <a:buFont typeface="Fira Mono Medium"/>
-              <a:buNone/>
-            </a:pPr>
-            <a:r>
-              <a:rPr b="0" i="0" lang="en-US" sz="850" u="none" cap="none" strike="noStrike">
-                <a:solidFill>
-                  <a:srgbClr val="9D9D9D"/>
-                </a:solidFill>
-                <a:latin typeface="Fira Mono Medium"/>
-                <a:ea typeface="Fira Mono Medium"/>
-                <a:cs typeface="Fira Mono Medium"/>
-                <a:sym typeface="Fira Mono Medium"/>
-              </a:rPr>
-              <a:t>                               THANK YOU ! </a:t>
-            </a:r>
-            <a:endParaRPr b="0" i="0" sz="850" u="none" cap="none" strike="noStrike">
-              <a:solidFill>
-                <a:schemeClr val="dk1"/>
-              </a:solidFill>
-              <a:latin typeface="Calibri"/>
-              <a:ea typeface="Calibri"/>
-              <a:cs typeface="Calibri"/>
-              <a:sym typeface="Calibri"/>
-            </a:endParaRPr>
-          </a:p>
-        </p:txBody>
-      </p:sp>
       <p:pic>
         <p:nvPicPr>
-          <p:cNvPr descr="preencoded.png" id="171" name="Google Shape;171;p11"/>
+          <p:cNvPr id="171" name="Google Shape;171;p11" descr="preencoded.png"/>
           <p:cNvPicPr preferRelativeResize="0"/>
           <p:nvPr/>
         </p:nvPicPr>
@@ -11529,7 +11716,7 @@
           <a:blip r:embed="rId3">
             <a:alphaModFix/>
           </a:blip>
-          <a:srcRect b="0" l="0" r="0" t="0"/>
+          <a:srcRect/>
           <a:stretch/>
         </p:blipFill>
         <p:spPr>
@@ -11568,23 +11755,20 @@
           </a:ln>
         </p:spPr>
         <p:txBody>
-          <a:bodyPr anchorCtr="0" anchor="ctr" bIns="91425" lIns="91425" spcFirstLastPara="1" rIns="91425" wrap="square" tIns="91425">
-            <a:noAutofit/>
-          </a:bodyPr>
-          <a:lstStyle/>
-          <a:p>
-            <a:pPr indent="0" lvl="0" marL="0" rtl="0" algn="l">
-              <a:spcBef>
-                <a:spcPts val="0"/>
-              </a:spcBef>
-              <a:spcAft>
-                <a:spcPts val="0"/>
-              </a:spcAft>
-              <a:buNone/>
-            </a:pPr>
-            <a:r>
-              <a:t/>
-            </a:r>
+          <a:bodyPr spcFirstLastPara="1" wrap="square" lIns="91425" tIns="91425" rIns="91425" bIns="91425" anchor="ctr" anchorCtr="0">
+            <a:noAutofit/>
+          </a:bodyPr>
+          <a:lstStyle/>
+          <a:p>
+            <a:pPr marL="0" lvl="0" indent="0" algn="l" rtl="0">
+              <a:spcBef>
+                <a:spcPts val="0"/>
+              </a:spcBef>
+              <a:spcAft>
+                <a:spcPts val="0"/>
+              </a:spcAft>
+              <a:buNone/>
+            </a:pPr>
             <a:endParaRPr/>
           </a:p>
         </p:txBody>
@@ -11598,7 +11782,7 @@
 </file>
 
 <file path=ppt/theme/theme1.xml><?xml version="1.0" encoding="utf-8"?>
-<a:theme xmlns:a="http://schemas.openxmlformats.org/drawingml/2006/main" xmlns:r="http://schemas.openxmlformats.org/officeDocument/2006/relationships" name="Office Theme">
+<a:theme xmlns:a="http://schemas.openxmlformats.org/drawingml/2006/main" name="Office Theme">
   <a:themeElements>
     <a:clrScheme name="Office">
       <a:dk1>
@@ -11873,11 +12057,13 @@
       </a:bgFillStyleLst>
     </a:fmtScheme>
   </a:themeElements>
+  <a:objectDefaults/>
+  <a:extraClrSchemeLst/>
 </a:theme>
 </file>
 
 <file path=ppt/theme/theme2.xml><?xml version="1.0" encoding="utf-8"?>
-<a:theme xmlns:a="http://schemas.openxmlformats.org/drawingml/2006/main" xmlns:r="http://schemas.openxmlformats.org/officeDocument/2006/relationships" name="Office Theme">
+<a:theme xmlns:a="http://schemas.openxmlformats.org/drawingml/2006/main" name="Office Theme">
   <a:themeElements>
     <a:clrScheme name="Office">
       <a:dk1>
@@ -12152,5 +12338,7 @@
       </a:bgFillStyleLst>
     </a:fmtScheme>
   </a:themeElements>
+  <a:objectDefaults/>
+  <a:extraClrSchemeLst/>
 </a:theme>
 </file>